--- a/Technical-Documents/Parallel-Computing/parallel-computing-course/MPI-ACC Accelerator-Aware MPI for Scientific Applications.pptx
+++ b/Technical-Documents/Parallel-Computing/parallel-computing-course/MPI-ACC Accelerator-Aware MPI for Scientific Applications.pptx
@@ -518,7 +518,7 @@
           <p:cNvPr id="6146" name="幻灯片图像占位符 1">
             <a:extLst>
               <a:ext uri="{FF2B5EF4-FFF2-40B4-BE49-F238E27FC236}">
-                <a16:creationId xmlns:a16="http://schemas.microsoft.com/office/drawing/2014/main" xmlns="" id="{4908B133-C54F-400F-8F70-355C57C0BE11}"/>
+                <a16:creationId xmlns="" xmlns:a16="http://schemas.microsoft.com/office/drawing/2014/main" id="{4908B133-C54F-400F-8F70-355C57C0BE11}"/>
               </a:ext>
             </a:extLst>
           </p:cNvPr>
@@ -555,7 +555,7 @@
           <p:cNvPr id="6147" name="备注占位符 2">
             <a:extLst>
               <a:ext uri="{FF2B5EF4-FFF2-40B4-BE49-F238E27FC236}">
-                <a16:creationId xmlns:a16="http://schemas.microsoft.com/office/drawing/2014/main" xmlns="" id="{7D16C196-D24B-4BE0-AE74-D44907B2A1B1}"/>
+                <a16:creationId xmlns="" xmlns:a16="http://schemas.microsoft.com/office/drawing/2014/main" id="{7D16C196-D24B-4BE0-AE74-D44907B2A1B1}"/>
               </a:ext>
             </a:extLst>
           </p:cNvPr>
@@ -610,7 +610,7 @@
           <p:cNvPr id="6148" name="灯片编号占位符 3">
             <a:extLst>
               <a:ext uri="{FF2B5EF4-FFF2-40B4-BE49-F238E27FC236}">
-                <a16:creationId xmlns:a16="http://schemas.microsoft.com/office/drawing/2014/main" xmlns="" id="{D230392C-ED50-49C3-93A6-10868BF6DADE}"/>
+                <a16:creationId xmlns="" xmlns:a16="http://schemas.microsoft.com/office/drawing/2014/main" id="{D230392C-ED50-49C3-93A6-10868BF6DADE}"/>
               </a:ext>
             </a:extLst>
           </p:cNvPr>
@@ -860,7 +860,7 @@
           <p:cNvPr id="6146" name="幻灯片图像占位符 1">
             <a:extLst>
               <a:ext uri="{FF2B5EF4-FFF2-40B4-BE49-F238E27FC236}">
-                <a16:creationId xmlns:a16="http://schemas.microsoft.com/office/drawing/2014/main" xmlns="" id="{4908B133-C54F-400F-8F70-355C57C0BE11}"/>
+                <a16:creationId xmlns="" xmlns:a16="http://schemas.microsoft.com/office/drawing/2014/main" id="{4908B133-C54F-400F-8F70-355C57C0BE11}"/>
               </a:ext>
             </a:extLst>
           </p:cNvPr>
@@ -897,7 +897,7 @@
           <p:cNvPr id="6147" name="备注占位符 2">
             <a:extLst>
               <a:ext uri="{FF2B5EF4-FFF2-40B4-BE49-F238E27FC236}">
-                <a16:creationId xmlns:a16="http://schemas.microsoft.com/office/drawing/2014/main" xmlns="" id="{7D16C196-D24B-4BE0-AE74-D44907B2A1B1}"/>
+                <a16:creationId xmlns="" xmlns:a16="http://schemas.microsoft.com/office/drawing/2014/main" id="{7D16C196-D24B-4BE0-AE74-D44907B2A1B1}"/>
               </a:ext>
             </a:extLst>
           </p:cNvPr>
@@ -952,7 +952,7 @@
           <p:cNvPr id="6148" name="灯片编号占位符 3">
             <a:extLst>
               <a:ext uri="{FF2B5EF4-FFF2-40B4-BE49-F238E27FC236}">
-                <a16:creationId xmlns:a16="http://schemas.microsoft.com/office/drawing/2014/main" xmlns="" id="{D230392C-ED50-49C3-93A6-10868BF6DADE}"/>
+                <a16:creationId xmlns="" xmlns:a16="http://schemas.microsoft.com/office/drawing/2014/main" id="{D230392C-ED50-49C3-93A6-10868BF6DADE}"/>
               </a:ext>
             </a:extLst>
           </p:cNvPr>
@@ -1202,7 +1202,7 @@
           <p:cNvPr id="6146" name="幻灯片图像占位符 1">
             <a:extLst>
               <a:ext uri="{FF2B5EF4-FFF2-40B4-BE49-F238E27FC236}">
-                <a16:creationId xmlns:a16="http://schemas.microsoft.com/office/drawing/2014/main" xmlns="" id="{4908B133-C54F-400F-8F70-355C57C0BE11}"/>
+                <a16:creationId xmlns="" xmlns:a16="http://schemas.microsoft.com/office/drawing/2014/main" id="{4908B133-C54F-400F-8F70-355C57C0BE11}"/>
               </a:ext>
             </a:extLst>
           </p:cNvPr>
@@ -1239,7 +1239,7 @@
           <p:cNvPr id="6147" name="备注占位符 2">
             <a:extLst>
               <a:ext uri="{FF2B5EF4-FFF2-40B4-BE49-F238E27FC236}">
-                <a16:creationId xmlns:a16="http://schemas.microsoft.com/office/drawing/2014/main" xmlns="" id="{7D16C196-D24B-4BE0-AE74-D44907B2A1B1}"/>
+                <a16:creationId xmlns="" xmlns:a16="http://schemas.microsoft.com/office/drawing/2014/main" id="{7D16C196-D24B-4BE0-AE74-D44907B2A1B1}"/>
               </a:ext>
             </a:extLst>
           </p:cNvPr>
@@ -1294,7 +1294,7 @@
           <p:cNvPr id="6148" name="灯片编号占位符 3">
             <a:extLst>
               <a:ext uri="{FF2B5EF4-FFF2-40B4-BE49-F238E27FC236}">
-                <a16:creationId xmlns:a16="http://schemas.microsoft.com/office/drawing/2014/main" xmlns="" id="{D230392C-ED50-49C3-93A6-10868BF6DADE}"/>
+                <a16:creationId xmlns="" xmlns:a16="http://schemas.microsoft.com/office/drawing/2014/main" id="{D230392C-ED50-49C3-93A6-10868BF6DADE}"/>
               </a:ext>
             </a:extLst>
           </p:cNvPr>
@@ -1544,7 +1544,7 @@
           <p:cNvPr id="6146" name="幻灯片图像占位符 1">
             <a:extLst>
               <a:ext uri="{FF2B5EF4-FFF2-40B4-BE49-F238E27FC236}">
-                <a16:creationId xmlns:a16="http://schemas.microsoft.com/office/drawing/2014/main" xmlns="" id="{4908B133-C54F-400F-8F70-355C57C0BE11}"/>
+                <a16:creationId xmlns="" xmlns:a16="http://schemas.microsoft.com/office/drawing/2014/main" id="{4908B133-C54F-400F-8F70-355C57C0BE11}"/>
               </a:ext>
             </a:extLst>
           </p:cNvPr>
@@ -1581,7 +1581,7 @@
           <p:cNvPr id="6147" name="备注占位符 2">
             <a:extLst>
               <a:ext uri="{FF2B5EF4-FFF2-40B4-BE49-F238E27FC236}">
-                <a16:creationId xmlns:a16="http://schemas.microsoft.com/office/drawing/2014/main" xmlns="" id="{7D16C196-D24B-4BE0-AE74-D44907B2A1B1}"/>
+                <a16:creationId xmlns="" xmlns:a16="http://schemas.microsoft.com/office/drawing/2014/main" id="{7D16C196-D24B-4BE0-AE74-D44907B2A1B1}"/>
               </a:ext>
             </a:extLst>
           </p:cNvPr>
@@ -1636,7 +1636,7 @@
           <p:cNvPr id="6148" name="灯片编号占位符 3">
             <a:extLst>
               <a:ext uri="{FF2B5EF4-FFF2-40B4-BE49-F238E27FC236}">
-                <a16:creationId xmlns:a16="http://schemas.microsoft.com/office/drawing/2014/main" xmlns="" id="{D230392C-ED50-49C3-93A6-10868BF6DADE}"/>
+                <a16:creationId xmlns="" xmlns:a16="http://schemas.microsoft.com/office/drawing/2014/main" id="{D230392C-ED50-49C3-93A6-10868BF6DADE}"/>
               </a:ext>
             </a:extLst>
           </p:cNvPr>
@@ -1886,7 +1886,7 @@
           <p:cNvPr id="6146" name="幻灯片图像占位符 1">
             <a:extLst>
               <a:ext uri="{FF2B5EF4-FFF2-40B4-BE49-F238E27FC236}">
-                <a16:creationId xmlns:a16="http://schemas.microsoft.com/office/drawing/2014/main" xmlns="" id="{4908B133-C54F-400F-8F70-355C57C0BE11}"/>
+                <a16:creationId xmlns="" xmlns:a16="http://schemas.microsoft.com/office/drawing/2014/main" id="{4908B133-C54F-400F-8F70-355C57C0BE11}"/>
               </a:ext>
             </a:extLst>
           </p:cNvPr>
@@ -1923,7 +1923,7 @@
           <p:cNvPr id="6147" name="备注占位符 2">
             <a:extLst>
               <a:ext uri="{FF2B5EF4-FFF2-40B4-BE49-F238E27FC236}">
-                <a16:creationId xmlns:a16="http://schemas.microsoft.com/office/drawing/2014/main" xmlns="" id="{7D16C196-D24B-4BE0-AE74-D44907B2A1B1}"/>
+                <a16:creationId xmlns="" xmlns:a16="http://schemas.microsoft.com/office/drawing/2014/main" id="{7D16C196-D24B-4BE0-AE74-D44907B2A1B1}"/>
               </a:ext>
             </a:extLst>
           </p:cNvPr>
@@ -1978,7 +1978,7 @@
           <p:cNvPr id="6148" name="灯片编号占位符 3">
             <a:extLst>
               <a:ext uri="{FF2B5EF4-FFF2-40B4-BE49-F238E27FC236}">
-                <a16:creationId xmlns:a16="http://schemas.microsoft.com/office/drawing/2014/main" xmlns="" id="{D230392C-ED50-49C3-93A6-10868BF6DADE}"/>
+                <a16:creationId xmlns="" xmlns:a16="http://schemas.microsoft.com/office/drawing/2014/main" id="{D230392C-ED50-49C3-93A6-10868BF6DADE}"/>
               </a:ext>
             </a:extLst>
           </p:cNvPr>
@@ -2228,7 +2228,7 @@
           <p:cNvPr id="6146" name="幻灯片图像占位符 1">
             <a:extLst>
               <a:ext uri="{FF2B5EF4-FFF2-40B4-BE49-F238E27FC236}">
-                <a16:creationId xmlns:a16="http://schemas.microsoft.com/office/drawing/2014/main" xmlns="" id="{4908B133-C54F-400F-8F70-355C57C0BE11}"/>
+                <a16:creationId xmlns="" xmlns:a16="http://schemas.microsoft.com/office/drawing/2014/main" id="{4908B133-C54F-400F-8F70-355C57C0BE11}"/>
               </a:ext>
             </a:extLst>
           </p:cNvPr>
@@ -2265,7 +2265,7 @@
           <p:cNvPr id="6147" name="备注占位符 2">
             <a:extLst>
               <a:ext uri="{FF2B5EF4-FFF2-40B4-BE49-F238E27FC236}">
-                <a16:creationId xmlns:a16="http://schemas.microsoft.com/office/drawing/2014/main" xmlns="" id="{7D16C196-D24B-4BE0-AE74-D44907B2A1B1}"/>
+                <a16:creationId xmlns="" xmlns:a16="http://schemas.microsoft.com/office/drawing/2014/main" id="{7D16C196-D24B-4BE0-AE74-D44907B2A1B1}"/>
               </a:ext>
             </a:extLst>
           </p:cNvPr>
@@ -2320,7 +2320,7 @@
           <p:cNvPr id="6148" name="灯片编号占位符 3">
             <a:extLst>
               <a:ext uri="{FF2B5EF4-FFF2-40B4-BE49-F238E27FC236}">
-                <a16:creationId xmlns:a16="http://schemas.microsoft.com/office/drawing/2014/main" xmlns="" id="{D230392C-ED50-49C3-93A6-10868BF6DADE}"/>
+                <a16:creationId xmlns="" xmlns:a16="http://schemas.microsoft.com/office/drawing/2014/main" id="{D230392C-ED50-49C3-93A6-10868BF6DADE}"/>
               </a:ext>
             </a:extLst>
           </p:cNvPr>
@@ -2570,7 +2570,7 @@
           <p:cNvPr id="6146" name="幻灯片图像占位符 1">
             <a:extLst>
               <a:ext uri="{FF2B5EF4-FFF2-40B4-BE49-F238E27FC236}">
-                <a16:creationId xmlns:a16="http://schemas.microsoft.com/office/drawing/2014/main" xmlns="" id="{4908B133-C54F-400F-8F70-355C57C0BE11}"/>
+                <a16:creationId xmlns="" xmlns:a16="http://schemas.microsoft.com/office/drawing/2014/main" id="{4908B133-C54F-400F-8F70-355C57C0BE11}"/>
               </a:ext>
             </a:extLst>
           </p:cNvPr>
@@ -2607,7 +2607,7 @@
           <p:cNvPr id="6147" name="备注占位符 2">
             <a:extLst>
               <a:ext uri="{FF2B5EF4-FFF2-40B4-BE49-F238E27FC236}">
-                <a16:creationId xmlns:a16="http://schemas.microsoft.com/office/drawing/2014/main" xmlns="" id="{7D16C196-D24B-4BE0-AE74-D44907B2A1B1}"/>
+                <a16:creationId xmlns="" xmlns:a16="http://schemas.microsoft.com/office/drawing/2014/main" id="{7D16C196-D24B-4BE0-AE74-D44907B2A1B1}"/>
               </a:ext>
             </a:extLst>
           </p:cNvPr>
@@ -2662,7 +2662,7 @@
           <p:cNvPr id="6148" name="灯片编号占位符 3">
             <a:extLst>
               <a:ext uri="{FF2B5EF4-FFF2-40B4-BE49-F238E27FC236}">
-                <a16:creationId xmlns:a16="http://schemas.microsoft.com/office/drawing/2014/main" xmlns="" id="{D230392C-ED50-49C3-93A6-10868BF6DADE}"/>
+                <a16:creationId xmlns="" xmlns:a16="http://schemas.microsoft.com/office/drawing/2014/main" id="{D230392C-ED50-49C3-93A6-10868BF6DADE}"/>
               </a:ext>
             </a:extLst>
           </p:cNvPr>
@@ -2912,7 +2912,7 @@
           <p:cNvPr id="6146" name="幻灯片图像占位符 1">
             <a:extLst>
               <a:ext uri="{FF2B5EF4-FFF2-40B4-BE49-F238E27FC236}">
-                <a16:creationId xmlns:a16="http://schemas.microsoft.com/office/drawing/2014/main" xmlns="" id="{4908B133-C54F-400F-8F70-355C57C0BE11}"/>
+                <a16:creationId xmlns="" xmlns:a16="http://schemas.microsoft.com/office/drawing/2014/main" id="{4908B133-C54F-400F-8F70-355C57C0BE11}"/>
               </a:ext>
             </a:extLst>
           </p:cNvPr>
@@ -2949,7 +2949,7 @@
           <p:cNvPr id="6147" name="备注占位符 2">
             <a:extLst>
               <a:ext uri="{FF2B5EF4-FFF2-40B4-BE49-F238E27FC236}">
-                <a16:creationId xmlns:a16="http://schemas.microsoft.com/office/drawing/2014/main" xmlns="" id="{7D16C196-D24B-4BE0-AE74-D44907B2A1B1}"/>
+                <a16:creationId xmlns="" xmlns:a16="http://schemas.microsoft.com/office/drawing/2014/main" id="{7D16C196-D24B-4BE0-AE74-D44907B2A1B1}"/>
               </a:ext>
             </a:extLst>
           </p:cNvPr>
@@ -3004,7 +3004,7 @@
           <p:cNvPr id="6148" name="灯片编号占位符 3">
             <a:extLst>
               <a:ext uri="{FF2B5EF4-FFF2-40B4-BE49-F238E27FC236}">
-                <a16:creationId xmlns:a16="http://schemas.microsoft.com/office/drawing/2014/main" xmlns="" id="{D230392C-ED50-49C3-93A6-10868BF6DADE}"/>
+                <a16:creationId xmlns="" xmlns:a16="http://schemas.microsoft.com/office/drawing/2014/main" id="{D230392C-ED50-49C3-93A6-10868BF6DADE}"/>
               </a:ext>
             </a:extLst>
           </p:cNvPr>
@@ -3254,7 +3254,7 @@
           <p:cNvPr id="6146" name="幻灯片图像占位符 1">
             <a:extLst>
               <a:ext uri="{FF2B5EF4-FFF2-40B4-BE49-F238E27FC236}">
-                <a16:creationId xmlns:a16="http://schemas.microsoft.com/office/drawing/2014/main" xmlns="" id="{4908B133-C54F-400F-8F70-355C57C0BE11}"/>
+                <a16:creationId xmlns="" xmlns:a16="http://schemas.microsoft.com/office/drawing/2014/main" id="{4908B133-C54F-400F-8F70-355C57C0BE11}"/>
               </a:ext>
             </a:extLst>
           </p:cNvPr>
@@ -3291,7 +3291,7 @@
           <p:cNvPr id="6147" name="备注占位符 2">
             <a:extLst>
               <a:ext uri="{FF2B5EF4-FFF2-40B4-BE49-F238E27FC236}">
-                <a16:creationId xmlns:a16="http://schemas.microsoft.com/office/drawing/2014/main" xmlns="" id="{7D16C196-D24B-4BE0-AE74-D44907B2A1B1}"/>
+                <a16:creationId xmlns="" xmlns:a16="http://schemas.microsoft.com/office/drawing/2014/main" id="{7D16C196-D24B-4BE0-AE74-D44907B2A1B1}"/>
               </a:ext>
             </a:extLst>
           </p:cNvPr>
@@ -3346,7 +3346,7 @@
           <p:cNvPr id="6148" name="灯片编号占位符 3">
             <a:extLst>
               <a:ext uri="{FF2B5EF4-FFF2-40B4-BE49-F238E27FC236}">
-                <a16:creationId xmlns:a16="http://schemas.microsoft.com/office/drawing/2014/main" xmlns="" id="{D230392C-ED50-49C3-93A6-10868BF6DADE}"/>
+                <a16:creationId xmlns="" xmlns:a16="http://schemas.microsoft.com/office/drawing/2014/main" id="{D230392C-ED50-49C3-93A6-10868BF6DADE}"/>
               </a:ext>
             </a:extLst>
           </p:cNvPr>
@@ -3596,7 +3596,7 @@
           <p:cNvPr id="6146" name="幻灯片图像占位符 1">
             <a:extLst>
               <a:ext uri="{FF2B5EF4-FFF2-40B4-BE49-F238E27FC236}">
-                <a16:creationId xmlns:a16="http://schemas.microsoft.com/office/drawing/2014/main" xmlns="" id="{4908B133-C54F-400F-8F70-355C57C0BE11}"/>
+                <a16:creationId xmlns="" xmlns:a16="http://schemas.microsoft.com/office/drawing/2014/main" id="{4908B133-C54F-400F-8F70-355C57C0BE11}"/>
               </a:ext>
             </a:extLst>
           </p:cNvPr>
@@ -3633,7 +3633,7 @@
           <p:cNvPr id="6147" name="备注占位符 2">
             <a:extLst>
               <a:ext uri="{FF2B5EF4-FFF2-40B4-BE49-F238E27FC236}">
-                <a16:creationId xmlns:a16="http://schemas.microsoft.com/office/drawing/2014/main" xmlns="" id="{7D16C196-D24B-4BE0-AE74-D44907B2A1B1}"/>
+                <a16:creationId xmlns="" xmlns:a16="http://schemas.microsoft.com/office/drawing/2014/main" id="{7D16C196-D24B-4BE0-AE74-D44907B2A1B1}"/>
               </a:ext>
             </a:extLst>
           </p:cNvPr>
@@ -3688,7 +3688,7 @@
           <p:cNvPr id="6148" name="灯片编号占位符 3">
             <a:extLst>
               <a:ext uri="{FF2B5EF4-FFF2-40B4-BE49-F238E27FC236}">
-                <a16:creationId xmlns:a16="http://schemas.microsoft.com/office/drawing/2014/main" xmlns="" id="{D230392C-ED50-49C3-93A6-10868BF6DADE}"/>
+                <a16:creationId xmlns="" xmlns:a16="http://schemas.microsoft.com/office/drawing/2014/main" id="{D230392C-ED50-49C3-93A6-10868BF6DADE}"/>
               </a:ext>
             </a:extLst>
           </p:cNvPr>
@@ -3938,7 +3938,7 @@
           <p:cNvPr id="6146" name="幻灯片图像占位符 1">
             <a:extLst>
               <a:ext uri="{FF2B5EF4-FFF2-40B4-BE49-F238E27FC236}">
-                <a16:creationId xmlns:a16="http://schemas.microsoft.com/office/drawing/2014/main" xmlns="" id="{4908B133-C54F-400F-8F70-355C57C0BE11}"/>
+                <a16:creationId xmlns="" xmlns:a16="http://schemas.microsoft.com/office/drawing/2014/main" id="{4908B133-C54F-400F-8F70-355C57C0BE11}"/>
               </a:ext>
             </a:extLst>
           </p:cNvPr>
@@ -3975,7 +3975,7 @@
           <p:cNvPr id="6147" name="备注占位符 2">
             <a:extLst>
               <a:ext uri="{FF2B5EF4-FFF2-40B4-BE49-F238E27FC236}">
-                <a16:creationId xmlns:a16="http://schemas.microsoft.com/office/drawing/2014/main" xmlns="" id="{7D16C196-D24B-4BE0-AE74-D44907B2A1B1}"/>
+                <a16:creationId xmlns="" xmlns:a16="http://schemas.microsoft.com/office/drawing/2014/main" id="{7D16C196-D24B-4BE0-AE74-D44907B2A1B1}"/>
               </a:ext>
             </a:extLst>
           </p:cNvPr>
@@ -4030,7 +4030,7 @@
           <p:cNvPr id="6148" name="灯片编号占位符 3">
             <a:extLst>
               <a:ext uri="{FF2B5EF4-FFF2-40B4-BE49-F238E27FC236}">
-                <a16:creationId xmlns:a16="http://schemas.microsoft.com/office/drawing/2014/main" xmlns="" id="{D230392C-ED50-49C3-93A6-10868BF6DADE}"/>
+                <a16:creationId xmlns="" xmlns:a16="http://schemas.microsoft.com/office/drawing/2014/main" id="{D230392C-ED50-49C3-93A6-10868BF6DADE}"/>
               </a:ext>
             </a:extLst>
           </p:cNvPr>
@@ -4280,7 +4280,7 @@
           <p:cNvPr id="6146" name="幻灯片图像占位符 1">
             <a:extLst>
               <a:ext uri="{FF2B5EF4-FFF2-40B4-BE49-F238E27FC236}">
-                <a16:creationId xmlns:a16="http://schemas.microsoft.com/office/drawing/2014/main" xmlns="" id="{4908B133-C54F-400F-8F70-355C57C0BE11}"/>
+                <a16:creationId xmlns="" xmlns:a16="http://schemas.microsoft.com/office/drawing/2014/main" id="{4908B133-C54F-400F-8F70-355C57C0BE11}"/>
               </a:ext>
             </a:extLst>
           </p:cNvPr>
@@ -4317,7 +4317,7 @@
           <p:cNvPr id="6147" name="备注占位符 2">
             <a:extLst>
               <a:ext uri="{FF2B5EF4-FFF2-40B4-BE49-F238E27FC236}">
-                <a16:creationId xmlns:a16="http://schemas.microsoft.com/office/drawing/2014/main" xmlns="" id="{7D16C196-D24B-4BE0-AE74-D44907B2A1B1}"/>
+                <a16:creationId xmlns="" xmlns:a16="http://schemas.microsoft.com/office/drawing/2014/main" id="{7D16C196-D24B-4BE0-AE74-D44907B2A1B1}"/>
               </a:ext>
             </a:extLst>
           </p:cNvPr>
@@ -4372,7 +4372,7 @@
           <p:cNvPr id="6148" name="灯片编号占位符 3">
             <a:extLst>
               <a:ext uri="{FF2B5EF4-FFF2-40B4-BE49-F238E27FC236}">
-                <a16:creationId xmlns:a16="http://schemas.microsoft.com/office/drawing/2014/main" xmlns="" id="{D230392C-ED50-49C3-93A6-10868BF6DADE}"/>
+                <a16:creationId xmlns="" xmlns:a16="http://schemas.microsoft.com/office/drawing/2014/main" id="{D230392C-ED50-49C3-93A6-10868BF6DADE}"/>
               </a:ext>
             </a:extLst>
           </p:cNvPr>
@@ -4622,7 +4622,7 @@
           <p:cNvPr id="6146" name="幻灯片图像占位符 1">
             <a:extLst>
               <a:ext uri="{FF2B5EF4-FFF2-40B4-BE49-F238E27FC236}">
-                <a16:creationId xmlns:a16="http://schemas.microsoft.com/office/drawing/2014/main" xmlns="" id="{4908B133-C54F-400F-8F70-355C57C0BE11}"/>
+                <a16:creationId xmlns="" xmlns:a16="http://schemas.microsoft.com/office/drawing/2014/main" id="{4908B133-C54F-400F-8F70-355C57C0BE11}"/>
               </a:ext>
             </a:extLst>
           </p:cNvPr>
@@ -4659,7 +4659,7 @@
           <p:cNvPr id="6147" name="备注占位符 2">
             <a:extLst>
               <a:ext uri="{FF2B5EF4-FFF2-40B4-BE49-F238E27FC236}">
-                <a16:creationId xmlns:a16="http://schemas.microsoft.com/office/drawing/2014/main" xmlns="" id="{7D16C196-D24B-4BE0-AE74-D44907B2A1B1}"/>
+                <a16:creationId xmlns="" xmlns:a16="http://schemas.microsoft.com/office/drawing/2014/main" id="{7D16C196-D24B-4BE0-AE74-D44907B2A1B1}"/>
               </a:ext>
             </a:extLst>
           </p:cNvPr>
@@ -4714,7 +4714,7 @@
           <p:cNvPr id="6148" name="灯片编号占位符 3">
             <a:extLst>
               <a:ext uri="{FF2B5EF4-FFF2-40B4-BE49-F238E27FC236}">
-                <a16:creationId xmlns:a16="http://schemas.microsoft.com/office/drawing/2014/main" xmlns="" id="{D230392C-ED50-49C3-93A6-10868BF6DADE}"/>
+                <a16:creationId xmlns="" xmlns:a16="http://schemas.microsoft.com/office/drawing/2014/main" id="{D230392C-ED50-49C3-93A6-10868BF6DADE}"/>
               </a:ext>
             </a:extLst>
           </p:cNvPr>
@@ -4964,7 +4964,7 @@
           <p:cNvPr id="6146" name="幻灯片图像占位符 1">
             <a:extLst>
               <a:ext uri="{FF2B5EF4-FFF2-40B4-BE49-F238E27FC236}">
-                <a16:creationId xmlns:a16="http://schemas.microsoft.com/office/drawing/2014/main" xmlns="" id="{4908B133-C54F-400F-8F70-355C57C0BE11}"/>
+                <a16:creationId xmlns="" xmlns:a16="http://schemas.microsoft.com/office/drawing/2014/main" id="{4908B133-C54F-400F-8F70-355C57C0BE11}"/>
               </a:ext>
             </a:extLst>
           </p:cNvPr>
@@ -5001,7 +5001,7 @@
           <p:cNvPr id="6147" name="备注占位符 2">
             <a:extLst>
               <a:ext uri="{FF2B5EF4-FFF2-40B4-BE49-F238E27FC236}">
-                <a16:creationId xmlns:a16="http://schemas.microsoft.com/office/drawing/2014/main" xmlns="" id="{7D16C196-D24B-4BE0-AE74-D44907B2A1B1}"/>
+                <a16:creationId xmlns="" xmlns:a16="http://schemas.microsoft.com/office/drawing/2014/main" id="{7D16C196-D24B-4BE0-AE74-D44907B2A1B1}"/>
               </a:ext>
             </a:extLst>
           </p:cNvPr>
@@ -5056,7 +5056,7 @@
           <p:cNvPr id="6148" name="灯片编号占位符 3">
             <a:extLst>
               <a:ext uri="{FF2B5EF4-FFF2-40B4-BE49-F238E27FC236}">
-                <a16:creationId xmlns:a16="http://schemas.microsoft.com/office/drawing/2014/main" xmlns="" id="{D230392C-ED50-49C3-93A6-10868BF6DADE}"/>
+                <a16:creationId xmlns="" xmlns:a16="http://schemas.microsoft.com/office/drawing/2014/main" id="{D230392C-ED50-49C3-93A6-10868BF6DADE}"/>
               </a:ext>
             </a:extLst>
           </p:cNvPr>
@@ -5306,7 +5306,7 @@
           <p:cNvPr id="6146" name="幻灯片图像占位符 1">
             <a:extLst>
               <a:ext uri="{FF2B5EF4-FFF2-40B4-BE49-F238E27FC236}">
-                <a16:creationId xmlns:a16="http://schemas.microsoft.com/office/drawing/2014/main" xmlns="" id="{4908B133-C54F-400F-8F70-355C57C0BE11}"/>
+                <a16:creationId xmlns="" xmlns:a16="http://schemas.microsoft.com/office/drawing/2014/main" id="{4908B133-C54F-400F-8F70-355C57C0BE11}"/>
               </a:ext>
             </a:extLst>
           </p:cNvPr>
@@ -5343,7 +5343,7 @@
           <p:cNvPr id="6147" name="备注占位符 2">
             <a:extLst>
               <a:ext uri="{FF2B5EF4-FFF2-40B4-BE49-F238E27FC236}">
-                <a16:creationId xmlns:a16="http://schemas.microsoft.com/office/drawing/2014/main" xmlns="" id="{7D16C196-D24B-4BE0-AE74-D44907B2A1B1}"/>
+                <a16:creationId xmlns="" xmlns:a16="http://schemas.microsoft.com/office/drawing/2014/main" id="{7D16C196-D24B-4BE0-AE74-D44907B2A1B1}"/>
               </a:ext>
             </a:extLst>
           </p:cNvPr>
@@ -5398,7 +5398,7 @@
           <p:cNvPr id="6148" name="灯片编号占位符 3">
             <a:extLst>
               <a:ext uri="{FF2B5EF4-FFF2-40B4-BE49-F238E27FC236}">
-                <a16:creationId xmlns:a16="http://schemas.microsoft.com/office/drawing/2014/main" xmlns="" id="{D230392C-ED50-49C3-93A6-10868BF6DADE}"/>
+                <a16:creationId xmlns="" xmlns:a16="http://schemas.microsoft.com/office/drawing/2014/main" id="{D230392C-ED50-49C3-93A6-10868BF6DADE}"/>
               </a:ext>
             </a:extLst>
           </p:cNvPr>
@@ -5648,7 +5648,7 @@
           <p:cNvPr id="6146" name="幻灯片图像占位符 1">
             <a:extLst>
               <a:ext uri="{FF2B5EF4-FFF2-40B4-BE49-F238E27FC236}">
-                <a16:creationId xmlns:a16="http://schemas.microsoft.com/office/drawing/2014/main" xmlns="" id="{4908B133-C54F-400F-8F70-355C57C0BE11}"/>
+                <a16:creationId xmlns="" xmlns:a16="http://schemas.microsoft.com/office/drawing/2014/main" id="{4908B133-C54F-400F-8F70-355C57C0BE11}"/>
               </a:ext>
             </a:extLst>
           </p:cNvPr>
@@ -5685,7 +5685,7 @@
           <p:cNvPr id="6147" name="备注占位符 2">
             <a:extLst>
               <a:ext uri="{FF2B5EF4-FFF2-40B4-BE49-F238E27FC236}">
-                <a16:creationId xmlns:a16="http://schemas.microsoft.com/office/drawing/2014/main" xmlns="" id="{7D16C196-D24B-4BE0-AE74-D44907B2A1B1}"/>
+                <a16:creationId xmlns="" xmlns:a16="http://schemas.microsoft.com/office/drawing/2014/main" id="{7D16C196-D24B-4BE0-AE74-D44907B2A1B1}"/>
               </a:ext>
             </a:extLst>
           </p:cNvPr>
@@ -5740,7 +5740,7 @@
           <p:cNvPr id="6148" name="灯片编号占位符 3">
             <a:extLst>
               <a:ext uri="{FF2B5EF4-FFF2-40B4-BE49-F238E27FC236}">
-                <a16:creationId xmlns:a16="http://schemas.microsoft.com/office/drawing/2014/main" xmlns="" id="{D230392C-ED50-49C3-93A6-10868BF6DADE}"/>
+                <a16:creationId xmlns="" xmlns:a16="http://schemas.microsoft.com/office/drawing/2014/main" id="{D230392C-ED50-49C3-93A6-10868BF6DADE}"/>
               </a:ext>
             </a:extLst>
           </p:cNvPr>
@@ -5990,7 +5990,7 @@
           <p:cNvPr id="6146" name="幻灯片图像占位符 1">
             <a:extLst>
               <a:ext uri="{FF2B5EF4-FFF2-40B4-BE49-F238E27FC236}">
-                <a16:creationId xmlns:a16="http://schemas.microsoft.com/office/drawing/2014/main" xmlns="" id="{4908B133-C54F-400F-8F70-355C57C0BE11}"/>
+                <a16:creationId xmlns="" xmlns:a16="http://schemas.microsoft.com/office/drawing/2014/main" id="{4908B133-C54F-400F-8F70-355C57C0BE11}"/>
               </a:ext>
             </a:extLst>
           </p:cNvPr>
@@ -6027,7 +6027,7 @@
           <p:cNvPr id="6147" name="备注占位符 2">
             <a:extLst>
               <a:ext uri="{FF2B5EF4-FFF2-40B4-BE49-F238E27FC236}">
-                <a16:creationId xmlns:a16="http://schemas.microsoft.com/office/drawing/2014/main" xmlns="" id="{7D16C196-D24B-4BE0-AE74-D44907B2A1B1}"/>
+                <a16:creationId xmlns="" xmlns:a16="http://schemas.microsoft.com/office/drawing/2014/main" id="{7D16C196-D24B-4BE0-AE74-D44907B2A1B1}"/>
               </a:ext>
             </a:extLst>
           </p:cNvPr>
@@ -6082,7 +6082,7 @@
           <p:cNvPr id="6148" name="灯片编号占位符 3">
             <a:extLst>
               <a:ext uri="{FF2B5EF4-FFF2-40B4-BE49-F238E27FC236}">
-                <a16:creationId xmlns:a16="http://schemas.microsoft.com/office/drawing/2014/main" xmlns="" id="{D230392C-ED50-49C3-93A6-10868BF6DADE}"/>
+                <a16:creationId xmlns="" xmlns:a16="http://schemas.microsoft.com/office/drawing/2014/main" id="{D230392C-ED50-49C3-93A6-10868BF6DADE}"/>
               </a:ext>
             </a:extLst>
           </p:cNvPr>
@@ -6332,7 +6332,7 @@
           <p:cNvPr id="6146" name="幻灯片图像占位符 1">
             <a:extLst>
               <a:ext uri="{FF2B5EF4-FFF2-40B4-BE49-F238E27FC236}">
-                <a16:creationId xmlns:a16="http://schemas.microsoft.com/office/drawing/2014/main" xmlns="" id="{4908B133-C54F-400F-8F70-355C57C0BE11}"/>
+                <a16:creationId xmlns="" xmlns:a16="http://schemas.microsoft.com/office/drawing/2014/main" id="{4908B133-C54F-400F-8F70-355C57C0BE11}"/>
               </a:ext>
             </a:extLst>
           </p:cNvPr>
@@ -6369,7 +6369,7 @@
           <p:cNvPr id="6147" name="备注占位符 2">
             <a:extLst>
               <a:ext uri="{FF2B5EF4-FFF2-40B4-BE49-F238E27FC236}">
-                <a16:creationId xmlns:a16="http://schemas.microsoft.com/office/drawing/2014/main" xmlns="" id="{7D16C196-D24B-4BE0-AE74-D44907B2A1B1}"/>
+                <a16:creationId xmlns="" xmlns:a16="http://schemas.microsoft.com/office/drawing/2014/main" id="{7D16C196-D24B-4BE0-AE74-D44907B2A1B1}"/>
               </a:ext>
             </a:extLst>
           </p:cNvPr>
@@ -6424,7 +6424,7 @@
           <p:cNvPr id="6148" name="灯片编号占位符 3">
             <a:extLst>
               <a:ext uri="{FF2B5EF4-FFF2-40B4-BE49-F238E27FC236}">
-                <a16:creationId xmlns:a16="http://schemas.microsoft.com/office/drawing/2014/main" xmlns="" id="{D230392C-ED50-49C3-93A6-10868BF6DADE}"/>
+                <a16:creationId xmlns="" xmlns:a16="http://schemas.microsoft.com/office/drawing/2014/main" id="{D230392C-ED50-49C3-93A6-10868BF6DADE}"/>
               </a:ext>
             </a:extLst>
           </p:cNvPr>
@@ -6674,7 +6674,7 @@
           <p:cNvPr id="6146" name="幻灯片图像占位符 1">
             <a:extLst>
               <a:ext uri="{FF2B5EF4-FFF2-40B4-BE49-F238E27FC236}">
-                <a16:creationId xmlns:a16="http://schemas.microsoft.com/office/drawing/2014/main" xmlns="" id="{4908B133-C54F-400F-8F70-355C57C0BE11}"/>
+                <a16:creationId xmlns="" xmlns:a16="http://schemas.microsoft.com/office/drawing/2014/main" id="{4908B133-C54F-400F-8F70-355C57C0BE11}"/>
               </a:ext>
             </a:extLst>
           </p:cNvPr>
@@ -6711,7 +6711,7 @@
           <p:cNvPr id="6147" name="备注占位符 2">
             <a:extLst>
               <a:ext uri="{FF2B5EF4-FFF2-40B4-BE49-F238E27FC236}">
-                <a16:creationId xmlns:a16="http://schemas.microsoft.com/office/drawing/2014/main" xmlns="" id="{7D16C196-D24B-4BE0-AE74-D44907B2A1B1}"/>
+                <a16:creationId xmlns="" xmlns:a16="http://schemas.microsoft.com/office/drawing/2014/main" id="{7D16C196-D24B-4BE0-AE74-D44907B2A1B1}"/>
               </a:ext>
             </a:extLst>
           </p:cNvPr>
@@ -6766,7 +6766,7 @@
           <p:cNvPr id="6148" name="灯片编号占位符 3">
             <a:extLst>
               <a:ext uri="{FF2B5EF4-FFF2-40B4-BE49-F238E27FC236}">
-                <a16:creationId xmlns:a16="http://schemas.microsoft.com/office/drawing/2014/main" xmlns="" id="{D230392C-ED50-49C3-93A6-10868BF6DADE}"/>
+                <a16:creationId xmlns="" xmlns:a16="http://schemas.microsoft.com/office/drawing/2014/main" id="{D230392C-ED50-49C3-93A6-10868BF6DADE}"/>
               </a:ext>
             </a:extLst>
           </p:cNvPr>
@@ -7016,7 +7016,7 @@
           <p:cNvPr id="6146" name="幻灯片图像占位符 1">
             <a:extLst>
               <a:ext uri="{FF2B5EF4-FFF2-40B4-BE49-F238E27FC236}">
-                <a16:creationId xmlns:a16="http://schemas.microsoft.com/office/drawing/2014/main" xmlns="" id="{4908B133-C54F-400F-8F70-355C57C0BE11}"/>
+                <a16:creationId xmlns="" xmlns:a16="http://schemas.microsoft.com/office/drawing/2014/main" id="{4908B133-C54F-400F-8F70-355C57C0BE11}"/>
               </a:ext>
             </a:extLst>
           </p:cNvPr>
@@ -7053,7 +7053,7 @@
           <p:cNvPr id="6147" name="备注占位符 2">
             <a:extLst>
               <a:ext uri="{FF2B5EF4-FFF2-40B4-BE49-F238E27FC236}">
-                <a16:creationId xmlns:a16="http://schemas.microsoft.com/office/drawing/2014/main" xmlns="" id="{7D16C196-D24B-4BE0-AE74-D44907B2A1B1}"/>
+                <a16:creationId xmlns="" xmlns:a16="http://schemas.microsoft.com/office/drawing/2014/main" id="{7D16C196-D24B-4BE0-AE74-D44907B2A1B1}"/>
               </a:ext>
             </a:extLst>
           </p:cNvPr>
@@ -7108,7 +7108,7 @@
           <p:cNvPr id="6148" name="灯片编号占位符 3">
             <a:extLst>
               <a:ext uri="{FF2B5EF4-FFF2-40B4-BE49-F238E27FC236}">
-                <a16:creationId xmlns:a16="http://schemas.microsoft.com/office/drawing/2014/main" xmlns="" id="{D230392C-ED50-49C3-93A6-10868BF6DADE}"/>
+                <a16:creationId xmlns="" xmlns:a16="http://schemas.microsoft.com/office/drawing/2014/main" id="{D230392C-ED50-49C3-93A6-10868BF6DADE}"/>
               </a:ext>
             </a:extLst>
           </p:cNvPr>
@@ -7358,7 +7358,7 @@
           <p:cNvPr id="6146" name="幻灯片图像占位符 1">
             <a:extLst>
               <a:ext uri="{FF2B5EF4-FFF2-40B4-BE49-F238E27FC236}">
-                <a16:creationId xmlns:a16="http://schemas.microsoft.com/office/drawing/2014/main" xmlns="" id="{4908B133-C54F-400F-8F70-355C57C0BE11}"/>
+                <a16:creationId xmlns="" xmlns:a16="http://schemas.microsoft.com/office/drawing/2014/main" id="{4908B133-C54F-400F-8F70-355C57C0BE11}"/>
               </a:ext>
             </a:extLst>
           </p:cNvPr>
@@ -7395,7 +7395,7 @@
           <p:cNvPr id="6147" name="备注占位符 2">
             <a:extLst>
               <a:ext uri="{FF2B5EF4-FFF2-40B4-BE49-F238E27FC236}">
-                <a16:creationId xmlns:a16="http://schemas.microsoft.com/office/drawing/2014/main" xmlns="" id="{7D16C196-D24B-4BE0-AE74-D44907B2A1B1}"/>
+                <a16:creationId xmlns="" xmlns:a16="http://schemas.microsoft.com/office/drawing/2014/main" id="{7D16C196-D24B-4BE0-AE74-D44907B2A1B1}"/>
               </a:ext>
             </a:extLst>
           </p:cNvPr>
@@ -7450,7 +7450,7 @@
           <p:cNvPr id="6148" name="灯片编号占位符 3">
             <a:extLst>
               <a:ext uri="{FF2B5EF4-FFF2-40B4-BE49-F238E27FC236}">
-                <a16:creationId xmlns:a16="http://schemas.microsoft.com/office/drawing/2014/main" xmlns="" id="{D230392C-ED50-49C3-93A6-10868BF6DADE}"/>
+                <a16:creationId xmlns="" xmlns:a16="http://schemas.microsoft.com/office/drawing/2014/main" id="{D230392C-ED50-49C3-93A6-10868BF6DADE}"/>
               </a:ext>
             </a:extLst>
           </p:cNvPr>
@@ -7700,7 +7700,7 @@
           <p:cNvPr id="6146" name="幻灯片图像占位符 1">
             <a:extLst>
               <a:ext uri="{FF2B5EF4-FFF2-40B4-BE49-F238E27FC236}">
-                <a16:creationId xmlns:a16="http://schemas.microsoft.com/office/drawing/2014/main" xmlns="" id="{4908B133-C54F-400F-8F70-355C57C0BE11}"/>
+                <a16:creationId xmlns="" xmlns:a16="http://schemas.microsoft.com/office/drawing/2014/main" id="{4908B133-C54F-400F-8F70-355C57C0BE11}"/>
               </a:ext>
             </a:extLst>
           </p:cNvPr>
@@ -7737,7 +7737,7 @@
           <p:cNvPr id="6147" name="备注占位符 2">
             <a:extLst>
               <a:ext uri="{FF2B5EF4-FFF2-40B4-BE49-F238E27FC236}">
-                <a16:creationId xmlns:a16="http://schemas.microsoft.com/office/drawing/2014/main" xmlns="" id="{7D16C196-D24B-4BE0-AE74-D44907B2A1B1}"/>
+                <a16:creationId xmlns="" xmlns:a16="http://schemas.microsoft.com/office/drawing/2014/main" id="{7D16C196-D24B-4BE0-AE74-D44907B2A1B1}"/>
               </a:ext>
             </a:extLst>
           </p:cNvPr>
@@ -7792,7 +7792,7 @@
           <p:cNvPr id="6148" name="灯片编号占位符 3">
             <a:extLst>
               <a:ext uri="{FF2B5EF4-FFF2-40B4-BE49-F238E27FC236}">
-                <a16:creationId xmlns:a16="http://schemas.microsoft.com/office/drawing/2014/main" xmlns="" id="{D230392C-ED50-49C3-93A6-10868BF6DADE}"/>
+                <a16:creationId xmlns="" xmlns:a16="http://schemas.microsoft.com/office/drawing/2014/main" id="{D230392C-ED50-49C3-93A6-10868BF6DADE}"/>
               </a:ext>
             </a:extLst>
           </p:cNvPr>
@@ -8042,7 +8042,7 @@
           <p:cNvPr id="6146" name="幻灯片图像占位符 1">
             <a:extLst>
               <a:ext uri="{FF2B5EF4-FFF2-40B4-BE49-F238E27FC236}">
-                <a16:creationId xmlns:a16="http://schemas.microsoft.com/office/drawing/2014/main" xmlns="" id="{4908B133-C54F-400F-8F70-355C57C0BE11}"/>
+                <a16:creationId xmlns="" xmlns:a16="http://schemas.microsoft.com/office/drawing/2014/main" id="{4908B133-C54F-400F-8F70-355C57C0BE11}"/>
               </a:ext>
             </a:extLst>
           </p:cNvPr>
@@ -8079,7 +8079,7 @@
           <p:cNvPr id="6147" name="备注占位符 2">
             <a:extLst>
               <a:ext uri="{FF2B5EF4-FFF2-40B4-BE49-F238E27FC236}">
-                <a16:creationId xmlns:a16="http://schemas.microsoft.com/office/drawing/2014/main" xmlns="" id="{7D16C196-D24B-4BE0-AE74-D44907B2A1B1}"/>
+                <a16:creationId xmlns="" xmlns:a16="http://schemas.microsoft.com/office/drawing/2014/main" id="{7D16C196-D24B-4BE0-AE74-D44907B2A1B1}"/>
               </a:ext>
             </a:extLst>
           </p:cNvPr>
@@ -8134,7 +8134,7 @@
           <p:cNvPr id="6148" name="灯片编号占位符 3">
             <a:extLst>
               <a:ext uri="{FF2B5EF4-FFF2-40B4-BE49-F238E27FC236}">
-                <a16:creationId xmlns:a16="http://schemas.microsoft.com/office/drawing/2014/main" xmlns="" id="{D230392C-ED50-49C3-93A6-10868BF6DADE}"/>
+                <a16:creationId xmlns="" xmlns:a16="http://schemas.microsoft.com/office/drawing/2014/main" id="{D230392C-ED50-49C3-93A6-10868BF6DADE}"/>
               </a:ext>
             </a:extLst>
           </p:cNvPr>
@@ -8384,7 +8384,7 @@
           <p:cNvPr id="6146" name="幻灯片图像占位符 1">
             <a:extLst>
               <a:ext uri="{FF2B5EF4-FFF2-40B4-BE49-F238E27FC236}">
-                <a16:creationId xmlns:a16="http://schemas.microsoft.com/office/drawing/2014/main" xmlns="" id="{4908B133-C54F-400F-8F70-355C57C0BE11}"/>
+                <a16:creationId xmlns="" xmlns:a16="http://schemas.microsoft.com/office/drawing/2014/main" id="{4908B133-C54F-400F-8F70-355C57C0BE11}"/>
               </a:ext>
             </a:extLst>
           </p:cNvPr>
@@ -8421,7 +8421,7 @@
           <p:cNvPr id="6147" name="备注占位符 2">
             <a:extLst>
               <a:ext uri="{FF2B5EF4-FFF2-40B4-BE49-F238E27FC236}">
-                <a16:creationId xmlns:a16="http://schemas.microsoft.com/office/drawing/2014/main" xmlns="" id="{7D16C196-D24B-4BE0-AE74-D44907B2A1B1}"/>
+                <a16:creationId xmlns="" xmlns:a16="http://schemas.microsoft.com/office/drawing/2014/main" id="{7D16C196-D24B-4BE0-AE74-D44907B2A1B1}"/>
               </a:ext>
             </a:extLst>
           </p:cNvPr>
@@ -8476,7 +8476,7 @@
           <p:cNvPr id="6148" name="灯片编号占位符 3">
             <a:extLst>
               <a:ext uri="{FF2B5EF4-FFF2-40B4-BE49-F238E27FC236}">
-                <a16:creationId xmlns:a16="http://schemas.microsoft.com/office/drawing/2014/main" xmlns="" id="{D230392C-ED50-49C3-93A6-10868BF6DADE}"/>
+                <a16:creationId xmlns="" xmlns:a16="http://schemas.microsoft.com/office/drawing/2014/main" id="{D230392C-ED50-49C3-93A6-10868BF6DADE}"/>
               </a:ext>
             </a:extLst>
           </p:cNvPr>
@@ -8726,7 +8726,7 @@
           <p:cNvPr id="6146" name="幻灯片图像占位符 1">
             <a:extLst>
               <a:ext uri="{FF2B5EF4-FFF2-40B4-BE49-F238E27FC236}">
-                <a16:creationId xmlns:a16="http://schemas.microsoft.com/office/drawing/2014/main" xmlns="" id="{4908B133-C54F-400F-8F70-355C57C0BE11}"/>
+                <a16:creationId xmlns="" xmlns:a16="http://schemas.microsoft.com/office/drawing/2014/main" id="{4908B133-C54F-400F-8F70-355C57C0BE11}"/>
               </a:ext>
             </a:extLst>
           </p:cNvPr>
@@ -8763,7 +8763,7 @@
           <p:cNvPr id="6147" name="备注占位符 2">
             <a:extLst>
               <a:ext uri="{FF2B5EF4-FFF2-40B4-BE49-F238E27FC236}">
-                <a16:creationId xmlns:a16="http://schemas.microsoft.com/office/drawing/2014/main" xmlns="" id="{7D16C196-D24B-4BE0-AE74-D44907B2A1B1}"/>
+                <a16:creationId xmlns="" xmlns:a16="http://schemas.microsoft.com/office/drawing/2014/main" id="{7D16C196-D24B-4BE0-AE74-D44907B2A1B1}"/>
               </a:ext>
             </a:extLst>
           </p:cNvPr>
@@ -8818,7 +8818,7 @@
           <p:cNvPr id="6148" name="灯片编号占位符 3">
             <a:extLst>
               <a:ext uri="{FF2B5EF4-FFF2-40B4-BE49-F238E27FC236}">
-                <a16:creationId xmlns:a16="http://schemas.microsoft.com/office/drawing/2014/main" xmlns="" id="{D230392C-ED50-49C3-93A6-10868BF6DADE}"/>
+                <a16:creationId xmlns="" xmlns:a16="http://schemas.microsoft.com/office/drawing/2014/main" id="{D230392C-ED50-49C3-93A6-10868BF6DADE}"/>
               </a:ext>
             </a:extLst>
           </p:cNvPr>
@@ -9068,7 +9068,7 @@
           <p:cNvPr id="6146" name="幻灯片图像占位符 1">
             <a:extLst>
               <a:ext uri="{FF2B5EF4-FFF2-40B4-BE49-F238E27FC236}">
-                <a16:creationId xmlns:a16="http://schemas.microsoft.com/office/drawing/2014/main" xmlns="" id="{4908B133-C54F-400F-8F70-355C57C0BE11}"/>
+                <a16:creationId xmlns="" xmlns:a16="http://schemas.microsoft.com/office/drawing/2014/main" id="{4908B133-C54F-400F-8F70-355C57C0BE11}"/>
               </a:ext>
             </a:extLst>
           </p:cNvPr>
@@ -9105,7 +9105,7 @@
           <p:cNvPr id="6147" name="备注占位符 2">
             <a:extLst>
               <a:ext uri="{FF2B5EF4-FFF2-40B4-BE49-F238E27FC236}">
-                <a16:creationId xmlns:a16="http://schemas.microsoft.com/office/drawing/2014/main" xmlns="" id="{7D16C196-D24B-4BE0-AE74-D44907B2A1B1}"/>
+                <a16:creationId xmlns="" xmlns:a16="http://schemas.microsoft.com/office/drawing/2014/main" id="{7D16C196-D24B-4BE0-AE74-D44907B2A1B1}"/>
               </a:ext>
             </a:extLst>
           </p:cNvPr>
@@ -9160,7 +9160,7 @@
           <p:cNvPr id="6148" name="灯片编号占位符 3">
             <a:extLst>
               <a:ext uri="{FF2B5EF4-FFF2-40B4-BE49-F238E27FC236}">
-                <a16:creationId xmlns:a16="http://schemas.microsoft.com/office/drawing/2014/main" xmlns="" id="{D230392C-ED50-49C3-93A6-10868BF6DADE}"/>
+                <a16:creationId xmlns="" xmlns:a16="http://schemas.microsoft.com/office/drawing/2014/main" id="{D230392C-ED50-49C3-93A6-10868BF6DADE}"/>
               </a:ext>
             </a:extLst>
           </p:cNvPr>
@@ -9410,7 +9410,7 @@
           <p:cNvPr id="6146" name="幻灯片图像占位符 1">
             <a:extLst>
               <a:ext uri="{FF2B5EF4-FFF2-40B4-BE49-F238E27FC236}">
-                <a16:creationId xmlns:a16="http://schemas.microsoft.com/office/drawing/2014/main" xmlns="" id="{4908B133-C54F-400F-8F70-355C57C0BE11}"/>
+                <a16:creationId xmlns="" xmlns:a16="http://schemas.microsoft.com/office/drawing/2014/main" id="{4908B133-C54F-400F-8F70-355C57C0BE11}"/>
               </a:ext>
             </a:extLst>
           </p:cNvPr>
@@ -9447,7 +9447,7 @@
           <p:cNvPr id="6147" name="备注占位符 2">
             <a:extLst>
               <a:ext uri="{FF2B5EF4-FFF2-40B4-BE49-F238E27FC236}">
-                <a16:creationId xmlns:a16="http://schemas.microsoft.com/office/drawing/2014/main" xmlns="" id="{7D16C196-D24B-4BE0-AE74-D44907B2A1B1}"/>
+                <a16:creationId xmlns="" xmlns:a16="http://schemas.microsoft.com/office/drawing/2014/main" id="{7D16C196-D24B-4BE0-AE74-D44907B2A1B1}"/>
               </a:ext>
             </a:extLst>
           </p:cNvPr>
@@ -9502,7 +9502,7 @@
           <p:cNvPr id="6148" name="灯片编号占位符 3">
             <a:extLst>
               <a:ext uri="{FF2B5EF4-FFF2-40B4-BE49-F238E27FC236}">
-                <a16:creationId xmlns:a16="http://schemas.microsoft.com/office/drawing/2014/main" xmlns="" id="{D230392C-ED50-49C3-93A6-10868BF6DADE}"/>
+                <a16:creationId xmlns="" xmlns:a16="http://schemas.microsoft.com/office/drawing/2014/main" id="{D230392C-ED50-49C3-93A6-10868BF6DADE}"/>
               </a:ext>
             </a:extLst>
           </p:cNvPr>
@@ -9752,7 +9752,7 @@
           <p:cNvPr id="6146" name="幻灯片图像占位符 1">
             <a:extLst>
               <a:ext uri="{FF2B5EF4-FFF2-40B4-BE49-F238E27FC236}">
-                <a16:creationId xmlns:a16="http://schemas.microsoft.com/office/drawing/2014/main" xmlns="" id="{4908B133-C54F-400F-8F70-355C57C0BE11}"/>
+                <a16:creationId xmlns="" xmlns:a16="http://schemas.microsoft.com/office/drawing/2014/main" id="{4908B133-C54F-400F-8F70-355C57C0BE11}"/>
               </a:ext>
             </a:extLst>
           </p:cNvPr>
@@ -9789,7 +9789,7 @@
           <p:cNvPr id="6147" name="备注占位符 2">
             <a:extLst>
               <a:ext uri="{FF2B5EF4-FFF2-40B4-BE49-F238E27FC236}">
-                <a16:creationId xmlns:a16="http://schemas.microsoft.com/office/drawing/2014/main" xmlns="" id="{7D16C196-D24B-4BE0-AE74-D44907B2A1B1}"/>
+                <a16:creationId xmlns="" xmlns:a16="http://schemas.microsoft.com/office/drawing/2014/main" id="{7D16C196-D24B-4BE0-AE74-D44907B2A1B1}"/>
               </a:ext>
             </a:extLst>
           </p:cNvPr>
@@ -9844,7 +9844,7 @@
           <p:cNvPr id="6148" name="灯片编号占位符 3">
             <a:extLst>
               <a:ext uri="{FF2B5EF4-FFF2-40B4-BE49-F238E27FC236}">
-                <a16:creationId xmlns:a16="http://schemas.microsoft.com/office/drawing/2014/main" xmlns="" id="{D230392C-ED50-49C3-93A6-10868BF6DADE}"/>
+                <a16:creationId xmlns="" xmlns:a16="http://schemas.microsoft.com/office/drawing/2014/main" id="{D230392C-ED50-49C3-93A6-10868BF6DADE}"/>
               </a:ext>
             </a:extLst>
           </p:cNvPr>
@@ -10094,7 +10094,7 @@
           <p:cNvPr id="6146" name="幻灯片图像占位符 1">
             <a:extLst>
               <a:ext uri="{FF2B5EF4-FFF2-40B4-BE49-F238E27FC236}">
-                <a16:creationId xmlns:a16="http://schemas.microsoft.com/office/drawing/2014/main" xmlns="" id="{4908B133-C54F-400F-8F70-355C57C0BE11}"/>
+                <a16:creationId xmlns="" xmlns:a16="http://schemas.microsoft.com/office/drawing/2014/main" id="{4908B133-C54F-400F-8F70-355C57C0BE11}"/>
               </a:ext>
             </a:extLst>
           </p:cNvPr>
@@ -10131,7 +10131,7 @@
           <p:cNvPr id="6147" name="备注占位符 2">
             <a:extLst>
               <a:ext uri="{FF2B5EF4-FFF2-40B4-BE49-F238E27FC236}">
-                <a16:creationId xmlns:a16="http://schemas.microsoft.com/office/drawing/2014/main" xmlns="" id="{7D16C196-D24B-4BE0-AE74-D44907B2A1B1}"/>
+                <a16:creationId xmlns="" xmlns:a16="http://schemas.microsoft.com/office/drawing/2014/main" id="{7D16C196-D24B-4BE0-AE74-D44907B2A1B1}"/>
               </a:ext>
             </a:extLst>
           </p:cNvPr>
@@ -10186,7 +10186,7 @@
           <p:cNvPr id="6148" name="灯片编号占位符 3">
             <a:extLst>
               <a:ext uri="{FF2B5EF4-FFF2-40B4-BE49-F238E27FC236}">
-                <a16:creationId xmlns:a16="http://schemas.microsoft.com/office/drawing/2014/main" xmlns="" id="{D230392C-ED50-49C3-93A6-10868BF6DADE}"/>
+                <a16:creationId xmlns="" xmlns:a16="http://schemas.microsoft.com/office/drawing/2014/main" id="{D230392C-ED50-49C3-93A6-10868BF6DADE}"/>
               </a:ext>
             </a:extLst>
           </p:cNvPr>
@@ -10436,7 +10436,7 @@
           <p:cNvPr id="6146" name="幻灯片图像占位符 1">
             <a:extLst>
               <a:ext uri="{FF2B5EF4-FFF2-40B4-BE49-F238E27FC236}">
-                <a16:creationId xmlns:a16="http://schemas.microsoft.com/office/drawing/2014/main" xmlns="" id="{4908B133-C54F-400F-8F70-355C57C0BE11}"/>
+                <a16:creationId xmlns="" xmlns:a16="http://schemas.microsoft.com/office/drawing/2014/main" id="{4908B133-C54F-400F-8F70-355C57C0BE11}"/>
               </a:ext>
             </a:extLst>
           </p:cNvPr>
@@ -10473,7 +10473,7 @@
           <p:cNvPr id="6147" name="备注占位符 2">
             <a:extLst>
               <a:ext uri="{FF2B5EF4-FFF2-40B4-BE49-F238E27FC236}">
-                <a16:creationId xmlns:a16="http://schemas.microsoft.com/office/drawing/2014/main" xmlns="" id="{7D16C196-D24B-4BE0-AE74-D44907B2A1B1}"/>
+                <a16:creationId xmlns="" xmlns:a16="http://schemas.microsoft.com/office/drawing/2014/main" id="{7D16C196-D24B-4BE0-AE74-D44907B2A1B1}"/>
               </a:ext>
             </a:extLst>
           </p:cNvPr>
@@ -10528,7 +10528,7 @@
           <p:cNvPr id="6148" name="灯片编号占位符 3">
             <a:extLst>
               <a:ext uri="{FF2B5EF4-FFF2-40B4-BE49-F238E27FC236}">
-                <a16:creationId xmlns:a16="http://schemas.microsoft.com/office/drawing/2014/main" xmlns="" id="{D230392C-ED50-49C3-93A6-10868BF6DADE}"/>
+                <a16:creationId xmlns="" xmlns:a16="http://schemas.microsoft.com/office/drawing/2014/main" id="{D230392C-ED50-49C3-93A6-10868BF6DADE}"/>
               </a:ext>
             </a:extLst>
           </p:cNvPr>
@@ -10778,7 +10778,7 @@
           <p:cNvPr id="6146" name="幻灯片图像占位符 1">
             <a:extLst>
               <a:ext uri="{FF2B5EF4-FFF2-40B4-BE49-F238E27FC236}">
-                <a16:creationId xmlns:a16="http://schemas.microsoft.com/office/drawing/2014/main" xmlns="" id="{4908B133-C54F-400F-8F70-355C57C0BE11}"/>
+                <a16:creationId xmlns="" xmlns:a16="http://schemas.microsoft.com/office/drawing/2014/main" id="{4908B133-C54F-400F-8F70-355C57C0BE11}"/>
               </a:ext>
             </a:extLst>
           </p:cNvPr>
@@ -10815,7 +10815,7 @@
           <p:cNvPr id="6147" name="备注占位符 2">
             <a:extLst>
               <a:ext uri="{FF2B5EF4-FFF2-40B4-BE49-F238E27FC236}">
-                <a16:creationId xmlns:a16="http://schemas.microsoft.com/office/drawing/2014/main" xmlns="" id="{7D16C196-D24B-4BE0-AE74-D44907B2A1B1}"/>
+                <a16:creationId xmlns="" xmlns:a16="http://schemas.microsoft.com/office/drawing/2014/main" id="{7D16C196-D24B-4BE0-AE74-D44907B2A1B1}"/>
               </a:ext>
             </a:extLst>
           </p:cNvPr>
@@ -10870,7 +10870,7 @@
           <p:cNvPr id="6148" name="灯片编号占位符 3">
             <a:extLst>
               <a:ext uri="{FF2B5EF4-FFF2-40B4-BE49-F238E27FC236}">
-                <a16:creationId xmlns:a16="http://schemas.microsoft.com/office/drawing/2014/main" xmlns="" id="{D230392C-ED50-49C3-93A6-10868BF6DADE}"/>
+                <a16:creationId xmlns="" xmlns:a16="http://schemas.microsoft.com/office/drawing/2014/main" id="{D230392C-ED50-49C3-93A6-10868BF6DADE}"/>
               </a:ext>
             </a:extLst>
           </p:cNvPr>
@@ -11120,7 +11120,7 @@
           <p:cNvPr id="6146" name="幻灯片图像占位符 1">
             <a:extLst>
               <a:ext uri="{FF2B5EF4-FFF2-40B4-BE49-F238E27FC236}">
-                <a16:creationId xmlns:a16="http://schemas.microsoft.com/office/drawing/2014/main" xmlns="" id="{4908B133-C54F-400F-8F70-355C57C0BE11}"/>
+                <a16:creationId xmlns="" xmlns:a16="http://schemas.microsoft.com/office/drawing/2014/main" id="{4908B133-C54F-400F-8F70-355C57C0BE11}"/>
               </a:ext>
             </a:extLst>
           </p:cNvPr>
@@ -11157,7 +11157,7 @@
           <p:cNvPr id="6147" name="备注占位符 2">
             <a:extLst>
               <a:ext uri="{FF2B5EF4-FFF2-40B4-BE49-F238E27FC236}">
-                <a16:creationId xmlns:a16="http://schemas.microsoft.com/office/drawing/2014/main" xmlns="" id="{7D16C196-D24B-4BE0-AE74-D44907B2A1B1}"/>
+                <a16:creationId xmlns="" xmlns:a16="http://schemas.microsoft.com/office/drawing/2014/main" id="{7D16C196-D24B-4BE0-AE74-D44907B2A1B1}"/>
               </a:ext>
             </a:extLst>
           </p:cNvPr>
@@ -11212,7 +11212,7 @@
           <p:cNvPr id="6148" name="灯片编号占位符 3">
             <a:extLst>
               <a:ext uri="{FF2B5EF4-FFF2-40B4-BE49-F238E27FC236}">
-                <a16:creationId xmlns:a16="http://schemas.microsoft.com/office/drawing/2014/main" xmlns="" id="{D230392C-ED50-49C3-93A6-10868BF6DADE}"/>
+                <a16:creationId xmlns="" xmlns:a16="http://schemas.microsoft.com/office/drawing/2014/main" id="{D230392C-ED50-49C3-93A6-10868BF6DADE}"/>
               </a:ext>
             </a:extLst>
           </p:cNvPr>
@@ -11462,7 +11462,7 @@
           <p:cNvPr id="6146" name="幻灯片图像占位符 1">
             <a:extLst>
               <a:ext uri="{FF2B5EF4-FFF2-40B4-BE49-F238E27FC236}">
-                <a16:creationId xmlns:a16="http://schemas.microsoft.com/office/drawing/2014/main" xmlns="" id="{4908B133-C54F-400F-8F70-355C57C0BE11}"/>
+                <a16:creationId xmlns="" xmlns:a16="http://schemas.microsoft.com/office/drawing/2014/main" id="{4908B133-C54F-400F-8F70-355C57C0BE11}"/>
               </a:ext>
             </a:extLst>
           </p:cNvPr>
@@ -11499,7 +11499,7 @@
           <p:cNvPr id="6147" name="备注占位符 2">
             <a:extLst>
               <a:ext uri="{FF2B5EF4-FFF2-40B4-BE49-F238E27FC236}">
-                <a16:creationId xmlns:a16="http://schemas.microsoft.com/office/drawing/2014/main" xmlns="" id="{7D16C196-D24B-4BE0-AE74-D44907B2A1B1}"/>
+                <a16:creationId xmlns="" xmlns:a16="http://schemas.microsoft.com/office/drawing/2014/main" id="{7D16C196-D24B-4BE0-AE74-D44907B2A1B1}"/>
               </a:ext>
             </a:extLst>
           </p:cNvPr>
@@ -11554,7 +11554,7 @@
           <p:cNvPr id="6148" name="灯片编号占位符 3">
             <a:extLst>
               <a:ext uri="{FF2B5EF4-FFF2-40B4-BE49-F238E27FC236}">
-                <a16:creationId xmlns:a16="http://schemas.microsoft.com/office/drawing/2014/main" xmlns="" id="{D230392C-ED50-49C3-93A6-10868BF6DADE}"/>
+                <a16:creationId xmlns="" xmlns:a16="http://schemas.microsoft.com/office/drawing/2014/main" id="{D230392C-ED50-49C3-93A6-10868BF6DADE}"/>
               </a:ext>
             </a:extLst>
           </p:cNvPr>
@@ -11804,7 +11804,7 @@
           <p:cNvPr id="2" name="标题 1">
             <a:extLst>
               <a:ext uri="{FF2B5EF4-FFF2-40B4-BE49-F238E27FC236}">
-                <a16:creationId xmlns:a16="http://schemas.microsoft.com/office/drawing/2014/main" xmlns="" id="{558AFC1F-0EC5-49BF-9268-F0FEE4B60F85}"/>
+                <a16:creationId xmlns="" xmlns:a16="http://schemas.microsoft.com/office/drawing/2014/main" id="{558AFC1F-0EC5-49BF-9268-F0FEE4B60F85}"/>
               </a:ext>
             </a:extLst>
           </p:cNvPr>
@@ -11841,7 +11841,7 @@
           <p:cNvPr id="3" name="副标题 2">
             <a:extLst>
               <a:ext uri="{FF2B5EF4-FFF2-40B4-BE49-F238E27FC236}">
-                <a16:creationId xmlns:a16="http://schemas.microsoft.com/office/drawing/2014/main" xmlns="" id="{411F25FC-AA7A-420B-9A3A-84ECEF4013AF}"/>
+                <a16:creationId xmlns="" xmlns:a16="http://schemas.microsoft.com/office/drawing/2014/main" id="{411F25FC-AA7A-420B-9A3A-84ECEF4013AF}"/>
               </a:ext>
             </a:extLst>
           </p:cNvPr>
@@ -11911,7 +11911,7 @@
           <p:cNvPr id="4" name="Rectangle 4">
             <a:extLst>
               <a:ext uri="{FF2B5EF4-FFF2-40B4-BE49-F238E27FC236}">
-                <a16:creationId xmlns:a16="http://schemas.microsoft.com/office/drawing/2014/main" xmlns="" id="{892DDA44-EBAA-4B0D-B1AD-17FC12E24344}"/>
+                <a16:creationId xmlns="" xmlns:a16="http://schemas.microsoft.com/office/drawing/2014/main" id="{892DDA44-EBAA-4B0D-B1AD-17FC12E24344}"/>
               </a:ext>
             </a:extLst>
           </p:cNvPr>
@@ -11945,7 +11945,7 @@
           <p:cNvPr id="5" name="Rectangle 5">
             <a:extLst>
               <a:ext uri="{FF2B5EF4-FFF2-40B4-BE49-F238E27FC236}">
-                <a16:creationId xmlns:a16="http://schemas.microsoft.com/office/drawing/2014/main" xmlns="" id="{59A68DBD-F8D1-4CAE-ACF1-A66E61D864F9}"/>
+                <a16:creationId xmlns="" xmlns:a16="http://schemas.microsoft.com/office/drawing/2014/main" id="{59A68DBD-F8D1-4CAE-ACF1-A66E61D864F9}"/>
               </a:ext>
             </a:extLst>
           </p:cNvPr>
@@ -11979,7 +11979,7 @@
           <p:cNvPr id="6" name="Rectangle 6">
             <a:extLst>
               <a:ext uri="{FF2B5EF4-FFF2-40B4-BE49-F238E27FC236}">
-                <a16:creationId xmlns:a16="http://schemas.microsoft.com/office/drawing/2014/main" xmlns="" id="{A406CACD-345F-48D9-9536-018A859493C9}"/>
+                <a16:creationId xmlns="" xmlns:a16="http://schemas.microsoft.com/office/drawing/2014/main" id="{A406CACD-345F-48D9-9536-018A859493C9}"/>
               </a:ext>
             </a:extLst>
           </p:cNvPr>
@@ -12050,7 +12050,7 @@
           <p:cNvPr id="2" name="标题 1">
             <a:extLst>
               <a:ext uri="{FF2B5EF4-FFF2-40B4-BE49-F238E27FC236}">
-                <a16:creationId xmlns:a16="http://schemas.microsoft.com/office/drawing/2014/main" xmlns="" id="{413EF4AD-90B9-4E2D-B48C-D5D41ADC00B1}"/>
+                <a16:creationId xmlns="" xmlns:a16="http://schemas.microsoft.com/office/drawing/2014/main" id="{413EF4AD-90B9-4E2D-B48C-D5D41ADC00B1}"/>
               </a:ext>
             </a:extLst>
           </p:cNvPr>
@@ -12078,7 +12078,7 @@
           <p:cNvPr id="3" name="竖排文字占位符 2">
             <a:extLst>
               <a:ext uri="{FF2B5EF4-FFF2-40B4-BE49-F238E27FC236}">
-                <a16:creationId xmlns:a16="http://schemas.microsoft.com/office/drawing/2014/main" xmlns="" id="{2935463B-296C-4D20-B55D-237CE160497F}"/>
+                <a16:creationId xmlns="" xmlns:a16="http://schemas.microsoft.com/office/drawing/2014/main" id="{2935463B-296C-4D20-B55D-237CE160497F}"/>
               </a:ext>
             </a:extLst>
           </p:cNvPr>
@@ -12135,7 +12135,7 @@
           <p:cNvPr id="4" name="Rectangle 4">
             <a:extLst>
               <a:ext uri="{FF2B5EF4-FFF2-40B4-BE49-F238E27FC236}">
-                <a16:creationId xmlns:a16="http://schemas.microsoft.com/office/drawing/2014/main" xmlns="" id="{1572E583-F505-4444-906F-8206A9EE7F1E}"/>
+                <a16:creationId xmlns="" xmlns:a16="http://schemas.microsoft.com/office/drawing/2014/main" id="{1572E583-F505-4444-906F-8206A9EE7F1E}"/>
               </a:ext>
             </a:extLst>
           </p:cNvPr>
@@ -12169,7 +12169,7 @@
           <p:cNvPr id="5" name="Rectangle 5">
             <a:extLst>
               <a:ext uri="{FF2B5EF4-FFF2-40B4-BE49-F238E27FC236}">
-                <a16:creationId xmlns:a16="http://schemas.microsoft.com/office/drawing/2014/main" xmlns="" id="{59D895F1-9DF8-48A9-9C6A-3A7AC93DF390}"/>
+                <a16:creationId xmlns="" xmlns:a16="http://schemas.microsoft.com/office/drawing/2014/main" id="{59D895F1-9DF8-48A9-9C6A-3A7AC93DF390}"/>
               </a:ext>
             </a:extLst>
           </p:cNvPr>
@@ -12203,7 +12203,7 @@
           <p:cNvPr id="6" name="Rectangle 6">
             <a:extLst>
               <a:ext uri="{FF2B5EF4-FFF2-40B4-BE49-F238E27FC236}">
-                <a16:creationId xmlns:a16="http://schemas.microsoft.com/office/drawing/2014/main" xmlns="" id="{291603C0-AEEF-495C-84B8-A97B75DBDA95}"/>
+                <a16:creationId xmlns="" xmlns:a16="http://schemas.microsoft.com/office/drawing/2014/main" id="{291603C0-AEEF-495C-84B8-A97B75DBDA95}"/>
               </a:ext>
             </a:extLst>
           </p:cNvPr>
@@ -12274,7 +12274,7 @@
           <p:cNvPr id="2" name="竖排标题 1">
             <a:extLst>
               <a:ext uri="{FF2B5EF4-FFF2-40B4-BE49-F238E27FC236}">
-                <a16:creationId xmlns:a16="http://schemas.microsoft.com/office/drawing/2014/main" xmlns="" id="{5C3D78EF-5EF5-478D-8576-1606D3C29178}"/>
+                <a16:creationId xmlns="" xmlns:a16="http://schemas.microsoft.com/office/drawing/2014/main" id="{5C3D78EF-5EF5-478D-8576-1606D3C29178}"/>
               </a:ext>
             </a:extLst>
           </p:cNvPr>
@@ -12307,7 +12307,7 @@
           <p:cNvPr id="3" name="竖排文字占位符 2">
             <a:extLst>
               <a:ext uri="{FF2B5EF4-FFF2-40B4-BE49-F238E27FC236}">
-                <a16:creationId xmlns:a16="http://schemas.microsoft.com/office/drawing/2014/main" xmlns="" id="{4DCD9F3D-20DB-4182-AD70-C533BC393EB5}"/>
+                <a16:creationId xmlns="" xmlns:a16="http://schemas.microsoft.com/office/drawing/2014/main" id="{4DCD9F3D-20DB-4182-AD70-C533BC393EB5}"/>
               </a:ext>
             </a:extLst>
           </p:cNvPr>
@@ -12369,7 +12369,7 @@
           <p:cNvPr id="4" name="Rectangle 4">
             <a:extLst>
               <a:ext uri="{FF2B5EF4-FFF2-40B4-BE49-F238E27FC236}">
-                <a16:creationId xmlns:a16="http://schemas.microsoft.com/office/drawing/2014/main" xmlns="" id="{80FCF88E-129A-43F9-90EC-1AB558A2726C}"/>
+                <a16:creationId xmlns="" xmlns:a16="http://schemas.microsoft.com/office/drawing/2014/main" id="{80FCF88E-129A-43F9-90EC-1AB558A2726C}"/>
               </a:ext>
             </a:extLst>
           </p:cNvPr>
@@ -12403,7 +12403,7 @@
           <p:cNvPr id="5" name="Rectangle 5">
             <a:extLst>
               <a:ext uri="{FF2B5EF4-FFF2-40B4-BE49-F238E27FC236}">
-                <a16:creationId xmlns:a16="http://schemas.microsoft.com/office/drawing/2014/main" xmlns="" id="{3124BE14-18C5-46A6-8BD5-794314EF816D}"/>
+                <a16:creationId xmlns="" xmlns:a16="http://schemas.microsoft.com/office/drawing/2014/main" id="{3124BE14-18C5-46A6-8BD5-794314EF816D}"/>
               </a:ext>
             </a:extLst>
           </p:cNvPr>
@@ -12437,7 +12437,7 @@
           <p:cNvPr id="6" name="Rectangle 6">
             <a:extLst>
               <a:ext uri="{FF2B5EF4-FFF2-40B4-BE49-F238E27FC236}">
-                <a16:creationId xmlns:a16="http://schemas.microsoft.com/office/drawing/2014/main" xmlns="" id="{597D6CFD-B5D7-46E4-8617-4E9947427CAF}"/>
+                <a16:creationId xmlns="" xmlns:a16="http://schemas.microsoft.com/office/drawing/2014/main" id="{597D6CFD-B5D7-46E4-8617-4E9947427CAF}"/>
               </a:ext>
             </a:extLst>
           </p:cNvPr>
@@ -12508,7 +12508,7 @@
           <p:cNvPr id="2" name="标题 1">
             <a:extLst>
               <a:ext uri="{FF2B5EF4-FFF2-40B4-BE49-F238E27FC236}">
-                <a16:creationId xmlns:a16="http://schemas.microsoft.com/office/drawing/2014/main" xmlns="" id="{79C7DECC-98E6-4FD9-AAA2-12B4A61F95C6}"/>
+                <a16:creationId xmlns="" xmlns:a16="http://schemas.microsoft.com/office/drawing/2014/main" id="{79C7DECC-98E6-4FD9-AAA2-12B4A61F95C6}"/>
               </a:ext>
             </a:extLst>
           </p:cNvPr>
@@ -12536,7 +12536,7 @@
           <p:cNvPr id="3" name="内容占位符 2">
             <a:extLst>
               <a:ext uri="{FF2B5EF4-FFF2-40B4-BE49-F238E27FC236}">
-                <a16:creationId xmlns:a16="http://schemas.microsoft.com/office/drawing/2014/main" xmlns="" id="{2DFFF49D-5346-4472-B7B4-2B4B12070C2F}"/>
+                <a16:creationId xmlns="" xmlns:a16="http://schemas.microsoft.com/office/drawing/2014/main" id="{2DFFF49D-5346-4472-B7B4-2B4B12070C2F}"/>
               </a:ext>
             </a:extLst>
           </p:cNvPr>
@@ -12593,7 +12593,7 @@
           <p:cNvPr id="4" name="Rectangle 4">
             <a:extLst>
               <a:ext uri="{FF2B5EF4-FFF2-40B4-BE49-F238E27FC236}">
-                <a16:creationId xmlns:a16="http://schemas.microsoft.com/office/drawing/2014/main" xmlns="" id="{3AE54C17-8281-4CEE-80BD-30C4F778807C}"/>
+                <a16:creationId xmlns="" xmlns:a16="http://schemas.microsoft.com/office/drawing/2014/main" id="{3AE54C17-8281-4CEE-80BD-30C4F778807C}"/>
               </a:ext>
             </a:extLst>
           </p:cNvPr>
@@ -12627,7 +12627,7 @@
           <p:cNvPr id="5" name="Rectangle 5">
             <a:extLst>
               <a:ext uri="{FF2B5EF4-FFF2-40B4-BE49-F238E27FC236}">
-                <a16:creationId xmlns:a16="http://schemas.microsoft.com/office/drawing/2014/main" xmlns="" id="{AA5AD5C1-CA4D-49A1-9F23-7E5608819125}"/>
+                <a16:creationId xmlns="" xmlns:a16="http://schemas.microsoft.com/office/drawing/2014/main" id="{AA5AD5C1-CA4D-49A1-9F23-7E5608819125}"/>
               </a:ext>
             </a:extLst>
           </p:cNvPr>
@@ -12661,7 +12661,7 @@
           <p:cNvPr id="6" name="Rectangle 6">
             <a:extLst>
               <a:ext uri="{FF2B5EF4-FFF2-40B4-BE49-F238E27FC236}">
-                <a16:creationId xmlns:a16="http://schemas.microsoft.com/office/drawing/2014/main" xmlns="" id="{89EA5E6E-1878-4876-87FC-34CF0D7DC10A}"/>
+                <a16:creationId xmlns="" xmlns:a16="http://schemas.microsoft.com/office/drawing/2014/main" id="{89EA5E6E-1878-4876-87FC-34CF0D7DC10A}"/>
               </a:ext>
             </a:extLst>
           </p:cNvPr>
@@ -12747,7 +12747,7 @@
           <p:cNvPr id="2" name="标题 1">
             <a:extLst>
               <a:ext uri="{FF2B5EF4-FFF2-40B4-BE49-F238E27FC236}">
-                <a16:creationId xmlns:a16="http://schemas.microsoft.com/office/drawing/2014/main" xmlns="" id="{D1C66AC4-7745-487C-B77E-D7209402F8D3}"/>
+                <a16:creationId xmlns="" xmlns:a16="http://schemas.microsoft.com/office/drawing/2014/main" id="{D1C66AC4-7745-487C-B77E-D7209402F8D3}"/>
               </a:ext>
             </a:extLst>
           </p:cNvPr>
@@ -12784,7 +12784,7 @@
           <p:cNvPr id="3" name="文本占位符 2">
             <a:extLst>
               <a:ext uri="{FF2B5EF4-FFF2-40B4-BE49-F238E27FC236}">
-                <a16:creationId xmlns:a16="http://schemas.microsoft.com/office/drawing/2014/main" xmlns="" id="{F0642504-C3D3-4FEB-932D-43E152422788}"/>
+                <a16:creationId xmlns="" xmlns:a16="http://schemas.microsoft.com/office/drawing/2014/main" id="{F0642504-C3D3-4FEB-932D-43E152422788}"/>
               </a:ext>
             </a:extLst>
           </p:cNvPr>
@@ -12855,7 +12855,7 @@
           <p:cNvPr id="4" name="Rectangle 4">
             <a:extLst>
               <a:ext uri="{FF2B5EF4-FFF2-40B4-BE49-F238E27FC236}">
-                <a16:creationId xmlns:a16="http://schemas.microsoft.com/office/drawing/2014/main" xmlns="" id="{1FDDD93F-F324-4F9A-B9D4-6849A4C3DA30}"/>
+                <a16:creationId xmlns="" xmlns:a16="http://schemas.microsoft.com/office/drawing/2014/main" id="{1FDDD93F-F324-4F9A-B9D4-6849A4C3DA30}"/>
               </a:ext>
             </a:extLst>
           </p:cNvPr>
@@ -12889,7 +12889,7 @@
           <p:cNvPr id="5" name="Rectangle 5">
             <a:extLst>
               <a:ext uri="{FF2B5EF4-FFF2-40B4-BE49-F238E27FC236}">
-                <a16:creationId xmlns:a16="http://schemas.microsoft.com/office/drawing/2014/main" xmlns="" id="{58D17B65-E136-4CDA-8948-06EE82F4BCF9}"/>
+                <a16:creationId xmlns="" xmlns:a16="http://schemas.microsoft.com/office/drawing/2014/main" id="{58D17B65-E136-4CDA-8948-06EE82F4BCF9}"/>
               </a:ext>
             </a:extLst>
           </p:cNvPr>
@@ -12923,7 +12923,7 @@
           <p:cNvPr id="6" name="Rectangle 6">
             <a:extLst>
               <a:ext uri="{FF2B5EF4-FFF2-40B4-BE49-F238E27FC236}">
-                <a16:creationId xmlns:a16="http://schemas.microsoft.com/office/drawing/2014/main" xmlns="" id="{D7125560-B1D6-4FEA-8C81-81F49D4763C4}"/>
+                <a16:creationId xmlns="" xmlns:a16="http://schemas.microsoft.com/office/drawing/2014/main" id="{D7125560-B1D6-4FEA-8C81-81F49D4763C4}"/>
               </a:ext>
             </a:extLst>
           </p:cNvPr>
@@ -12994,7 +12994,7 @@
           <p:cNvPr id="2" name="标题 1">
             <a:extLst>
               <a:ext uri="{FF2B5EF4-FFF2-40B4-BE49-F238E27FC236}">
-                <a16:creationId xmlns:a16="http://schemas.microsoft.com/office/drawing/2014/main" xmlns="" id="{235DD831-5C92-41D8-B2A4-F735B961D24C}"/>
+                <a16:creationId xmlns="" xmlns:a16="http://schemas.microsoft.com/office/drawing/2014/main" id="{235DD831-5C92-41D8-B2A4-F735B961D24C}"/>
               </a:ext>
             </a:extLst>
           </p:cNvPr>
@@ -13022,7 +13022,7 @@
           <p:cNvPr id="3" name="内容占位符 2">
             <a:extLst>
               <a:ext uri="{FF2B5EF4-FFF2-40B4-BE49-F238E27FC236}">
-                <a16:creationId xmlns:a16="http://schemas.microsoft.com/office/drawing/2014/main" xmlns="" id="{40589EF3-2B1D-4F74-90F9-1600D88D274F}"/>
+                <a16:creationId xmlns="" xmlns:a16="http://schemas.microsoft.com/office/drawing/2014/main" id="{40589EF3-2B1D-4F74-90F9-1600D88D274F}"/>
               </a:ext>
             </a:extLst>
           </p:cNvPr>
@@ -13084,7 +13084,7 @@
           <p:cNvPr id="4" name="内容占位符 3">
             <a:extLst>
               <a:ext uri="{FF2B5EF4-FFF2-40B4-BE49-F238E27FC236}">
-                <a16:creationId xmlns:a16="http://schemas.microsoft.com/office/drawing/2014/main" xmlns="" id="{31894757-41E5-4DC3-B486-BF0D8D2E3B3C}"/>
+                <a16:creationId xmlns="" xmlns:a16="http://schemas.microsoft.com/office/drawing/2014/main" id="{31894757-41E5-4DC3-B486-BF0D8D2E3B3C}"/>
               </a:ext>
             </a:extLst>
           </p:cNvPr>
@@ -13146,7 +13146,7 @@
           <p:cNvPr id="5" name="Rectangle 4">
             <a:extLst>
               <a:ext uri="{FF2B5EF4-FFF2-40B4-BE49-F238E27FC236}">
-                <a16:creationId xmlns:a16="http://schemas.microsoft.com/office/drawing/2014/main" xmlns="" id="{80B46424-4DF5-42C6-BA6D-7A5F0843E639}"/>
+                <a16:creationId xmlns="" xmlns:a16="http://schemas.microsoft.com/office/drawing/2014/main" id="{80B46424-4DF5-42C6-BA6D-7A5F0843E639}"/>
               </a:ext>
             </a:extLst>
           </p:cNvPr>
@@ -13180,7 +13180,7 @@
           <p:cNvPr id="6" name="Rectangle 5">
             <a:extLst>
               <a:ext uri="{FF2B5EF4-FFF2-40B4-BE49-F238E27FC236}">
-                <a16:creationId xmlns:a16="http://schemas.microsoft.com/office/drawing/2014/main" xmlns="" id="{54C6D9C2-78B1-4830-B70B-68D245CB3988}"/>
+                <a16:creationId xmlns="" xmlns:a16="http://schemas.microsoft.com/office/drawing/2014/main" id="{54C6D9C2-78B1-4830-B70B-68D245CB3988}"/>
               </a:ext>
             </a:extLst>
           </p:cNvPr>
@@ -13214,7 +13214,7 @@
           <p:cNvPr id="7" name="Rectangle 6">
             <a:extLst>
               <a:ext uri="{FF2B5EF4-FFF2-40B4-BE49-F238E27FC236}">
-                <a16:creationId xmlns:a16="http://schemas.microsoft.com/office/drawing/2014/main" xmlns="" id="{7C8F0C60-8AC6-4F0E-B049-CFBBD780349C}"/>
+                <a16:creationId xmlns="" xmlns:a16="http://schemas.microsoft.com/office/drawing/2014/main" id="{7C8F0C60-8AC6-4F0E-B049-CFBBD780349C}"/>
               </a:ext>
             </a:extLst>
           </p:cNvPr>
@@ -13285,7 +13285,7 @@
           <p:cNvPr id="2" name="标题 1">
             <a:extLst>
               <a:ext uri="{FF2B5EF4-FFF2-40B4-BE49-F238E27FC236}">
-                <a16:creationId xmlns:a16="http://schemas.microsoft.com/office/drawing/2014/main" xmlns="" id="{5EAC2349-C79E-4DAD-A7EC-F121B92EABC6}"/>
+                <a16:creationId xmlns="" xmlns:a16="http://schemas.microsoft.com/office/drawing/2014/main" id="{5EAC2349-C79E-4DAD-A7EC-F121B92EABC6}"/>
               </a:ext>
             </a:extLst>
           </p:cNvPr>
@@ -13318,7 +13318,7 @@
           <p:cNvPr id="3" name="文本占位符 2">
             <a:extLst>
               <a:ext uri="{FF2B5EF4-FFF2-40B4-BE49-F238E27FC236}">
-                <a16:creationId xmlns:a16="http://schemas.microsoft.com/office/drawing/2014/main" xmlns="" id="{6577C8D4-D6FA-4BC8-982E-A569EF349637}"/>
+                <a16:creationId xmlns="" xmlns:a16="http://schemas.microsoft.com/office/drawing/2014/main" id="{6577C8D4-D6FA-4BC8-982E-A569EF349637}"/>
               </a:ext>
             </a:extLst>
           </p:cNvPr>
@@ -13389,7 +13389,7 @@
           <p:cNvPr id="4" name="内容占位符 3">
             <a:extLst>
               <a:ext uri="{FF2B5EF4-FFF2-40B4-BE49-F238E27FC236}">
-                <a16:creationId xmlns:a16="http://schemas.microsoft.com/office/drawing/2014/main" xmlns="" id="{2C1BD52F-78B6-4701-9C21-05A4842E2948}"/>
+                <a16:creationId xmlns="" xmlns:a16="http://schemas.microsoft.com/office/drawing/2014/main" id="{2C1BD52F-78B6-4701-9C21-05A4842E2948}"/>
               </a:ext>
             </a:extLst>
           </p:cNvPr>
@@ -13451,7 +13451,7 @@
           <p:cNvPr id="5" name="文本占位符 4">
             <a:extLst>
               <a:ext uri="{FF2B5EF4-FFF2-40B4-BE49-F238E27FC236}">
-                <a16:creationId xmlns:a16="http://schemas.microsoft.com/office/drawing/2014/main" xmlns="" id="{41B5E117-E18D-486E-BBF0-E55E36688CE9}"/>
+                <a16:creationId xmlns="" xmlns:a16="http://schemas.microsoft.com/office/drawing/2014/main" id="{41B5E117-E18D-486E-BBF0-E55E36688CE9}"/>
               </a:ext>
             </a:extLst>
           </p:cNvPr>
@@ -13522,7 +13522,7 @@
           <p:cNvPr id="6" name="内容占位符 5">
             <a:extLst>
               <a:ext uri="{FF2B5EF4-FFF2-40B4-BE49-F238E27FC236}">
-                <a16:creationId xmlns:a16="http://schemas.microsoft.com/office/drawing/2014/main" xmlns="" id="{1A6184B9-916F-4A62-BB58-A9E1721165AE}"/>
+                <a16:creationId xmlns="" xmlns:a16="http://schemas.microsoft.com/office/drawing/2014/main" id="{1A6184B9-916F-4A62-BB58-A9E1721165AE}"/>
               </a:ext>
             </a:extLst>
           </p:cNvPr>
@@ -13584,7 +13584,7 @@
           <p:cNvPr id="7" name="Rectangle 4">
             <a:extLst>
               <a:ext uri="{FF2B5EF4-FFF2-40B4-BE49-F238E27FC236}">
-                <a16:creationId xmlns:a16="http://schemas.microsoft.com/office/drawing/2014/main" xmlns="" id="{9BDEFA24-1BB9-4A63-BE04-B2CD6F8BC7CD}"/>
+                <a16:creationId xmlns="" xmlns:a16="http://schemas.microsoft.com/office/drawing/2014/main" id="{9BDEFA24-1BB9-4A63-BE04-B2CD6F8BC7CD}"/>
               </a:ext>
             </a:extLst>
           </p:cNvPr>
@@ -13618,7 +13618,7 @@
           <p:cNvPr id="8" name="Rectangle 5">
             <a:extLst>
               <a:ext uri="{FF2B5EF4-FFF2-40B4-BE49-F238E27FC236}">
-                <a16:creationId xmlns:a16="http://schemas.microsoft.com/office/drawing/2014/main" xmlns="" id="{291227B2-68B3-4699-A416-5C0E6B364CA1}"/>
+                <a16:creationId xmlns="" xmlns:a16="http://schemas.microsoft.com/office/drawing/2014/main" id="{291227B2-68B3-4699-A416-5C0E6B364CA1}"/>
               </a:ext>
             </a:extLst>
           </p:cNvPr>
@@ -13652,7 +13652,7 @@
           <p:cNvPr id="9" name="Rectangle 6">
             <a:extLst>
               <a:ext uri="{FF2B5EF4-FFF2-40B4-BE49-F238E27FC236}">
-                <a16:creationId xmlns:a16="http://schemas.microsoft.com/office/drawing/2014/main" xmlns="" id="{DEC7A77C-9158-4F27-8F28-4C65512DA59A}"/>
+                <a16:creationId xmlns="" xmlns:a16="http://schemas.microsoft.com/office/drawing/2014/main" id="{DEC7A77C-9158-4F27-8F28-4C65512DA59A}"/>
               </a:ext>
             </a:extLst>
           </p:cNvPr>
@@ -13723,7 +13723,7 @@
           <p:cNvPr id="2" name="标题 1">
             <a:extLst>
               <a:ext uri="{FF2B5EF4-FFF2-40B4-BE49-F238E27FC236}">
-                <a16:creationId xmlns:a16="http://schemas.microsoft.com/office/drawing/2014/main" xmlns="" id="{2BC76C51-0028-4F2D-A216-4D11F5334867}"/>
+                <a16:creationId xmlns="" xmlns:a16="http://schemas.microsoft.com/office/drawing/2014/main" id="{2BC76C51-0028-4F2D-A216-4D11F5334867}"/>
               </a:ext>
             </a:extLst>
           </p:cNvPr>
@@ -13751,7 +13751,7 @@
           <p:cNvPr id="3" name="Rectangle 4">
             <a:extLst>
               <a:ext uri="{FF2B5EF4-FFF2-40B4-BE49-F238E27FC236}">
-                <a16:creationId xmlns:a16="http://schemas.microsoft.com/office/drawing/2014/main" xmlns="" id="{91CC3BF1-A404-4E2C-8AA3-99428C6F6DD8}"/>
+                <a16:creationId xmlns="" xmlns:a16="http://schemas.microsoft.com/office/drawing/2014/main" id="{91CC3BF1-A404-4E2C-8AA3-99428C6F6DD8}"/>
               </a:ext>
             </a:extLst>
           </p:cNvPr>
@@ -13785,7 +13785,7 @@
           <p:cNvPr id="4" name="Rectangle 5">
             <a:extLst>
               <a:ext uri="{FF2B5EF4-FFF2-40B4-BE49-F238E27FC236}">
-                <a16:creationId xmlns:a16="http://schemas.microsoft.com/office/drawing/2014/main" xmlns="" id="{B7D80654-FEB6-4772-9441-0475550AB2E7}"/>
+                <a16:creationId xmlns="" xmlns:a16="http://schemas.microsoft.com/office/drawing/2014/main" id="{B7D80654-FEB6-4772-9441-0475550AB2E7}"/>
               </a:ext>
             </a:extLst>
           </p:cNvPr>
@@ -13819,7 +13819,7 @@
           <p:cNvPr id="5" name="Rectangle 6">
             <a:extLst>
               <a:ext uri="{FF2B5EF4-FFF2-40B4-BE49-F238E27FC236}">
-                <a16:creationId xmlns:a16="http://schemas.microsoft.com/office/drawing/2014/main" xmlns="" id="{968FB6E6-FDEC-4041-BA77-FFA3A3FA254C}"/>
+                <a16:creationId xmlns="" xmlns:a16="http://schemas.microsoft.com/office/drawing/2014/main" id="{968FB6E6-FDEC-4041-BA77-FFA3A3FA254C}"/>
               </a:ext>
             </a:extLst>
           </p:cNvPr>
@@ -13890,7 +13890,7 @@
           <p:cNvPr id="2" name="Rectangle 4">
             <a:extLst>
               <a:ext uri="{FF2B5EF4-FFF2-40B4-BE49-F238E27FC236}">
-                <a16:creationId xmlns:a16="http://schemas.microsoft.com/office/drawing/2014/main" xmlns="" id="{6DC56CB5-95F7-41B4-8677-E12EBE1FBD59}"/>
+                <a16:creationId xmlns="" xmlns:a16="http://schemas.microsoft.com/office/drawing/2014/main" id="{6DC56CB5-95F7-41B4-8677-E12EBE1FBD59}"/>
               </a:ext>
             </a:extLst>
           </p:cNvPr>
@@ -13924,7 +13924,7 @@
           <p:cNvPr id="3" name="Rectangle 5">
             <a:extLst>
               <a:ext uri="{FF2B5EF4-FFF2-40B4-BE49-F238E27FC236}">
-                <a16:creationId xmlns:a16="http://schemas.microsoft.com/office/drawing/2014/main" xmlns="" id="{B7F0A7C5-5870-4D46-AA35-704A0D3C8668}"/>
+                <a16:creationId xmlns="" xmlns:a16="http://schemas.microsoft.com/office/drawing/2014/main" id="{B7F0A7C5-5870-4D46-AA35-704A0D3C8668}"/>
               </a:ext>
             </a:extLst>
           </p:cNvPr>
@@ -13958,7 +13958,7 @@
           <p:cNvPr id="4" name="Rectangle 6">
             <a:extLst>
               <a:ext uri="{FF2B5EF4-FFF2-40B4-BE49-F238E27FC236}">
-                <a16:creationId xmlns:a16="http://schemas.microsoft.com/office/drawing/2014/main" xmlns="" id="{11F62A78-2485-4514-AD6F-798D74A4E024}"/>
+                <a16:creationId xmlns="" xmlns:a16="http://schemas.microsoft.com/office/drawing/2014/main" id="{11F62A78-2485-4514-AD6F-798D74A4E024}"/>
               </a:ext>
             </a:extLst>
           </p:cNvPr>
@@ -14029,7 +14029,7 @@
           <p:cNvPr id="2" name="标题 1">
             <a:extLst>
               <a:ext uri="{FF2B5EF4-FFF2-40B4-BE49-F238E27FC236}">
-                <a16:creationId xmlns:a16="http://schemas.microsoft.com/office/drawing/2014/main" xmlns="" id="{0BD92CCA-0140-4241-AF84-A0DFC0FC9C4C}"/>
+                <a16:creationId xmlns="" xmlns:a16="http://schemas.microsoft.com/office/drawing/2014/main" id="{0BD92CCA-0140-4241-AF84-A0DFC0FC9C4C}"/>
               </a:ext>
             </a:extLst>
           </p:cNvPr>
@@ -14066,7 +14066,7 @@
           <p:cNvPr id="3" name="内容占位符 2">
             <a:extLst>
               <a:ext uri="{FF2B5EF4-FFF2-40B4-BE49-F238E27FC236}">
-                <a16:creationId xmlns:a16="http://schemas.microsoft.com/office/drawing/2014/main" xmlns="" id="{B149F413-03E0-42C8-96F2-A26C380EC64D}"/>
+                <a16:creationId xmlns="" xmlns:a16="http://schemas.microsoft.com/office/drawing/2014/main" id="{B149F413-03E0-42C8-96F2-A26C380EC64D}"/>
               </a:ext>
             </a:extLst>
           </p:cNvPr>
@@ -14156,7 +14156,7 @@
           <p:cNvPr id="4" name="文本占位符 3">
             <a:extLst>
               <a:ext uri="{FF2B5EF4-FFF2-40B4-BE49-F238E27FC236}">
-                <a16:creationId xmlns:a16="http://schemas.microsoft.com/office/drawing/2014/main" xmlns="" id="{80CED1CF-0137-4B94-B04B-8FDCB7C8B161}"/>
+                <a16:creationId xmlns="" xmlns:a16="http://schemas.microsoft.com/office/drawing/2014/main" id="{80CED1CF-0137-4B94-B04B-8FDCB7C8B161}"/>
               </a:ext>
             </a:extLst>
           </p:cNvPr>
@@ -14227,7 +14227,7 @@
           <p:cNvPr id="5" name="Rectangle 4">
             <a:extLst>
               <a:ext uri="{FF2B5EF4-FFF2-40B4-BE49-F238E27FC236}">
-                <a16:creationId xmlns:a16="http://schemas.microsoft.com/office/drawing/2014/main" xmlns="" id="{83A028F8-90C5-4894-9D68-1F454A6818EB}"/>
+                <a16:creationId xmlns="" xmlns:a16="http://schemas.microsoft.com/office/drawing/2014/main" id="{83A028F8-90C5-4894-9D68-1F454A6818EB}"/>
               </a:ext>
             </a:extLst>
           </p:cNvPr>
@@ -14261,7 +14261,7 @@
           <p:cNvPr id="6" name="Rectangle 5">
             <a:extLst>
               <a:ext uri="{FF2B5EF4-FFF2-40B4-BE49-F238E27FC236}">
-                <a16:creationId xmlns:a16="http://schemas.microsoft.com/office/drawing/2014/main" xmlns="" id="{4B6B0556-8025-49EB-A9D8-E82F10331C3C}"/>
+                <a16:creationId xmlns="" xmlns:a16="http://schemas.microsoft.com/office/drawing/2014/main" id="{4B6B0556-8025-49EB-A9D8-E82F10331C3C}"/>
               </a:ext>
             </a:extLst>
           </p:cNvPr>
@@ -14295,7 +14295,7 @@
           <p:cNvPr id="7" name="Rectangle 6">
             <a:extLst>
               <a:ext uri="{FF2B5EF4-FFF2-40B4-BE49-F238E27FC236}">
-                <a16:creationId xmlns:a16="http://schemas.microsoft.com/office/drawing/2014/main" xmlns="" id="{327CC8F1-4BD0-4FEC-AECB-DEAE8BCBA203}"/>
+                <a16:creationId xmlns="" xmlns:a16="http://schemas.microsoft.com/office/drawing/2014/main" id="{327CC8F1-4BD0-4FEC-AECB-DEAE8BCBA203}"/>
               </a:ext>
             </a:extLst>
           </p:cNvPr>
@@ -14366,7 +14366,7 @@
           <p:cNvPr id="2" name="标题 1">
             <a:extLst>
               <a:ext uri="{FF2B5EF4-FFF2-40B4-BE49-F238E27FC236}">
-                <a16:creationId xmlns:a16="http://schemas.microsoft.com/office/drawing/2014/main" xmlns="" id="{71EFFC16-3EB0-4FBB-96E7-A6D46DBE0860}"/>
+                <a16:creationId xmlns="" xmlns:a16="http://schemas.microsoft.com/office/drawing/2014/main" id="{71EFFC16-3EB0-4FBB-96E7-A6D46DBE0860}"/>
               </a:ext>
             </a:extLst>
           </p:cNvPr>
@@ -14403,7 +14403,7 @@
           <p:cNvPr id="3" name="图片占位符 2">
             <a:extLst>
               <a:ext uri="{FF2B5EF4-FFF2-40B4-BE49-F238E27FC236}">
-                <a16:creationId xmlns:a16="http://schemas.microsoft.com/office/drawing/2014/main" xmlns="" id="{5B422F93-2D7C-4C8D-98F2-E969A8987B29}"/>
+                <a16:creationId xmlns="" xmlns:a16="http://schemas.microsoft.com/office/drawing/2014/main" id="{5B422F93-2D7C-4C8D-98F2-E969A8987B29}"/>
               </a:ext>
             </a:extLst>
           </p:cNvPr>
@@ -14471,7 +14471,7 @@
           <p:cNvPr id="4" name="文本占位符 3">
             <a:extLst>
               <a:ext uri="{FF2B5EF4-FFF2-40B4-BE49-F238E27FC236}">
-                <a16:creationId xmlns:a16="http://schemas.microsoft.com/office/drawing/2014/main" xmlns="" id="{C6BF88C8-E1D1-4529-AA38-9722474E4E30}"/>
+                <a16:creationId xmlns="" xmlns:a16="http://schemas.microsoft.com/office/drawing/2014/main" id="{C6BF88C8-E1D1-4529-AA38-9722474E4E30}"/>
               </a:ext>
             </a:extLst>
           </p:cNvPr>
@@ -14542,7 +14542,7 @@
           <p:cNvPr id="5" name="Rectangle 4">
             <a:extLst>
               <a:ext uri="{FF2B5EF4-FFF2-40B4-BE49-F238E27FC236}">
-                <a16:creationId xmlns:a16="http://schemas.microsoft.com/office/drawing/2014/main" xmlns="" id="{8A92ADD1-D1E1-4FA7-89F9-EAC168EC5F5E}"/>
+                <a16:creationId xmlns="" xmlns:a16="http://schemas.microsoft.com/office/drawing/2014/main" id="{8A92ADD1-D1E1-4FA7-89F9-EAC168EC5F5E}"/>
               </a:ext>
             </a:extLst>
           </p:cNvPr>
@@ -14576,7 +14576,7 @@
           <p:cNvPr id="6" name="Rectangle 5">
             <a:extLst>
               <a:ext uri="{FF2B5EF4-FFF2-40B4-BE49-F238E27FC236}">
-                <a16:creationId xmlns:a16="http://schemas.microsoft.com/office/drawing/2014/main" xmlns="" id="{8AC2AA6A-2DDF-4129-A813-17A48D5D6578}"/>
+                <a16:creationId xmlns="" xmlns:a16="http://schemas.microsoft.com/office/drawing/2014/main" id="{8AC2AA6A-2DDF-4129-A813-17A48D5D6578}"/>
               </a:ext>
             </a:extLst>
           </p:cNvPr>
@@ -14610,7 +14610,7 @@
           <p:cNvPr id="7" name="Rectangle 6">
             <a:extLst>
               <a:ext uri="{FF2B5EF4-FFF2-40B4-BE49-F238E27FC236}">
-                <a16:creationId xmlns:a16="http://schemas.microsoft.com/office/drawing/2014/main" xmlns="" id="{AFAB14F8-8064-48F6-8B6D-749183531730}"/>
+                <a16:creationId xmlns="" xmlns:a16="http://schemas.microsoft.com/office/drawing/2014/main" id="{AFAB14F8-8064-48F6-8B6D-749183531730}"/>
               </a:ext>
             </a:extLst>
           </p:cNvPr>
@@ -14693,7 +14693,7 @@
           <p:cNvPr id="1026" name="Rectangle 2">
             <a:extLst>
               <a:ext uri="{FF2B5EF4-FFF2-40B4-BE49-F238E27FC236}">
-                <a16:creationId xmlns:a16="http://schemas.microsoft.com/office/drawing/2014/main" xmlns="" id="{80EF2504-E3EA-4812-BCE9-548B5A526130}"/>
+                <a16:creationId xmlns="" xmlns:a16="http://schemas.microsoft.com/office/drawing/2014/main" id="{80EF2504-E3EA-4812-BCE9-548B5A526130}"/>
               </a:ext>
             </a:extLst>
           </p:cNvPr>
@@ -14767,7 +14767,7 @@
           <p:cNvPr id="1027" name="Rectangle 3">
             <a:extLst>
               <a:ext uri="{FF2B5EF4-FFF2-40B4-BE49-F238E27FC236}">
-                <a16:creationId xmlns:a16="http://schemas.microsoft.com/office/drawing/2014/main" xmlns="" id="{7E888592-4D67-4FDC-8ACC-8DD192CAF425}"/>
+                <a16:creationId xmlns="" xmlns:a16="http://schemas.microsoft.com/office/drawing/2014/main" id="{7E888592-4D67-4FDC-8ACC-8DD192CAF425}"/>
               </a:ext>
             </a:extLst>
           </p:cNvPr>
@@ -14869,7 +14869,7 @@
           <p:cNvPr id="1028" name="Rectangle 4">
             <a:extLst>
               <a:ext uri="{FF2B5EF4-FFF2-40B4-BE49-F238E27FC236}">
-                <a16:creationId xmlns:a16="http://schemas.microsoft.com/office/drawing/2014/main" xmlns="" id="{40A3712E-94B2-46ED-881D-E1249EF279C0}"/>
+                <a16:creationId xmlns="" xmlns:a16="http://schemas.microsoft.com/office/drawing/2014/main" id="{40A3712E-94B2-46ED-881D-E1249EF279C0}"/>
               </a:ext>
             </a:extLst>
           </p:cNvPr>
@@ -14946,7 +14946,7 @@
           <p:cNvPr id="1029" name="Rectangle 5">
             <a:extLst>
               <a:ext uri="{FF2B5EF4-FFF2-40B4-BE49-F238E27FC236}">
-                <a16:creationId xmlns:a16="http://schemas.microsoft.com/office/drawing/2014/main" xmlns="" id="{26116D60-C064-41BB-B932-09348EA6EB7D}"/>
+                <a16:creationId xmlns="" xmlns:a16="http://schemas.microsoft.com/office/drawing/2014/main" id="{26116D60-C064-41BB-B932-09348EA6EB7D}"/>
               </a:ext>
             </a:extLst>
           </p:cNvPr>
@@ -15023,7 +15023,7 @@
           <p:cNvPr id="1030" name="Rectangle 6">
             <a:extLst>
               <a:ext uri="{FF2B5EF4-FFF2-40B4-BE49-F238E27FC236}">
-                <a16:creationId xmlns:a16="http://schemas.microsoft.com/office/drawing/2014/main" xmlns="" id="{4E6E49BE-DB26-4C77-94F7-5228E224DF48}"/>
+                <a16:creationId xmlns="" xmlns:a16="http://schemas.microsoft.com/office/drawing/2014/main" id="{4E6E49BE-DB26-4C77-94F7-5228E224DF48}"/>
               </a:ext>
             </a:extLst>
           </p:cNvPr>
@@ -15610,7 +15610,7 @@
           <p:cNvPr id="5122" name="标题 1">
             <a:extLst>
               <a:ext uri="{FF2B5EF4-FFF2-40B4-BE49-F238E27FC236}">
-                <a16:creationId xmlns:a16="http://schemas.microsoft.com/office/drawing/2014/main" xmlns="" id="{A237414D-C4E1-407F-9B0D-585D2D878A74}"/>
+                <a16:creationId xmlns="" xmlns:a16="http://schemas.microsoft.com/office/drawing/2014/main" id="{A237414D-C4E1-407F-9B0D-585D2D878A74}"/>
               </a:ext>
             </a:extLst>
           </p:cNvPr>
@@ -15684,7 +15684,7 @@
           <p:cNvPr id="3" name="内容占位符 2">
             <a:extLst>
               <a:ext uri="{FF2B5EF4-FFF2-40B4-BE49-F238E27FC236}">
-                <a16:creationId xmlns:a16="http://schemas.microsoft.com/office/drawing/2014/main" xmlns="" id="{3DFD56C3-3B63-4F4C-A455-80D220434928}"/>
+                <a16:creationId xmlns="" xmlns:a16="http://schemas.microsoft.com/office/drawing/2014/main" id="{3DFD56C3-3B63-4F4C-A455-80D220434928}"/>
               </a:ext>
             </a:extLst>
           </p:cNvPr>
@@ -15839,14 +15839,7 @@
                 <a:latin typeface="Times New Roman" panose="02020603050405020304" pitchFamily="18" charset="0"/>
                 <a:cs typeface="Times New Roman" panose="02020603050405020304" pitchFamily="18" charset="0"/>
               </a:rPr>
-              <a:t>TPDS’16 </a:t>
-            </a:r>
-            <a:r>
-              <a:rPr lang="en-US" altLang="zh-CN" sz="2400" b="1" dirty="0" smtClean="0">
-                <a:latin typeface="Times New Roman" panose="02020603050405020304" pitchFamily="18" charset="0"/>
-                <a:cs typeface="Times New Roman" panose="02020603050405020304" pitchFamily="18" charset="0"/>
-              </a:rPr>
-              <a:t>CCF A</a:t>
+              <a:t>TPDS’16 CCF A</a:t>
             </a:r>
             <a:r>
               <a:rPr lang="en-US" altLang="zh-CN" sz="2400" dirty="0" smtClean="0">
@@ -15867,7 +15860,7 @@
           <p:cNvPr id="4" name="内容占位符 2">
             <a:extLst>
               <a:ext uri="{FF2B5EF4-FFF2-40B4-BE49-F238E27FC236}">
-                <a16:creationId xmlns:a16="http://schemas.microsoft.com/office/drawing/2014/main" xmlns="" id="{3DFD56C3-3B63-4F4C-A455-80D220434928}"/>
+                <a16:creationId xmlns="" xmlns:a16="http://schemas.microsoft.com/office/drawing/2014/main" id="{3DFD56C3-3B63-4F4C-A455-80D220434928}"/>
               </a:ext>
             </a:extLst>
           </p:cNvPr>
@@ -16111,15 +16104,7 @@
                 <a:ea typeface="Arial Unicode MS" panose="020B0604020202020204" pitchFamily="34" charset="-122"/>
                 <a:cs typeface="Times New Roman" panose="02020603050405020304" pitchFamily="18" charset="0"/>
               </a:rPr>
-              <a:t>Junpeng </a:t>
-            </a:r>
-            <a:r>
-              <a:rPr lang="en-US" altLang="zh-CN" sz="2400" dirty="0" smtClean="0">
-                <a:latin typeface="Times New Roman" panose="02020603050405020304" pitchFamily="18" charset="0"/>
-                <a:ea typeface="Arial Unicode MS" panose="020B0604020202020204" pitchFamily="34" charset="-122"/>
-                <a:cs typeface="Times New Roman" panose="02020603050405020304" pitchFamily="18" charset="0"/>
-              </a:rPr>
-              <a:t>Zhu    </a:t>
+              <a:t>Junpeng Zhu    </a:t>
             </a:r>
             <a:r>
               <a:rPr lang="zh-CN" altLang="en-US" sz="2400" b="1" dirty="0" smtClean="0">
@@ -16244,7 +16229,7 @@
           <p:cNvPr id="5122" name="标题 1">
             <a:extLst>
               <a:ext uri="{FF2B5EF4-FFF2-40B4-BE49-F238E27FC236}">
-                <a16:creationId xmlns:a16="http://schemas.microsoft.com/office/drawing/2014/main" xmlns="" id="{A237414D-C4E1-407F-9B0D-585D2D878A74}"/>
+                <a16:creationId xmlns="" xmlns:a16="http://schemas.microsoft.com/office/drawing/2014/main" id="{A237414D-C4E1-407F-9B0D-585D2D878A74}"/>
               </a:ext>
             </a:extLst>
           </p:cNvPr>
@@ -16284,7 +16269,7 @@
           <p:cNvPr id="3" name="内容占位符 2">
             <a:extLst>
               <a:ext uri="{FF2B5EF4-FFF2-40B4-BE49-F238E27FC236}">
-                <a16:creationId xmlns:a16="http://schemas.microsoft.com/office/drawing/2014/main" xmlns="" id="{3DFD56C3-3B63-4F4C-A455-80D220434928}"/>
+                <a16:creationId xmlns="" xmlns:a16="http://schemas.microsoft.com/office/drawing/2014/main" id="{3DFD56C3-3B63-4F4C-A455-80D220434928}"/>
               </a:ext>
             </a:extLst>
           </p:cNvPr>
@@ -16706,7 +16691,7 @@
           <p:cNvPr id="5122" name="标题 1">
             <a:extLst>
               <a:ext uri="{FF2B5EF4-FFF2-40B4-BE49-F238E27FC236}">
-                <a16:creationId xmlns:a16="http://schemas.microsoft.com/office/drawing/2014/main" xmlns="" id="{A237414D-C4E1-407F-9B0D-585D2D878A74}"/>
+                <a16:creationId xmlns="" xmlns:a16="http://schemas.microsoft.com/office/drawing/2014/main" id="{A237414D-C4E1-407F-9B0D-585D2D878A74}"/>
               </a:ext>
             </a:extLst>
           </p:cNvPr>
@@ -16746,7 +16731,7 @@
           <p:cNvPr id="3" name="内容占位符 2">
             <a:extLst>
               <a:ext uri="{FF2B5EF4-FFF2-40B4-BE49-F238E27FC236}">
-                <a16:creationId xmlns:a16="http://schemas.microsoft.com/office/drawing/2014/main" xmlns="" id="{3DFD56C3-3B63-4F4C-A455-80D220434928}"/>
+                <a16:creationId xmlns="" xmlns:a16="http://schemas.microsoft.com/office/drawing/2014/main" id="{3DFD56C3-3B63-4F4C-A455-80D220434928}"/>
               </a:ext>
             </a:extLst>
           </p:cNvPr>
@@ -17214,7 +17199,7 @@
           <p:cNvPr id="5122" name="标题 1">
             <a:extLst>
               <a:ext uri="{FF2B5EF4-FFF2-40B4-BE49-F238E27FC236}">
-                <a16:creationId xmlns:a16="http://schemas.microsoft.com/office/drawing/2014/main" xmlns="" id="{A237414D-C4E1-407F-9B0D-585D2D878A74}"/>
+                <a16:creationId xmlns="" xmlns:a16="http://schemas.microsoft.com/office/drawing/2014/main" id="{A237414D-C4E1-407F-9B0D-585D2D878A74}"/>
               </a:ext>
             </a:extLst>
           </p:cNvPr>
@@ -17254,7 +17239,7 @@
           <p:cNvPr id="3" name="内容占位符 2">
             <a:extLst>
               <a:ext uri="{FF2B5EF4-FFF2-40B4-BE49-F238E27FC236}">
-                <a16:creationId xmlns:a16="http://schemas.microsoft.com/office/drawing/2014/main" xmlns="" id="{3DFD56C3-3B63-4F4C-A455-80D220434928}"/>
+                <a16:creationId xmlns="" xmlns:a16="http://schemas.microsoft.com/office/drawing/2014/main" id="{3DFD56C3-3B63-4F4C-A455-80D220434928}"/>
               </a:ext>
             </a:extLst>
           </p:cNvPr>
@@ -17630,7 +17615,7 @@
           <p:cNvPr id="5122" name="标题 1">
             <a:extLst>
               <a:ext uri="{FF2B5EF4-FFF2-40B4-BE49-F238E27FC236}">
-                <a16:creationId xmlns:a16="http://schemas.microsoft.com/office/drawing/2014/main" xmlns="" id="{A237414D-C4E1-407F-9B0D-585D2D878A74}"/>
+                <a16:creationId xmlns="" xmlns:a16="http://schemas.microsoft.com/office/drawing/2014/main" id="{A237414D-C4E1-407F-9B0D-585D2D878A74}"/>
               </a:ext>
             </a:extLst>
           </p:cNvPr>
@@ -17909,7 +17894,7 @@
           <p:cNvPr id="5122" name="标题 1">
             <a:extLst>
               <a:ext uri="{FF2B5EF4-FFF2-40B4-BE49-F238E27FC236}">
-                <a16:creationId xmlns:a16="http://schemas.microsoft.com/office/drawing/2014/main" xmlns="" id="{A237414D-C4E1-407F-9B0D-585D2D878A74}"/>
+                <a16:creationId xmlns="" xmlns:a16="http://schemas.microsoft.com/office/drawing/2014/main" id="{A237414D-C4E1-407F-9B0D-585D2D878A74}"/>
               </a:ext>
             </a:extLst>
           </p:cNvPr>
@@ -18136,7 +18121,7 @@
           <p:cNvPr id="5122" name="标题 1">
             <a:extLst>
               <a:ext uri="{FF2B5EF4-FFF2-40B4-BE49-F238E27FC236}">
-                <a16:creationId xmlns:a16="http://schemas.microsoft.com/office/drawing/2014/main" xmlns="" id="{A237414D-C4E1-407F-9B0D-585D2D878A74}"/>
+                <a16:creationId xmlns="" xmlns:a16="http://schemas.microsoft.com/office/drawing/2014/main" id="{A237414D-C4E1-407F-9B0D-585D2D878A74}"/>
               </a:ext>
             </a:extLst>
           </p:cNvPr>
@@ -18469,7 +18454,7 @@
           <p:cNvPr id="5122" name="标题 1">
             <a:extLst>
               <a:ext uri="{FF2B5EF4-FFF2-40B4-BE49-F238E27FC236}">
-                <a16:creationId xmlns:a16="http://schemas.microsoft.com/office/drawing/2014/main" xmlns="" id="{A237414D-C4E1-407F-9B0D-585D2D878A74}"/>
+                <a16:creationId xmlns="" xmlns:a16="http://schemas.microsoft.com/office/drawing/2014/main" id="{A237414D-C4E1-407F-9B0D-585D2D878A74}"/>
               </a:ext>
             </a:extLst>
           </p:cNvPr>
@@ -19057,7 +19042,7 @@
           <p:cNvPr id="5122" name="标题 1">
             <a:extLst>
               <a:ext uri="{FF2B5EF4-FFF2-40B4-BE49-F238E27FC236}">
-                <a16:creationId xmlns:a16="http://schemas.microsoft.com/office/drawing/2014/main" xmlns="" id="{A237414D-C4E1-407F-9B0D-585D2D878A74}"/>
+                <a16:creationId xmlns="" xmlns:a16="http://schemas.microsoft.com/office/drawing/2014/main" id="{A237414D-C4E1-407F-9B0D-585D2D878A74}"/>
               </a:ext>
             </a:extLst>
           </p:cNvPr>
@@ -19097,7 +19082,7 @@
           <p:cNvPr id="3" name="内容占位符 2">
             <a:extLst>
               <a:ext uri="{FF2B5EF4-FFF2-40B4-BE49-F238E27FC236}">
-                <a16:creationId xmlns:a16="http://schemas.microsoft.com/office/drawing/2014/main" xmlns="" id="{3DFD56C3-3B63-4F4C-A455-80D220434928}"/>
+                <a16:creationId xmlns="" xmlns:a16="http://schemas.microsoft.com/office/drawing/2014/main" id="{3DFD56C3-3B63-4F4C-A455-80D220434928}"/>
               </a:ext>
             </a:extLst>
           </p:cNvPr>
@@ -19459,7 +19444,7 @@
           <p:cNvPr id="5122" name="标题 1">
             <a:extLst>
               <a:ext uri="{FF2B5EF4-FFF2-40B4-BE49-F238E27FC236}">
-                <a16:creationId xmlns:a16="http://schemas.microsoft.com/office/drawing/2014/main" xmlns="" id="{A237414D-C4E1-407F-9B0D-585D2D878A74}"/>
+                <a16:creationId xmlns="" xmlns:a16="http://schemas.microsoft.com/office/drawing/2014/main" id="{A237414D-C4E1-407F-9B0D-585D2D878A74}"/>
               </a:ext>
             </a:extLst>
           </p:cNvPr>
@@ -19685,7 +19670,7 @@
           <p:cNvPr id="5122" name="标题 1">
             <a:extLst>
               <a:ext uri="{FF2B5EF4-FFF2-40B4-BE49-F238E27FC236}">
-                <a16:creationId xmlns:a16="http://schemas.microsoft.com/office/drawing/2014/main" xmlns="" id="{A237414D-C4E1-407F-9B0D-585D2D878A74}"/>
+                <a16:creationId xmlns="" xmlns:a16="http://schemas.microsoft.com/office/drawing/2014/main" id="{A237414D-C4E1-407F-9B0D-585D2D878A74}"/>
               </a:ext>
             </a:extLst>
           </p:cNvPr>
@@ -20148,7 +20133,7 @@
           <p:cNvPr id="5122" name="标题 1">
             <a:extLst>
               <a:ext uri="{FF2B5EF4-FFF2-40B4-BE49-F238E27FC236}">
-                <a16:creationId xmlns:a16="http://schemas.microsoft.com/office/drawing/2014/main" xmlns="" id="{A237414D-C4E1-407F-9B0D-585D2D878A74}"/>
+                <a16:creationId xmlns="" xmlns:a16="http://schemas.microsoft.com/office/drawing/2014/main" id="{A237414D-C4E1-407F-9B0D-585D2D878A74}"/>
               </a:ext>
             </a:extLst>
           </p:cNvPr>
@@ -20827,7 +20812,7 @@
           <p:cNvPr id="5122" name="标题 1">
             <a:extLst>
               <a:ext uri="{FF2B5EF4-FFF2-40B4-BE49-F238E27FC236}">
-                <a16:creationId xmlns:a16="http://schemas.microsoft.com/office/drawing/2014/main" xmlns="" id="{A237414D-C4E1-407F-9B0D-585D2D878A74}"/>
+                <a16:creationId xmlns="" xmlns:a16="http://schemas.microsoft.com/office/drawing/2014/main" id="{A237414D-C4E1-407F-9B0D-585D2D878A74}"/>
               </a:ext>
             </a:extLst>
           </p:cNvPr>
@@ -21365,7 +21350,7 @@
           <p:cNvPr id="5122" name="标题 1">
             <a:extLst>
               <a:ext uri="{FF2B5EF4-FFF2-40B4-BE49-F238E27FC236}">
-                <a16:creationId xmlns:a16="http://schemas.microsoft.com/office/drawing/2014/main" xmlns="" id="{A237414D-C4E1-407F-9B0D-585D2D878A74}"/>
+                <a16:creationId xmlns="" xmlns:a16="http://schemas.microsoft.com/office/drawing/2014/main" id="{A237414D-C4E1-407F-9B0D-585D2D878A74}"/>
               </a:ext>
             </a:extLst>
           </p:cNvPr>
@@ -21619,7 +21604,7 @@
           <p:cNvPr id="5122" name="标题 1">
             <a:extLst>
               <a:ext uri="{FF2B5EF4-FFF2-40B4-BE49-F238E27FC236}">
-                <a16:creationId xmlns:a16="http://schemas.microsoft.com/office/drawing/2014/main" xmlns="" id="{A237414D-C4E1-407F-9B0D-585D2D878A74}"/>
+                <a16:creationId xmlns="" xmlns:a16="http://schemas.microsoft.com/office/drawing/2014/main" id="{A237414D-C4E1-407F-9B0D-585D2D878A74}"/>
               </a:ext>
             </a:extLst>
           </p:cNvPr>
@@ -21749,7 +21734,7 @@
           <p:cNvPr id="5122" name="标题 1">
             <a:extLst>
               <a:ext uri="{FF2B5EF4-FFF2-40B4-BE49-F238E27FC236}">
-                <a16:creationId xmlns:a16="http://schemas.microsoft.com/office/drawing/2014/main" xmlns="" id="{A237414D-C4E1-407F-9B0D-585D2D878A74}"/>
+                <a16:creationId xmlns="" xmlns:a16="http://schemas.microsoft.com/office/drawing/2014/main" id="{A237414D-C4E1-407F-9B0D-585D2D878A74}"/>
               </a:ext>
             </a:extLst>
           </p:cNvPr>
@@ -21789,7 +21774,7 @@
           <p:cNvPr id="3" name="内容占位符 2">
             <a:extLst>
               <a:ext uri="{FF2B5EF4-FFF2-40B4-BE49-F238E27FC236}">
-                <a16:creationId xmlns:a16="http://schemas.microsoft.com/office/drawing/2014/main" xmlns="" id="{3DFD56C3-3B63-4F4C-A455-80D220434928}"/>
+                <a16:creationId xmlns="" xmlns:a16="http://schemas.microsoft.com/office/drawing/2014/main" id="{3DFD56C3-3B63-4F4C-A455-80D220434928}"/>
               </a:ext>
             </a:extLst>
           </p:cNvPr>
@@ -22151,7 +22136,7 @@
           <p:cNvPr id="5122" name="标题 1">
             <a:extLst>
               <a:ext uri="{FF2B5EF4-FFF2-40B4-BE49-F238E27FC236}">
-                <a16:creationId xmlns:a16="http://schemas.microsoft.com/office/drawing/2014/main" xmlns="" id="{A237414D-C4E1-407F-9B0D-585D2D878A74}"/>
+                <a16:creationId xmlns="" xmlns:a16="http://schemas.microsoft.com/office/drawing/2014/main" id="{A237414D-C4E1-407F-9B0D-585D2D878A74}"/>
               </a:ext>
             </a:extLst>
           </p:cNvPr>
@@ -22465,7 +22450,7 @@
           <p:cNvPr id="5122" name="标题 1">
             <a:extLst>
               <a:ext uri="{FF2B5EF4-FFF2-40B4-BE49-F238E27FC236}">
-                <a16:creationId xmlns:a16="http://schemas.microsoft.com/office/drawing/2014/main" xmlns="" id="{A237414D-C4E1-407F-9B0D-585D2D878A74}"/>
+                <a16:creationId xmlns="" xmlns:a16="http://schemas.microsoft.com/office/drawing/2014/main" id="{A237414D-C4E1-407F-9B0D-585D2D878A74}"/>
               </a:ext>
             </a:extLst>
           </p:cNvPr>
@@ -22597,7 +22582,7 @@
           <p:cNvPr id="5122" name="标题 1">
             <a:extLst>
               <a:ext uri="{FF2B5EF4-FFF2-40B4-BE49-F238E27FC236}">
-                <a16:creationId xmlns:a16="http://schemas.microsoft.com/office/drawing/2014/main" xmlns="" id="{A237414D-C4E1-407F-9B0D-585D2D878A74}"/>
+                <a16:creationId xmlns="" xmlns:a16="http://schemas.microsoft.com/office/drawing/2014/main" id="{A237414D-C4E1-407F-9B0D-585D2D878A74}"/>
               </a:ext>
             </a:extLst>
           </p:cNvPr>
@@ -22637,7 +22622,7 @@
           <p:cNvPr id="3" name="内容占位符 2">
             <a:extLst>
               <a:ext uri="{FF2B5EF4-FFF2-40B4-BE49-F238E27FC236}">
-                <a16:creationId xmlns:a16="http://schemas.microsoft.com/office/drawing/2014/main" xmlns="" id="{3DFD56C3-3B63-4F4C-A455-80D220434928}"/>
+                <a16:creationId xmlns="" xmlns:a16="http://schemas.microsoft.com/office/drawing/2014/main" id="{3DFD56C3-3B63-4F4C-A455-80D220434928}"/>
               </a:ext>
             </a:extLst>
           </p:cNvPr>
@@ -22808,7 +22793,7 @@
           <p:cNvPr id="5122" name="标题 1">
             <a:extLst>
               <a:ext uri="{FF2B5EF4-FFF2-40B4-BE49-F238E27FC236}">
-                <a16:creationId xmlns:a16="http://schemas.microsoft.com/office/drawing/2014/main" xmlns="" id="{A237414D-C4E1-407F-9B0D-585D2D878A74}"/>
+                <a16:creationId xmlns="" xmlns:a16="http://schemas.microsoft.com/office/drawing/2014/main" id="{A237414D-C4E1-407F-9B0D-585D2D878A74}"/>
               </a:ext>
             </a:extLst>
           </p:cNvPr>
@@ -22848,7 +22833,7 @@
           <p:cNvPr id="3" name="内容占位符 2">
             <a:extLst>
               <a:ext uri="{FF2B5EF4-FFF2-40B4-BE49-F238E27FC236}">
-                <a16:creationId xmlns:a16="http://schemas.microsoft.com/office/drawing/2014/main" xmlns="" id="{3DFD56C3-3B63-4F4C-A455-80D220434928}"/>
+                <a16:creationId xmlns="" xmlns:a16="http://schemas.microsoft.com/office/drawing/2014/main" id="{3DFD56C3-3B63-4F4C-A455-80D220434928}"/>
               </a:ext>
             </a:extLst>
           </p:cNvPr>
@@ -23044,7 +23029,7 @@
           <p:cNvPr id="5122" name="标题 1">
             <a:extLst>
               <a:ext uri="{FF2B5EF4-FFF2-40B4-BE49-F238E27FC236}">
-                <a16:creationId xmlns:a16="http://schemas.microsoft.com/office/drawing/2014/main" xmlns="" id="{A237414D-C4E1-407F-9B0D-585D2D878A74}"/>
+                <a16:creationId xmlns="" xmlns:a16="http://schemas.microsoft.com/office/drawing/2014/main" id="{A237414D-C4E1-407F-9B0D-585D2D878A74}"/>
               </a:ext>
             </a:extLst>
           </p:cNvPr>
@@ -23176,7 +23161,7 @@
           <p:cNvPr id="5122" name="标题 1">
             <a:extLst>
               <a:ext uri="{FF2B5EF4-FFF2-40B4-BE49-F238E27FC236}">
-                <a16:creationId xmlns:a16="http://schemas.microsoft.com/office/drawing/2014/main" xmlns="" id="{A237414D-C4E1-407F-9B0D-585D2D878A74}"/>
+                <a16:creationId xmlns="" xmlns:a16="http://schemas.microsoft.com/office/drawing/2014/main" id="{A237414D-C4E1-407F-9B0D-585D2D878A74}"/>
               </a:ext>
             </a:extLst>
           </p:cNvPr>
@@ -23308,7 +23293,7 @@
           <p:cNvPr id="5122" name="标题 1">
             <a:extLst>
               <a:ext uri="{FF2B5EF4-FFF2-40B4-BE49-F238E27FC236}">
-                <a16:creationId xmlns:a16="http://schemas.microsoft.com/office/drawing/2014/main" xmlns="" id="{A237414D-C4E1-407F-9B0D-585D2D878A74}"/>
+                <a16:creationId xmlns="" xmlns:a16="http://schemas.microsoft.com/office/drawing/2014/main" id="{A237414D-C4E1-407F-9B0D-585D2D878A74}"/>
               </a:ext>
             </a:extLst>
           </p:cNvPr>
@@ -23348,7 +23333,7 @@
           <p:cNvPr id="3" name="内容占位符 2">
             <a:extLst>
               <a:ext uri="{FF2B5EF4-FFF2-40B4-BE49-F238E27FC236}">
-                <a16:creationId xmlns:a16="http://schemas.microsoft.com/office/drawing/2014/main" xmlns="" id="{3DFD56C3-3B63-4F4C-A455-80D220434928}"/>
+                <a16:creationId xmlns="" xmlns:a16="http://schemas.microsoft.com/office/drawing/2014/main" id="{3DFD56C3-3B63-4F4C-A455-80D220434928}"/>
               </a:ext>
             </a:extLst>
           </p:cNvPr>
@@ -23707,7 +23692,7 @@
           <p:cNvPr id="5122" name="标题 1">
             <a:extLst>
               <a:ext uri="{FF2B5EF4-FFF2-40B4-BE49-F238E27FC236}">
-                <a16:creationId xmlns:a16="http://schemas.microsoft.com/office/drawing/2014/main" xmlns="" id="{A237414D-C4E1-407F-9B0D-585D2D878A74}"/>
+                <a16:creationId xmlns="" xmlns:a16="http://schemas.microsoft.com/office/drawing/2014/main" id="{A237414D-C4E1-407F-9B0D-585D2D878A74}"/>
               </a:ext>
             </a:extLst>
           </p:cNvPr>
@@ -23839,7 +23824,7 @@
           <p:cNvPr id="5122" name="标题 1">
             <a:extLst>
               <a:ext uri="{FF2B5EF4-FFF2-40B4-BE49-F238E27FC236}">
-                <a16:creationId xmlns:a16="http://schemas.microsoft.com/office/drawing/2014/main" xmlns="" id="{A237414D-C4E1-407F-9B0D-585D2D878A74}"/>
+                <a16:creationId xmlns="" xmlns:a16="http://schemas.microsoft.com/office/drawing/2014/main" id="{A237414D-C4E1-407F-9B0D-585D2D878A74}"/>
               </a:ext>
             </a:extLst>
           </p:cNvPr>
@@ -23879,7 +23864,7 @@
           <p:cNvPr id="3" name="内容占位符 2">
             <a:extLst>
               <a:ext uri="{FF2B5EF4-FFF2-40B4-BE49-F238E27FC236}">
-                <a16:creationId xmlns:a16="http://schemas.microsoft.com/office/drawing/2014/main" xmlns="" id="{3DFD56C3-3B63-4F4C-A455-80D220434928}"/>
+                <a16:creationId xmlns="" xmlns:a16="http://schemas.microsoft.com/office/drawing/2014/main" id="{3DFD56C3-3B63-4F4C-A455-80D220434928}"/>
               </a:ext>
             </a:extLst>
           </p:cNvPr>
@@ -24201,7 +24186,7 @@
           <p:cNvPr id="5122" name="标题 1">
             <a:extLst>
               <a:ext uri="{FF2B5EF4-FFF2-40B4-BE49-F238E27FC236}">
-                <a16:creationId xmlns:a16="http://schemas.microsoft.com/office/drawing/2014/main" xmlns="" id="{A237414D-C4E1-407F-9B0D-585D2D878A74}"/>
+                <a16:creationId xmlns="" xmlns:a16="http://schemas.microsoft.com/office/drawing/2014/main" id="{A237414D-C4E1-407F-9B0D-585D2D878A74}"/>
               </a:ext>
             </a:extLst>
           </p:cNvPr>
@@ -24241,7 +24226,7 @@
           <p:cNvPr id="3" name="内容占位符 2">
             <a:extLst>
               <a:ext uri="{FF2B5EF4-FFF2-40B4-BE49-F238E27FC236}">
-                <a16:creationId xmlns:a16="http://schemas.microsoft.com/office/drawing/2014/main" xmlns="" id="{3DFD56C3-3B63-4F4C-A455-80D220434928}"/>
+                <a16:creationId xmlns="" xmlns:a16="http://schemas.microsoft.com/office/drawing/2014/main" id="{3DFD56C3-3B63-4F4C-A455-80D220434928}"/>
               </a:ext>
             </a:extLst>
           </p:cNvPr>
@@ -24509,8 +24494,8 @@
         </p:nvSpPr>
         <p:spPr>
           <a:xfrm>
-            <a:off x="982636" y="2823231"/>
-            <a:ext cx="10489785" cy="1550807"/>
+            <a:off x="1698628" y="2823231"/>
+            <a:ext cx="8929115" cy="1550807"/>
           </a:xfrm>
         </p:spPr>
         <p:txBody>
@@ -24522,7 +24507,11 @@
             </a:pPr>
             <a:r>
               <a:rPr lang="en-US" altLang="zh-CN" sz="7200" b="1" dirty="0" smtClean="0"/>
-              <a:t>Thank you &amp; Comments!</a:t>
+              <a:t>Thanks &amp; </a:t>
+            </a:r>
+            <a:r>
+              <a:rPr lang="en-US" altLang="zh-CN" sz="7200" b="1" dirty="0" smtClean="0"/>
+              <a:t>Comments!</a:t>
             </a:r>
             <a:endParaRPr lang="zh-CN" altLang="en-US" sz="7200" b="1" dirty="0"/>
           </a:p>
@@ -24570,7 +24559,7 @@
           <p:cNvPr id="5122" name="标题 1">
             <a:extLst>
               <a:ext uri="{FF2B5EF4-FFF2-40B4-BE49-F238E27FC236}">
-                <a16:creationId xmlns:a16="http://schemas.microsoft.com/office/drawing/2014/main" xmlns="" id="{A237414D-C4E1-407F-9B0D-585D2D878A74}"/>
+                <a16:creationId xmlns="" xmlns:a16="http://schemas.microsoft.com/office/drawing/2014/main" id="{A237414D-C4E1-407F-9B0D-585D2D878A74}"/>
               </a:ext>
             </a:extLst>
           </p:cNvPr>
@@ -24610,7 +24599,7 @@
           <p:cNvPr id="3" name="内容占位符 2">
             <a:extLst>
               <a:ext uri="{FF2B5EF4-FFF2-40B4-BE49-F238E27FC236}">
-                <a16:creationId xmlns:a16="http://schemas.microsoft.com/office/drawing/2014/main" xmlns="" id="{3DFD56C3-3B63-4F4C-A455-80D220434928}"/>
+                <a16:creationId xmlns="" xmlns:a16="http://schemas.microsoft.com/office/drawing/2014/main" id="{3DFD56C3-3B63-4F4C-A455-80D220434928}"/>
               </a:ext>
             </a:extLst>
           </p:cNvPr>
@@ -24813,7 +24802,7 @@
           <p:cNvPr id="5122" name="标题 1">
             <a:extLst>
               <a:ext uri="{FF2B5EF4-FFF2-40B4-BE49-F238E27FC236}">
-                <a16:creationId xmlns:a16="http://schemas.microsoft.com/office/drawing/2014/main" xmlns="" id="{A237414D-C4E1-407F-9B0D-585D2D878A74}"/>
+                <a16:creationId xmlns="" xmlns:a16="http://schemas.microsoft.com/office/drawing/2014/main" id="{A237414D-C4E1-407F-9B0D-585D2D878A74}"/>
               </a:ext>
             </a:extLst>
           </p:cNvPr>
@@ -24853,7 +24842,7 @@
           <p:cNvPr id="3" name="内容占位符 2">
             <a:extLst>
               <a:ext uri="{FF2B5EF4-FFF2-40B4-BE49-F238E27FC236}">
-                <a16:creationId xmlns:a16="http://schemas.microsoft.com/office/drawing/2014/main" xmlns="" id="{3DFD56C3-3B63-4F4C-A455-80D220434928}"/>
+                <a16:creationId xmlns="" xmlns:a16="http://schemas.microsoft.com/office/drawing/2014/main" id="{3DFD56C3-3B63-4F4C-A455-80D220434928}"/>
               </a:ext>
             </a:extLst>
           </p:cNvPr>
@@ -25153,7 +25142,7 @@
           <p:cNvPr id="5122" name="标题 1">
             <a:extLst>
               <a:ext uri="{FF2B5EF4-FFF2-40B4-BE49-F238E27FC236}">
-                <a16:creationId xmlns:a16="http://schemas.microsoft.com/office/drawing/2014/main" xmlns="" id="{A237414D-C4E1-407F-9B0D-585D2D878A74}"/>
+                <a16:creationId xmlns="" xmlns:a16="http://schemas.microsoft.com/office/drawing/2014/main" id="{A237414D-C4E1-407F-9B0D-585D2D878A74}"/>
               </a:ext>
             </a:extLst>
           </p:cNvPr>
@@ -25193,7 +25182,7 @@
           <p:cNvPr id="3" name="内容占位符 2">
             <a:extLst>
               <a:ext uri="{FF2B5EF4-FFF2-40B4-BE49-F238E27FC236}">
-                <a16:creationId xmlns:a16="http://schemas.microsoft.com/office/drawing/2014/main" xmlns="" id="{3DFD56C3-3B63-4F4C-A455-80D220434928}"/>
+                <a16:creationId xmlns="" xmlns:a16="http://schemas.microsoft.com/office/drawing/2014/main" id="{3DFD56C3-3B63-4F4C-A455-80D220434928}"/>
               </a:ext>
             </a:extLst>
           </p:cNvPr>
@@ -25562,7 +25551,7 @@
           <p:cNvPr id="5122" name="标题 1">
             <a:extLst>
               <a:ext uri="{FF2B5EF4-FFF2-40B4-BE49-F238E27FC236}">
-                <a16:creationId xmlns:a16="http://schemas.microsoft.com/office/drawing/2014/main" xmlns="" id="{A237414D-C4E1-407F-9B0D-585D2D878A74}"/>
+                <a16:creationId xmlns="" xmlns:a16="http://schemas.microsoft.com/office/drawing/2014/main" id="{A237414D-C4E1-407F-9B0D-585D2D878A74}"/>
               </a:ext>
             </a:extLst>
           </p:cNvPr>
@@ -25602,7 +25591,7 @@
           <p:cNvPr id="3" name="内容占位符 2">
             <a:extLst>
               <a:ext uri="{FF2B5EF4-FFF2-40B4-BE49-F238E27FC236}">
-                <a16:creationId xmlns:a16="http://schemas.microsoft.com/office/drawing/2014/main" xmlns="" id="{3DFD56C3-3B63-4F4C-A455-80D220434928}"/>
+                <a16:creationId xmlns="" xmlns:a16="http://schemas.microsoft.com/office/drawing/2014/main" id="{3DFD56C3-3B63-4F4C-A455-80D220434928}"/>
               </a:ext>
             </a:extLst>
           </p:cNvPr>
@@ -25861,7 +25850,7 @@
           <p:cNvPr id="5122" name="标题 1">
             <a:extLst>
               <a:ext uri="{FF2B5EF4-FFF2-40B4-BE49-F238E27FC236}">
-                <a16:creationId xmlns:a16="http://schemas.microsoft.com/office/drawing/2014/main" xmlns="" id="{A237414D-C4E1-407F-9B0D-585D2D878A74}"/>
+                <a16:creationId xmlns="" xmlns:a16="http://schemas.microsoft.com/office/drawing/2014/main" id="{A237414D-C4E1-407F-9B0D-585D2D878A74}"/>
               </a:ext>
             </a:extLst>
           </p:cNvPr>
@@ -25901,7 +25890,7 @@
           <p:cNvPr id="3" name="内容占位符 2">
             <a:extLst>
               <a:ext uri="{FF2B5EF4-FFF2-40B4-BE49-F238E27FC236}">
-                <a16:creationId xmlns:a16="http://schemas.microsoft.com/office/drawing/2014/main" xmlns="" id="{3DFD56C3-3B63-4F4C-A455-80D220434928}"/>
+                <a16:creationId xmlns="" xmlns:a16="http://schemas.microsoft.com/office/drawing/2014/main" id="{3DFD56C3-3B63-4F4C-A455-80D220434928}"/>
               </a:ext>
             </a:extLst>
           </p:cNvPr>
@@ -26219,7 +26208,7 @@
           <p:cNvPr id="5122" name="标题 1">
             <a:extLst>
               <a:ext uri="{FF2B5EF4-FFF2-40B4-BE49-F238E27FC236}">
-                <a16:creationId xmlns:a16="http://schemas.microsoft.com/office/drawing/2014/main" xmlns="" id="{A237414D-C4E1-407F-9B0D-585D2D878A74}"/>
+                <a16:creationId xmlns="" xmlns:a16="http://schemas.microsoft.com/office/drawing/2014/main" id="{A237414D-C4E1-407F-9B0D-585D2D878A74}"/>
               </a:ext>
             </a:extLst>
           </p:cNvPr>

--- a/Technical-Documents/Parallel-Computing/parallel-computing-course/MPI-ACC Accelerator-Aware MPI for Scientific Applications.pptx
+++ b/Technical-Documents/Parallel-Computing/parallel-computing-course/MPI-ACC Accelerator-Aware MPI for Scientific Applications.pptx
@@ -518,7 +518,7 @@
           <p:cNvPr id="6146" name="幻灯片图像占位符 1">
             <a:extLst>
               <a:ext uri="{FF2B5EF4-FFF2-40B4-BE49-F238E27FC236}">
-                <a16:creationId xmlns="" xmlns:a16="http://schemas.microsoft.com/office/drawing/2014/main" id="{4908B133-C54F-400F-8F70-355C57C0BE11}"/>
+                <a16:creationId xmlns:a16="http://schemas.microsoft.com/office/drawing/2014/main" xmlns="" id="{4908B133-C54F-400F-8F70-355C57C0BE11}"/>
               </a:ext>
             </a:extLst>
           </p:cNvPr>
@@ -555,7 +555,7 @@
           <p:cNvPr id="6147" name="备注占位符 2">
             <a:extLst>
               <a:ext uri="{FF2B5EF4-FFF2-40B4-BE49-F238E27FC236}">
-                <a16:creationId xmlns="" xmlns:a16="http://schemas.microsoft.com/office/drawing/2014/main" id="{7D16C196-D24B-4BE0-AE74-D44907B2A1B1}"/>
+                <a16:creationId xmlns:a16="http://schemas.microsoft.com/office/drawing/2014/main" xmlns="" id="{7D16C196-D24B-4BE0-AE74-D44907B2A1B1}"/>
               </a:ext>
             </a:extLst>
           </p:cNvPr>
@@ -610,7 +610,7 @@
           <p:cNvPr id="6148" name="灯片编号占位符 3">
             <a:extLst>
               <a:ext uri="{FF2B5EF4-FFF2-40B4-BE49-F238E27FC236}">
-                <a16:creationId xmlns="" xmlns:a16="http://schemas.microsoft.com/office/drawing/2014/main" id="{D230392C-ED50-49C3-93A6-10868BF6DADE}"/>
+                <a16:creationId xmlns:a16="http://schemas.microsoft.com/office/drawing/2014/main" xmlns="" id="{D230392C-ED50-49C3-93A6-10868BF6DADE}"/>
               </a:ext>
             </a:extLst>
           </p:cNvPr>
@@ -860,7 +860,7 @@
           <p:cNvPr id="6146" name="幻灯片图像占位符 1">
             <a:extLst>
               <a:ext uri="{FF2B5EF4-FFF2-40B4-BE49-F238E27FC236}">
-                <a16:creationId xmlns="" xmlns:a16="http://schemas.microsoft.com/office/drawing/2014/main" id="{4908B133-C54F-400F-8F70-355C57C0BE11}"/>
+                <a16:creationId xmlns:a16="http://schemas.microsoft.com/office/drawing/2014/main" xmlns="" id="{4908B133-C54F-400F-8F70-355C57C0BE11}"/>
               </a:ext>
             </a:extLst>
           </p:cNvPr>
@@ -897,7 +897,7 @@
           <p:cNvPr id="6147" name="备注占位符 2">
             <a:extLst>
               <a:ext uri="{FF2B5EF4-FFF2-40B4-BE49-F238E27FC236}">
-                <a16:creationId xmlns="" xmlns:a16="http://schemas.microsoft.com/office/drawing/2014/main" id="{7D16C196-D24B-4BE0-AE74-D44907B2A1B1}"/>
+                <a16:creationId xmlns:a16="http://schemas.microsoft.com/office/drawing/2014/main" xmlns="" id="{7D16C196-D24B-4BE0-AE74-D44907B2A1B1}"/>
               </a:ext>
             </a:extLst>
           </p:cNvPr>
@@ -952,7 +952,7 @@
           <p:cNvPr id="6148" name="灯片编号占位符 3">
             <a:extLst>
               <a:ext uri="{FF2B5EF4-FFF2-40B4-BE49-F238E27FC236}">
-                <a16:creationId xmlns="" xmlns:a16="http://schemas.microsoft.com/office/drawing/2014/main" id="{D230392C-ED50-49C3-93A6-10868BF6DADE}"/>
+                <a16:creationId xmlns:a16="http://schemas.microsoft.com/office/drawing/2014/main" xmlns="" id="{D230392C-ED50-49C3-93A6-10868BF6DADE}"/>
               </a:ext>
             </a:extLst>
           </p:cNvPr>
@@ -1202,7 +1202,7 @@
           <p:cNvPr id="6146" name="幻灯片图像占位符 1">
             <a:extLst>
               <a:ext uri="{FF2B5EF4-FFF2-40B4-BE49-F238E27FC236}">
-                <a16:creationId xmlns="" xmlns:a16="http://schemas.microsoft.com/office/drawing/2014/main" id="{4908B133-C54F-400F-8F70-355C57C0BE11}"/>
+                <a16:creationId xmlns:a16="http://schemas.microsoft.com/office/drawing/2014/main" xmlns="" id="{4908B133-C54F-400F-8F70-355C57C0BE11}"/>
               </a:ext>
             </a:extLst>
           </p:cNvPr>
@@ -1239,7 +1239,7 @@
           <p:cNvPr id="6147" name="备注占位符 2">
             <a:extLst>
               <a:ext uri="{FF2B5EF4-FFF2-40B4-BE49-F238E27FC236}">
-                <a16:creationId xmlns="" xmlns:a16="http://schemas.microsoft.com/office/drawing/2014/main" id="{7D16C196-D24B-4BE0-AE74-D44907B2A1B1}"/>
+                <a16:creationId xmlns:a16="http://schemas.microsoft.com/office/drawing/2014/main" xmlns="" id="{7D16C196-D24B-4BE0-AE74-D44907B2A1B1}"/>
               </a:ext>
             </a:extLst>
           </p:cNvPr>
@@ -1294,7 +1294,7 @@
           <p:cNvPr id="6148" name="灯片编号占位符 3">
             <a:extLst>
               <a:ext uri="{FF2B5EF4-FFF2-40B4-BE49-F238E27FC236}">
-                <a16:creationId xmlns="" xmlns:a16="http://schemas.microsoft.com/office/drawing/2014/main" id="{D230392C-ED50-49C3-93A6-10868BF6DADE}"/>
+                <a16:creationId xmlns:a16="http://schemas.microsoft.com/office/drawing/2014/main" xmlns="" id="{D230392C-ED50-49C3-93A6-10868BF6DADE}"/>
               </a:ext>
             </a:extLst>
           </p:cNvPr>
@@ -1544,7 +1544,7 @@
           <p:cNvPr id="6146" name="幻灯片图像占位符 1">
             <a:extLst>
               <a:ext uri="{FF2B5EF4-FFF2-40B4-BE49-F238E27FC236}">
-                <a16:creationId xmlns="" xmlns:a16="http://schemas.microsoft.com/office/drawing/2014/main" id="{4908B133-C54F-400F-8F70-355C57C0BE11}"/>
+                <a16:creationId xmlns:a16="http://schemas.microsoft.com/office/drawing/2014/main" xmlns="" id="{4908B133-C54F-400F-8F70-355C57C0BE11}"/>
               </a:ext>
             </a:extLst>
           </p:cNvPr>
@@ -1581,7 +1581,7 @@
           <p:cNvPr id="6147" name="备注占位符 2">
             <a:extLst>
               <a:ext uri="{FF2B5EF4-FFF2-40B4-BE49-F238E27FC236}">
-                <a16:creationId xmlns="" xmlns:a16="http://schemas.microsoft.com/office/drawing/2014/main" id="{7D16C196-D24B-4BE0-AE74-D44907B2A1B1}"/>
+                <a16:creationId xmlns:a16="http://schemas.microsoft.com/office/drawing/2014/main" xmlns="" id="{7D16C196-D24B-4BE0-AE74-D44907B2A1B1}"/>
               </a:ext>
             </a:extLst>
           </p:cNvPr>
@@ -1636,7 +1636,7 @@
           <p:cNvPr id="6148" name="灯片编号占位符 3">
             <a:extLst>
               <a:ext uri="{FF2B5EF4-FFF2-40B4-BE49-F238E27FC236}">
-                <a16:creationId xmlns="" xmlns:a16="http://schemas.microsoft.com/office/drawing/2014/main" id="{D230392C-ED50-49C3-93A6-10868BF6DADE}"/>
+                <a16:creationId xmlns:a16="http://schemas.microsoft.com/office/drawing/2014/main" xmlns="" id="{D230392C-ED50-49C3-93A6-10868BF6DADE}"/>
               </a:ext>
             </a:extLst>
           </p:cNvPr>
@@ -1886,7 +1886,7 @@
           <p:cNvPr id="6146" name="幻灯片图像占位符 1">
             <a:extLst>
               <a:ext uri="{FF2B5EF4-FFF2-40B4-BE49-F238E27FC236}">
-                <a16:creationId xmlns="" xmlns:a16="http://schemas.microsoft.com/office/drawing/2014/main" id="{4908B133-C54F-400F-8F70-355C57C0BE11}"/>
+                <a16:creationId xmlns:a16="http://schemas.microsoft.com/office/drawing/2014/main" xmlns="" id="{4908B133-C54F-400F-8F70-355C57C0BE11}"/>
               </a:ext>
             </a:extLst>
           </p:cNvPr>
@@ -1923,7 +1923,7 @@
           <p:cNvPr id="6147" name="备注占位符 2">
             <a:extLst>
               <a:ext uri="{FF2B5EF4-FFF2-40B4-BE49-F238E27FC236}">
-                <a16:creationId xmlns="" xmlns:a16="http://schemas.microsoft.com/office/drawing/2014/main" id="{7D16C196-D24B-4BE0-AE74-D44907B2A1B1}"/>
+                <a16:creationId xmlns:a16="http://schemas.microsoft.com/office/drawing/2014/main" xmlns="" id="{7D16C196-D24B-4BE0-AE74-D44907B2A1B1}"/>
               </a:ext>
             </a:extLst>
           </p:cNvPr>
@@ -1978,7 +1978,7 @@
           <p:cNvPr id="6148" name="灯片编号占位符 3">
             <a:extLst>
               <a:ext uri="{FF2B5EF4-FFF2-40B4-BE49-F238E27FC236}">
-                <a16:creationId xmlns="" xmlns:a16="http://schemas.microsoft.com/office/drawing/2014/main" id="{D230392C-ED50-49C3-93A6-10868BF6DADE}"/>
+                <a16:creationId xmlns:a16="http://schemas.microsoft.com/office/drawing/2014/main" xmlns="" id="{D230392C-ED50-49C3-93A6-10868BF6DADE}"/>
               </a:ext>
             </a:extLst>
           </p:cNvPr>
@@ -2228,7 +2228,7 @@
           <p:cNvPr id="6146" name="幻灯片图像占位符 1">
             <a:extLst>
               <a:ext uri="{FF2B5EF4-FFF2-40B4-BE49-F238E27FC236}">
-                <a16:creationId xmlns="" xmlns:a16="http://schemas.microsoft.com/office/drawing/2014/main" id="{4908B133-C54F-400F-8F70-355C57C0BE11}"/>
+                <a16:creationId xmlns:a16="http://schemas.microsoft.com/office/drawing/2014/main" xmlns="" id="{4908B133-C54F-400F-8F70-355C57C0BE11}"/>
               </a:ext>
             </a:extLst>
           </p:cNvPr>
@@ -2265,7 +2265,7 @@
           <p:cNvPr id="6147" name="备注占位符 2">
             <a:extLst>
               <a:ext uri="{FF2B5EF4-FFF2-40B4-BE49-F238E27FC236}">
-                <a16:creationId xmlns="" xmlns:a16="http://schemas.microsoft.com/office/drawing/2014/main" id="{7D16C196-D24B-4BE0-AE74-D44907B2A1B1}"/>
+                <a16:creationId xmlns:a16="http://schemas.microsoft.com/office/drawing/2014/main" xmlns="" id="{7D16C196-D24B-4BE0-AE74-D44907B2A1B1}"/>
               </a:ext>
             </a:extLst>
           </p:cNvPr>
@@ -2320,7 +2320,7 @@
           <p:cNvPr id="6148" name="灯片编号占位符 3">
             <a:extLst>
               <a:ext uri="{FF2B5EF4-FFF2-40B4-BE49-F238E27FC236}">
-                <a16:creationId xmlns="" xmlns:a16="http://schemas.microsoft.com/office/drawing/2014/main" id="{D230392C-ED50-49C3-93A6-10868BF6DADE}"/>
+                <a16:creationId xmlns:a16="http://schemas.microsoft.com/office/drawing/2014/main" xmlns="" id="{D230392C-ED50-49C3-93A6-10868BF6DADE}"/>
               </a:ext>
             </a:extLst>
           </p:cNvPr>
@@ -2570,7 +2570,7 @@
           <p:cNvPr id="6146" name="幻灯片图像占位符 1">
             <a:extLst>
               <a:ext uri="{FF2B5EF4-FFF2-40B4-BE49-F238E27FC236}">
-                <a16:creationId xmlns="" xmlns:a16="http://schemas.microsoft.com/office/drawing/2014/main" id="{4908B133-C54F-400F-8F70-355C57C0BE11}"/>
+                <a16:creationId xmlns:a16="http://schemas.microsoft.com/office/drawing/2014/main" xmlns="" id="{4908B133-C54F-400F-8F70-355C57C0BE11}"/>
               </a:ext>
             </a:extLst>
           </p:cNvPr>
@@ -2607,7 +2607,7 @@
           <p:cNvPr id="6147" name="备注占位符 2">
             <a:extLst>
               <a:ext uri="{FF2B5EF4-FFF2-40B4-BE49-F238E27FC236}">
-                <a16:creationId xmlns="" xmlns:a16="http://schemas.microsoft.com/office/drawing/2014/main" id="{7D16C196-D24B-4BE0-AE74-D44907B2A1B1}"/>
+                <a16:creationId xmlns:a16="http://schemas.microsoft.com/office/drawing/2014/main" xmlns="" id="{7D16C196-D24B-4BE0-AE74-D44907B2A1B1}"/>
               </a:ext>
             </a:extLst>
           </p:cNvPr>
@@ -2662,7 +2662,7 @@
           <p:cNvPr id="6148" name="灯片编号占位符 3">
             <a:extLst>
               <a:ext uri="{FF2B5EF4-FFF2-40B4-BE49-F238E27FC236}">
-                <a16:creationId xmlns="" xmlns:a16="http://schemas.microsoft.com/office/drawing/2014/main" id="{D230392C-ED50-49C3-93A6-10868BF6DADE}"/>
+                <a16:creationId xmlns:a16="http://schemas.microsoft.com/office/drawing/2014/main" xmlns="" id="{D230392C-ED50-49C3-93A6-10868BF6DADE}"/>
               </a:ext>
             </a:extLst>
           </p:cNvPr>
@@ -2912,7 +2912,7 @@
           <p:cNvPr id="6146" name="幻灯片图像占位符 1">
             <a:extLst>
               <a:ext uri="{FF2B5EF4-FFF2-40B4-BE49-F238E27FC236}">
-                <a16:creationId xmlns="" xmlns:a16="http://schemas.microsoft.com/office/drawing/2014/main" id="{4908B133-C54F-400F-8F70-355C57C0BE11}"/>
+                <a16:creationId xmlns:a16="http://schemas.microsoft.com/office/drawing/2014/main" xmlns="" id="{4908B133-C54F-400F-8F70-355C57C0BE11}"/>
               </a:ext>
             </a:extLst>
           </p:cNvPr>
@@ -2949,7 +2949,7 @@
           <p:cNvPr id="6147" name="备注占位符 2">
             <a:extLst>
               <a:ext uri="{FF2B5EF4-FFF2-40B4-BE49-F238E27FC236}">
-                <a16:creationId xmlns="" xmlns:a16="http://schemas.microsoft.com/office/drawing/2014/main" id="{7D16C196-D24B-4BE0-AE74-D44907B2A1B1}"/>
+                <a16:creationId xmlns:a16="http://schemas.microsoft.com/office/drawing/2014/main" xmlns="" id="{7D16C196-D24B-4BE0-AE74-D44907B2A1B1}"/>
               </a:ext>
             </a:extLst>
           </p:cNvPr>
@@ -3004,7 +3004,7 @@
           <p:cNvPr id="6148" name="灯片编号占位符 3">
             <a:extLst>
               <a:ext uri="{FF2B5EF4-FFF2-40B4-BE49-F238E27FC236}">
-                <a16:creationId xmlns="" xmlns:a16="http://schemas.microsoft.com/office/drawing/2014/main" id="{D230392C-ED50-49C3-93A6-10868BF6DADE}"/>
+                <a16:creationId xmlns:a16="http://schemas.microsoft.com/office/drawing/2014/main" xmlns="" id="{D230392C-ED50-49C3-93A6-10868BF6DADE}"/>
               </a:ext>
             </a:extLst>
           </p:cNvPr>
@@ -3254,7 +3254,7 @@
           <p:cNvPr id="6146" name="幻灯片图像占位符 1">
             <a:extLst>
               <a:ext uri="{FF2B5EF4-FFF2-40B4-BE49-F238E27FC236}">
-                <a16:creationId xmlns="" xmlns:a16="http://schemas.microsoft.com/office/drawing/2014/main" id="{4908B133-C54F-400F-8F70-355C57C0BE11}"/>
+                <a16:creationId xmlns:a16="http://schemas.microsoft.com/office/drawing/2014/main" xmlns="" id="{4908B133-C54F-400F-8F70-355C57C0BE11}"/>
               </a:ext>
             </a:extLst>
           </p:cNvPr>
@@ -3291,7 +3291,7 @@
           <p:cNvPr id="6147" name="备注占位符 2">
             <a:extLst>
               <a:ext uri="{FF2B5EF4-FFF2-40B4-BE49-F238E27FC236}">
-                <a16:creationId xmlns="" xmlns:a16="http://schemas.microsoft.com/office/drawing/2014/main" id="{7D16C196-D24B-4BE0-AE74-D44907B2A1B1}"/>
+                <a16:creationId xmlns:a16="http://schemas.microsoft.com/office/drawing/2014/main" xmlns="" id="{7D16C196-D24B-4BE0-AE74-D44907B2A1B1}"/>
               </a:ext>
             </a:extLst>
           </p:cNvPr>
@@ -3346,7 +3346,7 @@
           <p:cNvPr id="6148" name="灯片编号占位符 3">
             <a:extLst>
               <a:ext uri="{FF2B5EF4-FFF2-40B4-BE49-F238E27FC236}">
-                <a16:creationId xmlns="" xmlns:a16="http://schemas.microsoft.com/office/drawing/2014/main" id="{D230392C-ED50-49C3-93A6-10868BF6DADE}"/>
+                <a16:creationId xmlns:a16="http://schemas.microsoft.com/office/drawing/2014/main" xmlns="" id="{D230392C-ED50-49C3-93A6-10868BF6DADE}"/>
               </a:ext>
             </a:extLst>
           </p:cNvPr>
@@ -3596,7 +3596,7 @@
           <p:cNvPr id="6146" name="幻灯片图像占位符 1">
             <a:extLst>
               <a:ext uri="{FF2B5EF4-FFF2-40B4-BE49-F238E27FC236}">
-                <a16:creationId xmlns="" xmlns:a16="http://schemas.microsoft.com/office/drawing/2014/main" id="{4908B133-C54F-400F-8F70-355C57C0BE11}"/>
+                <a16:creationId xmlns:a16="http://schemas.microsoft.com/office/drawing/2014/main" xmlns="" id="{4908B133-C54F-400F-8F70-355C57C0BE11}"/>
               </a:ext>
             </a:extLst>
           </p:cNvPr>
@@ -3633,7 +3633,7 @@
           <p:cNvPr id="6147" name="备注占位符 2">
             <a:extLst>
               <a:ext uri="{FF2B5EF4-FFF2-40B4-BE49-F238E27FC236}">
-                <a16:creationId xmlns="" xmlns:a16="http://schemas.microsoft.com/office/drawing/2014/main" id="{7D16C196-D24B-4BE0-AE74-D44907B2A1B1}"/>
+                <a16:creationId xmlns:a16="http://schemas.microsoft.com/office/drawing/2014/main" xmlns="" id="{7D16C196-D24B-4BE0-AE74-D44907B2A1B1}"/>
               </a:ext>
             </a:extLst>
           </p:cNvPr>
@@ -3688,7 +3688,7 @@
           <p:cNvPr id="6148" name="灯片编号占位符 3">
             <a:extLst>
               <a:ext uri="{FF2B5EF4-FFF2-40B4-BE49-F238E27FC236}">
-                <a16:creationId xmlns="" xmlns:a16="http://schemas.microsoft.com/office/drawing/2014/main" id="{D230392C-ED50-49C3-93A6-10868BF6DADE}"/>
+                <a16:creationId xmlns:a16="http://schemas.microsoft.com/office/drawing/2014/main" xmlns="" id="{D230392C-ED50-49C3-93A6-10868BF6DADE}"/>
               </a:ext>
             </a:extLst>
           </p:cNvPr>
@@ -3938,7 +3938,7 @@
           <p:cNvPr id="6146" name="幻灯片图像占位符 1">
             <a:extLst>
               <a:ext uri="{FF2B5EF4-FFF2-40B4-BE49-F238E27FC236}">
-                <a16:creationId xmlns="" xmlns:a16="http://schemas.microsoft.com/office/drawing/2014/main" id="{4908B133-C54F-400F-8F70-355C57C0BE11}"/>
+                <a16:creationId xmlns:a16="http://schemas.microsoft.com/office/drawing/2014/main" xmlns="" id="{4908B133-C54F-400F-8F70-355C57C0BE11}"/>
               </a:ext>
             </a:extLst>
           </p:cNvPr>
@@ -3975,7 +3975,7 @@
           <p:cNvPr id="6147" name="备注占位符 2">
             <a:extLst>
               <a:ext uri="{FF2B5EF4-FFF2-40B4-BE49-F238E27FC236}">
-                <a16:creationId xmlns="" xmlns:a16="http://schemas.microsoft.com/office/drawing/2014/main" id="{7D16C196-D24B-4BE0-AE74-D44907B2A1B1}"/>
+                <a16:creationId xmlns:a16="http://schemas.microsoft.com/office/drawing/2014/main" xmlns="" id="{7D16C196-D24B-4BE0-AE74-D44907B2A1B1}"/>
               </a:ext>
             </a:extLst>
           </p:cNvPr>
@@ -4030,7 +4030,7 @@
           <p:cNvPr id="6148" name="灯片编号占位符 3">
             <a:extLst>
               <a:ext uri="{FF2B5EF4-FFF2-40B4-BE49-F238E27FC236}">
-                <a16:creationId xmlns="" xmlns:a16="http://schemas.microsoft.com/office/drawing/2014/main" id="{D230392C-ED50-49C3-93A6-10868BF6DADE}"/>
+                <a16:creationId xmlns:a16="http://schemas.microsoft.com/office/drawing/2014/main" xmlns="" id="{D230392C-ED50-49C3-93A6-10868BF6DADE}"/>
               </a:ext>
             </a:extLst>
           </p:cNvPr>
@@ -4280,7 +4280,7 @@
           <p:cNvPr id="6146" name="幻灯片图像占位符 1">
             <a:extLst>
               <a:ext uri="{FF2B5EF4-FFF2-40B4-BE49-F238E27FC236}">
-                <a16:creationId xmlns="" xmlns:a16="http://schemas.microsoft.com/office/drawing/2014/main" id="{4908B133-C54F-400F-8F70-355C57C0BE11}"/>
+                <a16:creationId xmlns:a16="http://schemas.microsoft.com/office/drawing/2014/main" xmlns="" id="{4908B133-C54F-400F-8F70-355C57C0BE11}"/>
               </a:ext>
             </a:extLst>
           </p:cNvPr>
@@ -4317,7 +4317,7 @@
           <p:cNvPr id="6147" name="备注占位符 2">
             <a:extLst>
               <a:ext uri="{FF2B5EF4-FFF2-40B4-BE49-F238E27FC236}">
-                <a16:creationId xmlns="" xmlns:a16="http://schemas.microsoft.com/office/drawing/2014/main" id="{7D16C196-D24B-4BE0-AE74-D44907B2A1B1}"/>
+                <a16:creationId xmlns:a16="http://schemas.microsoft.com/office/drawing/2014/main" xmlns="" id="{7D16C196-D24B-4BE0-AE74-D44907B2A1B1}"/>
               </a:ext>
             </a:extLst>
           </p:cNvPr>
@@ -4372,7 +4372,7 @@
           <p:cNvPr id="6148" name="灯片编号占位符 3">
             <a:extLst>
               <a:ext uri="{FF2B5EF4-FFF2-40B4-BE49-F238E27FC236}">
-                <a16:creationId xmlns="" xmlns:a16="http://schemas.microsoft.com/office/drawing/2014/main" id="{D230392C-ED50-49C3-93A6-10868BF6DADE}"/>
+                <a16:creationId xmlns:a16="http://schemas.microsoft.com/office/drawing/2014/main" xmlns="" id="{D230392C-ED50-49C3-93A6-10868BF6DADE}"/>
               </a:ext>
             </a:extLst>
           </p:cNvPr>
@@ -4622,7 +4622,7 @@
           <p:cNvPr id="6146" name="幻灯片图像占位符 1">
             <a:extLst>
               <a:ext uri="{FF2B5EF4-FFF2-40B4-BE49-F238E27FC236}">
-                <a16:creationId xmlns="" xmlns:a16="http://schemas.microsoft.com/office/drawing/2014/main" id="{4908B133-C54F-400F-8F70-355C57C0BE11}"/>
+                <a16:creationId xmlns:a16="http://schemas.microsoft.com/office/drawing/2014/main" xmlns="" id="{4908B133-C54F-400F-8F70-355C57C0BE11}"/>
               </a:ext>
             </a:extLst>
           </p:cNvPr>
@@ -4659,7 +4659,7 @@
           <p:cNvPr id="6147" name="备注占位符 2">
             <a:extLst>
               <a:ext uri="{FF2B5EF4-FFF2-40B4-BE49-F238E27FC236}">
-                <a16:creationId xmlns="" xmlns:a16="http://schemas.microsoft.com/office/drawing/2014/main" id="{7D16C196-D24B-4BE0-AE74-D44907B2A1B1}"/>
+                <a16:creationId xmlns:a16="http://schemas.microsoft.com/office/drawing/2014/main" xmlns="" id="{7D16C196-D24B-4BE0-AE74-D44907B2A1B1}"/>
               </a:ext>
             </a:extLst>
           </p:cNvPr>
@@ -4714,7 +4714,7 @@
           <p:cNvPr id="6148" name="灯片编号占位符 3">
             <a:extLst>
               <a:ext uri="{FF2B5EF4-FFF2-40B4-BE49-F238E27FC236}">
-                <a16:creationId xmlns="" xmlns:a16="http://schemas.microsoft.com/office/drawing/2014/main" id="{D230392C-ED50-49C3-93A6-10868BF6DADE}"/>
+                <a16:creationId xmlns:a16="http://schemas.microsoft.com/office/drawing/2014/main" xmlns="" id="{D230392C-ED50-49C3-93A6-10868BF6DADE}"/>
               </a:ext>
             </a:extLst>
           </p:cNvPr>
@@ -4964,7 +4964,7 @@
           <p:cNvPr id="6146" name="幻灯片图像占位符 1">
             <a:extLst>
               <a:ext uri="{FF2B5EF4-FFF2-40B4-BE49-F238E27FC236}">
-                <a16:creationId xmlns="" xmlns:a16="http://schemas.microsoft.com/office/drawing/2014/main" id="{4908B133-C54F-400F-8F70-355C57C0BE11}"/>
+                <a16:creationId xmlns:a16="http://schemas.microsoft.com/office/drawing/2014/main" xmlns="" id="{4908B133-C54F-400F-8F70-355C57C0BE11}"/>
               </a:ext>
             </a:extLst>
           </p:cNvPr>
@@ -5001,7 +5001,7 @@
           <p:cNvPr id="6147" name="备注占位符 2">
             <a:extLst>
               <a:ext uri="{FF2B5EF4-FFF2-40B4-BE49-F238E27FC236}">
-                <a16:creationId xmlns="" xmlns:a16="http://schemas.microsoft.com/office/drawing/2014/main" id="{7D16C196-D24B-4BE0-AE74-D44907B2A1B1}"/>
+                <a16:creationId xmlns:a16="http://schemas.microsoft.com/office/drawing/2014/main" xmlns="" id="{7D16C196-D24B-4BE0-AE74-D44907B2A1B1}"/>
               </a:ext>
             </a:extLst>
           </p:cNvPr>
@@ -5056,7 +5056,7 @@
           <p:cNvPr id="6148" name="灯片编号占位符 3">
             <a:extLst>
               <a:ext uri="{FF2B5EF4-FFF2-40B4-BE49-F238E27FC236}">
-                <a16:creationId xmlns="" xmlns:a16="http://schemas.microsoft.com/office/drawing/2014/main" id="{D230392C-ED50-49C3-93A6-10868BF6DADE}"/>
+                <a16:creationId xmlns:a16="http://schemas.microsoft.com/office/drawing/2014/main" xmlns="" id="{D230392C-ED50-49C3-93A6-10868BF6DADE}"/>
               </a:ext>
             </a:extLst>
           </p:cNvPr>
@@ -5306,7 +5306,7 @@
           <p:cNvPr id="6146" name="幻灯片图像占位符 1">
             <a:extLst>
               <a:ext uri="{FF2B5EF4-FFF2-40B4-BE49-F238E27FC236}">
-                <a16:creationId xmlns="" xmlns:a16="http://schemas.microsoft.com/office/drawing/2014/main" id="{4908B133-C54F-400F-8F70-355C57C0BE11}"/>
+                <a16:creationId xmlns:a16="http://schemas.microsoft.com/office/drawing/2014/main" xmlns="" id="{4908B133-C54F-400F-8F70-355C57C0BE11}"/>
               </a:ext>
             </a:extLst>
           </p:cNvPr>
@@ -5343,7 +5343,7 @@
           <p:cNvPr id="6147" name="备注占位符 2">
             <a:extLst>
               <a:ext uri="{FF2B5EF4-FFF2-40B4-BE49-F238E27FC236}">
-                <a16:creationId xmlns="" xmlns:a16="http://schemas.microsoft.com/office/drawing/2014/main" id="{7D16C196-D24B-4BE0-AE74-D44907B2A1B1}"/>
+                <a16:creationId xmlns:a16="http://schemas.microsoft.com/office/drawing/2014/main" xmlns="" id="{7D16C196-D24B-4BE0-AE74-D44907B2A1B1}"/>
               </a:ext>
             </a:extLst>
           </p:cNvPr>
@@ -5398,7 +5398,7 @@
           <p:cNvPr id="6148" name="灯片编号占位符 3">
             <a:extLst>
               <a:ext uri="{FF2B5EF4-FFF2-40B4-BE49-F238E27FC236}">
-                <a16:creationId xmlns="" xmlns:a16="http://schemas.microsoft.com/office/drawing/2014/main" id="{D230392C-ED50-49C3-93A6-10868BF6DADE}"/>
+                <a16:creationId xmlns:a16="http://schemas.microsoft.com/office/drawing/2014/main" xmlns="" id="{D230392C-ED50-49C3-93A6-10868BF6DADE}"/>
               </a:ext>
             </a:extLst>
           </p:cNvPr>
@@ -5648,7 +5648,7 @@
           <p:cNvPr id="6146" name="幻灯片图像占位符 1">
             <a:extLst>
               <a:ext uri="{FF2B5EF4-FFF2-40B4-BE49-F238E27FC236}">
-                <a16:creationId xmlns="" xmlns:a16="http://schemas.microsoft.com/office/drawing/2014/main" id="{4908B133-C54F-400F-8F70-355C57C0BE11}"/>
+                <a16:creationId xmlns:a16="http://schemas.microsoft.com/office/drawing/2014/main" xmlns="" id="{4908B133-C54F-400F-8F70-355C57C0BE11}"/>
               </a:ext>
             </a:extLst>
           </p:cNvPr>
@@ -5685,7 +5685,7 @@
           <p:cNvPr id="6147" name="备注占位符 2">
             <a:extLst>
               <a:ext uri="{FF2B5EF4-FFF2-40B4-BE49-F238E27FC236}">
-                <a16:creationId xmlns="" xmlns:a16="http://schemas.microsoft.com/office/drawing/2014/main" id="{7D16C196-D24B-4BE0-AE74-D44907B2A1B1}"/>
+                <a16:creationId xmlns:a16="http://schemas.microsoft.com/office/drawing/2014/main" xmlns="" id="{7D16C196-D24B-4BE0-AE74-D44907B2A1B1}"/>
               </a:ext>
             </a:extLst>
           </p:cNvPr>
@@ -5740,7 +5740,7 @@
           <p:cNvPr id="6148" name="灯片编号占位符 3">
             <a:extLst>
               <a:ext uri="{FF2B5EF4-FFF2-40B4-BE49-F238E27FC236}">
-                <a16:creationId xmlns="" xmlns:a16="http://schemas.microsoft.com/office/drawing/2014/main" id="{D230392C-ED50-49C3-93A6-10868BF6DADE}"/>
+                <a16:creationId xmlns:a16="http://schemas.microsoft.com/office/drawing/2014/main" xmlns="" id="{D230392C-ED50-49C3-93A6-10868BF6DADE}"/>
               </a:ext>
             </a:extLst>
           </p:cNvPr>
@@ -5990,7 +5990,7 @@
           <p:cNvPr id="6146" name="幻灯片图像占位符 1">
             <a:extLst>
               <a:ext uri="{FF2B5EF4-FFF2-40B4-BE49-F238E27FC236}">
-                <a16:creationId xmlns="" xmlns:a16="http://schemas.microsoft.com/office/drawing/2014/main" id="{4908B133-C54F-400F-8F70-355C57C0BE11}"/>
+                <a16:creationId xmlns:a16="http://schemas.microsoft.com/office/drawing/2014/main" xmlns="" id="{4908B133-C54F-400F-8F70-355C57C0BE11}"/>
               </a:ext>
             </a:extLst>
           </p:cNvPr>
@@ -6027,7 +6027,7 @@
           <p:cNvPr id="6147" name="备注占位符 2">
             <a:extLst>
               <a:ext uri="{FF2B5EF4-FFF2-40B4-BE49-F238E27FC236}">
-                <a16:creationId xmlns="" xmlns:a16="http://schemas.microsoft.com/office/drawing/2014/main" id="{7D16C196-D24B-4BE0-AE74-D44907B2A1B1}"/>
+                <a16:creationId xmlns:a16="http://schemas.microsoft.com/office/drawing/2014/main" xmlns="" id="{7D16C196-D24B-4BE0-AE74-D44907B2A1B1}"/>
               </a:ext>
             </a:extLst>
           </p:cNvPr>
@@ -6082,7 +6082,7 @@
           <p:cNvPr id="6148" name="灯片编号占位符 3">
             <a:extLst>
               <a:ext uri="{FF2B5EF4-FFF2-40B4-BE49-F238E27FC236}">
-                <a16:creationId xmlns="" xmlns:a16="http://schemas.microsoft.com/office/drawing/2014/main" id="{D230392C-ED50-49C3-93A6-10868BF6DADE}"/>
+                <a16:creationId xmlns:a16="http://schemas.microsoft.com/office/drawing/2014/main" xmlns="" id="{D230392C-ED50-49C3-93A6-10868BF6DADE}"/>
               </a:ext>
             </a:extLst>
           </p:cNvPr>
@@ -6332,7 +6332,7 @@
           <p:cNvPr id="6146" name="幻灯片图像占位符 1">
             <a:extLst>
               <a:ext uri="{FF2B5EF4-FFF2-40B4-BE49-F238E27FC236}">
-                <a16:creationId xmlns="" xmlns:a16="http://schemas.microsoft.com/office/drawing/2014/main" id="{4908B133-C54F-400F-8F70-355C57C0BE11}"/>
+                <a16:creationId xmlns:a16="http://schemas.microsoft.com/office/drawing/2014/main" xmlns="" id="{4908B133-C54F-400F-8F70-355C57C0BE11}"/>
               </a:ext>
             </a:extLst>
           </p:cNvPr>
@@ -6369,7 +6369,7 @@
           <p:cNvPr id="6147" name="备注占位符 2">
             <a:extLst>
               <a:ext uri="{FF2B5EF4-FFF2-40B4-BE49-F238E27FC236}">
-                <a16:creationId xmlns="" xmlns:a16="http://schemas.microsoft.com/office/drawing/2014/main" id="{7D16C196-D24B-4BE0-AE74-D44907B2A1B1}"/>
+                <a16:creationId xmlns:a16="http://schemas.microsoft.com/office/drawing/2014/main" xmlns="" id="{7D16C196-D24B-4BE0-AE74-D44907B2A1B1}"/>
               </a:ext>
             </a:extLst>
           </p:cNvPr>
@@ -6424,7 +6424,7 @@
           <p:cNvPr id="6148" name="灯片编号占位符 3">
             <a:extLst>
               <a:ext uri="{FF2B5EF4-FFF2-40B4-BE49-F238E27FC236}">
-                <a16:creationId xmlns="" xmlns:a16="http://schemas.microsoft.com/office/drawing/2014/main" id="{D230392C-ED50-49C3-93A6-10868BF6DADE}"/>
+                <a16:creationId xmlns:a16="http://schemas.microsoft.com/office/drawing/2014/main" xmlns="" id="{D230392C-ED50-49C3-93A6-10868BF6DADE}"/>
               </a:ext>
             </a:extLst>
           </p:cNvPr>
@@ -6674,7 +6674,7 @@
           <p:cNvPr id="6146" name="幻灯片图像占位符 1">
             <a:extLst>
               <a:ext uri="{FF2B5EF4-FFF2-40B4-BE49-F238E27FC236}">
-                <a16:creationId xmlns="" xmlns:a16="http://schemas.microsoft.com/office/drawing/2014/main" id="{4908B133-C54F-400F-8F70-355C57C0BE11}"/>
+                <a16:creationId xmlns:a16="http://schemas.microsoft.com/office/drawing/2014/main" xmlns="" id="{4908B133-C54F-400F-8F70-355C57C0BE11}"/>
               </a:ext>
             </a:extLst>
           </p:cNvPr>
@@ -6711,7 +6711,7 @@
           <p:cNvPr id="6147" name="备注占位符 2">
             <a:extLst>
               <a:ext uri="{FF2B5EF4-FFF2-40B4-BE49-F238E27FC236}">
-                <a16:creationId xmlns="" xmlns:a16="http://schemas.microsoft.com/office/drawing/2014/main" id="{7D16C196-D24B-4BE0-AE74-D44907B2A1B1}"/>
+                <a16:creationId xmlns:a16="http://schemas.microsoft.com/office/drawing/2014/main" xmlns="" id="{7D16C196-D24B-4BE0-AE74-D44907B2A1B1}"/>
               </a:ext>
             </a:extLst>
           </p:cNvPr>
@@ -6766,7 +6766,7 @@
           <p:cNvPr id="6148" name="灯片编号占位符 3">
             <a:extLst>
               <a:ext uri="{FF2B5EF4-FFF2-40B4-BE49-F238E27FC236}">
-                <a16:creationId xmlns="" xmlns:a16="http://schemas.microsoft.com/office/drawing/2014/main" id="{D230392C-ED50-49C3-93A6-10868BF6DADE}"/>
+                <a16:creationId xmlns:a16="http://schemas.microsoft.com/office/drawing/2014/main" xmlns="" id="{D230392C-ED50-49C3-93A6-10868BF6DADE}"/>
               </a:ext>
             </a:extLst>
           </p:cNvPr>
@@ -7016,7 +7016,7 @@
           <p:cNvPr id="6146" name="幻灯片图像占位符 1">
             <a:extLst>
               <a:ext uri="{FF2B5EF4-FFF2-40B4-BE49-F238E27FC236}">
-                <a16:creationId xmlns="" xmlns:a16="http://schemas.microsoft.com/office/drawing/2014/main" id="{4908B133-C54F-400F-8F70-355C57C0BE11}"/>
+                <a16:creationId xmlns:a16="http://schemas.microsoft.com/office/drawing/2014/main" xmlns="" id="{4908B133-C54F-400F-8F70-355C57C0BE11}"/>
               </a:ext>
             </a:extLst>
           </p:cNvPr>
@@ -7053,7 +7053,7 @@
           <p:cNvPr id="6147" name="备注占位符 2">
             <a:extLst>
               <a:ext uri="{FF2B5EF4-FFF2-40B4-BE49-F238E27FC236}">
-                <a16:creationId xmlns="" xmlns:a16="http://schemas.microsoft.com/office/drawing/2014/main" id="{7D16C196-D24B-4BE0-AE74-D44907B2A1B1}"/>
+                <a16:creationId xmlns:a16="http://schemas.microsoft.com/office/drawing/2014/main" xmlns="" id="{7D16C196-D24B-4BE0-AE74-D44907B2A1B1}"/>
               </a:ext>
             </a:extLst>
           </p:cNvPr>
@@ -7108,7 +7108,7 @@
           <p:cNvPr id="6148" name="灯片编号占位符 3">
             <a:extLst>
               <a:ext uri="{FF2B5EF4-FFF2-40B4-BE49-F238E27FC236}">
-                <a16:creationId xmlns="" xmlns:a16="http://schemas.microsoft.com/office/drawing/2014/main" id="{D230392C-ED50-49C3-93A6-10868BF6DADE}"/>
+                <a16:creationId xmlns:a16="http://schemas.microsoft.com/office/drawing/2014/main" xmlns="" id="{D230392C-ED50-49C3-93A6-10868BF6DADE}"/>
               </a:ext>
             </a:extLst>
           </p:cNvPr>
@@ -7358,7 +7358,7 @@
           <p:cNvPr id="6146" name="幻灯片图像占位符 1">
             <a:extLst>
               <a:ext uri="{FF2B5EF4-FFF2-40B4-BE49-F238E27FC236}">
-                <a16:creationId xmlns="" xmlns:a16="http://schemas.microsoft.com/office/drawing/2014/main" id="{4908B133-C54F-400F-8F70-355C57C0BE11}"/>
+                <a16:creationId xmlns:a16="http://schemas.microsoft.com/office/drawing/2014/main" xmlns="" id="{4908B133-C54F-400F-8F70-355C57C0BE11}"/>
               </a:ext>
             </a:extLst>
           </p:cNvPr>
@@ -7395,7 +7395,7 @@
           <p:cNvPr id="6147" name="备注占位符 2">
             <a:extLst>
               <a:ext uri="{FF2B5EF4-FFF2-40B4-BE49-F238E27FC236}">
-                <a16:creationId xmlns="" xmlns:a16="http://schemas.microsoft.com/office/drawing/2014/main" id="{7D16C196-D24B-4BE0-AE74-D44907B2A1B1}"/>
+                <a16:creationId xmlns:a16="http://schemas.microsoft.com/office/drawing/2014/main" xmlns="" id="{7D16C196-D24B-4BE0-AE74-D44907B2A1B1}"/>
               </a:ext>
             </a:extLst>
           </p:cNvPr>
@@ -7450,7 +7450,7 @@
           <p:cNvPr id="6148" name="灯片编号占位符 3">
             <a:extLst>
               <a:ext uri="{FF2B5EF4-FFF2-40B4-BE49-F238E27FC236}">
-                <a16:creationId xmlns="" xmlns:a16="http://schemas.microsoft.com/office/drawing/2014/main" id="{D230392C-ED50-49C3-93A6-10868BF6DADE}"/>
+                <a16:creationId xmlns:a16="http://schemas.microsoft.com/office/drawing/2014/main" xmlns="" id="{D230392C-ED50-49C3-93A6-10868BF6DADE}"/>
               </a:ext>
             </a:extLst>
           </p:cNvPr>
@@ -7700,7 +7700,7 @@
           <p:cNvPr id="6146" name="幻灯片图像占位符 1">
             <a:extLst>
               <a:ext uri="{FF2B5EF4-FFF2-40B4-BE49-F238E27FC236}">
-                <a16:creationId xmlns="" xmlns:a16="http://schemas.microsoft.com/office/drawing/2014/main" id="{4908B133-C54F-400F-8F70-355C57C0BE11}"/>
+                <a16:creationId xmlns:a16="http://schemas.microsoft.com/office/drawing/2014/main" xmlns="" id="{4908B133-C54F-400F-8F70-355C57C0BE11}"/>
               </a:ext>
             </a:extLst>
           </p:cNvPr>
@@ -7737,7 +7737,7 @@
           <p:cNvPr id="6147" name="备注占位符 2">
             <a:extLst>
               <a:ext uri="{FF2B5EF4-FFF2-40B4-BE49-F238E27FC236}">
-                <a16:creationId xmlns="" xmlns:a16="http://schemas.microsoft.com/office/drawing/2014/main" id="{7D16C196-D24B-4BE0-AE74-D44907B2A1B1}"/>
+                <a16:creationId xmlns:a16="http://schemas.microsoft.com/office/drawing/2014/main" xmlns="" id="{7D16C196-D24B-4BE0-AE74-D44907B2A1B1}"/>
               </a:ext>
             </a:extLst>
           </p:cNvPr>
@@ -7792,7 +7792,7 @@
           <p:cNvPr id="6148" name="灯片编号占位符 3">
             <a:extLst>
               <a:ext uri="{FF2B5EF4-FFF2-40B4-BE49-F238E27FC236}">
-                <a16:creationId xmlns="" xmlns:a16="http://schemas.microsoft.com/office/drawing/2014/main" id="{D230392C-ED50-49C3-93A6-10868BF6DADE}"/>
+                <a16:creationId xmlns:a16="http://schemas.microsoft.com/office/drawing/2014/main" xmlns="" id="{D230392C-ED50-49C3-93A6-10868BF6DADE}"/>
               </a:ext>
             </a:extLst>
           </p:cNvPr>
@@ -8042,7 +8042,7 @@
           <p:cNvPr id="6146" name="幻灯片图像占位符 1">
             <a:extLst>
               <a:ext uri="{FF2B5EF4-FFF2-40B4-BE49-F238E27FC236}">
-                <a16:creationId xmlns="" xmlns:a16="http://schemas.microsoft.com/office/drawing/2014/main" id="{4908B133-C54F-400F-8F70-355C57C0BE11}"/>
+                <a16:creationId xmlns:a16="http://schemas.microsoft.com/office/drawing/2014/main" xmlns="" id="{4908B133-C54F-400F-8F70-355C57C0BE11}"/>
               </a:ext>
             </a:extLst>
           </p:cNvPr>
@@ -8079,7 +8079,7 @@
           <p:cNvPr id="6147" name="备注占位符 2">
             <a:extLst>
               <a:ext uri="{FF2B5EF4-FFF2-40B4-BE49-F238E27FC236}">
-                <a16:creationId xmlns="" xmlns:a16="http://schemas.microsoft.com/office/drawing/2014/main" id="{7D16C196-D24B-4BE0-AE74-D44907B2A1B1}"/>
+                <a16:creationId xmlns:a16="http://schemas.microsoft.com/office/drawing/2014/main" xmlns="" id="{7D16C196-D24B-4BE0-AE74-D44907B2A1B1}"/>
               </a:ext>
             </a:extLst>
           </p:cNvPr>
@@ -8134,7 +8134,7 @@
           <p:cNvPr id="6148" name="灯片编号占位符 3">
             <a:extLst>
               <a:ext uri="{FF2B5EF4-FFF2-40B4-BE49-F238E27FC236}">
-                <a16:creationId xmlns="" xmlns:a16="http://schemas.microsoft.com/office/drawing/2014/main" id="{D230392C-ED50-49C3-93A6-10868BF6DADE}"/>
+                <a16:creationId xmlns:a16="http://schemas.microsoft.com/office/drawing/2014/main" xmlns="" id="{D230392C-ED50-49C3-93A6-10868BF6DADE}"/>
               </a:ext>
             </a:extLst>
           </p:cNvPr>
@@ -8384,7 +8384,7 @@
           <p:cNvPr id="6146" name="幻灯片图像占位符 1">
             <a:extLst>
               <a:ext uri="{FF2B5EF4-FFF2-40B4-BE49-F238E27FC236}">
-                <a16:creationId xmlns="" xmlns:a16="http://schemas.microsoft.com/office/drawing/2014/main" id="{4908B133-C54F-400F-8F70-355C57C0BE11}"/>
+                <a16:creationId xmlns:a16="http://schemas.microsoft.com/office/drawing/2014/main" xmlns="" id="{4908B133-C54F-400F-8F70-355C57C0BE11}"/>
               </a:ext>
             </a:extLst>
           </p:cNvPr>
@@ -8421,7 +8421,7 @@
           <p:cNvPr id="6147" name="备注占位符 2">
             <a:extLst>
               <a:ext uri="{FF2B5EF4-FFF2-40B4-BE49-F238E27FC236}">
-                <a16:creationId xmlns="" xmlns:a16="http://schemas.microsoft.com/office/drawing/2014/main" id="{7D16C196-D24B-4BE0-AE74-D44907B2A1B1}"/>
+                <a16:creationId xmlns:a16="http://schemas.microsoft.com/office/drawing/2014/main" xmlns="" id="{7D16C196-D24B-4BE0-AE74-D44907B2A1B1}"/>
               </a:ext>
             </a:extLst>
           </p:cNvPr>
@@ -8476,7 +8476,7 @@
           <p:cNvPr id="6148" name="灯片编号占位符 3">
             <a:extLst>
               <a:ext uri="{FF2B5EF4-FFF2-40B4-BE49-F238E27FC236}">
-                <a16:creationId xmlns="" xmlns:a16="http://schemas.microsoft.com/office/drawing/2014/main" id="{D230392C-ED50-49C3-93A6-10868BF6DADE}"/>
+                <a16:creationId xmlns:a16="http://schemas.microsoft.com/office/drawing/2014/main" xmlns="" id="{D230392C-ED50-49C3-93A6-10868BF6DADE}"/>
               </a:ext>
             </a:extLst>
           </p:cNvPr>
@@ -8726,7 +8726,7 @@
           <p:cNvPr id="6146" name="幻灯片图像占位符 1">
             <a:extLst>
               <a:ext uri="{FF2B5EF4-FFF2-40B4-BE49-F238E27FC236}">
-                <a16:creationId xmlns="" xmlns:a16="http://schemas.microsoft.com/office/drawing/2014/main" id="{4908B133-C54F-400F-8F70-355C57C0BE11}"/>
+                <a16:creationId xmlns:a16="http://schemas.microsoft.com/office/drawing/2014/main" xmlns="" id="{4908B133-C54F-400F-8F70-355C57C0BE11}"/>
               </a:ext>
             </a:extLst>
           </p:cNvPr>
@@ -8763,7 +8763,7 @@
           <p:cNvPr id="6147" name="备注占位符 2">
             <a:extLst>
               <a:ext uri="{FF2B5EF4-FFF2-40B4-BE49-F238E27FC236}">
-                <a16:creationId xmlns="" xmlns:a16="http://schemas.microsoft.com/office/drawing/2014/main" id="{7D16C196-D24B-4BE0-AE74-D44907B2A1B1}"/>
+                <a16:creationId xmlns:a16="http://schemas.microsoft.com/office/drawing/2014/main" xmlns="" id="{7D16C196-D24B-4BE0-AE74-D44907B2A1B1}"/>
               </a:ext>
             </a:extLst>
           </p:cNvPr>
@@ -8818,7 +8818,7 @@
           <p:cNvPr id="6148" name="灯片编号占位符 3">
             <a:extLst>
               <a:ext uri="{FF2B5EF4-FFF2-40B4-BE49-F238E27FC236}">
-                <a16:creationId xmlns="" xmlns:a16="http://schemas.microsoft.com/office/drawing/2014/main" id="{D230392C-ED50-49C3-93A6-10868BF6DADE}"/>
+                <a16:creationId xmlns:a16="http://schemas.microsoft.com/office/drawing/2014/main" xmlns="" id="{D230392C-ED50-49C3-93A6-10868BF6DADE}"/>
               </a:ext>
             </a:extLst>
           </p:cNvPr>
@@ -9068,7 +9068,7 @@
           <p:cNvPr id="6146" name="幻灯片图像占位符 1">
             <a:extLst>
               <a:ext uri="{FF2B5EF4-FFF2-40B4-BE49-F238E27FC236}">
-                <a16:creationId xmlns="" xmlns:a16="http://schemas.microsoft.com/office/drawing/2014/main" id="{4908B133-C54F-400F-8F70-355C57C0BE11}"/>
+                <a16:creationId xmlns:a16="http://schemas.microsoft.com/office/drawing/2014/main" xmlns="" id="{4908B133-C54F-400F-8F70-355C57C0BE11}"/>
               </a:ext>
             </a:extLst>
           </p:cNvPr>
@@ -9105,7 +9105,7 @@
           <p:cNvPr id="6147" name="备注占位符 2">
             <a:extLst>
               <a:ext uri="{FF2B5EF4-FFF2-40B4-BE49-F238E27FC236}">
-                <a16:creationId xmlns="" xmlns:a16="http://schemas.microsoft.com/office/drawing/2014/main" id="{7D16C196-D24B-4BE0-AE74-D44907B2A1B1}"/>
+                <a16:creationId xmlns:a16="http://schemas.microsoft.com/office/drawing/2014/main" xmlns="" id="{7D16C196-D24B-4BE0-AE74-D44907B2A1B1}"/>
               </a:ext>
             </a:extLst>
           </p:cNvPr>
@@ -9160,7 +9160,7 @@
           <p:cNvPr id="6148" name="灯片编号占位符 3">
             <a:extLst>
               <a:ext uri="{FF2B5EF4-FFF2-40B4-BE49-F238E27FC236}">
-                <a16:creationId xmlns="" xmlns:a16="http://schemas.microsoft.com/office/drawing/2014/main" id="{D230392C-ED50-49C3-93A6-10868BF6DADE}"/>
+                <a16:creationId xmlns:a16="http://schemas.microsoft.com/office/drawing/2014/main" xmlns="" id="{D230392C-ED50-49C3-93A6-10868BF6DADE}"/>
               </a:ext>
             </a:extLst>
           </p:cNvPr>
@@ -9410,7 +9410,7 @@
           <p:cNvPr id="6146" name="幻灯片图像占位符 1">
             <a:extLst>
               <a:ext uri="{FF2B5EF4-FFF2-40B4-BE49-F238E27FC236}">
-                <a16:creationId xmlns="" xmlns:a16="http://schemas.microsoft.com/office/drawing/2014/main" id="{4908B133-C54F-400F-8F70-355C57C0BE11}"/>
+                <a16:creationId xmlns:a16="http://schemas.microsoft.com/office/drawing/2014/main" xmlns="" id="{4908B133-C54F-400F-8F70-355C57C0BE11}"/>
               </a:ext>
             </a:extLst>
           </p:cNvPr>
@@ -9447,7 +9447,7 @@
           <p:cNvPr id="6147" name="备注占位符 2">
             <a:extLst>
               <a:ext uri="{FF2B5EF4-FFF2-40B4-BE49-F238E27FC236}">
-                <a16:creationId xmlns="" xmlns:a16="http://schemas.microsoft.com/office/drawing/2014/main" id="{7D16C196-D24B-4BE0-AE74-D44907B2A1B1}"/>
+                <a16:creationId xmlns:a16="http://schemas.microsoft.com/office/drawing/2014/main" xmlns="" id="{7D16C196-D24B-4BE0-AE74-D44907B2A1B1}"/>
               </a:ext>
             </a:extLst>
           </p:cNvPr>
@@ -9502,7 +9502,7 @@
           <p:cNvPr id="6148" name="灯片编号占位符 3">
             <a:extLst>
               <a:ext uri="{FF2B5EF4-FFF2-40B4-BE49-F238E27FC236}">
-                <a16:creationId xmlns="" xmlns:a16="http://schemas.microsoft.com/office/drawing/2014/main" id="{D230392C-ED50-49C3-93A6-10868BF6DADE}"/>
+                <a16:creationId xmlns:a16="http://schemas.microsoft.com/office/drawing/2014/main" xmlns="" id="{D230392C-ED50-49C3-93A6-10868BF6DADE}"/>
               </a:ext>
             </a:extLst>
           </p:cNvPr>
@@ -9752,7 +9752,7 @@
           <p:cNvPr id="6146" name="幻灯片图像占位符 1">
             <a:extLst>
               <a:ext uri="{FF2B5EF4-FFF2-40B4-BE49-F238E27FC236}">
-                <a16:creationId xmlns="" xmlns:a16="http://schemas.microsoft.com/office/drawing/2014/main" id="{4908B133-C54F-400F-8F70-355C57C0BE11}"/>
+                <a16:creationId xmlns:a16="http://schemas.microsoft.com/office/drawing/2014/main" xmlns="" id="{4908B133-C54F-400F-8F70-355C57C0BE11}"/>
               </a:ext>
             </a:extLst>
           </p:cNvPr>
@@ -9789,7 +9789,7 @@
           <p:cNvPr id="6147" name="备注占位符 2">
             <a:extLst>
               <a:ext uri="{FF2B5EF4-FFF2-40B4-BE49-F238E27FC236}">
-                <a16:creationId xmlns="" xmlns:a16="http://schemas.microsoft.com/office/drawing/2014/main" id="{7D16C196-D24B-4BE0-AE74-D44907B2A1B1}"/>
+                <a16:creationId xmlns:a16="http://schemas.microsoft.com/office/drawing/2014/main" xmlns="" id="{7D16C196-D24B-4BE0-AE74-D44907B2A1B1}"/>
               </a:ext>
             </a:extLst>
           </p:cNvPr>
@@ -9844,7 +9844,7 @@
           <p:cNvPr id="6148" name="灯片编号占位符 3">
             <a:extLst>
               <a:ext uri="{FF2B5EF4-FFF2-40B4-BE49-F238E27FC236}">
-                <a16:creationId xmlns="" xmlns:a16="http://schemas.microsoft.com/office/drawing/2014/main" id="{D230392C-ED50-49C3-93A6-10868BF6DADE}"/>
+                <a16:creationId xmlns:a16="http://schemas.microsoft.com/office/drawing/2014/main" xmlns="" id="{D230392C-ED50-49C3-93A6-10868BF6DADE}"/>
               </a:ext>
             </a:extLst>
           </p:cNvPr>
@@ -10094,7 +10094,7 @@
           <p:cNvPr id="6146" name="幻灯片图像占位符 1">
             <a:extLst>
               <a:ext uri="{FF2B5EF4-FFF2-40B4-BE49-F238E27FC236}">
-                <a16:creationId xmlns="" xmlns:a16="http://schemas.microsoft.com/office/drawing/2014/main" id="{4908B133-C54F-400F-8F70-355C57C0BE11}"/>
+                <a16:creationId xmlns:a16="http://schemas.microsoft.com/office/drawing/2014/main" xmlns="" id="{4908B133-C54F-400F-8F70-355C57C0BE11}"/>
               </a:ext>
             </a:extLst>
           </p:cNvPr>
@@ -10131,7 +10131,7 @@
           <p:cNvPr id="6147" name="备注占位符 2">
             <a:extLst>
               <a:ext uri="{FF2B5EF4-FFF2-40B4-BE49-F238E27FC236}">
-                <a16:creationId xmlns="" xmlns:a16="http://schemas.microsoft.com/office/drawing/2014/main" id="{7D16C196-D24B-4BE0-AE74-D44907B2A1B1}"/>
+                <a16:creationId xmlns:a16="http://schemas.microsoft.com/office/drawing/2014/main" xmlns="" id="{7D16C196-D24B-4BE0-AE74-D44907B2A1B1}"/>
               </a:ext>
             </a:extLst>
           </p:cNvPr>
@@ -10186,7 +10186,7 @@
           <p:cNvPr id="6148" name="灯片编号占位符 3">
             <a:extLst>
               <a:ext uri="{FF2B5EF4-FFF2-40B4-BE49-F238E27FC236}">
-                <a16:creationId xmlns="" xmlns:a16="http://schemas.microsoft.com/office/drawing/2014/main" id="{D230392C-ED50-49C3-93A6-10868BF6DADE}"/>
+                <a16:creationId xmlns:a16="http://schemas.microsoft.com/office/drawing/2014/main" xmlns="" id="{D230392C-ED50-49C3-93A6-10868BF6DADE}"/>
               </a:ext>
             </a:extLst>
           </p:cNvPr>
@@ -10436,7 +10436,7 @@
           <p:cNvPr id="6146" name="幻灯片图像占位符 1">
             <a:extLst>
               <a:ext uri="{FF2B5EF4-FFF2-40B4-BE49-F238E27FC236}">
-                <a16:creationId xmlns="" xmlns:a16="http://schemas.microsoft.com/office/drawing/2014/main" id="{4908B133-C54F-400F-8F70-355C57C0BE11}"/>
+                <a16:creationId xmlns:a16="http://schemas.microsoft.com/office/drawing/2014/main" xmlns="" id="{4908B133-C54F-400F-8F70-355C57C0BE11}"/>
               </a:ext>
             </a:extLst>
           </p:cNvPr>
@@ -10473,7 +10473,7 @@
           <p:cNvPr id="6147" name="备注占位符 2">
             <a:extLst>
               <a:ext uri="{FF2B5EF4-FFF2-40B4-BE49-F238E27FC236}">
-                <a16:creationId xmlns="" xmlns:a16="http://schemas.microsoft.com/office/drawing/2014/main" id="{7D16C196-D24B-4BE0-AE74-D44907B2A1B1}"/>
+                <a16:creationId xmlns:a16="http://schemas.microsoft.com/office/drawing/2014/main" xmlns="" id="{7D16C196-D24B-4BE0-AE74-D44907B2A1B1}"/>
               </a:ext>
             </a:extLst>
           </p:cNvPr>
@@ -10528,7 +10528,7 @@
           <p:cNvPr id="6148" name="灯片编号占位符 3">
             <a:extLst>
               <a:ext uri="{FF2B5EF4-FFF2-40B4-BE49-F238E27FC236}">
-                <a16:creationId xmlns="" xmlns:a16="http://schemas.microsoft.com/office/drawing/2014/main" id="{D230392C-ED50-49C3-93A6-10868BF6DADE}"/>
+                <a16:creationId xmlns:a16="http://schemas.microsoft.com/office/drawing/2014/main" xmlns="" id="{D230392C-ED50-49C3-93A6-10868BF6DADE}"/>
               </a:ext>
             </a:extLst>
           </p:cNvPr>
@@ -10778,7 +10778,7 @@
           <p:cNvPr id="6146" name="幻灯片图像占位符 1">
             <a:extLst>
               <a:ext uri="{FF2B5EF4-FFF2-40B4-BE49-F238E27FC236}">
-                <a16:creationId xmlns="" xmlns:a16="http://schemas.microsoft.com/office/drawing/2014/main" id="{4908B133-C54F-400F-8F70-355C57C0BE11}"/>
+                <a16:creationId xmlns:a16="http://schemas.microsoft.com/office/drawing/2014/main" xmlns="" id="{4908B133-C54F-400F-8F70-355C57C0BE11}"/>
               </a:ext>
             </a:extLst>
           </p:cNvPr>
@@ -10815,7 +10815,7 @@
           <p:cNvPr id="6147" name="备注占位符 2">
             <a:extLst>
               <a:ext uri="{FF2B5EF4-FFF2-40B4-BE49-F238E27FC236}">
-                <a16:creationId xmlns="" xmlns:a16="http://schemas.microsoft.com/office/drawing/2014/main" id="{7D16C196-D24B-4BE0-AE74-D44907B2A1B1}"/>
+                <a16:creationId xmlns:a16="http://schemas.microsoft.com/office/drawing/2014/main" xmlns="" id="{7D16C196-D24B-4BE0-AE74-D44907B2A1B1}"/>
               </a:ext>
             </a:extLst>
           </p:cNvPr>
@@ -10870,7 +10870,7 @@
           <p:cNvPr id="6148" name="灯片编号占位符 3">
             <a:extLst>
               <a:ext uri="{FF2B5EF4-FFF2-40B4-BE49-F238E27FC236}">
-                <a16:creationId xmlns="" xmlns:a16="http://schemas.microsoft.com/office/drawing/2014/main" id="{D230392C-ED50-49C3-93A6-10868BF6DADE}"/>
+                <a16:creationId xmlns:a16="http://schemas.microsoft.com/office/drawing/2014/main" xmlns="" id="{D230392C-ED50-49C3-93A6-10868BF6DADE}"/>
               </a:ext>
             </a:extLst>
           </p:cNvPr>
@@ -11120,7 +11120,7 @@
           <p:cNvPr id="6146" name="幻灯片图像占位符 1">
             <a:extLst>
               <a:ext uri="{FF2B5EF4-FFF2-40B4-BE49-F238E27FC236}">
-                <a16:creationId xmlns="" xmlns:a16="http://schemas.microsoft.com/office/drawing/2014/main" id="{4908B133-C54F-400F-8F70-355C57C0BE11}"/>
+                <a16:creationId xmlns:a16="http://schemas.microsoft.com/office/drawing/2014/main" xmlns="" id="{4908B133-C54F-400F-8F70-355C57C0BE11}"/>
               </a:ext>
             </a:extLst>
           </p:cNvPr>
@@ -11157,7 +11157,7 @@
           <p:cNvPr id="6147" name="备注占位符 2">
             <a:extLst>
               <a:ext uri="{FF2B5EF4-FFF2-40B4-BE49-F238E27FC236}">
-                <a16:creationId xmlns="" xmlns:a16="http://schemas.microsoft.com/office/drawing/2014/main" id="{7D16C196-D24B-4BE0-AE74-D44907B2A1B1}"/>
+                <a16:creationId xmlns:a16="http://schemas.microsoft.com/office/drawing/2014/main" xmlns="" id="{7D16C196-D24B-4BE0-AE74-D44907B2A1B1}"/>
               </a:ext>
             </a:extLst>
           </p:cNvPr>
@@ -11212,7 +11212,7 @@
           <p:cNvPr id="6148" name="灯片编号占位符 3">
             <a:extLst>
               <a:ext uri="{FF2B5EF4-FFF2-40B4-BE49-F238E27FC236}">
-                <a16:creationId xmlns="" xmlns:a16="http://schemas.microsoft.com/office/drawing/2014/main" id="{D230392C-ED50-49C3-93A6-10868BF6DADE}"/>
+                <a16:creationId xmlns:a16="http://schemas.microsoft.com/office/drawing/2014/main" xmlns="" id="{D230392C-ED50-49C3-93A6-10868BF6DADE}"/>
               </a:ext>
             </a:extLst>
           </p:cNvPr>
@@ -11462,7 +11462,7 @@
           <p:cNvPr id="6146" name="幻灯片图像占位符 1">
             <a:extLst>
               <a:ext uri="{FF2B5EF4-FFF2-40B4-BE49-F238E27FC236}">
-                <a16:creationId xmlns="" xmlns:a16="http://schemas.microsoft.com/office/drawing/2014/main" id="{4908B133-C54F-400F-8F70-355C57C0BE11}"/>
+                <a16:creationId xmlns:a16="http://schemas.microsoft.com/office/drawing/2014/main" xmlns="" id="{4908B133-C54F-400F-8F70-355C57C0BE11}"/>
               </a:ext>
             </a:extLst>
           </p:cNvPr>
@@ -11499,7 +11499,7 @@
           <p:cNvPr id="6147" name="备注占位符 2">
             <a:extLst>
               <a:ext uri="{FF2B5EF4-FFF2-40B4-BE49-F238E27FC236}">
-                <a16:creationId xmlns="" xmlns:a16="http://schemas.microsoft.com/office/drawing/2014/main" id="{7D16C196-D24B-4BE0-AE74-D44907B2A1B1}"/>
+                <a16:creationId xmlns:a16="http://schemas.microsoft.com/office/drawing/2014/main" xmlns="" id="{7D16C196-D24B-4BE0-AE74-D44907B2A1B1}"/>
               </a:ext>
             </a:extLst>
           </p:cNvPr>
@@ -11554,7 +11554,7 @@
           <p:cNvPr id="6148" name="灯片编号占位符 3">
             <a:extLst>
               <a:ext uri="{FF2B5EF4-FFF2-40B4-BE49-F238E27FC236}">
-                <a16:creationId xmlns="" xmlns:a16="http://schemas.microsoft.com/office/drawing/2014/main" id="{D230392C-ED50-49C3-93A6-10868BF6DADE}"/>
+                <a16:creationId xmlns:a16="http://schemas.microsoft.com/office/drawing/2014/main" xmlns="" id="{D230392C-ED50-49C3-93A6-10868BF6DADE}"/>
               </a:ext>
             </a:extLst>
           </p:cNvPr>
@@ -11804,7 +11804,7 @@
           <p:cNvPr id="2" name="标题 1">
             <a:extLst>
               <a:ext uri="{FF2B5EF4-FFF2-40B4-BE49-F238E27FC236}">
-                <a16:creationId xmlns="" xmlns:a16="http://schemas.microsoft.com/office/drawing/2014/main" id="{558AFC1F-0EC5-49BF-9268-F0FEE4B60F85}"/>
+                <a16:creationId xmlns:a16="http://schemas.microsoft.com/office/drawing/2014/main" xmlns="" id="{558AFC1F-0EC5-49BF-9268-F0FEE4B60F85}"/>
               </a:ext>
             </a:extLst>
           </p:cNvPr>
@@ -11841,7 +11841,7 @@
           <p:cNvPr id="3" name="副标题 2">
             <a:extLst>
               <a:ext uri="{FF2B5EF4-FFF2-40B4-BE49-F238E27FC236}">
-                <a16:creationId xmlns="" xmlns:a16="http://schemas.microsoft.com/office/drawing/2014/main" id="{411F25FC-AA7A-420B-9A3A-84ECEF4013AF}"/>
+                <a16:creationId xmlns:a16="http://schemas.microsoft.com/office/drawing/2014/main" xmlns="" id="{411F25FC-AA7A-420B-9A3A-84ECEF4013AF}"/>
               </a:ext>
             </a:extLst>
           </p:cNvPr>
@@ -11911,7 +11911,7 @@
           <p:cNvPr id="4" name="Rectangle 4">
             <a:extLst>
               <a:ext uri="{FF2B5EF4-FFF2-40B4-BE49-F238E27FC236}">
-                <a16:creationId xmlns="" xmlns:a16="http://schemas.microsoft.com/office/drawing/2014/main" id="{892DDA44-EBAA-4B0D-B1AD-17FC12E24344}"/>
+                <a16:creationId xmlns:a16="http://schemas.microsoft.com/office/drawing/2014/main" xmlns="" id="{892DDA44-EBAA-4B0D-B1AD-17FC12E24344}"/>
               </a:ext>
             </a:extLst>
           </p:cNvPr>
@@ -11945,7 +11945,7 @@
           <p:cNvPr id="5" name="Rectangle 5">
             <a:extLst>
               <a:ext uri="{FF2B5EF4-FFF2-40B4-BE49-F238E27FC236}">
-                <a16:creationId xmlns="" xmlns:a16="http://schemas.microsoft.com/office/drawing/2014/main" id="{59A68DBD-F8D1-4CAE-ACF1-A66E61D864F9}"/>
+                <a16:creationId xmlns:a16="http://schemas.microsoft.com/office/drawing/2014/main" xmlns="" id="{59A68DBD-F8D1-4CAE-ACF1-A66E61D864F9}"/>
               </a:ext>
             </a:extLst>
           </p:cNvPr>
@@ -11979,7 +11979,7 @@
           <p:cNvPr id="6" name="Rectangle 6">
             <a:extLst>
               <a:ext uri="{FF2B5EF4-FFF2-40B4-BE49-F238E27FC236}">
-                <a16:creationId xmlns="" xmlns:a16="http://schemas.microsoft.com/office/drawing/2014/main" id="{A406CACD-345F-48D9-9536-018A859493C9}"/>
+                <a16:creationId xmlns:a16="http://schemas.microsoft.com/office/drawing/2014/main" xmlns="" id="{A406CACD-345F-48D9-9536-018A859493C9}"/>
               </a:ext>
             </a:extLst>
           </p:cNvPr>
@@ -12050,7 +12050,7 @@
           <p:cNvPr id="2" name="标题 1">
             <a:extLst>
               <a:ext uri="{FF2B5EF4-FFF2-40B4-BE49-F238E27FC236}">
-                <a16:creationId xmlns="" xmlns:a16="http://schemas.microsoft.com/office/drawing/2014/main" id="{413EF4AD-90B9-4E2D-B48C-D5D41ADC00B1}"/>
+                <a16:creationId xmlns:a16="http://schemas.microsoft.com/office/drawing/2014/main" xmlns="" id="{413EF4AD-90B9-4E2D-B48C-D5D41ADC00B1}"/>
               </a:ext>
             </a:extLst>
           </p:cNvPr>
@@ -12078,7 +12078,7 @@
           <p:cNvPr id="3" name="竖排文字占位符 2">
             <a:extLst>
               <a:ext uri="{FF2B5EF4-FFF2-40B4-BE49-F238E27FC236}">
-                <a16:creationId xmlns="" xmlns:a16="http://schemas.microsoft.com/office/drawing/2014/main" id="{2935463B-296C-4D20-B55D-237CE160497F}"/>
+                <a16:creationId xmlns:a16="http://schemas.microsoft.com/office/drawing/2014/main" xmlns="" id="{2935463B-296C-4D20-B55D-237CE160497F}"/>
               </a:ext>
             </a:extLst>
           </p:cNvPr>
@@ -12135,7 +12135,7 @@
           <p:cNvPr id="4" name="Rectangle 4">
             <a:extLst>
               <a:ext uri="{FF2B5EF4-FFF2-40B4-BE49-F238E27FC236}">
-                <a16:creationId xmlns="" xmlns:a16="http://schemas.microsoft.com/office/drawing/2014/main" id="{1572E583-F505-4444-906F-8206A9EE7F1E}"/>
+                <a16:creationId xmlns:a16="http://schemas.microsoft.com/office/drawing/2014/main" xmlns="" id="{1572E583-F505-4444-906F-8206A9EE7F1E}"/>
               </a:ext>
             </a:extLst>
           </p:cNvPr>
@@ -12169,7 +12169,7 @@
           <p:cNvPr id="5" name="Rectangle 5">
             <a:extLst>
               <a:ext uri="{FF2B5EF4-FFF2-40B4-BE49-F238E27FC236}">
-                <a16:creationId xmlns="" xmlns:a16="http://schemas.microsoft.com/office/drawing/2014/main" id="{59D895F1-9DF8-48A9-9C6A-3A7AC93DF390}"/>
+                <a16:creationId xmlns:a16="http://schemas.microsoft.com/office/drawing/2014/main" xmlns="" id="{59D895F1-9DF8-48A9-9C6A-3A7AC93DF390}"/>
               </a:ext>
             </a:extLst>
           </p:cNvPr>
@@ -12203,7 +12203,7 @@
           <p:cNvPr id="6" name="Rectangle 6">
             <a:extLst>
               <a:ext uri="{FF2B5EF4-FFF2-40B4-BE49-F238E27FC236}">
-                <a16:creationId xmlns="" xmlns:a16="http://schemas.microsoft.com/office/drawing/2014/main" id="{291603C0-AEEF-495C-84B8-A97B75DBDA95}"/>
+                <a16:creationId xmlns:a16="http://schemas.microsoft.com/office/drawing/2014/main" xmlns="" id="{291603C0-AEEF-495C-84B8-A97B75DBDA95}"/>
               </a:ext>
             </a:extLst>
           </p:cNvPr>
@@ -12274,7 +12274,7 @@
           <p:cNvPr id="2" name="竖排标题 1">
             <a:extLst>
               <a:ext uri="{FF2B5EF4-FFF2-40B4-BE49-F238E27FC236}">
-                <a16:creationId xmlns="" xmlns:a16="http://schemas.microsoft.com/office/drawing/2014/main" id="{5C3D78EF-5EF5-478D-8576-1606D3C29178}"/>
+                <a16:creationId xmlns:a16="http://schemas.microsoft.com/office/drawing/2014/main" xmlns="" id="{5C3D78EF-5EF5-478D-8576-1606D3C29178}"/>
               </a:ext>
             </a:extLst>
           </p:cNvPr>
@@ -12307,7 +12307,7 @@
           <p:cNvPr id="3" name="竖排文字占位符 2">
             <a:extLst>
               <a:ext uri="{FF2B5EF4-FFF2-40B4-BE49-F238E27FC236}">
-                <a16:creationId xmlns="" xmlns:a16="http://schemas.microsoft.com/office/drawing/2014/main" id="{4DCD9F3D-20DB-4182-AD70-C533BC393EB5}"/>
+                <a16:creationId xmlns:a16="http://schemas.microsoft.com/office/drawing/2014/main" xmlns="" id="{4DCD9F3D-20DB-4182-AD70-C533BC393EB5}"/>
               </a:ext>
             </a:extLst>
           </p:cNvPr>
@@ -12369,7 +12369,7 @@
           <p:cNvPr id="4" name="Rectangle 4">
             <a:extLst>
               <a:ext uri="{FF2B5EF4-FFF2-40B4-BE49-F238E27FC236}">
-                <a16:creationId xmlns="" xmlns:a16="http://schemas.microsoft.com/office/drawing/2014/main" id="{80FCF88E-129A-43F9-90EC-1AB558A2726C}"/>
+                <a16:creationId xmlns:a16="http://schemas.microsoft.com/office/drawing/2014/main" xmlns="" id="{80FCF88E-129A-43F9-90EC-1AB558A2726C}"/>
               </a:ext>
             </a:extLst>
           </p:cNvPr>
@@ -12403,7 +12403,7 @@
           <p:cNvPr id="5" name="Rectangle 5">
             <a:extLst>
               <a:ext uri="{FF2B5EF4-FFF2-40B4-BE49-F238E27FC236}">
-                <a16:creationId xmlns="" xmlns:a16="http://schemas.microsoft.com/office/drawing/2014/main" id="{3124BE14-18C5-46A6-8BD5-794314EF816D}"/>
+                <a16:creationId xmlns:a16="http://schemas.microsoft.com/office/drawing/2014/main" xmlns="" id="{3124BE14-18C5-46A6-8BD5-794314EF816D}"/>
               </a:ext>
             </a:extLst>
           </p:cNvPr>
@@ -12437,7 +12437,7 @@
           <p:cNvPr id="6" name="Rectangle 6">
             <a:extLst>
               <a:ext uri="{FF2B5EF4-FFF2-40B4-BE49-F238E27FC236}">
-                <a16:creationId xmlns="" xmlns:a16="http://schemas.microsoft.com/office/drawing/2014/main" id="{597D6CFD-B5D7-46E4-8617-4E9947427CAF}"/>
+                <a16:creationId xmlns:a16="http://schemas.microsoft.com/office/drawing/2014/main" xmlns="" id="{597D6CFD-B5D7-46E4-8617-4E9947427CAF}"/>
               </a:ext>
             </a:extLst>
           </p:cNvPr>
@@ -12508,7 +12508,7 @@
           <p:cNvPr id="2" name="标题 1">
             <a:extLst>
               <a:ext uri="{FF2B5EF4-FFF2-40B4-BE49-F238E27FC236}">
-                <a16:creationId xmlns="" xmlns:a16="http://schemas.microsoft.com/office/drawing/2014/main" id="{79C7DECC-98E6-4FD9-AAA2-12B4A61F95C6}"/>
+                <a16:creationId xmlns:a16="http://schemas.microsoft.com/office/drawing/2014/main" xmlns="" id="{79C7DECC-98E6-4FD9-AAA2-12B4A61F95C6}"/>
               </a:ext>
             </a:extLst>
           </p:cNvPr>
@@ -12536,7 +12536,7 @@
           <p:cNvPr id="3" name="内容占位符 2">
             <a:extLst>
               <a:ext uri="{FF2B5EF4-FFF2-40B4-BE49-F238E27FC236}">
-                <a16:creationId xmlns="" xmlns:a16="http://schemas.microsoft.com/office/drawing/2014/main" id="{2DFFF49D-5346-4472-B7B4-2B4B12070C2F}"/>
+                <a16:creationId xmlns:a16="http://schemas.microsoft.com/office/drawing/2014/main" xmlns="" id="{2DFFF49D-5346-4472-B7B4-2B4B12070C2F}"/>
               </a:ext>
             </a:extLst>
           </p:cNvPr>
@@ -12593,7 +12593,7 @@
           <p:cNvPr id="4" name="Rectangle 4">
             <a:extLst>
               <a:ext uri="{FF2B5EF4-FFF2-40B4-BE49-F238E27FC236}">
-                <a16:creationId xmlns="" xmlns:a16="http://schemas.microsoft.com/office/drawing/2014/main" id="{3AE54C17-8281-4CEE-80BD-30C4F778807C}"/>
+                <a16:creationId xmlns:a16="http://schemas.microsoft.com/office/drawing/2014/main" xmlns="" id="{3AE54C17-8281-4CEE-80BD-30C4F778807C}"/>
               </a:ext>
             </a:extLst>
           </p:cNvPr>
@@ -12627,7 +12627,7 @@
           <p:cNvPr id="5" name="Rectangle 5">
             <a:extLst>
               <a:ext uri="{FF2B5EF4-FFF2-40B4-BE49-F238E27FC236}">
-                <a16:creationId xmlns="" xmlns:a16="http://schemas.microsoft.com/office/drawing/2014/main" id="{AA5AD5C1-CA4D-49A1-9F23-7E5608819125}"/>
+                <a16:creationId xmlns:a16="http://schemas.microsoft.com/office/drawing/2014/main" xmlns="" id="{AA5AD5C1-CA4D-49A1-9F23-7E5608819125}"/>
               </a:ext>
             </a:extLst>
           </p:cNvPr>
@@ -12661,7 +12661,7 @@
           <p:cNvPr id="6" name="Rectangle 6">
             <a:extLst>
               <a:ext uri="{FF2B5EF4-FFF2-40B4-BE49-F238E27FC236}">
-                <a16:creationId xmlns="" xmlns:a16="http://schemas.microsoft.com/office/drawing/2014/main" id="{89EA5E6E-1878-4876-87FC-34CF0D7DC10A}"/>
+                <a16:creationId xmlns:a16="http://schemas.microsoft.com/office/drawing/2014/main" xmlns="" id="{89EA5E6E-1878-4876-87FC-34CF0D7DC10A}"/>
               </a:ext>
             </a:extLst>
           </p:cNvPr>
@@ -12747,7 +12747,7 @@
           <p:cNvPr id="2" name="标题 1">
             <a:extLst>
               <a:ext uri="{FF2B5EF4-FFF2-40B4-BE49-F238E27FC236}">
-                <a16:creationId xmlns="" xmlns:a16="http://schemas.microsoft.com/office/drawing/2014/main" id="{D1C66AC4-7745-487C-B77E-D7209402F8D3}"/>
+                <a16:creationId xmlns:a16="http://schemas.microsoft.com/office/drawing/2014/main" xmlns="" id="{D1C66AC4-7745-487C-B77E-D7209402F8D3}"/>
               </a:ext>
             </a:extLst>
           </p:cNvPr>
@@ -12784,7 +12784,7 @@
           <p:cNvPr id="3" name="文本占位符 2">
             <a:extLst>
               <a:ext uri="{FF2B5EF4-FFF2-40B4-BE49-F238E27FC236}">
-                <a16:creationId xmlns="" xmlns:a16="http://schemas.microsoft.com/office/drawing/2014/main" id="{F0642504-C3D3-4FEB-932D-43E152422788}"/>
+                <a16:creationId xmlns:a16="http://schemas.microsoft.com/office/drawing/2014/main" xmlns="" id="{F0642504-C3D3-4FEB-932D-43E152422788}"/>
               </a:ext>
             </a:extLst>
           </p:cNvPr>
@@ -12855,7 +12855,7 @@
           <p:cNvPr id="4" name="Rectangle 4">
             <a:extLst>
               <a:ext uri="{FF2B5EF4-FFF2-40B4-BE49-F238E27FC236}">
-                <a16:creationId xmlns="" xmlns:a16="http://schemas.microsoft.com/office/drawing/2014/main" id="{1FDDD93F-F324-4F9A-B9D4-6849A4C3DA30}"/>
+                <a16:creationId xmlns:a16="http://schemas.microsoft.com/office/drawing/2014/main" xmlns="" id="{1FDDD93F-F324-4F9A-B9D4-6849A4C3DA30}"/>
               </a:ext>
             </a:extLst>
           </p:cNvPr>
@@ -12889,7 +12889,7 @@
           <p:cNvPr id="5" name="Rectangle 5">
             <a:extLst>
               <a:ext uri="{FF2B5EF4-FFF2-40B4-BE49-F238E27FC236}">
-                <a16:creationId xmlns="" xmlns:a16="http://schemas.microsoft.com/office/drawing/2014/main" id="{58D17B65-E136-4CDA-8948-06EE82F4BCF9}"/>
+                <a16:creationId xmlns:a16="http://schemas.microsoft.com/office/drawing/2014/main" xmlns="" id="{58D17B65-E136-4CDA-8948-06EE82F4BCF9}"/>
               </a:ext>
             </a:extLst>
           </p:cNvPr>
@@ -12923,7 +12923,7 @@
           <p:cNvPr id="6" name="Rectangle 6">
             <a:extLst>
               <a:ext uri="{FF2B5EF4-FFF2-40B4-BE49-F238E27FC236}">
-                <a16:creationId xmlns="" xmlns:a16="http://schemas.microsoft.com/office/drawing/2014/main" id="{D7125560-B1D6-4FEA-8C81-81F49D4763C4}"/>
+                <a16:creationId xmlns:a16="http://schemas.microsoft.com/office/drawing/2014/main" xmlns="" id="{D7125560-B1D6-4FEA-8C81-81F49D4763C4}"/>
               </a:ext>
             </a:extLst>
           </p:cNvPr>
@@ -12994,7 +12994,7 @@
           <p:cNvPr id="2" name="标题 1">
             <a:extLst>
               <a:ext uri="{FF2B5EF4-FFF2-40B4-BE49-F238E27FC236}">
-                <a16:creationId xmlns="" xmlns:a16="http://schemas.microsoft.com/office/drawing/2014/main" id="{235DD831-5C92-41D8-B2A4-F735B961D24C}"/>
+                <a16:creationId xmlns:a16="http://schemas.microsoft.com/office/drawing/2014/main" xmlns="" id="{235DD831-5C92-41D8-B2A4-F735B961D24C}"/>
               </a:ext>
             </a:extLst>
           </p:cNvPr>
@@ -13022,7 +13022,7 @@
           <p:cNvPr id="3" name="内容占位符 2">
             <a:extLst>
               <a:ext uri="{FF2B5EF4-FFF2-40B4-BE49-F238E27FC236}">
-                <a16:creationId xmlns="" xmlns:a16="http://schemas.microsoft.com/office/drawing/2014/main" id="{40589EF3-2B1D-4F74-90F9-1600D88D274F}"/>
+                <a16:creationId xmlns:a16="http://schemas.microsoft.com/office/drawing/2014/main" xmlns="" id="{40589EF3-2B1D-4F74-90F9-1600D88D274F}"/>
               </a:ext>
             </a:extLst>
           </p:cNvPr>
@@ -13084,7 +13084,7 @@
           <p:cNvPr id="4" name="内容占位符 3">
             <a:extLst>
               <a:ext uri="{FF2B5EF4-FFF2-40B4-BE49-F238E27FC236}">
-                <a16:creationId xmlns="" xmlns:a16="http://schemas.microsoft.com/office/drawing/2014/main" id="{31894757-41E5-4DC3-B486-BF0D8D2E3B3C}"/>
+                <a16:creationId xmlns:a16="http://schemas.microsoft.com/office/drawing/2014/main" xmlns="" id="{31894757-41E5-4DC3-B486-BF0D8D2E3B3C}"/>
               </a:ext>
             </a:extLst>
           </p:cNvPr>
@@ -13146,7 +13146,7 @@
           <p:cNvPr id="5" name="Rectangle 4">
             <a:extLst>
               <a:ext uri="{FF2B5EF4-FFF2-40B4-BE49-F238E27FC236}">
-                <a16:creationId xmlns="" xmlns:a16="http://schemas.microsoft.com/office/drawing/2014/main" id="{80B46424-4DF5-42C6-BA6D-7A5F0843E639}"/>
+                <a16:creationId xmlns:a16="http://schemas.microsoft.com/office/drawing/2014/main" xmlns="" id="{80B46424-4DF5-42C6-BA6D-7A5F0843E639}"/>
               </a:ext>
             </a:extLst>
           </p:cNvPr>
@@ -13180,7 +13180,7 @@
           <p:cNvPr id="6" name="Rectangle 5">
             <a:extLst>
               <a:ext uri="{FF2B5EF4-FFF2-40B4-BE49-F238E27FC236}">
-                <a16:creationId xmlns="" xmlns:a16="http://schemas.microsoft.com/office/drawing/2014/main" id="{54C6D9C2-78B1-4830-B70B-68D245CB3988}"/>
+                <a16:creationId xmlns:a16="http://schemas.microsoft.com/office/drawing/2014/main" xmlns="" id="{54C6D9C2-78B1-4830-B70B-68D245CB3988}"/>
               </a:ext>
             </a:extLst>
           </p:cNvPr>
@@ -13214,7 +13214,7 @@
           <p:cNvPr id="7" name="Rectangle 6">
             <a:extLst>
               <a:ext uri="{FF2B5EF4-FFF2-40B4-BE49-F238E27FC236}">
-                <a16:creationId xmlns="" xmlns:a16="http://schemas.microsoft.com/office/drawing/2014/main" id="{7C8F0C60-8AC6-4F0E-B049-CFBBD780349C}"/>
+                <a16:creationId xmlns:a16="http://schemas.microsoft.com/office/drawing/2014/main" xmlns="" id="{7C8F0C60-8AC6-4F0E-B049-CFBBD780349C}"/>
               </a:ext>
             </a:extLst>
           </p:cNvPr>
@@ -13285,7 +13285,7 @@
           <p:cNvPr id="2" name="标题 1">
             <a:extLst>
               <a:ext uri="{FF2B5EF4-FFF2-40B4-BE49-F238E27FC236}">
-                <a16:creationId xmlns="" xmlns:a16="http://schemas.microsoft.com/office/drawing/2014/main" id="{5EAC2349-C79E-4DAD-A7EC-F121B92EABC6}"/>
+                <a16:creationId xmlns:a16="http://schemas.microsoft.com/office/drawing/2014/main" xmlns="" id="{5EAC2349-C79E-4DAD-A7EC-F121B92EABC6}"/>
               </a:ext>
             </a:extLst>
           </p:cNvPr>
@@ -13318,7 +13318,7 @@
           <p:cNvPr id="3" name="文本占位符 2">
             <a:extLst>
               <a:ext uri="{FF2B5EF4-FFF2-40B4-BE49-F238E27FC236}">
-                <a16:creationId xmlns="" xmlns:a16="http://schemas.microsoft.com/office/drawing/2014/main" id="{6577C8D4-D6FA-4BC8-982E-A569EF349637}"/>
+                <a16:creationId xmlns:a16="http://schemas.microsoft.com/office/drawing/2014/main" xmlns="" id="{6577C8D4-D6FA-4BC8-982E-A569EF349637}"/>
               </a:ext>
             </a:extLst>
           </p:cNvPr>
@@ -13389,7 +13389,7 @@
           <p:cNvPr id="4" name="内容占位符 3">
             <a:extLst>
               <a:ext uri="{FF2B5EF4-FFF2-40B4-BE49-F238E27FC236}">
-                <a16:creationId xmlns="" xmlns:a16="http://schemas.microsoft.com/office/drawing/2014/main" id="{2C1BD52F-78B6-4701-9C21-05A4842E2948}"/>
+                <a16:creationId xmlns:a16="http://schemas.microsoft.com/office/drawing/2014/main" xmlns="" id="{2C1BD52F-78B6-4701-9C21-05A4842E2948}"/>
               </a:ext>
             </a:extLst>
           </p:cNvPr>
@@ -13451,7 +13451,7 @@
           <p:cNvPr id="5" name="文本占位符 4">
             <a:extLst>
               <a:ext uri="{FF2B5EF4-FFF2-40B4-BE49-F238E27FC236}">
-                <a16:creationId xmlns="" xmlns:a16="http://schemas.microsoft.com/office/drawing/2014/main" id="{41B5E117-E18D-486E-BBF0-E55E36688CE9}"/>
+                <a16:creationId xmlns:a16="http://schemas.microsoft.com/office/drawing/2014/main" xmlns="" id="{41B5E117-E18D-486E-BBF0-E55E36688CE9}"/>
               </a:ext>
             </a:extLst>
           </p:cNvPr>
@@ -13522,7 +13522,7 @@
           <p:cNvPr id="6" name="内容占位符 5">
             <a:extLst>
               <a:ext uri="{FF2B5EF4-FFF2-40B4-BE49-F238E27FC236}">
-                <a16:creationId xmlns="" xmlns:a16="http://schemas.microsoft.com/office/drawing/2014/main" id="{1A6184B9-916F-4A62-BB58-A9E1721165AE}"/>
+                <a16:creationId xmlns:a16="http://schemas.microsoft.com/office/drawing/2014/main" xmlns="" id="{1A6184B9-916F-4A62-BB58-A9E1721165AE}"/>
               </a:ext>
             </a:extLst>
           </p:cNvPr>
@@ -13584,7 +13584,7 @@
           <p:cNvPr id="7" name="Rectangle 4">
             <a:extLst>
               <a:ext uri="{FF2B5EF4-FFF2-40B4-BE49-F238E27FC236}">
-                <a16:creationId xmlns="" xmlns:a16="http://schemas.microsoft.com/office/drawing/2014/main" id="{9BDEFA24-1BB9-4A63-BE04-B2CD6F8BC7CD}"/>
+                <a16:creationId xmlns:a16="http://schemas.microsoft.com/office/drawing/2014/main" xmlns="" id="{9BDEFA24-1BB9-4A63-BE04-B2CD6F8BC7CD}"/>
               </a:ext>
             </a:extLst>
           </p:cNvPr>
@@ -13618,7 +13618,7 @@
           <p:cNvPr id="8" name="Rectangle 5">
             <a:extLst>
               <a:ext uri="{FF2B5EF4-FFF2-40B4-BE49-F238E27FC236}">
-                <a16:creationId xmlns="" xmlns:a16="http://schemas.microsoft.com/office/drawing/2014/main" id="{291227B2-68B3-4699-A416-5C0E6B364CA1}"/>
+                <a16:creationId xmlns:a16="http://schemas.microsoft.com/office/drawing/2014/main" xmlns="" id="{291227B2-68B3-4699-A416-5C0E6B364CA1}"/>
               </a:ext>
             </a:extLst>
           </p:cNvPr>
@@ -13652,7 +13652,7 @@
           <p:cNvPr id="9" name="Rectangle 6">
             <a:extLst>
               <a:ext uri="{FF2B5EF4-FFF2-40B4-BE49-F238E27FC236}">
-                <a16:creationId xmlns="" xmlns:a16="http://schemas.microsoft.com/office/drawing/2014/main" id="{DEC7A77C-9158-4F27-8F28-4C65512DA59A}"/>
+                <a16:creationId xmlns:a16="http://schemas.microsoft.com/office/drawing/2014/main" xmlns="" id="{DEC7A77C-9158-4F27-8F28-4C65512DA59A}"/>
               </a:ext>
             </a:extLst>
           </p:cNvPr>
@@ -13723,7 +13723,7 @@
           <p:cNvPr id="2" name="标题 1">
             <a:extLst>
               <a:ext uri="{FF2B5EF4-FFF2-40B4-BE49-F238E27FC236}">
-                <a16:creationId xmlns="" xmlns:a16="http://schemas.microsoft.com/office/drawing/2014/main" id="{2BC76C51-0028-4F2D-A216-4D11F5334867}"/>
+                <a16:creationId xmlns:a16="http://schemas.microsoft.com/office/drawing/2014/main" xmlns="" id="{2BC76C51-0028-4F2D-A216-4D11F5334867}"/>
               </a:ext>
             </a:extLst>
           </p:cNvPr>
@@ -13751,7 +13751,7 @@
           <p:cNvPr id="3" name="Rectangle 4">
             <a:extLst>
               <a:ext uri="{FF2B5EF4-FFF2-40B4-BE49-F238E27FC236}">
-                <a16:creationId xmlns="" xmlns:a16="http://schemas.microsoft.com/office/drawing/2014/main" id="{91CC3BF1-A404-4E2C-8AA3-99428C6F6DD8}"/>
+                <a16:creationId xmlns:a16="http://schemas.microsoft.com/office/drawing/2014/main" xmlns="" id="{91CC3BF1-A404-4E2C-8AA3-99428C6F6DD8}"/>
               </a:ext>
             </a:extLst>
           </p:cNvPr>
@@ -13785,7 +13785,7 @@
           <p:cNvPr id="4" name="Rectangle 5">
             <a:extLst>
               <a:ext uri="{FF2B5EF4-FFF2-40B4-BE49-F238E27FC236}">
-                <a16:creationId xmlns="" xmlns:a16="http://schemas.microsoft.com/office/drawing/2014/main" id="{B7D80654-FEB6-4772-9441-0475550AB2E7}"/>
+                <a16:creationId xmlns:a16="http://schemas.microsoft.com/office/drawing/2014/main" xmlns="" id="{B7D80654-FEB6-4772-9441-0475550AB2E7}"/>
               </a:ext>
             </a:extLst>
           </p:cNvPr>
@@ -13819,7 +13819,7 @@
           <p:cNvPr id="5" name="Rectangle 6">
             <a:extLst>
               <a:ext uri="{FF2B5EF4-FFF2-40B4-BE49-F238E27FC236}">
-                <a16:creationId xmlns="" xmlns:a16="http://schemas.microsoft.com/office/drawing/2014/main" id="{968FB6E6-FDEC-4041-BA77-FFA3A3FA254C}"/>
+                <a16:creationId xmlns:a16="http://schemas.microsoft.com/office/drawing/2014/main" xmlns="" id="{968FB6E6-FDEC-4041-BA77-FFA3A3FA254C}"/>
               </a:ext>
             </a:extLst>
           </p:cNvPr>
@@ -13890,7 +13890,7 @@
           <p:cNvPr id="2" name="Rectangle 4">
             <a:extLst>
               <a:ext uri="{FF2B5EF4-FFF2-40B4-BE49-F238E27FC236}">
-                <a16:creationId xmlns="" xmlns:a16="http://schemas.microsoft.com/office/drawing/2014/main" id="{6DC56CB5-95F7-41B4-8677-E12EBE1FBD59}"/>
+                <a16:creationId xmlns:a16="http://schemas.microsoft.com/office/drawing/2014/main" xmlns="" id="{6DC56CB5-95F7-41B4-8677-E12EBE1FBD59}"/>
               </a:ext>
             </a:extLst>
           </p:cNvPr>
@@ -13924,7 +13924,7 @@
           <p:cNvPr id="3" name="Rectangle 5">
             <a:extLst>
               <a:ext uri="{FF2B5EF4-FFF2-40B4-BE49-F238E27FC236}">
-                <a16:creationId xmlns="" xmlns:a16="http://schemas.microsoft.com/office/drawing/2014/main" id="{B7F0A7C5-5870-4D46-AA35-704A0D3C8668}"/>
+                <a16:creationId xmlns:a16="http://schemas.microsoft.com/office/drawing/2014/main" xmlns="" id="{B7F0A7C5-5870-4D46-AA35-704A0D3C8668}"/>
               </a:ext>
             </a:extLst>
           </p:cNvPr>
@@ -13958,7 +13958,7 @@
           <p:cNvPr id="4" name="Rectangle 6">
             <a:extLst>
               <a:ext uri="{FF2B5EF4-FFF2-40B4-BE49-F238E27FC236}">
-                <a16:creationId xmlns="" xmlns:a16="http://schemas.microsoft.com/office/drawing/2014/main" id="{11F62A78-2485-4514-AD6F-798D74A4E024}"/>
+                <a16:creationId xmlns:a16="http://schemas.microsoft.com/office/drawing/2014/main" xmlns="" id="{11F62A78-2485-4514-AD6F-798D74A4E024}"/>
               </a:ext>
             </a:extLst>
           </p:cNvPr>
@@ -14029,7 +14029,7 @@
           <p:cNvPr id="2" name="标题 1">
             <a:extLst>
               <a:ext uri="{FF2B5EF4-FFF2-40B4-BE49-F238E27FC236}">
-                <a16:creationId xmlns="" xmlns:a16="http://schemas.microsoft.com/office/drawing/2014/main" id="{0BD92CCA-0140-4241-AF84-A0DFC0FC9C4C}"/>
+                <a16:creationId xmlns:a16="http://schemas.microsoft.com/office/drawing/2014/main" xmlns="" id="{0BD92CCA-0140-4241-AF84-A0DFC0FC9C4C}"/>
               </a:ext>
             </a:extLst>
           </p:cNvPr>
@@ -14066,7 +14066,7 @@
           <p:cNvPr id="3" name="内容占位符 2">
             <a:extLst>
               <a:ext uri="{FF2B5EF4-FFF2-40B4-BE49-F238E27FC236}">
-                <a16:creationId xmlns="" xmlns:a16="http://schemas.microsoft.com/office/drawing/2014/main" id="{B149F413-03E0-42C8-96F2-A26C380EC64D}"/>
+                <a16:creationId xmlns:a16="http://schemas.microsoft.com/office/drawing/2014/main" xmlns="" id="{B149F413-03E0-42C8-96F2-A26C380EC64D}"/>
               </a:ext>
             </a:extLst>
           </p:cNvPr>
@@ -14156,7 +14156,7 @@
           <p:cNvPr id="4" name="文本占位符 3">
             <a:extLst>
               <a:ext uri="{FF2B5EF4-FFF2-40B4-BE49-F238E27FC236}">
-                <a16:creationId xmlns="" xmlns:a16="http://schemas.microsoft.com/office/drawing/2014/main" id="{80CED1CF-0137-4B94-B04B-8FDCB7C8B161}"/>
+                <a16:creationId xmlns:a16="http://schemas.microsoft.com/office/drawing/2014/main" xmlns="" id="{80CED1CF-0137-4B94-B04B-8FDCB7C8B161}"/>
               </a:ext>
             </a:extLst>
           </p:cNvPr>
@@ -14227,7 +14227,7 @@
           <p:cNvPr id="5" name="Rectangle 4">
             <a:extLst>
               <a:ext uri="{FF2B5EF4-FFF2-40B4-BE49-F238E27FC236}">
-                <a16:creationId xmlns="" xmlns:a16="http://schemas.microsoft.com/office/drawing/2014/main" id="{83A028F8-90C5-4894-9D68-1F454A6818EB}"/>
+                <a16:creationId xmlns:a16="http://schemas.microsoft.com/office/drawing/2014/main" xmlns="" id="{83A028F8-90C5-4894-9D68-1F454A6818EB}"/>
               </a:ext>
             </a:extLst>
           </p:cNvPr>
@@ -14261,7 +14261,7 @@
           <p:cNvPr id="6" name="Rectangle 5">
             <a:extLst>
               <a:ext uri="{FF2B5EF4-FFF2-40B4-BE49-F238E27FC236}">
-                <a16:creationId xmlns="" xmlns:a16="http://schemas.microsoft.com/office/drawing/2014/main" id="{4B6B0556-8025-49EB-A9D8-E82F10331C3C}"/>
+                <a16:creationId xmlns:a16="http://schemas.microsoft.com/office/drawing/2014/main" xmlns="" id="{4B6B0556-8025-49EB-A9D8-E82F10331C3C}"/>
               </a:ext>
             </a:extLst>
           </p:cNvPr>
@@ -14295,7 +14295,7 @@
           <p:cNvPr id="7" name="Rectangle 6">
             <a:extLst>
               <a:ext uri="{FF2B5EF4-FFF2-40B4-BE49-F238E27FC236}">
-                <a16:creationId xmlns="" xmlns:a16="http://schemas.microsoft.com/office/drawing/2014/main" id="{327CC8F1-4BD0-4FEC-AECB-DEAE8BCBA203}"/>
+                <a16:creationId xmlns:a16="http://schemas.microsoft.com/office/drawing/2014/main" xmlns="" id="{327CC8F1-4BD0-4FEC-AECB-DEAE8BCBA203}"/>
               </a:ext>
             </a:extLst>
           </p:cNvPr>
@@ -14366,7 +14366,7 @@
           <p:cNvPr id="2" name="标题 1">
             <a:extLst>
               <a:ext uri="{FF2B5EF4-FFF2-40B4-BE49-F238E27FC236}">
-                <a16:creationId xmlns="" xmlns:a16="http://schemas.microsoft.com/office/drawing/2014/main" id="{71EFFC16-3EB0-4FBB-96E7-A6D46DBE0860}"/>
+                <a16:creationId xmlns:a16="http://schemas.microsoft.com/office/drawing/2014/main" xmlns="" id="{71EFFC16-3EB0-4FBB-96E7-A6D46DBE0860}"/>
               </a:ext>
             </a:extLst>
           </p:cNvPr>
@@ -14403,7 +14403,7 @@
           <p:cNvPr id="3" name="图片占位符 2">
             <a:extLst>
               <a:ext uri="{FF2B5EF4-FFF2-40B4-BE49-F238E27FC236}">
-                <a16:creationId xmlns="" xmlns:a16="http://schemas.microsoft.com/office/drawing/2014/main" id="{5B422F93-2D7C-4C8D-98F2-E969A8987B29}"/>
+                <a16:creationId xmlns:a16="http://schemas.microsoft.com/office/drawing/2014/main" xmlns="" id="{5B422F93-2D7C-4C8D-98F2-E969A8987B29}"/>
               </a:ext>
             </a:extLst>
           </p:cNvPr>
@@ -14471,7 +14471,7 @@
           <p:cNvPr id="4" name="文本占位符 3">
             <a:extLst>
               <a:ext uri="{FF2B5EF4-FFF2-40B4-BE49-F238E27FC236}">
-                <a16:creationId xmlns="" xmlns:a16="http://schemas.microsoft.com/office/drawing/2014/main" id="{C6BF88C8-E1D1-4529-AA38-9722474E4E30}"/>
+                <a16:creationId xmlns:a16="http://schemas.microsoft.com/office/drawing/2014/main" xmlns="" id="{C6BF88C8-E1D1-4529-AA38-9722474E4E30}"/>
               </a:ext>
             </a:extLst>
           </p:cNvPr>
@@ -14542,7 +14542,7 @@
           <p:cNvPr id="5" name="Rectangle 4">
             <a:extLst>
               <a:ext uri="{FF2B5EF4-FFF2-40B4-BE49-F238E27FC236}">
-                <a16:creationId xmlns="" xmlns:a16="http://schemas.microsoft.com/office/drawing/2014/main" id="{8A92ADD1-D1E1-4FA7-89F9-EAC168EC5F5E}"/>
+                <a16:creationId xmlns:a16="http://schemas.microsoft.com/office/drawing/2014/main" xmlns="" id="{8A92ADD1-D1E1-4FA7-89F9-EAC168EC5F5E}"/>
               </a:ext>
             </a:extLst>
           </p:cNvPr>
@@ -14576,7 +14576,7 @@
           <p:cNvPr id="6" name="Rectangle 5">
             <a:extLst>
               <a:ext uri="{FF2B5EF4-FFF2-40B4-BE49-F238E27FC236}">
-                <a16:creationId xmlns="" xmlns:a16="http://schemas.microsoft.com/office/drawing/2014/main" id="{8AC2AA6A-2DDF-4129-A813-17A48D5D6578}"/>
+                <a16:creationId xmlns:a16="http://schemas.microsoft.com/office/drawing/2014/main" xmlns="" id="{8AC2AA6A-2DDF-4129-A813-17A48D5D6578}"/>
               </a:ext>
             </a:extLst>
           </p:cNvPr>
@@ -14610,7 +14610,7 @@
           <p:cNvPr id="7" name="Rectangle 6">
             <a:extLst>
               <a:ext uri="{FF2B5EF4-FFF2-40B4-BE49-F238E27FC236}">
-                <a16:creationId xmlns="" xmlns:a16="http://schemas.microsoft.com/office/drawing/2014/main" id="{AFAB14F8-8064-48F6-8B6D-749183531730}"/>
+                <a16:creationId xmlns:a16="http://schemas.microsoft.com/office/drawing/2014/main" xmlns="" id="{AFAB14F8-8064-48F6-8B6D-749183531730}"/>
               </a:ext>
             </a:extLst>
           </p:cNvPr>
@@ -14693,7 +14693,7 @@
           <p:cNvPr id="1026" name="Rectangle 2">
             <a:extLst>
               <a:ext uri="{FF2B5EF4-FFF2-40B4-BE49-F238E27FC236}">
-                <a16:creationId xmlns="" xmlns:a16="http://schemas.microsoft.com/office/drawing/2014/main" id="{80EF2504-E3EA-4812-BCE9-548B5A526130}"/>
+                <a16:creationId xmlns:a16="http://schemas.microsoft.com/office/drawing/2014/main" xmlns="" id="{80EF2504-E3EA-4812-BCE9-548B5A526130}"/>
               </a:ext>
             </a:extLst>
           </p:cNvPr>
@@ -14767,7 +14767,7 @@
           <p:cNvPr id="1027" name="Rectangle 3">
             <a:extLst>
               <a:ext uri="{FF2B5EF4-FFF2-40B4-BE49-F238E27FC236}">
-                <a16:creationId xmlns="" xmlns:a16="http://schemas.microsoft.com/office/drawing/2014/main" id="{7E888592-4D67-4FDC-8ACC-8DD192CAF425}"/>
+                <a16:creationId xmlns:a16="http://schemas.microsoft.com/office/drawing/2014/main" xmlns="" id="{7E888592-4D67-4FDC-8ACC-8DD192CAF425}"/>
               </a:ext>
             </a:extLst>
           </p:cNvPr>
@@ -14869,7 +14869,7 @@
           <p:cNvPr id="1028" name="Rectangle 4">
             <a:extLst>
               <a:ext uri="{FF2B5EF4-FFF2-40B4-BE49-F238E27FC236}">
-                <a16:creationId xmlns="" xmlns:a16="http://schemas.microsoft.com/office/drawing/2014/main" id="{40A3712E-94B2-46ED-881D-E1249EF279C0}"/>
+                <a16:creationId xmlns:a16="http://schemas.microsoft.com/office/drawing/2014/main" xmlns="" id="{40A3712E-94B2-46ED-881D-E1249EF279C0}"/>
               </a:ext>
             </a:extLst>
           </p:cNvPr>
@@ -14946,7 +14946,7 @@
           <p:cNvPr id="1029" name="Rectangle 5">
             <a:extLst>
               <a:ext uri="{FF2B5EF4-FFF2-40B4-BE49-F238E27FC236}">
-                <a16:creationId xmlns="" xmlns:a16="http://schemas.microsoft.com/office/drawing/2014/main" id="{26116D60-C064-41BB-B932-09348EA6EB7D}"/>
+                <a16:creationId xmlns:a16="http://schemas.microsoft.com/office/drawing/2014/main" xmlns="" id="{26116D60-C064-41BB-B932-09348EA6EB7D}"/>
               </a:ext>
             </a:extLst>
           </p:cNvPr>
@@ -15023,7 +15023,7 @@
           <p:cNvPr id="1030" name="Rectangle 6">
             <a:extLst>
               <a:ext uri="{FF2B5EF4-FFF2-40B4-BE49-F238E27FC236}">
-                <a16:creationId xmlns="" xmlns:a16="http://schemas.microsoft.com/office/drawing/2014/main" id="{4E6E49BE-DB26-4C77-94F7-5228E224DF48}"/>
+                <a16:creationId xmlns:a16="http://schemas.microsoft.com/office/drawing/2014/main" xmlns="" id="{4E6E49BE-DB26-4C77-94F7-5228E224DF48}"/>
               </a:ext>
             </a:extLst>
           </p:cNvPr>
@@ -15610,7 +15610,7 @@
           <p:cNvPr id="5122" name="标题 1">
             <a:extLst>
               <a:ext uri="{FF2B5EF4-FFF2-40B4-BE49-F238E27FC236}">
-                <a16:creationId xmlns="" xmlns:a16="http://schemas.microsoft.com/office/drawing/2014/main" id="{A237414D-C4E1-407F-9B0D-585D2D878A74}"/>
+                <a16:creationId xmlns:a16="http://schemas.microsoft.com/office/drawing/2014/main" xmlns="" id="{A237414D-C4E1-407F-9B0D-585D2D878A74}"/>
               </a:ext>
             </a:extLst>
           </p:cNvPr>
@@ -15684,7 +15684,7 @@
           <p:cNvPr id="3" name="内容占位符 2">
             <a:extLst>
               <a:ext uri="{FF2B5EF4-FFF2-40B4-BE49-F238E27FC236}">
-                <a16:creationId xmlns="" xmlns:a16="http://schemas.microsoft.com/office/drawing/2014/main" id="{3DFD56C3-3B63-4F4C-A455-80D220434928}"/>
+                <a16:creationId xmlns:a16="http://schemas.microsoft.com/office/drawing/2014/main" xmlns="" id="{3DFD56C3-3B63-4F4C-A455-80D220434928}"/>
               </a:ext>
             </a:extLst>
           </p:cNvPr>
@@ -15860,7 +15860,7 @@
           <p:cNvPr id="4" name="内容占位符 2">
             <a:extLst>
               <a:ext uri="{FF2B5EF4-FFF2-40B4-BE49-F238E27FC236}">
-                <a16:creationId xmlns="" xmlns:a16="http://schemas.microsoft.com/office/drawing/2014/main" id="{3DFD56C3-3B63-4F4C-A455-80D220434928}"/>
+                <a16:creationId xmlns:a16="http://schemas.microsoft.com/office/drawing/2014/main" xmlns="" id="{3DFD56C3-3B63-4F4C-A455-80D220434928}"/>
               </a:ext>
             </a:extLst>
           </p:cNvPr>
@@ -16229,7 +16229,7 @@
           <p:cNvPr id="5122" name="标题 1">
             <a:extLst>
               <a:ext uri="{FF2B5EF4-FFF2-40B4-BE49-F238E27FC236}">
-                <a16:creationId xmlns="" xmlns:a16="http://schemas.microsoft.com/office/drawing/2014/main" id="{A237414D-C4E1-407F-9B0D-585D2D878A74}"/>
+                <a16:creationId xmlns:a16="http://schemas.microsoft.com/office/drawing/2014/main" xmlns="" id="{A237414D-C4E1-407F-9B0D-585D2D878A74}"/>
               </a:ext>
             </a:extLst>
           </p:cNvPr>
@@ -16269,7 +16269,7 @@
           <p:cNvPr id="3" name="内容占位符 2">
             <a:extLst>
               <a:ext uri="{FF2B5EF4-FFF2-40B4-BE49-F238E27FC236}">
-                <a16:creationId xmlns="" xmlns:a16="http://schemas.microsoft.com/office/drawing/2014/main" id="{3DFD56C3-3B63-4F4C-A455-80D220434928}"/>
+                <a16:creationId xmlns:a16="http://schemas.microsoft.com/office/drawing/2014/main" xmlns="" id="{3DFD56C3-3B63-4F4C-A455-80D220434928}"/>
               </a:ext>
             </a:extLst>
           </p:cNvPr>
@@ -16691,7 +16691,7 @@
           <p:cNvPr id="5122" name="标题 1">
             <a:extLst>
               <a:ext uri="{FF2B5EF4-FFF2-40B4-BE49-F238E27FC236}">
-                <a16:creationId xmlns="" xmlns:a16="http://schemas.microsoft.com/office/drawing/2014/main" id="{A237414D-C4E1-407F-9B0D-585D2D878A74}"/>
+                <a16:creationId xmlns:a16="http://schemas.microsoft.com/office/drawing/2014/main" xmlns="" id="{A237414D-C4E1-407F-9B0D-585D2D878A74}"/>
               </a:ext>
             </a:extLst>
           </p:cNvPr>
@@ -16731,7 +16731,7 @@
           <p:cNvPr id="3" name="内容占位符 2">
             <a:extLst>
               <a:ext uri="{FF2B5EF4-FFF2-40B4-BE49-F238E27FC236}">
-                <a16:creationId xmlns="" xmlns:a16="http://schemas.microsoft.com/office/drawing/2014/main" id="{3DFD56C3-3B63-4F4C-A455-80D220434928}"/>
+                <a16:creationId xmlns:a16="http://schemas.microsoft.com/office/drawing/2014/main" xmlns="" id="{3DFD56C3-3B63-4F4C-A455-80D220434928}"/>
               </a:ext>
             </a:extLst>
           </p:cNvPr>
@@ -17199,7 +17199,7 @@
           <p:cNvPr id="5122" name="标题 1">
             <a:extLst>
               <a:ext uri="{FF2B5EF4-FFF2-40B4-BE49-F238E27FC236}">
-                <a16:creationId xmlns="" xmlns:a16="http://schemas.microsoft.com/office/drawing/2014/main" id="{A237414D-C4E1-407F-9B0D-585D2D878A74}"/>
+                <a16:creationId xmlns:a16="http://schemas.microsoft.com/office/drawing/2014/main" xmlns="" id="{A237414D-C4E1-407F-9B0D-585D2D878A74}"/>
               </a:ext>
             </a:extLst>
           </p:cNvPr>
@@ -17239,7 +17239,7 @@
           <p:cNvPr id="3" name="内容占位符 2">
             <a:extLst>
               <a:ext uri="{FF2B5EF4-FFF2-40B4-BE49-F238E27FC236}">
-                <a16:creationId xmlns="" xmlns:a16="http://schemas.microsoft.com/office/drawing/2014/main" id="{3DFD56C3-3B63-4F4C-A455-80D220434928}"/>
+                <a16:creationId xmlns:a16="http://schemas.microsoft.com/office/drawing/2014/main" xmlns="" id="{3DFD56C3-3B63-4F4C-A455-80D220434928}"/>
               </a:ext>
             </a:extLst>
           </p:cNvPr>
@@ -17322,7 +17322,7 @@
                 <a:latin typeface="Times New Roman" panose="02020603050405020304" pitchFamily="18" charset="0"/>
                 <a:cs typeface="Times New Roman" panose="02020603050405020304" pitchFamily="18" charset="0"/>
               </a:rPr>
-              <a:t>Studies</a:t>
+              <a:t>Study</a:t>
             </a:r>
             <a:endParaRPr lang="en-US" altLang="zh-CN" b="1" dirty="0">
               <a:latin typeface="Times New Roman" panose="02020603050405020304" pitchFamily="18" charset="0"/>
@@ -17615,7 +17615,7 @@
           <p:cNvPr id="5122" name="标题 1">
             <a:extLst>
               <a:ext uri="{FF2B5EF4-FFF2-40B4-BE49-F238E27FC236}">
-                <a16:creationId xmlns="" xmlns:a16="http://schemas.microsoft.com/office/drawing/2014/main" id="{A237414D-C4E1-407F-9B0D-585D2D878A74}"/>
+                <a16:creationId xmlns:a16="http://schemas.microsoft.com/office/drawing/2014/main" xmlns="" id="{A237414D-C4E1-407F-9B0D-585D2D878A74}"/>
               </a:ext>
             </a:extLst>
           </p:cNvPr>
@@ -17894,7 +17894,7 @@
           <p:cNvPr id="5122" name="标题 1">
             <a:extLst>
               <a:ext uri="{FF2B5EF4-FFF2-40B4-BE49-F238E27FC236}">
-                <a16:creationId xmlns="" xmlns:a16="http://schemas.microsoft.com/office/drawing/2014/main" id="{A237414D-C4E1-407F-9B0D-585D2D878A74}"/>
+                <a16:creationId xmlns:a16="http://schemas.microsoft.com/office/drawing/2014/main" xmlns="" id="{A237414D-C4E1-407F-9B0D-585D2D878A74}"/>
               </a:ext>
             </a:extLst>
           </p:cNvPr>
@@ -18121,7 +18121,7 @@
           <p:cNvPr id="5122" name="标题 1">
             <a:extLst>
               <a:ext uri="{FF2B5EF4-FFF2-40B4-BE49-F238E27FC236}">
-                <a16:creationId xmlns="" xmlns:a16="http://schemas.microsoft.com/office/drawing/2014/main" id="{A237414D-C4E1-407F-9B0D-585D2D878A74}"/>
+                <a16:creationId xmlns:a16="http://schemas.microsoft.com/office/drawing/2014/main" xmlns="" id="{A237414D-C4E1-407F-9B0D-585D2D878A74}"/>
               </a:ext>
             </a:extLst>
           </p:cNvPr>
@@ -18454,7 +18454,7 @@
           <p:cNvPr id="5122" name="标题 1">
             <a:extLst>
               <a:ext uri="{FF2B5EF4-FFF2-40B4-BE49-F238E27FC236}">
-                <a16:creationId xmlns="" xmlns:a16="http://schemas.microsoft.com/office/drawing/2014/main" id="{A237414D-C4E1-407F-9B0D-585D2D878A74}"/>
+                <a16:creationId xmlns:a16="http://schemas.microsoft.com/office/drawing/2014/main" xmlns="" id="{A237414D-C4E1-407F-9B0D-585D2D878A74}"/>
               </a:ext>
             </a:extLst>
           </p:cNvPr>
@@ -19042,7 +19042,7 @@
           <p:cNvPr id="5122" name="标题 1">
             <a:extLst>
               <a:ext uri="{FF2B5EF4-FFF2-40B4-BE49-F238E27FC236}">
-                <a16:creationId xmlns="" xmlns:a16="http://schemas.microsoft.com/office/drawing/2014/main" id="{A237414D-C4E1-407F-9B0D-585D2D878A74}"/>
+                <a16:creationId xmlns:a16="http://schemas.microsoft.com/office/drawing/2014/main" xmlns="" id="{A237414D-C4E1-407F-9B0D-585D2D878A74}"/>
               </a:ext>
             </a:extLst>
           </p:cNvPr>
@@ -19082,7 +19082,7 @@
           <p:cNvPr id="3" name="内容占位符 2">
             <a:extLst>
               <a:ext uri="{FF2B5EF4-FFF2-40B4-BE49-F238E27FC236}">
-                <a16:creationId xmlns="" xmlns:a16="http://schemas.microsoft.com/office/drawing/2014/main" id="{3DFD56C3-3B63-4F4C-A455-80D220434928}"/>
+                <a16:creationId xmlns:a16="http://schemas.microsoft.com/office/drawing/2014/main" xmlns="" id="{3DFD56C3-3B63-4F4C-A455-80D220434928}"/>
               </a:ext>
             </a:extLst>
           </p:cNvPr>
@@ -19151,7 +19151,14 @@
                 <a:latin typeface="Times New Roman" panose="02020603050405020304" pitchFamily="18" charset="0"/>
                 <a:cs typeface="Times New Roman" panose="02020603050405020304" pitchFamily="18" charset="0"/>
               </a:rPr>
-              <a:t>Application Case Studies</a:t>
+              <a:t>Application Case </a:t>
+            </a:r>
+            <a:r>
+              <a:rPr lang="en-US" altLang="zh-CN" b="1" dirty="0" smtClean="0">
+                <a:latin typeface="Times New Roman" panose="02020603050405020304" pitchFamily="18" charset="0"/>
+                <a:cs typeface="Times New Roman" panose="02020603050405020304" pitchFamily="18" charset="0"/>
+              </a:rPr>
+              <a:t>Study</a:t>
             </a:r>
             <a:endParaRPr lang="en-US" altLang="zh-CN" b="1" dirty="0">
               <a:latin typeface="Times New Roman" panose="02020603050405020304" pitchFamily="18" charset="0"/>
@@ -19444,7 +19451,7 @@
           <p:cNvPr id="5122" name="标题 1">
             <a:extLst>
               <a:ext uri="{FF2B5EF4-FFF2-40B4-BE49-F238E27FC236}">
-                <a16:creationId xmlns="" xmlns:a16="http://schemas.microsoft.com/office/drawing/2014/main" id="{A237414D-C4E1-407F-9B0D-585D2D878A74}"/>
+                <a16:creationId xmlns:a16="http://schemas.microsoft.com/office/drawing/2014/main" xmlns="" id="{A237414D-C4E1-407F-9B0D-585D2D878A74}"/>
               </a:ext>
             </a:extLst>
           </p:cNvPr>
@@ -19470,7 +19477,21 @@
                 <a:latin typeface="Times New Roman" panose="02020603050405020304" pitchFamily="18" charset="0"/>
                 <a:cs typeface="Times New Roman" panose="02020603050405020304" pitchFamily="18" charset="0"/>
               </a:rPr>
-              <a:t>Applications Case Studies</a:t>
+              <a:t>Application </a:t>
+            </a:r>
+            <a:r>
+              <a:rPr lang="en-US" altLang="zh-CN" dirty="0" smtClean="0">
+                <a:latin typeface="Times New Roman" panose="02020603050405020304" pitchFamily="18" charset="0"/>
+                <a:cs typeface="Times New Roman" panose="02020603050405020304" pitchFamily="18" charset="0"/>
+              </a:rPr>
+              <a:t>Case </a:t>
+            </a:r>
+            <a:r>
+              <a:rPr lang="en-US" altLang="zh-CN" dirty="0" smtClean="0">
+                <a:latin typeface="Times New Roman" panose="02020603050405020304" pitchFamily="18" charset="0"/>
+                <a:cs typeface="Times New Roman" panose="02020603050405020304" pitchFamily="18" charset="0"/>
+              </a:rPr>
+              <a:t>Study</a:t>
             </a:r>
             <a:endParaRPr lang="en-US" altLang="zh-CN" dirty="0">
               <a:latin typeface="Times New Roman" panose="02020603050405020304" pitchFamily="18" charset="0"/>
@@ -19670,7 +19691,7 @@
           <p:cNvPr id="5122" name="标题 1">
             <a:extLst>
               <a:ext uri="{FF2B5EF4-FFF2-40B4-BE49-F238E27FC236}">
-                <a16:creationId xmlns="" xmlns:a16="http://schemas.microsoft.com/office/drawing/2014/main" id="{A237414D-C4E1-407F-9B0D-585D2D878A74}"/>
+                <a16:creationId xmlns:a16="http://schemas.microsoft.com/office/drawing/2014/main" xmlns="" id="{A237414D-C4E1-407F-9B0D-585D2D878A74}"/>
               </a:ext>
             </a:extLst>
           </p:cNvPr>
@@ -19696,7 +19717,21 @@
                 <a:latin typeface="Times New Roman" panose="02020603050405020304" pitchFamily="18" charset="0"/>
                 <a:cs typeface="Times New Roman" panose="02020603050405020304" pitchFamily="18" charset="0"/>
               </a:rPr>
-              <a:t>Applications Case Studies</a:t>
+              <a:t>Application </a:t>
+            </a:r>
+            <a:r>
+              <a:rPr lang="en-US" altLang="zh-CN" dirty="0" smtClean="0">
+                <a:latin typeface="Times New Roman" panose="02020603050405020304" pitchFamily="18" charset="0"/>
+                <a:cs typeface="Times New Roman" panose="02020603050405020304" pitchFamily="18" charset="0"/>
+              </a:rPr>
+              <a:t>Case </a:t>
+            </a:r>
+            <a:r>
+              <a:rPr lang="en-US" altLang="zh-CN" dirty="0" smtClean="0">
+                <a:latin typeface="Times New Roman" panose="02020603050405020304" pitchFamily="18" charset="0"/>
+                <a:cs typeface="Times New Roman" panose="02020603050405020304" pitchFamily="18" charset="0"/>
+              </a:rPr>
+              <a:t>Study</a:t>
             </a:r>
             <a:endParaRPr lang="en-US" altLang="zh-CN" dirty="0">
               <a:latin typeface="Times New Roman" panose="02020603050405020304" pitchFamily="18" charset="0"/>
@@ -20133,7 +20168,7 @@
           <p:cNvPr id="5122" name="标题 1">
             <a:extLst>
               <a:ext uri="{FF2B5EF4-FFF2-40B4-BE49-F238E27FC236}">
-                <a16:creationId xmlns="" xmlns:a16="http://schemas.microsoft.com/office/drawing/2014/main" id="{A237414D-C4E1-407F-9B0D-585D2D878A74}"/>
+                <a16:creationId xmlns:a16="http://schemas.microsoft.com/office/drawing/2014/main" xmlns="" id="{A237414D-C4E1-407F-9B0D-585D2D878A74}"/>
               </a:ext>
             </a:extLst>
           </p:cNvPr>
@@ -20812,7 +20847,7 @@
           <p:cNvPr id="5122" name="标题 1">
             <a:extLst>
               <a:ext uri="{FF2B5EF4-FFF2-40B4-BE49-F238E27FC236}">
-                <a16:creationId xmlns="" xmlns:a16="http://schemas.microsoft.com/office/drawing/2014/main" id="{A237414D-C4E1-407F-9B0D-585D2D878A74}"/>
+                <a16:creationId xmlns:a16="http://schemas.microsoft.com/office/drawing/2014/main" xmlns="" id="{A237414D-C4E1-407F-9B0D-585D2D878A74}"/>
               </a:ext>
             </a:extLst>
           </p:cNvPr>
@@ -20838,7 +20873,21 @@
                 <a:latin typeface="Times New Roman" panose="02020603050405020304" pitchFamily="18" charset="0"/>
                 <a:cs typeface="Times New Roman" panose="02020603050405020304" pitchFamily="18" charset="0"/>
               </a:rPr>
-              <a:t>Applications Case Studies</a:t>
+              <a:t>Application </a:t>
+            </a:r>
+            <a:r>
+              <a:rPr lang="en-US" altLang="zh-CN" dirty="0" smtClean="0">
+                <a:latin typeface="Times New Roman" panose="02020603050405020304" pitchFamily="18" charset="0"/>
+                <a:cs typeface="Times New Roman" panose="02020603050405020304" pitchFamily="18" charset="0"/>
+              </a:rPr>
+              <a:t>Case </a:t>
+            </a:r>
+            <a:r>
+              <a:rPr lang="en-US" altLang="zh-CN" dirty="0" smtClean="0">
+                <a:latin typeface="Times New Roman" panose="02020603050405020304" pitchFamily="18" charset="0"/>
+                <a:cs typeface="Times New Roman" panose="02020603050405020304" pitchFamily="18" charset="0"/>
+              </a:rPr>
+              <a:t>Study</a:t>
             </a:r>
             <a:endParaRPr lang="en-US" altLang="zh-CN" dirty="0">
               <a:latin typeface="Times New Roman" panose="02020603050405020304" pitchFamily="18" charset="0"/>
@@ -21350,7 +21399,7 @@
           <p:cNvPr id="5122" name="标题 1">
             <a:extLst>
               <a:ext uri="{FF2B5EF4-FFF2-40B4-BE49-F238E27FC236}">
-                <a16:creationId xmlns="" xmlns:a16="http://schemas.microsoft.com/office/drawing/2014/main" id="{A237414D-C4E1-407F-9B0D-585D2D878A74}"/>
+                <a16:creationId xmlns:a16="http://schemas.microsoft.com/office/drawing/2014/main" xmlns="" id="{A237414D-C4E1-407F-9B0D-585D2D878A74}"/>
               </a:ext>
             </a:extLst>
           </p:cNvPr>
@@ -21376,7 +21425,14 @@
                 <a:latin typeface="Times New Roman" panose="02020603050405020304" pitchFamily="18" charset="0"/>
                 <a:cs typeface="Times New Roman" panose="02020603050405020304" pitchFamily="18" charset="0"/>
               </a:rPr>
-              <a:t>Application Case Studies</a:t>
+              <a:t>Application Case </a:t>
+            </a:r>
+            <a:r>
+              <a:rPr lang="en-US" altLang="zh-CN" dirty="0" smtClean="0">
+                <a:latin typeface="Times New Roman" panose="02020603050405020304" pitchFamily="18" charset="0"/>
+                <a:cs typeface="Times New Roman" panose="02020603050405020304" pitchFamily="18" charset="0"/>
+              </a:rPr>
+              <a:t>Study</a:t>
             </a:r>
             <a:endParaRPr lang="en-US" altLang="zh-CN" dirty="0">
               <a:latin typeface="Times New Roman" panose="02020603050405020304" pitchFamily="18" charset="0"/>
@@ -21604,7 +21660,7 @@
           <p:cNvPr id="5122" name="标题 1">
             <a:extLst>
               <a:ext uri="{FF2B5EF4-FFF2-40B4-BE49-F238E27FC236}">
-                <a16:creationId xmlns="" xmlns:a16="http://schemas.microsoft.com/office/drawing/2014/main" id="{A237414D-C4E1-407F-9B0D-585D2D878A74}"/>
+                <a16:creationId xmlns:a16="http://schemas.microsoft.com/office/drawing/2014/main" xmlns="" id="{A237414D-C4E1-407F-9B0D-585D2D878A74}"/>
               </a:ext>
             </a:extLst>
           </p:cNvPr>
@@ -21630,7 +21686,14 @@
                 <a:latin typeface="Times New Roman" panose="02020603050405020304" pitchFamily="18" charset="0"/>
                 <a:cs typeface="Times New Roman" panose="02020603050405020304" pitchFamily="18" charset="0"/>
               </a:rPr>
-              <a:t>Application Case Studies</a:t>
+              <a:t>Application Case </a:t>
+            </a:r>
+            <a:r>
+              <a:rPr lang="en-US" altLang="zh-CN" dirty="0" smtClean="0">
+                <a:latin typeface="Times New Roman" panose="02020603050405020304" pitchFamily="18" charset="0"/>
+                <a:cs typeface="Times New Roman" panose="02020603050405020304" pitchFamily="18" charset="0"/>
+              </a:rPr>
+              <a:t>Study</a:t>
             </a:r>
             <a:endParaRPr lang="en-US" altLang="zh-CN" dirty="0">
               <a:latin typeface="Times New Roman" panose="02020603050405020304" pitchFamily="18" charset="0"/>
@@ -21734,7 +21797,7 @@
           <p:cNvPr id="5122" name="标题 1">
             <a:extLst>
               <a:ext uri="{FF2B5EF4-FFF2-40B4-BE49-F238E27FC236}">
-                <a16:creationId xmlns="" xmlns:a16="http://schemas.microsoft.com/office/drawing/2014/main" id="{A237414D-C4E1-407F-9B0D-585D2D878A74}"/>
+                <a16:creationId xmlns:a16="http://schemas.microsoft.com/office/drawing/2014/main" xmlns="" id="{A237414D-C4E1-407F-9B0D-585D2D878A74}"/>
               </a:ext>
             </a:extLst>
           </p:cNvPr>
@@ -21774,7 +21837,7 @@
           <p:cNvPr id="3" name="内容占位符 2">
             <a:extLst>
               <a:ext uri="{FF2B5EF4-FFF2-40B4-BE49-F238E27FC236}">
-                <a16:creationId xmlns="" xmlns:a16="http://schemas.microsoft.com/office/drawing/2014/main" id="{3DFD56C3-3B63-4F4C-A455-80D220434928}"/>
+                <a16:creationId xmlns:a16="http://schemas.microsoft.com/office/drawing/2014/main" xmlns="" id="{3DFD56C3-3B63-4F4C-A455-80D220434928}"/>
               </a:ext>
             </a:extLst>
           </p:cNvPr>
@@ -21843,7 +21906,14 @@
                 <a:latin typeface="Times New Roman" panose="02020603050405020304" pitchFamily="18" charset="0"/>
                 <a:cs typeface="Times New Roman" panose="02020603050405020304" pitchFamily="18" charset="0"/>
               </a:rPr>
-              <a:t>Application Case Studies</a:t>
+              <a:t>Application Case </a:t>
+            </a:r>
+            <a:r>
+              <a:rPr lang="en-US" altLang="zh-CN" b="1" dirty="0" smtClean="0">
+                <a:latin typeface="Times New Roman" panose="02020603050405020304" pitchFamily="18" charset="0"/>
+                <a:cs typeface="Times New Roman" panose="02020603050405020304" pitchFamily="18" charset="0"/>
+              </a:rPr>
+              <a:t>Study</a:t>
             </a:r>
             <a:endParaRPr lang="en-US" altLang="zh-CN" b="1" dirty="0">
               <a:latin typeface="Times New Roman" panose="02020603050405020304" pitchFamily="18" charset="0"/>
@@ -22136,7 +22206,7 @@
           <p:cNvPr id="5122" name="标题 1">
             <a:extLst>
               <a:ext uri="{FF2B5EF4-FFF2-40B4-BE49-F238E27FC236}">
-                <a16:creationId xmlns="" xmlns:a16="http://schemas.microsoft.com/office/drawing/2014/main" id="{A237414D-C4E1-407F-9B0D-585D2D878A74}"/>
+                <a16:creationId xmlns:a16="http://schemas.microsoft.com/office/drawing/2014/main" xmlns="" id="{A237414D-C4E1-407F-9B0D-585D2D878A74}"/>
               </a:ext>
             </a:extLst>
           </p:cNvPr>
@@ -22450,7 +22520,7 @@
           <p:cNvPr id="5122" name="标题 1">
             <a:extLst>
               <a:ext uri="{FF2B5EF4-FFF2-40B4-BE49-F238E27FC236}">
-                <a16:creationId xmlns="" xmlns:a16="http://schemas.microsoft.com/office/drawing/2014/main" id="{A237414D-C4E1-407F-9B0D-585D2D878A74}"/>
+                <a16:creationId xmlns:a16="http://schemas.microsoft.com/office/drawing/2014/main" xmlns="" id="{A237414D-C4E1-407F-9B0D-585D2D878A74}"/>
               </a:ext>
             </a:extLst>
           </p:cNvPr>
@@ -22582,7 +22652,7 @@
           <p:cNvPr id="5122" name="标题 1">
             <a:extLst>
               <a:ext uri="{FF2B5EF4-FFF2-40B4-BE49-F238E27FC236}">
-                <a16:creationId xmlns="" xmlns:a16="http://schemas.microsoft.com/office/drawing/2014/main" id="{A237414D-C4E1-407F-9B0D-585D2D878A74}"/>
+                <a16:creationId xmlns:a16="http://schemas.microsoft.com/office/drawing/2014/main" xmlns="" id="{A237414D-C4E1-407F-9B0D-585D2D878A74}"/>
               </a:ext>
             </a:extLst>
           </p:cNvPr>
@@ -22622,7 +22692,7 @@
           <p:cNvPr id="3" name="内容占位符 2">
             <a:extLst>
               <a:ext uri="{FF2B5EF4-FFF2-40B4-BE49-F238E27FC236}">
-                <a16:creationId xmlns="" xmlns:a16="http://schemas.microsoft.com/office/drawing/2014/main" id="{3DFD56C3-3B63-4F4C-A455-80D220434928}"/>
+                <a16:creationId xmlns:a16="http://schemas.microsoft.com/office/drawing/2014/main" xmlns="" id="{3DFD56C3-3B63-4F4C-A455-80D220434928}"/>
               </a:ext>
             </a:extLst>
           </p:cNvPr>
@@ -22793,7 +22863,7 @@
           <p:cNvPr id="5122" name="标题 1">
             <a:extLst>
               <a:ext uri="{FF2B5EF4-FFF2-40B4-BE49-F238E27FC236}">
-                <a16:creationId xmlns="" xmlns:a16="http://schemas.microsoft.com/office/drawing/2014/main" id="{A237414D-C4E1-407F-9B0D-585D2D878A74}"/>
+                <a16:creationId xmlns:a16="http://schemas.microsoft.com/office/drawing/2014/main" xmlns="" id="{A237414D-C4E1-407F-9B0D-585D2D878A74}"/>
               </a:ext>
             </a:extLst>
           </p:cNvPr>
@@ -22833,7 +22903,7 @@
           <p:cNvPr id="3" name="内容占位符 2">
             <a:extLst>
               <a:ext uri="{FF2B5EF4-FFF2-40B4-BE49-F238E27FC236}">
-                <a16:creationId xmlns="" xmlns:a16="http://schemas.microsoft.com/office/drawing/2014/main" id="{3DFD56C3-3B63-4F4C-A455-80D220434928}"/>
+                <a16:creationId xmlns:a16="http://schemas.microsoft.com/office/drawing/2014/main" xmlns="" id="{3DFD56C3-3B63-4F4C-A455-80D220434928}"/>
               </a:ext>
             </a:extLst>
           </p:cNvPr>
@@ -23029,7 +23099,7 @@
           <p:cNvPr id="5122" name="标题 1">
             <a:extLst>
               <a:ext uri="{FF2B5EF4-FFF2-40B4-BE49-F238E27FC236}">
-                <a16:creationId xmlns="" xmlns:a16="http://schemas.microsoft.com/office/drawing/2014/main" id="{A237414D-C4E1-407F-9B0D-585D2D878A74}"/>
+                <a16:creationId xmlns:a16="http://schemas.microsoft.com/office/drawing/2014/main" xmlns="" id="{A237414D-C4E1-407F-9B0D-585D2D878A74}"/>
               </a:ext>
             </a:extLst>
           </p:cNvPr>
@@ -23161,7 +23231,7 @@
           <p:cNvPr id="5122" name="标题 1">
             <a:extLst>
               <a:ext uri="{FF2B5EF4-FFF2-40B4-BE49-F238E27FC236}">
-                <a16:creationId xmlns="" xmlns:a16="http://schemas.microsoft.com/office/drawing/2014/main" id="{A237414D-C4E1-407F-9B0D-585D2D878A74}"/>
+                <a16:creationId xmlns:a16="http://schemas.microsoft.com/office/drawing/2014/main" xmlns="" id="{A237414D-C4E1-407F-9B0D-585D2D878A74}"/>
               </a:ext>
             </a:extLst>
           </p:cNvPr>
@@ -23293,7 +23363,7 @@
           <p:cNvPr id="5122" name="标题 1">
             <a:extLst>
               <a:ext uri="{FF2B5EF4-FFF2-40B4-BE49-F238E27FC236}">
-                <a16:creationId xmlns="" xmlns:a16="http://schemas.microsoft.com/office/drawing/2014/main" id="{A237414D-C4E1-407F-9B0D-585D2D878A74}"/>
+                <a16:creationId xmlns:a16="http://schemas.microsoft.com/office/drawing/2014/main" xmlns="" id="{A237414D-C4E1-407F-9B0D-585D2D878A74}"/>
               </a:ext>
             </a:extLst>
           </p:cNvPr>
@@ -23333,7 +23403,7 @@
           <p:cNvPr id="3" name="内容占位符 2">
             <a:extLst>
               <a:ext uri="{FF2B5EF4-FFF2-40B4-BE49-F238E27FC236}">
-                <a16:creationId xmlns="" xmlns:a16="http://schemas.microsoft.com/office/drawing/2014/main" id="{3DFD56C3-3B63-4F4C-A455-80D220434928}"/>
+                <a16:creationId xmlns:a16="http://schemas.microsoft.com/office/drawing/2014/main" xmlns="" id="{3DFD56C3-3B63-4F4C-A455-80D220434928}"/>
               </a:ext>
             </a:extLst>
           </p:cNvPr>
@@ -23402,7 +23472,14 @@
                 <a:latin typeface="Times New Roman" panose="02020603050405020304" pitchFamily="18" charset="0"/>
                 <a:cs typeface="Times New Roman" panose="02020603050405020304" pitchFamily="18" charset="0"/>
               </a:rPr>
-              <a:t>Application Case Studies</a:t>
+              <a:t>Application Case </a:t>
+            </a:r>
+            <a:r>
+              <a:rPr lang="en-US" altLang="zh-CN" b="1" dirty="0" smtClean="0">
+                <a:latin typeface="Times New Roman" panose="02020603050405020304" pitchFamily="18" charset="0"/>
+                <a:cs typeface="Times New Roman" panose="02020603050405020304" pitchFamily="18" charset="0"/>
+              </a:rPr>
+              <a:t>Study</a:t>
             </a:r>
             <a:endParaRPr lang="en-US" altLang="zh-CN" b="1" dirty="0">
               <a:latin typeface="Times New Roman" panose="02020603050405020304" pitchFamily="18" charset="0"/>
@@ -23692,7 +23769,7 @@
           <p:cNvPr id="5122" name="标题 1">
             <a:extLst>
               <a:ext uri="{FF2B5EF4-FFF2-40B4-BE49-F238E27FC236}">
-                <a16:creationId xmlns="" xmlns:a16="http://schemas.microsoft.com/office/drawing/2014/main" id="{A237414D-C4E1-407F-9B0D-585D2D878A74}"/>
+                <a16:creationId xmlns:a16="http://schemas.microsoft.com/office/drawing/2014/main" xmlns="" id="{A237414D-C4E1-407F-9B0D-585D2D878A74}"/>
               </a:ext>
             </a:extLst>
           </p:cNvPr>
@@ -23824,7 +23901,7 @@
           <p:cNvPr id="5122" name="标题 1">
             <a:extLst>
               <a:ext uri="{FF2B5EF4-FFF2-40B4-BE49-F238E27FC236}">
-                <a16:creationId xmlns="" xmlns:a16="http://schemas.microsoft.com/office/drawing/2014/main" id="{A237414D-C4E1-407F-9B0D-585D2D878A74}"/>
+                <a16:creationId xmlns:a16="http://schemas.microsoft.com/office/drawing/2014/main" xmlns="" id="{A237414D-C4E1-407F-9B0D-585D2D878A74}"/>
               </a:ext>
             </a:extLst>
           </p:cNvPr>
@@ -23864,7 +23941,7 @@
           <p:cNvPr id="3" name="内容占位符 2">
             <a:extLst>
               <a:ext uri="{FF2B5EF4-FFF2-40B4-BE49-F238E27FC236}">
-                <a16:creationId xmlns="" xmlns:a16="http://schemas.microsoft.com/office/drawing/2014/main" id="{3DFD56C3-3B63-4F4C-A455-80D220434928}"/>
+                <a16:creationId xmlns:a16="http://schemas.microsoft.com/office/drawing/2014/main" xmlns="" id="{3DFD56C3-3B63-4F4C-A455-80D220434928}"/>
               </a:ext>
             </a:extLst>
           </p:cNvPr>
@@ -23920,7 +23997,27 @@
                 <a:latin typeface="Times New Roman" panose="02020603050405020304" pitchFamily="18" charset="0"/>
                 <a:cs typeface="Times New Roman" panose="02020603050405020304" pitchFamily="18" charset="0"/>
               </a:rPr>
-              <a:t>MPI-ACC Design &amp; Optimizations</a:t>
+              <a:t>MPI-ACC Design &amp; </a:t>
+            </a:r>
+            <a:r>
+              <a:rPr lang="en-US" altLang="zh-CN" b="1" dirty="0" smtClean="0">
+                <a:latin typeface="Times New Roman" panose="02020603050405020304" pitchFamily="18" charset="0"/>
+                <a:cs typeface="Times New Roman" panose="02020603050405020304" pitchFamily="18" charset="0"/>
+              </a:rPr>
+              <a:t>Optimizations</a:t>
+            </a:r>
+          </a:p>
+          <a:p>
+            <a:pPr>
+              <a:buFont typeface="Arial" panose="020B0604020202020204" pitchFamily="34" charset="0"/>
+              <a:buChar char="•"/>
+            </a:pPr>
+            <a:r>
+              <a:rPr lang="en-US" altLang="zh-CN" b="1" dirty="0" smtClean="0">
+                <a:latin typeface="Times New Roman" panose="02020603050405020304" pitchFamily="18" charset="0"/>
+                <a:cs typeface="Times New Roman" panose="02020603050405020304" pitchFamily="18" charset="0"/>
+              </a:rPr>
+              <a:t>Application Case Study</a:t>
             </a:r>
             <a:endParaRPr lang="en-US" altLang="zh-CN" b="1" dirty="0">
               <a:latin typeface="Times New Roman" panose="02020603050405020304" pitchFamily="18" charset="0"/>
@@ -24133,6 +24230,33 @@
                                   </p:childTnLst>
                                 </p:cTn>
                               </p:par>
+                              <p:par>
+                                <p:cTn id="13" presetID="3" presetClass="emph" presetSubtype="2" fill="hold" nodeType="withEffect">
+                                  <p:stCondLst>
+                                    <p:cond delay="0"/>
+                                  </p:stCondLst>
+                                  <p:childTnLst>
+                                    <p:animClr clrSpc="rgb" dir="cw">
+                                      <p:cBhvr override="childStyle">
+                                        <p:cTn id="14" dur="10" fill="hold"/>
+                                        <p:tgtEl>
+                                          <p:spTgt spid="3">
+                                            <p:txEl>
+                                              <p:pRg st="4" end="4"/>
+                                            </p:txEl>
+                                          </p:spTgt>
+                                        </p:tgtEl>
+                                        <p:attrNameLst>
+                                          <p:attrName>style.color</p:attrName>
+                                        </p:attrNameLst>
+                                      </p:cBhvr>
+                                      <p:to>
+                                        <a:srgbClr val="D8D8D8"/>
+                                      </p:to>
+                                    </p:animClr>
+                                  </p:childTnLst>
+                                </p:cTn>
+                              </p:par>
                             </p:childTnLst>
                           </p:cTn>
                         </p:par>
@@ -24186,7 +24310,7 @@
           <p:cNvPr id="5122" name="标题 1">
             <a:extLst>
               <a:ext uri="{FF2B5EF4-FFF2-40B4-BE49-F238E27FC236}">
-                <a16:creationId xmlns="" xmlns:a16="http://schemas.microsoft.com/office/drawing/2014/main" id="{A237414D-C4E1-407F-9B0D-585D2D878A74}"/>
+                <a16:creationId xmlns:a16="http://schemas.microsoft.com/office/drawing/2014/main" xmlns="" id="{A237414D-C4E1-407F-9B0D-585D2D878A74}"/>
               </a:ext>
             </a:extLst>
           </p:cNvPr>
@@ -24226,7 +24350,7 @@
           <p:cNvPr id="3" name="内容占位符 2">
             <a:extLst>
               <a:ext uri="{FF2B5EF4-FFF2-40B4-BE49-F238E27FC236}">
-                <a16:creationId xmlns="" xmlns:a16="http://schemas.microsoft.com/office/drawing/2014/main" id="{3DFD56C3-3B63-4F4C-A455-80D220434928}"/>
+                <a16:creationId xmlns:a16="http://schemas.microsoft.com/office/drawing/2014/main" xmlns="" id="{3DFD56C3-3B63-4F4C-A455-80D220434928}"/>
               </a:ext>
             </a:extLst>
           </p:cNvPr>
@@ -24507,11 +24631,7 @@
             </a:pPr>
             <a:r>
               <a:rPr lang="en-US" altLang="zh-CN" sz="7200" b="1" dirty="0" smtClean="0"/>
-              <a:t>Thanks &amp; </a:t>
-            </a:r>
-            <a:r>
-              <a:rPr lang="en-US" altLang="zh-CN" sz="7200" b="1" dirty="0" smtClean="0"/>
-              <a:t>Comments!</a:t>
+              <a:t>Thanks &amp; Comments!</a:t>
             </a:r>
             <a:endParaRPr lang="zh-CN" altLang="en-US" sz="7200" b="1" dirty="0"/>
           </a:p>
@@ -24559,7 +24679,7 @@
           <p:cNvPr id="5122" name="标题 1">
             <a:extLst>
               <a:ext uri="{FF2B5EF4-FFF2-40B4-BE49-F238E27FC236}">
-                <a16:creationId xmlns="" xmlns:a16="http://schemas.microsoft.com/office/drawing/2014/main" id="{A237414D-C4E1-407F-9B0D-585D2D878A74}"/>
+                <a16:creationId xmlns:a16="http://schemas.microsoft.com/office/drawing/2014/main" xmlns="" id="{A237414D-C4E1-407F-9B0D-585D2D878A74}"/>
               </a:ext>
             </a:extLst>
           </p:cNvPr>
@@ -24599,7 +24719,7 @@
           <p:cNvPr id="3" name="内容占位符 2">
             <a:extLst>
               <a:ext uri="{FF2B5EF4-FFF2-40B4-BE49-F238E27FC236}">
-                <a16:creationId xmlns="" xmlns:a16="http://schemas.microsoft.com/office/drawing/2014/main" id="{3DFD56C3-3B63-4F4C-A455-80D220434928}"/>
+                <a16:creationId xmlns:a16="http://schemas.microsoft.com/office/drawing/2014/main" xmlns="" id="{3DFD56C3-3B63-4F4C-A455-80D220434928}"/>
               </a:ext>
             </a:extLst>
           </p:cNvPr>
@@ -24802,7 +24922,7 @@
           <p:cNvPr id="5122" name="标题 1">
             <a:extLst>
               <a:ext uri="{FF2B5EF4-FFF2-40B4-BE49-F238E27FC236}">
-                <a16:creationId xmlns="" xmlns:a16="http://schemas.microsoft.com/office/drawing/2014/main" id="{A237414D-C4E1-407F-9B0D-585D2D878A74}"/>
+                <a16:creationId xmlns:a16="http://schemas.microsoft.com/office/drawing/2014/main" xmlns="" id="{A237414D-C4E1-407F-9B0D-585D2D878A74}"/>
               </a:ext>
             </a:extLst>
           </p:cNvPr>
@@ -24842,7 +24962,7 @@
           <p:cNvPr id="3" name="内容占位符 2">
             <a:extLst>
               <a:ext uri="{FF2B5EF4-FFF2-40B4-BE49-F238E27FC236}">
-                <a16:creationId xmlns="" xmlns:a16="http://schemas.microsoft.com/office/drawing/2014/main" id="{3DFD56C3-3B63-4F4C-A455-80D220434928}"/>
+                <a16:creationId xmlns:a16="http://schemas.microsoft.com/office/drawing/2014/main" xmlns="" id="{3DFD56C3-3B63-4F4C-A455-80D220434928}"/>
               </a:ext>
             </a:extLst>
           </p:cNvPr>
@@ -25142,7 +25262,7 @@
           <p:cNvPr id="5122" name="标题 1">
             <a:extLst>
               <a:ext uri="{FF2B5EF4-FFF2-40B4-BE49-F238E27FC236}">
-                <a16:creationId xmlns="" xmlns:a16="http://schemas.microsoft.com/office/drawing/2014/main" id="{A237414D-C4E1-407F-9B0D-585D2D878A74}"/>
+                <a16:creationId xmlns:a16="http://schemas.microsoft.com/office/drawing/2014/main" xmlns="" id="{A237414D-C4E1-407F-9B0D-585D2D878A74}"/>
               </a:ext>
             </a:extLst>
           </p:cNvPr>
@@ -25182,7 +25302,7 @@
           <p:cNvPr id="3" name="内容占位符 2">
             <a:extLst>
               <a:ext uri="{FF2B5EF4-FFF2-40B4-BE49-F238E27FC236}">
-                <a16:creationId xmlns="" xmlns:a16="http://schemas.microsoft.com/office/drawing/2014/main" id="{3DFD56C3-3B63-4F4C-A455-80D220434928}"/>
+                <a16:creationId xmlns:a16="http://schemas.microsoft.com/office/drawing/2014/main" xmlns="" id="{3DFD56C3-3B63-4F4C-A455-80D220434928}"/>
               </a:ext>
             </a:extLst>
           </p:cNvPr>
@@ -25258,7 +25378,14 @@
                 <a:latin typeface="Times New Roman" panose="02020603050405020304" pitchFamily="18" charset="0"/>
                 <a:cs typeface="Times New Roman" panose="02020603050405020304" pitchFamily="18" charset="0"/>
               </a:rPr>
-              <a:t>Application Case Studies</a:t>
+              <a:t>Application Case </a:t>
+            </a:r>
+            <a:r>
+              <a:rPr lang="en-US" altLang="zh-CN" b="1" dirty="0" smtClean="0">
+                <a:latin typeface="Times New Roman" panose="02020603050405020304" pitchFamily="18" charset="0"/>
+                <a:cs typeface="Times New Roman" panose="02020603050405020304" pitchFamily="18" charset="0"/>
+              </a:rPr>
+              <a:t>Study</a:t>
             </a:r>
             <a:endParaRPr lang="en-US" altLang="zh-CN" b="1" dirty="0">
               <a:latin typeface="Times New Roman" panose="02020603050405020304" pitchFamily="18" charset="0"/>
@@ -25551,7 +25678,7 @@
           <p:cNvPr id="5122" name="标题 1">
             <a:extLst>
               <a:ext uri="{FF2B5EF4-FFF2-40B4-BE49-F238E27FC236}">
-                <a16:creationId xmlns="" xmlns:a16="http://schemas.microsoft.com/office/drawing/2014/main" id="{A237414D-C4E1-407F-9B0D-585D2D878A74}"/>
+                <a16:creationId xmlns:a16="http://schemas.microsoft.com/office/drawing/2014/main" xmlns="" id="{A237414D-C4E1-407F-9B0D-585D2D878A74}"/>
               </a:ext>
             </a:extLst>
           </p:cNvPr>
@@ -25591,7 +25718,7 @@
           <p:cNvPr id="3" name="内容占位符 2">
             <a:extLst>
               <a:ext uri="{FF2B5EF4-FFF2-40B4-BE49-F238E27FC236}">
-                <a16:creationId xmlns="" xmlns:a16="http://schemas.microsoft.com/office/drawing/2014/main" id="{3DFD56C3-3B63-4F4C-A455-80D220434928}"/>
+                <a16:creationId xmlns:a16="http://schemas.microsoft.com/office/drawing/2014/main" xmlns="" id="{3DFD56C3-3B63-4F4C-A455-80D220434928}"/>
               </a:ext>
             </a:extLst>
           </p:cNvPr>
@@ -25850,7 +25977,7 @@
           <p:cNvPr id="5122" name="标题 1">
             <a:extLst>
               <a:ext uri="{FF2B5EF4-FFF2-40B4-BE49-F238E27FC236}">
-                <a16:creationId xmlns="" xmlns:a16="http://schemas.microsoft.com/office/drawing/2014/main" id="{A237414D-C4E1-407F-9B0D-585D2D878A74}"/>
+                <a16:creationId xmlns:a16="http://schemas.microsoft.com/office/drawing/2014/main" xmlns="" id="{A237414D-C4E1-407F-9B0D-585D2D878A74}"/>
               </a:ext>
             </a:extLst>
           </p:cNvPr>
@@ -25890,7 +26017,7 @@
           <p:cNvPr id="3" name="内容占位符 2">
             <a:extLst>
               <a:ext uri="{FF2B5EF4-FFF2-40B4-BE49-F238E27FC236}">
-                <a16:creationId xmlns="" xmlns:a16="http://schemas.microsoft.com/office/drawing/2014/main" id="{3DFD56C3-3B63-4F4C-A455-80D220434928}"/>
+                <a16:creationId xmlns:a16="http://schemas.microsoft.com/office/drawing/2014/main" xmlns="" id="{3DFD56C3-3B63-4F4C-A455-80D220434928}"/>
               </a:ext>
             </a:extLst>
           </p:cNvPr>
@@ -26208,7 +26335,7 @@
           <p:cNvPr id="5122" name="标题 1">
             <a:extLst>
               <a:ext uri="{FF2B5EF4-FFF2-40B4-BE49-F238E27FC236}">
-                <a16:creationId xmlns="" xmlns:a16="http://schemas.microsoft.com/office/drawing/2014/main" id="{A237414D-C4E1-407F-9B0D-585D2D878A74}"/>
+                <a16:creationId xmlns:a16="http://schemas.microsoft.com/office/drawing/2014/main" xmlns="" id="{A237414D-C4E1-407F-9B0D-585D2D878A74}"/>
               </a:ext>
             </a:extLst>
           </p:cNvPr>

--- a/Technical-Documents/Parallel-Computing/parallel-computing-course/MPI-ACC Accelerator-Aware MPI for Scientific Applications.pptx
+++ b/Technical-Documents/Parallel-Computing/parallel-computing-course/MPI-ACC Accelerator-Aware MPI for Scientific Applications.pptx
@@ -229,7 +229,7 @@
           <a:p>
             <a:fld id="{73A93084-53C3-4D41-9C09-AF8810E82D9D}" type="datetimeFigureOut">
               <a:rPr lang="zh-CN" altLang="en-US" smtClean="0"/>
-              <a:t>2019/3/28</a:t>
+              <a:t>2019/3/31</a:t>
             </a:fld>
             <a:endParaRPr lang="zh-CN" altLang="en-US"/>
           </a:p>
@@ -518,7 +518,7 @@
           <p:cNvPr id="6146" name="幻灯片图像占位符 1">
             <a:extLst>
               <a:ext uri="{FF2B5EF4-FFF2-40B4-BE49-F238E27FC236}">
-                <a16:creationId xmlns:a16="http://schemas.microsoft.com/office/drawing/2014/main" xmlns="" id="{4908B133-C54F-400F-8F70-355C57C0BE11}"/>
+                <a16:creationId xmlns="" xmlns:a16="http://schemas.microsoft.com/office/drawing/2014/main" id="{4908B133-C54F-400F-8F70-355C57C0BE11}"/>
               </a:ext>
             </a:extLst>
           </p:cNvPr>
@@ -555,7 +555,7 @@
           <p:cNvPr id="6147" name="备注占位符 2">
             <a:extLst>
               <a:ext uri="{FF2B5EF4-FFF2-40B4-BE49-F238E27FC236}">
-                <a16:creationId xmlns:a16="http://schemas.microsoft.com/office/drawing/2014/main" xmlns="" id="{7D16C196-D24B-4BE0-AE74-D44907B2A1B1}"/>
+                <a16:creationId xmlns="" xmlns:a16="http://schemas.microsoft.com/office/drawing/2014/main" id="{7D16C196-D24B-4BE0-AE74-D44907B2A1B1}"/>
               </a:ext>
             </a:extLst>
           </p:cNvPr>
@@ -610,7 +610,7 @@
           <p:cNvPr id="6148" name="灯片编号占位符 3">
             <a:extLst>
               <a:ext uri="{FF2B5EF4-FFF2-40B4-BE49-F238E27FC236}">
-                <a16:creationId xmlns:a16="http://schemas.microsoft.com/office/drawing/2014/main" xmlns="" id="{D230392C-ED50-49C3-93A6-10868BF6DADE}"/>
+                <a16:creationId xmlns="" xmlns:a16="http://schemas.microsoft.com/office/drawing/2014/main" id="{D230392C-ED50-49C3-93A6-10868BF6DADE}"/>
               </a:ext>
             </a:extLst>
           </p:cNvPr>
@@ -860,7 +860,7 @@
           <p:cNvPr id="6146" name="幻灯片图像占位符 1">
             <a:extLst>
               <a:ext uri="{FF2B5EF4-FFF2-40B4-BE49-F238E27FC236}">
-                <a16:creationId xmlns:a16="http://schemas.microsoft.com/office/drawing/2014/main" xmlns="" id="{4908B133-C54F-400F-8F70-355C57C0BE11}"/>
+                <a16:creationId xmlns="" xmlns:a16="http://schemas.microsoft.com/office/drawing/2014/main" id="{4908B133-C54F-400F-8F70-355C57C0BE11}"/>
               </a:ext>
             </a:extLst>
           </p:cNvPr>
@@ -897,7 +897,7 @@
           <p:cNvPr id="6147" name="备注占位符 2">
             <a:extLst>
               <a:ext uri="{FF2B5EF4-FFF2-40B4-BE49-F238E27FC236}">
-                <a16:creationId xmlns:a16="http://schemas.microsoft.com/office/drawing/2014/main" xmlns="" id="{7D16C196-D24B-4BE0-AE74-D44907B2A1B1}"/>
+                <a16:creationId xmlns="" xmlns:a16="http://schemas.microsoft.com/office/drawing/2014/main" id="{7D16C196-D24B-4BE0-AE74-D44907B2A1B1}"/>
               </a:ext>
             </a:extLst>
           </p:cNvPr>
@@ -952,7 +952,7 @@
           <p:cNvPr id="6148" name="灯片编号占位符 3">
             <a:extLst>
               <a:ext uri="{FF2B5EF4-FFF2-40B4-BE49-F238E27FC236}">
-                <a16:creationId xmlns:a16="http://schemas.microsoft.com/office/drawing/2014/main" xmlns="" id="{D230392C-ED50-49C3-93A6-10868BF6DADE}"/>
+                <a16:creationId xmlns="" xmlns:a16="http://schemas.microsoft.com/office/drawing/2014/main" id="{D230392C-ED50-49C3-93A6-10868BF6DADE}"/>
               </a:ext>
             </a:extLst>
           </p:cNvPr>
@@ -1202,7 +1202,7 @@
           <p:cNvPr id="6146" name="幻灯片图像占位符 1">
             <a:extLst>
               <a:ext uri="{FF2B5EF4-FFF2-40B4-BE49-F238E27FC236}">
-                <a16:creationId xmlns:a16="http://schemas.microsoft.com/office/drawing/2014/main" xmlns="" id="{4908B133-C54F-400F-8F70-355C57C0BE11}"/>
+                <a16:creationId xmlns="" xmlns:a16="http://schemas.microsoft.com/office/drawing/2014/main" id="{4908B133-C54F-400F-8F70-355C57C0BE11}"/>
               </a:ext>
             </a:extLst>
           </p:cNvPr>
@@ -1239,7 +1239,7 @@
           <p:cNvPr id="6147" name="备注占位符 2">
             <a:extLst>
               <a:ext uri="{FF2B5EF4-FFF2-40B4-BE49-F238E27FC236}">
-                <a16:creationId xmlns:a16="http://schemas.microsoft.com/office/drawing/2014/main" xmlns="" id="{7D16C196-D24B-4BE0-AE74-D44907B2A1B1}"/>
+                <a16:creationId xmlns="" xmlns:a16="http://schemas.microsoft.com/office/drawing/2014/main" id="{7D16C196-D24B-4BE0-AE74-D44907B2A1B1}"/>
               </a:ext>
             </a:extLst>
           </p:cNvPr>
@@ -1294,7 +1294,7 @@
           <p:cNvPr id="6148" name="灯片编号占位符 3">
             <a:extLst>
               <a:ext uri="{FF2B5EF4-FFF2-40B4-BE49-F238E27FC236}">
-                <a16:creationId xmlns:a16="http://schemas.microsoft.com/office/drawing/2014/main" xmlns="" id="{D230392C-ED50-49C3-93A6-10868BF6DADE}"/>
+                <a16:creationId xmlns="" xmlns:a16="http://schemas.microsoft.com/office/drawing/2014/main" id="{D230392C-ED50-49C3-93A6-10868BF6DADE}"/>
               </a:ext>
             </a:extLst>
           </p:cNvPr>
@@ -1544,7 +1544,7 @@
           <p:cNvPr id="6146" name="幻灯片图像占位符 1">
             <a:extLst>
               <a:ext uri="{FF2B5EF4-FFF2-40B4-BE49-F238E27FC236}">
-                <a16:creationId xmlns:a16="http://schemas.microsoft.com/office/drawing/2014/main" xmlns="" id="{4908B133-C54F-400F-8F70-355C57C0BE11}"/>
+                <a16:creationId xmlns="" xmlns:a16="http://schemas.microsoft.com/office/drawing/2014/main" id="{4908B133-C54F-400F-8F70-355C57C0BE11}"/>
               </a:ext>
             </a:extLst>
           </p:cNvPr>
@@ -1581,7 +1581,7 @@
           <p:cNvPr id="6147" name="备注占位符 2">
             <a:extLst>
               <a:ext uri="{FF2B5EF4-FFF2-40B4-BE49-F238E27FC236}">
-                <a16:creationId xmlns:a16="http://schemas.microsoft.com/office/drawing/2014/main" xmlns="" id="{7D16C196-D24B-4BE0-AE74-D44907B2A1B1}"/>
+                <a16:creationId xmlns="" xmlns:a16="http://schemas.microsoft.com/office/drawing/2014/main" id="{7D16C196-D24B-4BE0-AE74-D44907B2A1B1}"/>
               </a:ext>
             </a:extLst>
           </p:cNvPr>
@@ -1636,7 +1636,7 @@
           <p:cNvPr id="6148" name="灯片编号占位符 3">
             <a:extLst>
               <a:ext uri="{FF2B5EF4-FFF2-40B4-BE49-F238E27FC236}">
-                <a16:creationId xmlns:a16="http://schemas.microsoft.com/office/drawing/2014/main" xmlns="" id="{D230392C-ED50-49C3-93A6-10868BF6DADE}"/>
+                <a16:creationId xmlns="" xmlns:a16="http://schemas.microsoft.com/office/drawing/2014/main" id="{D230392C-ED50-49C3-93A6-10868BF6DADE}"/>
               </a:ext>
             </a:extLst>
           </p:cNvPr>
@@ -1886,7 +1886,7 @@
           <p:cNvPr id="6146" name="幻灯片图像占位符 1">
             <a:extLst>
               <a:ext uri="{FF2B5EF4-FFF2-40B4-BE49-F238E27FC236}">
-                <a16:creationId xmlns:a16="http://schemas.microsoft.com/office/drawing/2014/main" xmlns="" id="{4908B133-C54F-400F-8F70-355C57C0BE11}"/>
+                <a16:creationId xmlns="" xmlns:a16="http://schemas.microsoft.com/office/drawing/2014/main" id="{4908B133-C54F-400F-8F70-355C57C0BE11}"/>
               </a:ext>
             </a:extLst>
           </p:cNvPr>
@@ -1923,7 +1923,7 @@
           <p:cNvPr id="6147" name="备注占位符 2">
             <a:extLst>
               <a:ext uri="{FF2B5EF4-FFF2-40B4-BE49-F238E27FC236}">
-                <a16:creationId xmlns:a16="http://schemas.microsoft.com/office/drawing/2014/main" xmlns="" id="{7D16C196-D24B-4BE0-AE74-D44907B2A1B1}"/>
+                <a16:creationId xmlns="" xmlns:a16="http://schemas.microsoft.com/office/drawing/2014/main" id="{7D16C196-D24B-4BE0-AE74-D44907B2A1B1}"/>
               </a:ext>
             </a:extLst>
           </p:cNvPr>
@@ -1978,7 +1978,7 @@
           <p:cNvPr id="6148" name="灯片编号占位符 3">
             <a:extLst>
               <a:ext uri="{FF2B5EF4-FFF2-40B4-BE49-F238E27FC236}">
-                <a16:creationId xmlns:a16="http://schemas.microsoft.com/office/drawing/2014/main" xmlns="" id="{D230392C-ED50-49C3-93A6-10868BF6DADE}"/>
+                <a16:creationId xmlns="" xmlns:a16="http://schemas.microsoft.com/office/drawing/2014/main" id="{D230392C-ED50-49C3-93A6-10868BF6DADE}"/>
               </a:ext>
             </a:extLst>
           </p:cNvPr>
@@ -2228,7 +2228,7 @@
           <p:cNvPr id="6146" name="幻灯片图像占位符 1">
             <a:extLst>
               <a:ext uri="{FF2B5EF4-FFF2-40B4-BE49-F238E27FC236}">
-                <a16:creationId xmlns:a16="http://schemas.microsoft.com/office/drawing/2014/main" xmlns="" id="{4908B133-C54F-400F-8F70-355C57C0BE11}"/>
+                <a16:creationId xmlns="" xmlns:a16="http://schemas.microsoft.com/office/drawing/2014/main" id="{4908B133-C54F-400F-8F70-355C57C0BE11}"/>
               </a:ext>
             </a:extLst>
           </p:cNvPr>
@@ -2265,7 +2265,7 @@
           <p:cNvPr id="6147" name="备注占位符 2">
             <a:extLst>
               <a:ext uri="{FF2B5EF4-FFF2-40B4-BE49-F238E27FC236}">
-                <a16:creationId xmlns:a16="http://schemas.microsoft.com/office/drawing/2014/main" xmlns="" id="{7D16C196-D24B-4BE0-AE74-D44907B2A1B1}"/>
+                <a16:creationId xmlns="" xmlns:a16="http://schemas.microsoft.com/office/drawing/2014/main" id="{7D16C196-D24B-4BE0-AE74-D44907B2A1B1}"/>
               </a:ext>
             </a:extLst>
           </p:cNvPr>
@@ -2320,7 +2320,7 @@
           <p:cNvPr id="6148" name="灯片编号占位符 3">
             <a:extLst>
               <a:ext uri="{FF2B5EF4-FFF2-40B4-BE49-F238E27FC236}">
-                <a16:creationId xmlns:a16="http://schemas.microsoft.com/office/drawing/2014/main" xmlns="" id="{D230392C-ED50-49C3-93A6-10868BF6DADE}"/>
+                <a16:creationId xmlns="" xmlns:a16="http://schemas.microsoft.com/office/drawing/2014/main" id="{D230392C-ED50-49C3-93A6-10868BF6DADE}"/>
               </a:ext>
             </a:extLst>
           </p:cNvPr>
@@ -2570,7 +2570,7 @@
           <p:cNvPr id="6146" name="幻灯片图像占位符 1">
             <a:extLst>
               <a:ext uri="{FF2B5EF4-FFF2-40B4-BE49-F238E27FC236}">
-                <a16:creationId xmlns:a16="http://schemas.microsoft.com/office/drawing/2014/main" xmlns="" id="{4908B133-C54F-400F-8F70-355C57C0BE11}"/>
+                <a16:creationId xmlns="" xmlns:a16="http://schemas.microsoft.com/office/drawing/2014/main" id="{4908B133-C54F-400F-8F70-355C57C0BE11}"/>
               </a:ext>
             </a:extLst>
           </p:cNvPr>
@@ -2607,7 +2607,7 @@
           <p:cNvPr id="6147" name="备注占位符 2">
             <a:extLst>
               <a:ext uri="{FF2B5EF4-FFF2-40B4-BE49-F238E27FC236}">
-                <a16:creationId xmlns:a16="http://schemas.microsoft.com/office/drawing/2014/main" xmlns="" id="{7D16C196-D24B-4BE0-AE74-D44907B2A1B1}"/>
+                <a16:creationId xmlns="" xmlns:a16="http://schemas.microsoft.com/office/drawing/2014/main" id="{7D16C196-D24B-4BE0-AE74-D44907B2A1B1}"/>
               </a:ext>
             </a:extLst>
           </p:cNvPr>
@@ -2662,7 +2662,7 @@
           <p:cNvPr id="6148" name="灯片编号占位符 3">
             <a:extLst>
               <a:ext uri="{FF2B5EF4-FFF2-40B4-BE49-F238E27FC236}">
-                <a16:creationId xmlns:a16="http://schemas.microsoft.com/office/drawing/2014/main" xmlns="" id="{D230392C-ED50-49C3-93A6-10868BF6DADE}"/>
+                <a16:creationId xmlns="" xmlns:a16="http://schemas.microsoft.com/office/drawing/2014/main" id="{D230392C-ED50-49C3-93A6-10868BF6DADE}"/>
               </a:ext>
             </a:extLst>
           </p:cNvPr>
@@ -2912,7 +2912,7 @@
           <p:cNvPr id="6146" name="幻灯片图像占位符 1">
             <a:extLst>
               <a:ext uri="{FF2B5EF4-FFF2-40B4-BE49-F238E27FC236}">
-                <a16:creationId xmlns:a16="http://schemas.microsoft.com/office/drawing/2014/main" xmlns="" id="{4908B133-C54F-400F-8F70-355C57C0BE11}"/>
+                <a16:creationId xmlns="" xmlns:a16="http://schemas.microsoft.com/office/drawing/2014/main" id="{4908B133-C54F-400F-8F70-355C57C0BE11}"/>
               </a:ext>
             </a:extLst>
           </p:cNvPr>
@@ -2949,7 +2949,7 @@
           <p:cNvPr id="6147" name="备注占位符 2">
             <a:extLst>
               <a:ext uri="{FF2B5EF4-FFF2-40B4-BE49-F238E27FC236}">
-                <a16:creationId xmlns:a16="http://schemas.microsoft.com/office/drawing/2014/main" xmlns="" id="{7D16C196-D24B-4BE0-AE74-D44907B2A1B1}"/>
+                <a16:creationId xmlns="" xmlns:a16="http://schemas.microsoft.com/office/drawing/2014/main" id="{7D16C196-D24B-4BE0-AE74-D44907B2A1B1}"/>
               </a:ext>
             </a:extLst>
           </p:cNvPr>
@@ -3004,7 +3004,7 @@
           <p:cNvPr id="6148" name="灯片编号占位符 3">
             <a:extLst>
               <a:ext uri="{FF2B5EF4-FFF2-40B4-BE49-F238E27FC236}">
-                <a16:creationId xmlns:a16="http://schemas.microsoft.com/office/drawing/2014/main" xmlns="" id="{D230392C-ED50-49C3-93A6-10868BF6DADE}"/>
+                <a16:creationId xmlns="" xmlns:a16="http://schemas.microsoft.com/office/drawing/2014/main" id="{D230392C-ED50-49C3-93A6-10868BF6DADE}"/>
               </a:ext>
             </a:extLst>
           </p:cNvPr>
@@ -3254,7 +3254,7 @@
           <p:cNvPr id="6146" name="幻灯片图像占位符 1">
             <a:extLst>
               <a:ext uri="{FF2B5EF4-FFF2-40B4-BE49-F238E27FC236}">
-                <a16:creationId xmlns:a16="http://schemas.microsoft.com/office/drawing/2014/main" xmlns="" id="{4908B133-C54F-400F-8F70-355C57C0BE11}"/>
+                <a16:creationId xmlns="" xmlns:a16="http://schemas.microsoft.com/office/drawing/2014/main" id="{4908B133-C54F-400F-8F70-355C57C0BE11}"/>
               </a:ext>
             </a:extLst>
           </p:cNvPr>
@@ -3291,7 +3291,7 @@
           <p:cNvPr id="6147" name="备注占位符 2">
             <a:extLst>
               <a:ext uri="{FF2B5EF4-FFF2-40B4-BE49-F238E27FC236}">
-                <a16:creationId xmlns:a16="http://schemas.microsoft.com/office/drawing/2014/main" xmlns="" id="{7D16C196-D24B-4BE0-AE74-D44907B2A1B1}"/>
+                <a16:creationId xmlns="" xmlns:a16="http://schemas.microsoft.com/office/drawing/2014/main" id="{7D16C196-D24B-4BE0-AE74-D44907B2A1B1}"/>
               </a:ext>
             </a:extLst>
           </p:cNvPr>
@@ -3346,7 +3346,7 @@
           <p:cNvPr id="6148" name="灯片编号占位符 3">
             <a:extLst>
               <a:ext uri="{FF2B5EF4-FFF2-40B4-BE49-F238E27FC236}">
-                <a16:creationId xmlns:a16="http://schemas.microsoft.com/office/drawing/2014/main" xmlns="" id="{D230392C-ED50-49C3-93A6-10868BF6DADE}"/>
+                <a16:creationId xmlns="" xmlns:a16="http://schemas.microsoft.com/office/drawing/2014/main" id="{D230392C-ED50-49C3-93A6-10868BF6DADE}"/>
               </a:ext>
             </a:extLst>
           </p:cNvPr>
@@ -3596,7 +3596,7 @@
           <p:cNvPr id="6146" name="幻灯片图像占位符 1">
             <a:extLst>
               <a:ext uri="{FF2B5EF4-FFF2-40B4-BE49-F238E27FC236}">
-                <a16:creationId xmlns:a16="http://schemas.microsoft.com/office/drawing/2014/main" xmlns="" id="{4908B133-C54F-400F-8F70-355C57C0BE11}"/>
+                <a16:creationId xmlns="" xmlns:a16="http://schemas.microsoft.com/office/drawing/2014/main" id="{4908B133-C54F-400F-8F70-355C57C0BE11}"/>
               </a:ext>
             </a:extLst>
           </p:cNvPr>
@@ -3633,7 +3633,7 @@
           <p:cNvPr id="6147" name="备注占位符 2">
             <a:extLst>
               <a:ext uri="{FF2B5EF4-FFF2-40B4-BE49-F238E27FC236}">
-                <a16:creationId xmlns:a16="http://schemas.microsoft.com/office/drawing/2014/main" xmlns="" id="{7D16C196-D24B-4BE0-AE74-D44907B2A1B1}"/>
+                <a16:creationId xmlns="" xmlns:a16="http://schemas.microsoft.com/office/drawing/2014/main" id="{7D16C196-D24B-4BE0-AE74-D44907B2A1B1}"/>
               </a:ext>
             </a:extLst>
           </p:cNvPr>
@@ -3688,7 +3688,7 @@
           <p:cNvPr id="6148" name="灯片编号占位符 3">
             <a:extLst>
               <a:ext uri="{FF2B5EF4-FFF2-40B4-BE49-F238E27FC236}">
-                <a16:creationId xmlns:a16="http://schemas.microsoft.com/office/drawing/2014/main" xmlns="" id="{D230392C-ED50-49C3-93A6-10868BF6DADE}"/>
+                <a16:creationId xmlns="" xmlns:a16="http://schemas.microsoft.com/office/drawing/2014/main" id="{D230392C-ED50-49C3-93A6-10868BF6DADE}"/>
               </a:ext>
             </a:extLst>
           </p:cNvPr>
@@ -3938,7 +3938,7 @@
           <p:cNvPr id="6146" name="幻灯片图像占位符 1">
             <a:extLst>
               <a:ext uri="{FF2B5EF4-FFF2-40B4-BE49-F238E27FC236}">
-                <a16:creationId xmlns:a16="http://schemas.microsoft.com/office/drawing/2014/main" xmlns="" id="{4908B133-C54F-400F-8F70-355C57C0BE11}"/>
+                <a16:creationId xmlns="" xmlns:a16="http://schemas.microsoft.com/office/drawing/2014/main" id="{4908B133-C54F-400F-8F70-355C57C0BE11}"/>
               </a:ext>
             </a:extLst>
           </p:cNvPr>
@@ -3975,7 +3975,7 @@
           <p:cNvPr id="6147" name="备注占位符 2">
             <a:extLst>
               <a:ext uri="{FF2B5EF4-FFF2-40B4-BE49-F238E27FC236}">
-                <a16:creationId xmlns:a16="http://schemas.microsoft.com/office/drawing/2014/main" xmlns="" id="{7D16C196-D24B-4BE0-AE74-D44907B2A1B1}"/>
+                <a16:creationId xmlns="" xmlns:a16="http://schemas.microsoft.com/office/drawing/2014/main" id="{7D16C196-D24B-4BE0-AE74-D44907B2A1B1}"/>
               </a:ext>
             </a:extLst>
           </p:cNvPr>
@@ -4030,7 +4030,7 @@
           <p:cNvPr id="6148" name="灯片编号占位符 3">
             <a:extLst>
               <a:ext uri="{FF2B5EF4-FFF2-40B4-BE49-F238E27FC236}">
-                <a16:creationId xmlns:a16="http://schemas.microsoft.com/office/drawing/2014/main" xmlns="" id="{D230392C-ED50-49C3-93A6-10868BF6DADE}"/>
+                <a16:creationId xmlns="" xmlns:a16="http://schemas.microsoft.com/office/drawing/2014/main" id="{D230392C-ED50-49C3-93A6-10868BF6DADE}"/>
               </a:ext>
             </a:extLst>
           </p:cNvPr>
@@ -4280,7 +4280,7 @@
           <p:cNvPr id="6146" name="幻灯片图像占位符 1">
             <a:extLst>
               <a:ext uri="{FF2B5EF4-FFF2-40B4-BE49-F238E27FC236}">
-                <a16:creationId xmlns:a16="http://schemas.microsoft.com/office/drawing/2014/main" xmlns="" id="{4908B133-C54F-400F-8F70-355C57C0BE11}"/>
+                <a16:creationId xmlns="" xmlns:a16="http://schemas.microsoft.com/office/drawing/2014/main" id="{4908B133-C54F-400F-8F70-355C57C0BE11}"/>
               </a:ext>
             </a:extLst>
           </p:cNvPr>
@@ -4317,7 +4317,7 @@
           <p:cNvPr id="6147" name="备注占位符 2">
             <a:extLst>
               <a:ext uri="{FF2B5EF4-FFF2-40B4-BE49-F238E27FC236}">
-                <a16:creationId xmlns:a16="http://schemas.microsoft.com/office/drawing/2014/main" xmlns="" id="{7D16C196-D24B-4BE0-AE74-D44907B2A1B1}"/>
+                <a16:creationId xmlns="" xmlns:a16="http://schemas.microsoft.com/office/drawing/2014/main" id="{7D16C196-D24B-4BE0-AE74-D44907B2A1B1}"/>
               </a:ext>
             </a:extLst>
           </p:cNvPr>
@@ -4372,7 +4372,7 @@
           <p:cNvPr id="6148" name="灯片编号占位符 3">
             <a:extLst>
               <a:ext uri="{FF2B5EF4-FFF2-40B4-BE49-F238E27FC236}">
-                <a16:creationId xmlns:a16="http://schemas.microsoft.com/office/drawing/2014/main" xmlns="" id="{D230392C-ED50-49C3-93A6-10868BF6DADE}"/>
+                <a16:creationId xmlns="" xmlns:a16="http://schemas.microsoft.com/office/drawing/2014/main" id="{D230392C-ED50-49C3-93A6-10868BF6DADE}"/>
               </a:ext>
             </a:extLst>
           </p:cNvPr>
@@ -4622,7 +4622,7 @@
           <p:cNvPr id="6146" name="幻灯片图像占位符 1">
             <a:extLst>
               <a:ext uri="{FF2B5EF4-FFF2-40B4-BE49-F238E27FC236}">
-                <a16:creationId xmlns:a16="http://schemas.microsoft.com/office/drawing/2014/main" xmlns="" id="{4908B133-C54F-400F-8F70-355C57C0BE11}"/>
+                <a16:creationId xmlns="" xmlns:a16="http://schemas.microsoft.com/office/drawing/2014/main" id="{4908B133-C54F-400F-8F70-355C57C0BE11}"/>
               </a:ext>
             </a:extLst>
           </p:cNvPr>
@@ -4659,7 +4659,7 @@
           <p:cNvPr id="6147" name="备注占位符 2">
             <a:extLst>
               <a:ext uri="{FF2B5EF4-FFF2-40B4-BE49-F238E27FC236}">
-                <a16:creationId xmlns:a16="http://schemas.microsoft.com/office/drawing/2014/main" xmlns="" id="{7D16C196-D24B-4BE0-AE74-D44907B2A1B1}"/>
+                <a16:creationId xmlns="" xmlns:a16="http://schemas.microsoft.com/office/drawing/2014/main" id="{7D16C196-D24B-4BE0-AE74-D44907B2A1B1}"/>
               </a:ext>
             </a:extLst>
           </p:cNvPr>
@@ -4714,7 +4714,7 @@
           <p:cNvPr id="6148" name="灯片编号占位符 3">
             <a:extLst>
               <a:ext uri="{FF2B5EF4-FFF2-40B4-BE49-F238E27FC236}">
-                <a16:creationId xmlns:a16="http://schemas.microsoft.com/office/drawing/2014/main" xmlns="" id="{D230392C-ED50-49C3-93A6-10868BF6DADE}"/>
+                <a16:creationId xmlns="" xmlns:a16="http://schemas.microsoft.com/office/drawing/2014/main" id="{D230392C-ED50-49C3-93A6-10868BF6DADE}"/>
               </a:ext>
             </a:extLst>
           </p:cNvPr>
@@ -4964,7 +4964,7 @@
           <p:cNvPr id="6146" name="幻灯片图像占位符 1">
             <a:extLst>
               <a:ext uri="{FF2B5EF4-FFF2-40B4-BE49-F238E27FC236}">
-                <a16:creationId xmlns:a16="http://schemas.microsoft.com/office/drawing/2014/main" xmlns="" id="{4908B133-C54F-400F-8F70-355C57C0BE11}"/>
+                <a16:creationId xmlns="" xmlns:a16="http://schemas.microsoft.com/office/drawing/2014/main" id="{4908B133-C54F-400F-8F70-355C57C0BE11}"/>
               </a:ext>
             </a:extLst>
           </p:cNvPr>
@@ -5001,7 +5001,7 @@
           <p:cNvPr id="6147" name="备注占位符 2">
             <a:extLst>
               <a:ext uri="{FF2B5EF4-FFF2-40B4-BE49-F238E27FC236}">
-                <a16:creationId xmlns:a16="http://schemas.microsoft.com/office/drawing/2014/main" xmlns="" id="{7D16C196-D24B-4BE0-AE74-D44907B2A1B1}"/>
+                <a16:creationId xmlns="" xmlns:a16="http://schemas.microsoft.com/office/drawing/2014/main" id="{7D16C196-D24B-4BE0-AE74-D44907B2A1B1}"/>
               </a:ext>
             </a:extLst>
           </p:cNvPr>
@@ -5056,7 +5056,7 @@
           <p:cNvPr id="6148" name="灯片编号占位符 3">
             <a:extLst>
               <a:ext uri="{FF2B5EF4-FFF2-40B4-BE49-F238E27FC236}">
-                <a16:creationId xmlns:a16="http://schemas.microsoft.com/office/drawing/2014/main" xmlns="" id="{D230392C-ED50-49C3-93A6-10868BF6DADE}"/>
+                <a16:creationId xmlns="" xmlns:a16="http://schemas.microsoft.com/office/drawing/2014/main" id="{D230392C-ED50-49C3-93A6-10868BF6DADE}"/>
               </a:ext>
             </a:extLst>
           </p:cNvPr>
@@ -5306,7 +5306,7 @@
           <p:cNvPr id="6146" name="幻灯片图像占位符 1">
             <a:extLst>
               <a:ext uri="{FF2B5EF4-FFF2-40B4-BE49-F238E27FC236}">
-                <a16:creationId xmlns:a16="http://schemas.microsoft.com/office/drawing/2014/main" xmlns="" id="{4908B133-C54F-400F-8F70-355C57C0BE11}"/>
+                <a16:creationId xmlns="" xmlns:a16="http://schemas.microsoft.com/office/drawing/2014/main" id="{4908B133-C54F-400F-8F70-355C57C0BE11}"/>
               </a:ext>
             </a:extLst>
           </p:cNvPr>
@@ -5343,7 +5343,7 @@
           <p:cNvPr id="6147" name="备注占位符 2">
             <a:extLst>
               <a:ext uri="{FF2B5EF4-FFF2-40B4-BE49-F238E27FC236}">
-                <a16:creationId xmlns:a16="http://schemas.microsoft.com/office/drawing/2014/main" xmlns="" id="{7D16C196-D24B-4BE0-AE74-D44907B2A1B1}"/>
+                <a16:creationId xmlns="" xmlns:a16="http://schemas.microsoft.com/office/drawing/2014/main" id="{7D16C196-D24B-4BE0-AE74-D44907B2A1B1}"/>
               </a:ext>
             </a:extLst>
           </p:cNvPr>
@@ -5398,7 +5398,7 @@
           <p:cNvPr id="6148" name="灯片编号占位符 3">
             <a:extLst>
               <a:ext uri="{FF2B5EF4-FFF2-40B4-BE49-F238E27FC236}">
-                <a16:creationId xmlns:a16="http://schemas.microsoft.com/office/drawing/2014/main" xmlns="" id="{D230392C-ED50-49C3-93A6-10868BF6DADE}"/>
+                <a16:creationId xmlns="" xmlns:a16="http://schemas.microsoft.com/office/drawing/2014/main" id="{D230392C-ED50-49C3-93A6-10868BF6DADE}"/>
               </a:ext>
             </a:extLst>
           </p:cNvPr>
@@ -5648,7 +5648,7 @@
           <p:cNvPr id="6146" name="幻灯片图像占位符 1">
             <a:extLst>
               <a:ext uri="{FF2B5EF4-FFF2-40B4-BE49-F238E27FC236}">
-                <a16:creationId xmlns:a16="http://schemas.microsoft.com/office/drawing/2014/main" xmlns="" id="{4908B133-C54F-400F-8F70-355C57C0BE11}"/>
+                <a16:creationId xmlns="" xmlns:a16="http://schemas.microsoft.com/office/drawing/2014/main" id="{4908B133-C54F-400F-8F70-355C57C0BE11}"/>
               </a:ext>
             </a:extLst>
           </p:cNvPr>
@@ -5685,7 +5685,7 @@
           <p:cNvPr id="6147" name="备注占位符 2">
             <a:extLst>
               <a:ext uri="{FF2B5EF4-FFF2-40B4-BE49-F238E27FC236}">
-                <a16:creationId xmlns:a16="http://schemas.microsoft.com/office/drawing/2014/main" xmlns="" id="{7D16C196-D24B-4BE0-AE74-D44907B2A1B1}"/>
+                <a16:creationId xmlns="" xmlns:a16="http://schemas.microsoft.com/office/drawing/2014/main" id="{7D16C196-D24B-4BE0-AE74-D44907B2A1B1}"/>
               </a:ext>
             </a:extLst>
           </p:cNvPr>
@@ -5740,7 +5740,7 @@
           <p:cNvPr id="6148" name="灯片编号占位符 3">
             <a:extLst>
               <a:ext uri="{FF2B5EF4-FFF2-40B4-BE49-F238E27FC236}">
-                <a16:creationId xmlns:a16="http://schemas.microsoft.com/office/drawing/2014/main" xmlns="" id="{D230392C-ED50-49C3-93A6-10868BF6DADE}"/>
+                <a16:creationId xmlns="" xmlns:a16="http://schemas.microsoft.com/office/drawing/2014/main" id="{D230392C-ED50-49C3-93A6-10868BF6DADE}"/>
               </a:ext>
             </a:extLst>
           </p:cNvPr>
@@ -5990,7 +5990,7 @@
           <p:cNvPr id="6146" name="幻灯片图像占位符 1">
             <a:extLst>
               <a:ext uri="{FF2B5EF4-FFF2-40B4-BE49-F238E27FC236}">
-                <a16:creationId xmlns:a16="http://schemas.microsoft.com/office/drawing/2014/main" xmlns="" id="{4908B133-C54F-400F-8F70-355C57C0BE11}"/>
+                <a16:creationId xmlns="" xmlns:a16="http://schemas.microsoft.com/office/drawing/2014/main" id="{4908B133-C54F-400F-8F70-355C57C0BE11}"/>
               </a:ext>
             </a:extLst>
           </p:cNvPr>
@@ -6027,7 +6027,7 @@
           <p:cNvPr id="6147" name="备注占位符 2">
             <a:extLst>
               <a:ext uri="{FF2B5EF4-FFF2-40B4-BE49-F238E27FC236}">
-                <a16:creationId xmlns:a16="http://schemas.microsoft.com/office/drawing/2014/main" xmlns="" id="{7D16C196-D24B-4BE0-AE74-D44907B2A1B1}"/>
+                <a16:creationId xmlns="" xmlns:a16="http://schemas.microsoft.com/office/drawing/2014/main" id="{7D16C196-D24B-4BE0-AE74-D44907B2A1B1}"/>
               </a:ext>
             </a:extLst>
           </p:cNvPr>
@@ -6082,7 +6082,7 @@
           <p:cNvPr id="6148" name="灯片编号占位符 3">
             <a:extLst>
               <a:ext uri="{FF2B5EF4-FFF2-40B4-BE49-F238E27FC236}">
-                <a16:creationId xmlns:a16="http://schemas.microsoft.com/office/drawing/2014/main" xmlns="" id="{D230392C-ED50-49C3-93A6-10868BF6DADE}"/>
+                <a16:creationId xmlns="" xmlns:a16="http://schemas.microsoft.com/office/drawing/2014/main" id="{D230392C-ED50-49C3-93A6-10868BF6DADE}"/>
               </a:ext>
             </a:extLst>
           </p:cNvPr>
@@ -6332,7 +6332,7 @@
           <p:cNvPr id="6146" name="幻灯片图像占位符 1">
             <a:extLst>
               <a:ext uri="{FF2B5EF4-FFF2-40B4-BE49-F238E27FC236}">
-                <a16:creationId xmlns:a16="http://schemas.microsoft.com/office/drawing/2014/main" xmlns="" id="{4908B133-C54F-400F-8F70-355C57C0BE11}"/>
+                <a16:creationId xmlns="" xmlns:a16="http://schemas.microsoft.com/office/drawing/2014/main" id="{4908B133-C54F-400F-8F70-355C57C0BE11}"/>
               </a:ext>
             </a:extLst>
           </p:cNvPr>
@@ -6369,7 +6369,7 @@
           <p:cNvPr id="6147" name="备注占位符 2">
             <a:extLst>
               <a:ext uri="{FF2B5EF4-FFF2-40B4-BE49-F238E27FC236}">
-                <a16:creationId xmlns:a16="http://schemas.microsoft.com/office/drawing/2014/main" xmlns="" id="{7D16C196-D24B-4BE0-AE74-D44907B2A1B1}"/>
+                <a16:creationId xmlns="" xmlns:a16="http://schemas.microsoft.com/office/drawing/2014/main" id="{7D16C196-D24B-4BE0-AE74-D44907B2A1B1}"/>
               </a:ext>
             </a:extLst>
           </p:cNvPr>
@@ -6424,7 +6424,7 @@
           <p:cNvPr id="6148" name="灯片编号占位符 3">
             <a:extLst>
               <a:ext uri="{FF2B5EF4-FFF2-40B4-BE49-F238E27FC236}">
-                <a16:creationId xmlns:a16="http://schemas.microsoft.com/office/drawing/2014/main" xmlns="" id="{D230392C-ED50-49C3-93A6-10868BF6DADE}"/>
+                <a16:creationId xmlns="" xmlns:a16="http://schemas.microsoft.com/office/drawing/2014/main" id="{D230392C-ED50-49C3-93A6-10868BF6DADE}"/>
               </a:ext>
             </a:extLst>
           </p:cNvPr>
@@ -6674,7 +6674,7 @@
           <p:cNvPr id="6146" name="幻灯片图像占位符 1">
             <a:extLst>
               <a:ext uri="{FF2B5EF4-FFF2-40B4-BE49-F238E27FC236}">
-                <a16:creationId xmlns:a16="http://schemas.microsoft.com/office/drawing/2014/main" xmlns="" id="{4908B133-C54F-400F-8F70-355C57C0BE11}"/>
+                <a16:creationId xmlns="" xmlns:a16="http://schemas.microsoft.com/office/drawing/2014/main" id="{4908B133-C54F-400F-8F70-355C57C0BE11}"/>
               </a:ext>
             </a:extLst>
           </p:cNvPr>
@@ -6711,7 +6711,7 @@
           <p:cNvPr id="6147" name="备注占位符 2">
             <a:extLst>
               <a:ext uri="{FF2B5EF4-FFF2-40B4-BE49-F238E27FC236}">
-                <a16:creationId xmlns:a16="http://schemas.microsoft.com/office/drawing/2014/main" xmlns="" id="{7D16C196-D24B-4BE0-AE74-D44907B2A1B1}"/>
+                <a16:creationId xmlns="" xmlns:a16="http://schemas.microsoft.com/office/drawing/2014/main" id="{7D16C196-D24B-4BE0-AE74-D44907B2A1B1}"/>
               </a:ext>
             </a:extLst>
           </p:cNvPr>
@@ -6766,7 +6766,7 @@
           <p:cNvPr id="6148" name="灯片编号占位符 3">
             <a:extLst>
               <a:ext uri="{FF2B5EF4-FFF2-40B4-BE49-F238E27FC236}">
-                <a16:creationId xmlns:a16="http://schemas.microsoft.com/office/drawing/2014/main" xmlns="" id="{D230392C-ED50-49C3-93A6-10868BF6DADE}"/>
+                <a16:creationId xmlns="" xmlns:a16="http://schemas.microsoft.com/office/drawing/2014/main" id="{D230392C-ED50-49C3-93A6-10868BF6DADE}"/>
               </a:ext>
             </a:extLst>
           </p:cNvPr>
@@ -7016,7 +7016,7 @@
           <p:cNvPr id="6146" name="幻灯片图像占位符 1">
             <a:extLst>
               <a:ext uri="{FF2B5EF4-FFF2-40B4-BE49-F238E27FC236}">
-                <a16:creationId xmlns:a16="http://schemas.microsoft.com/office/drawing/2014/main" xmlns="" id="{4908B133-C54F-400F-8F70-355C57C0BE11}"/>
+                <a16:creationId xmlns="" xmlns:a16="http://schemas.microsoft.com/office/drawing/2014/main" id="{4908B133-C54F-400F-8F70-355C57C0BE11}"/>
               </a:ext>
             </a:extLst>
           </p:cNvPr>
@@ -7053,7 +7053,7 @@
           <p:cNvPr id="6147" name="备注占位符 2">
             <a:extLst>
               <a:ext uri="{FF2B5EF4-FFF2-40B4-BE49-F238E27FC236}">
-                <a16:creationId xmlns:a16="http://schemas.microsoft.com/office/drawing/2014/main" xmlns="" id="{7D16C196-D24B-4BE0-AE74-D44907B2A1B1}"/>
+                <a16:creationId xmlns="" xmlns:a16="http://schemas.microsoft.com/office/drawing/2014/main" id="{7D16C196-D24B-4BE0-AE74-D44907B2A1B1}"/>
               </a:ext>
             </a:extLst>
           </p:cNvPr>
@@ -7108,7 +7108,7 @@
           <p:cNvPr id="6148" name="灯片编号占位符 3">
             <a:extLst>
               <a:ext uri="{FF2B5EF4-FFF2-40B4-BE49-F238E27FC236}">
-                <a16:creationId xmlns:a16="http://schemas.microsoft.com/office/drawing/2014/main" xmlns="" id="{D230392C-ED50-49C3-93A6-10868BF6DADE}"/>
+                <a16:creationId xmlns="" xmlns:a16="http://schemas.microsoft.com/office/drawing/2014/main" id="{D230392C-ED50-49C3-93A6-10868BF6DADE}"/>
               </a:ext>
             </a:extLst>
           </p:cNvPr>
@@ -7358,7 +7358,7 @@
           <p:cNvPr id="6146" name="幻灯片图像占位符 1">
             <a:extLst>
               <a:ext uri="{FF2B5EF4-FFF2-40B4-BE49-F238E27FC236}">
-                <a16:creationId xmlns:a16="http://schemas.microsoft.com/office/drawing/2014/main" xmlns="" id="{4908B133-C54F-400F-8F70-355C57C0BE11}"/>
+                <a16:creationId xmlns="" xmlns:a16="http://schemas.microsoft.com/office/drawing/2014/main" id="{4908B133-C54F-400F-8F70-355C57C0BE11}"/>
               </a:ext>
             </a:extLst>
           </p:cNvPr>
@@ -7395,7 +7395,7 @@
           <p:cNvPr id="6147" name="备注占位符 2">
             <a:extLst>
               <a:ext uri="{FF2B5EF4-FFF2-40B4-BE49-F238E27FC236}">
-                <a16:creationId xmlns:a16="http://schemas.microsoft.com/office/drawing/2014/main" xmlns="" id="{7D16C196-D24B-4BE0-AE74-D44907B2A1B1}"/>
+                <a16:creationId xmlns="" xmlns:a16="http://schemas.microsoft.com/office/drawing/2014/main" id="{7D16C196-D24B-4BE0-AE74-D44907B2A1B1}"/>
               </a:ext>
             </a:extLst>
           </p:cNvPr>
@@ -7450,7 +7450,7 @@
           <p:cNvPr id="6148" name="灯片编号占位符 3">
             <a:extLst>
               <a:ext uri="{FF2B5EF4-FFF2-40B4-BE49-F238E27FC236}">
-                <a16:creationId xmlns:a16="http://schemas.microsoft.com/office/drawing/2014/main" xmlns="" id="{D230392C-ED50-49C3-93A6-10868BF6DADE}"/>
+                <a16:creationId xmlns="" xmlns:a16="http://schemas.microsoft.com/office/drawing/2014/main" id="{D230392C-ED50-49C3-93A6-10868BF6DADE}"/>
               </a:ext>
             </a:extLst>
           </p:cNvPr>
@@ -7700,7 +7700,7 @@
           <p:cNvPr id="6146" name="幻灯片图像占位符 1">
             <a:extLst>
               <a:ext uri="{FF2B5EF4-FFF2-40B4-BE49-F238E27FC236}">
-                <a16:creationId xmlns:a16="http://schemas.microsoft.com/office/drawing/2014/main" xmlns="" id="{4908B133-C54F-400F-8F70-355C57C0BE11}"/>
+                <a16:creationId xmlns="" xmlns:a16="http://schemas.microsoft.com/office/drawing/2014/main" id="{4908B133-C54F-400F-8F70-355C57C0BE11}"/>
               </a:ext>
             </a:extLst>
           </p:cNvPr>
@@ -7737,7 +7737,7 @@
           <p:cNvPr id="6147" name="备注占位符 2">
             <a:extLst>
               <a:ext uri="{FF2B5EF4-FFF2-40B4-BE49-F238E27FC236}">
-                <a16:creationId xmlns:a16="http://schemas.microsoft.com/office/drawing/2014/main" xmlns="" id="{7D16C196-D24B-4BE0-AE74-D44907B2A1B1}"/>
+                <a16:creationId xmlns="" xmlns:a16="http://schemas.microsoft.com/office/drawing/2014/main" id="{7D16C196-D24B-4BE0-AE74-D44907B2A1B1}"/>
               </a:ext>
             </a:extLst>
           </p:cNvPr>
@@ -7792,7 +7792,7 @@
           <p:cNvPr id="6148" name="灯片编号占位符 3">
             <a:extLst>
               <a:ext uri="{FF2B5EF4-FFF2-40B4-BE49-F238E27FC236}">
-                <a16:creationId xmlns:a16="http://schemas.microsoft.com/office/drawing/2014/main" xmlns="" id="{D230392C-ED50-49C3-93A6-10868BF6DADE}"/>
+                <a16:creationId xmlns="" xmlns:a16="http://schemas.microsoft.com/office/drawing/2014/main" id="{D230392C-ED50-49C3-93A6-10868BF6DADE}"/>
               </a:ext>
             </a:extLst>
           </p:cNvPr>
@@ -8042,7 +8042,7 @@
           <p:cNvPr id="6146" name="幻灯片图像占位符 1">
             <a:extLst>
               <a:ext uri="{FF2B5EF4-FFF2-40B4-BE49-F238E27FC236}">
-                <a16:creationId xmlns:a16="http://schemas.microsoft.com/office/drawing/2014/main" xmlns="" id="{4908B133-C54F-400F-8F70-355C57C0BE11}"/>
+                <a16:creationId xmlns="" xmlns:a16="http://schemas.microsoft.com/office/drawing/2014/main" id="{4908B133-C54F-400F-8F70-355C57C0BE11}"/>
               </a:ext>
             </a:extLst>
           </p:cNvPr>
@@ -8079,7 +8079,7 @@
           <p:cNvPr id="6147" name="备注占位符 2">
             <a:extLst>
               <a:ext uri="{FF2B5EF4-FFF2-40B4-BE49-F238E27FC236}">
-                <a16:creationId xmlns:a16="http://schemas.microsoft.com/office/drawing/2014/main" xmlns="" id="{7D16C196-D24B-4BE0-AE74-D44907B2A1B1}"/>
+                <a16:creationId xmlns="" xmlns:a16="http://schemas.microsoft.com/office/drawing/2014/main" id="{7D16C196-D24B-4BE0-AE74-D44907B2A1B1}"/>
               </a:ext>
             </a:extLst>
           </p:cNvPr>
@@ -8134,7 +8134,7 @@
           <p:cNvPr id="6148" name="灯片编号占位符 3">
             <a:extLst>
               <a:ext uri="{FF2B5EF4-FFF2-40B4-BE49-F238E27FC236}">
-                <a16:creationId xmlns:a16="http://schemas.microsoft.com/office/drawing/2014/main" xmlns="" id="{D230392C-ED50-49C3-93A6-10868BF6DADE}"/>
+                <a16:creationId xmlns="" xmlns:a16="http://schemas.microsoft.com/office/drawing/2014/main" id="{D230392C-ED50-49C3-93A6-10868BF6DADE}"/>
               </a:ext>
             </a:extLst>
           </p:cNvPr>
@@ -8384,7 +8384,7 @@
           <p:cNvPr id="6146" name="幻灯片图像占位符 1">
             <a:extLst>
               <a:ext uri="{FF2B5EF4-FFF2-40B4-BE49-F238E27FC236}">
-                <a16:creationId xmlns:a16="http://schemas.microsoft.com/office/drawing/2014/main" xmlns="" id="{4908B133-C54F-400F-8F70-355C57C0BE11}"/>
+                <a16:creationId xmlns="" xmlns:a16="http://schemas.microsoft.com/office/drawing/2014/main" id="{4908B133-C54F-400F-8F70-355C57C0BE11}"/>
               </a:ext>
             </a:extLst>
           </p:cNvPr>
@@ -8421,7 +8421,7 @@
           <p:cNvPr id="6147" name="备注占位符 2">
             <a:extLst>
               <a:ext uri="{FF2B5EF4-FFF2-40B4-BE49-F238E27FC236}">
-                <a16:creationId xmlns:a16="http://schemas.microsoft.com/office/drawing/2014/main" xmlns="" id="{7D16C196-D24B-4BE0-AE74-D44907B2A1B1}"/>
+                <a16:creationId xmlns="" xmlns:a16="http://schemas.microsoft.com/office/drawing/2014/main" id="{7D16C196-D24B-4BE0-AE74-D44907B2A1B1}"/>
               </a:ext>
             </a:extLst>
           </p:cNvPr>
@@ -8476,7 +8476,7 @@
           <p:cNvPr id="6148" name="灯片编号占位符 3">
             <a:extLst>
               <a:ext uri="{FF2B5EF4-FFF2-40B4-BE49-F238E27FC236}">
-                <a16:creationId xmlns:a16="http://schemas.microsoft.com/office/drawing/2014/main" xmlns="" id="{D230392C-ED50-49C3-93A6-10868BF6DADE}"/>
+                <a16:creationId xmlns="" xmlns:a16="http://schemas.microsoft.com/office/drawing/2014/main" id="{D230392C-ED50-49C3-93A6-10868BF6DADE}"/>
               </a:ext>
             </a:extLst>
           </p:cNvPr>
@@ -8726,7 +8726,7 @@
           <p:cNvPr id="6146" name="幻灯片图像占位符 1">
             <a:extLst>
               <a:ext uri="{FF2B5EF4-FFF2-40B4-BE49-F238E27FC236}">
-                <a16:creationId xmlns:a16="http://schemas.microsoft.com/office/drawing/2014/main" xmlns="" id="{4908B133-C54F-400F-8F70-355C57C0BE11}"/>
+                <a16:creationId xmlns="" xmlns:a16="http://schemas.microsoft.com/office/drawing/2014/main" id="{4908B133-C54F-400F-8F70-355C57C0BE11}"/>
               </a:ext>
             </a:extLst>
           </p:cNvPr>
@@ -8763,7 +8763,7 @@
           <p:cNvPr id="6147" name="备注占位符 2">
             <a:extLst>
               <a:ext uri="{FF2B5EF4-FFF2-40B4-BE49-F238E27FC236}">
-                <a16:creationId xmlns:a16="http://schemas.microsoft.com/office/drawing/2014/main" xmlns="" id="{7D16C196-D24B-4BE0-AE74-D44907B2A1B1}"/>
+                <a16:creationId xmlns="" xmlns:a16="http://schemas.microsoft.com/office/drawing/2014/main" id="{7D16C196-D24B-4BE0-AE74-D44907B2A1B1}"/>
               </a:ext>
             </a:extLst>
           </p:cNvPr>
@@ -8818,7 +8818,7 @@
           <p:cNvPr id="6148" name="灯片编号占位符 3">
             <a:extLst>
               <a:ext uri="{FF2B5EF4-FFF2-40B4-BE49-F238E27FC236}">
-                <a16:creationId xmlns:a16="http://schemas.microsoft.com/office/drawing/2014/main" xmlns="" id="{D230392C-ED50-49C3-93A6-10868BF6DADE}"/>
+                <a16:creationId xmlns="" xmlns:a16="http://schemas.microsoft.com/office/drawing/2014/main" id="{D230392C-ED50-49C3-93A6-10868BF6DADE}"/>
               </a:ext>
             </a:extLst>
           </p:cNvPr>
@@ -9068,7 +9068,7 @@
           <p:cNvPr id="6146" name="幻灯片图像占位符 1">
             <a:extLst>
               <a:ext uri="{FF2B5EF4-FFF2-40B4-BE49-F238E27FC236}">
-                <a16:creationId xmlns:a16="http://schemas.microsoft.com/office/drawing/2014/main" xmlns="" id="{4908B133-C54F-400F-8F70-355C57C0BE11}"/>
+                <a16:creationId xmlns="" xmlns:a16="http://schemas.microsoft.com/office/drawing/2014/main" id="{4908B133-C54F-400F-8F70-355C57C0BE11}"/>
               </a:ext>
             </a:extLst>
           </p:cNvPr>
@@ -9105,7 +9105,7 @@
           <p:cNvPr id="6147" name="备注占位符 2">
             <a:extLst>
               <a:ext uri="{FF2B5EF4-FFF2-40B4-BE49-F238E27FC236}">
-                <a16:creationId xmlns:a16="http://schemas.microsoft.com/office/drawing/2014/main" xmlns="" id="{7D16C196-D24B-4BE0-AE74-D44907B2A1B1}"/>
+                <a16:creationId xmlns="" xmlns:a16="http://schemas.microsoft.com/office/drawing/2014/main" id="{7D16C196-D24B-4BE0-AE74-D44907B2A1B1}"/>
               </a:ext>
             </a:extLst>
           </p:cNvPr>
@@ -9160,7 +9160,7 @@
           <p:cNvPr id="6148" name="灯片编号占位符 3">
             <a:extLst>
               <a:ext uri="{FF2B5EF4-FFF2-40B4-BE49-F238E27FC236}">
-                <a16:creationId xmlns:a16="http://schemas.microsoft.com/office/drawing/2014/main" xmlns="" id="{D230392C-ED50-49C3-93A6-10868BF6DADE}"/>
+                <a16:creationId xmlns="" xmlns:a16="http://schemas.microsoft.com/office/drawing/2014/main" id="{D230392C-ED50-49C3-93A6-10868BF6DADE}"/>
               </a:ext>
             </a:extLst>
           </p:cNvPr>
@@ -9410,7 +9410,7 @@
           <p:cNvPr id="6146" name="幻灯片图像占位符 1">
             <a:extLst>
               <a:ext uri="{FF2B5EF4-FFF2-40B4-BE49-F238E27FC236}">
-                <a16:creationId xmlns:a16="http://schemas.microsoft.com/office/drawing/2014/main" xmlns="" id="{4908B133-C54F-400F-8F70-355C57C0BE11}"/>
+                <a16:creationId xmlns="" xmlns:a16="http://schemas.microsoft.com/office/drawing/2014/main" id="{4908B133-C54F-400F-8F70-355C57C0BE11}"/>
               </a:ext>
             </a:extLst>
           </p:cNvPr>
@@ -9447,7 +9447,7 @@
           <p:cNvPr id="6147" name="备注占位符 2">
             <a:extLst>
               <a:ext uri="{FF2B5EF4-FFF2-40B4-BE49-F238E27FC236}">
-                <a16:creationId xmlns:a16="http://schemas.microsoft.com/office/drawing/2014/main" xmlns="" id="{7D16C196-D24B-4BE0-AE74-D44907B2A1B1}"/>
+                <a16:creationId xmlns="" xmlns:a16="http://schemas.microsoft.com/office/drawing/2014/main" id="{7D16C196-D24B-4BE0-AE74-D44907B2A1B1}"/>
               </a:ext>
             </a:extLst>
           </p:cNvPr>
@@ -9502,7 +9502,7 @@
           <p:cNvPr id="6148" name="灯片编号占位符 3">
             <a:extLst>
               <a:ext uri="{FF2B5EF4-FFF2-40B4-BE49-F238E27FC236}">
-                <a16:creationId xmlns:a16="http://schemas.microsoft.com/office/drawing/2014/main" xmlns="" id="{D230392C-ED50-49C3-93A6-10868BF6DADE}"/>
+                <a16:creationId xmlns="" xmlns:a16="http://schemas.microsoft.com/office/drawing/2014/main" id="{D230392C-ED50-49C3-93A6-10868BF6DADE}"/>
               </a:ext>
             </a:extLst>
           </p:cNvPr>
@@ -9752,7 +9752,7 @@
           <p:cNvPr id="6146" name="幻灯片图像占位符 1">
             <a:extLst>
               <a:ext uri="{FF2B5EF4-FFF2-40B4-BE49-F238E27FC236}">
-                <a16:creationId xmlns:a16="http://schemas.microsoft.com/office/drawing/2014/main" xmlns="" id="{4908B133-C54F-400F-8F70-355C57C0BE11}"/>
+                <a16:creationId xmlns="" xmlns:a16="http://schemas.microsoft.com/office/drawing/2014/main" id="{4908B133-C54F-400F-8F70-355C57C0BE11}"/>
               </a:ext>
             </a:extLst>
           </p:cNvPr>
@@ -9789,7 +9789,7 @@
           <p:cNvPr id="6147" name="备注占位符 2">
             <a:extLst>
               <a:ext uri="{FF2B5EF4-FFF2-40B4-BE49-F238E27FC236}">
-                <a16:creationId xmlns:a16="http://schemas.microsoft.com/office/drawing/2014/main" xmlns="" id="{7D16C196-D24B-4BE0-AE74-D44907B2A1B1}"/>
+                <a16:creationId xmlns="" xmlns:a16="http://schemas.microsoft.com/office/drawing/2014/main" id="{7D16C196-D24B-4BE0-AE74-D44907B2A1B1}"/>
               </a:ext>
             </a:extLst>
           </p:cNvPr>
@@ -9844,7 +9844,7 @@
           <p:cNvPr id="6148" name="灯片编号占位符 3">
             <a:extLst>
               <a:ext uri="{FF2B5EF4-FFF2-40B4-BE49-F238E27FC236}">
-                <a16:creationId xmlns:a16="http://schemas.microsoft.com/office/drawing/2014/main" xmlns="" id="{D230392C-ED50-49C3-93A6-10868BF6DADE}"/>
+                <a16:creationId xmlns="" xmlns:a16="http://schemas.microsoft.com/office/drawing/2014/main" id="{D230392C-ED50-49C3-93A6-10868BF6DADE}"/>
               </a:ext>
             </a:extLst>
           </p:cNvPr>
@@ -10094,7 +10094,7 @@
           <p:cNvPr id="6146" name="幻灯片图像占位符 1">
             <a:extLst>
               <a:ext uri="{FF2B5EF4-FFF2-40B4-BE49-F238E27FC236}">
-                <a16:creationId xmlns:a16="http://schemas.microsoft.com/office/drawing/2014/main" xmlns="" id="{4908B133-C54F-400F-8F70-355C57C0BE11}"/>
+                <a16:creationId xmlns="" xmlns:a16="http://schemas.microsoft.com/office/drawing/2014/main" id="{4908B133-C54F-400F-8F70-355C57C0BE11}"/>
               </a:ext>
             </a:extLst>
           </p:cNvPr>
@@ -10131,7 +10131,7 @@
           <p:cNvPr id="6147" name="备注占位符 2">
             <a:extLst>
               <a:ext uri="{FF2B5EF4-FFF2-40B4-BE49-F238E27FC236}">
-                <a16:creationId xmlns:a16="http://schemas.microsoft.com/office/drawing/2014/main" xmlns="" id="{7D16C196-D24B-4BE0-AE74-D44907B2A1B1}"/>
+                <a16:creationId xmlns="" xmlns:a16="http://schemas.microsoft.com/office/drawing/2014/main" id="{7D16C196-D24B-4BE0-AE74-D44907B2A1B1}"/>
               </a:ext>
             </a:extLst>
           </p:cNvPr>
@@ -10186,7 +10186,7 @@
           <p:cNvPr id="6148" name="灯片编号占位符 3">
             <a:extLst>
               <a:ext uri="{FF2B5EF4-FFF2-40B4-BE49-F238E27FC236}">
-                <a16:creationId xmlns:a16="http://schemas.microsoft.com/office/drawing/2014/main" xmlns="" id="{D230392C-ED50-49C3-93A6-10868BF6DADE}"/>
+                <a16:creationId xmlns="" xmlns:a16="http://schemas.microsoft.com/office/drawing/2014/main" id="{D230392C-ED50-49C3-93A6-10868BF6DADE}"/>
               </a:ext>
             </a:extLst>
           </p:cNvPr>
@@ -10436,7 +10436,7 @@
           <p:cNvPr id="6146" name="幻灯片图像占位符 1">
             <a:extLst>
               <a:ext uri="{FF2B5EF4-FFF2-40B4-BE49-F238E27FC236}">
-                <a16:creationId xmlns:a16="http://schemas.microsoft.com/office/drawing/2014/main" xmlns="" id="{4908B133-C54F-400F-8F70-355C57C0BE11}"/>
+                <a16:creationId xmlns="" xmlns:a16="http://schemas.microsoft.com/office/drawing/2014/main" id="{4908B133-C54F-400F-8F70-355C57C0BE11}"/>
               </a:ext>
             </a:extLst>
           </p:cNvPr>
@@ -10473,7 +10473,7 @@
           <p:cNvPr id="6147" name="备注占位符 2">
             <a:extLst>
               <a:ext uri="{FF2B5EF4-FFF2-40B4-BE49-F238E27FC236}">
-                <a16:creationId xmlns:a16="http://schemas.microsoft.com/office/drawing/2014/main" xmlns="" id="{7D16C196-D24B-4BE0-AE74-D44907B2A1B1}"/>
+                <a16:creationId xmlns="" xmlns:a16="http://schemas.microsoft.com/office/drawing/2014/main" id="{7D16C196-D24B-4BE0-AE74-D44907B2A1B1}"/>
               </a:ext>
             </a:extLst>
           </p:cNvPr>
@@ -10528,7 +10528,7 @@
           <p:cNvPr id="6148" name="灯片编号占位符 3">
             <a:extLst>
               <a:ext uri="{FF2B5EF4-FFF2-40B4-BE49-F238E27FC236}">
-                <a16:creationId xmlns:a16="http://schemas.microsoft.com/office/drawing/2014/main" xmlns="" id="{D230392C-ED50-49C3-93A6-10868BF6DADE}"/>
+                <a16:creationId xmlns="" xmlns:a16="http://schemas.microsoft.com/office/drawing/2014/main" id="{D230392C-ED50-49C3-93A6-10868BF6DADE}"/>
               </a:ext>
             </a:extLst>
           </p:cNvPr>
@@ -10778,7 +10778,7 @@
           <p:cNvPr id="6146" name="幻灯片图像占位符 1">
             <a:extLst>
               <a:ext uri="{FF2B5EF4-FFF2-40B4-BE49-F238E27FC236}">
-                <a16:creationId xmlns:a16="http://schemas.microsoft.com/office/drawing/2014/main" xmlns="" id="{4908B133-C54F-400F-8F70-355C57C0BE11}"/>
+                <a16:creationId xmlns="" xmlns:a16="http://schemas.microsoft.com/office/drawing/2014/main" id="{4908B133-C54F-400F-8F70-355C57C0BE11}"/>
               </a:ext>
             </a:extLst>
           </p:cNvPr>
@@ -10815,7 +10815,7 @@
           <p:cNvPr id="6147" name="备注占位符 2">
             <a:extLst>
               <a:ext uri="{FF2B5EF4-FFF2-40B4-BE49-F238E27FC236}">
-                <a16:creationId xmlns:a16="http://schemas.microsoft.com/office/drawing/2014/main" xmlns="" id="{7D16C196-D24B-4BE0-AE74-D44907B2A1B1}"/>
+                <a16:creationId xmlns="" xmlns:a16="http://schemas.microsoft.com/office/drawing/2014/main" id="{7D16C196-D24B-4BE0-AE74-D44907B2A1B1}"/>
               </a:ext>
             </a:extLst>
           </p:cNvPr>
@@ -10870,7 +10870,7 @@
           <p:cNvPr id="6148" name="灯片编号占位符 3">
             <a:extLst>
               <a:ext uri="{FF2B5EF4-FFF2-40B4-BE49-F238E27FC236}">
-                <a16:creationId xmlns:a16="http://schemas.microsoft.com/office/drawing/2014/main" xmlns="" id="{D230392C-ED50-49C3-93A6-10868BF6DADE}"/>
+                <a16:creationId xmlns="" xmlns:a16="http://schemas.microsoft.com/office/drawing/2014/main" id="{D230392C-ED50-49C3-93A6-10868BF6DADE}"/>
               </a:ext>
             </a:extLst>
           </p:cNvPr>
@@ -11120,7 +11120,7 @@
           <p:cNvPr id="6146" name="幻灯片图像占位符 1">
             <a:extLst>
               <a:ext uri="{FF2B5EF4-FFF2-40B4-BE49-F238E27FC236}">
-                <a16:creationId xmlns:a16="http://schemas.microsoft.com/office/drawing/2014/main" xmlns="" id="{4908B133-C54F-400F-8F70-355C57C0BE11}"/>
+                <a16:creationId xmlns="" xmlns:a16="http://schemas.microsoft.com/office/drawing/2014/main" id="{4908B133-C54F-400F-8F70-355C57C0BE11}"/>
               </a:ext>
             </a:extLst>
           </p:cNvPr>
@@ -11157,7 +11157,7 @@
           <p:cNvPr id="6147" name="备注占位符 2">
             <a:extLst>
               <a:ext uri="{FF2B5EF4-FFF2-40B4-BE49-F238E27FC236}">
-                <a16:creationId xmlns:a16="http://schemas.microsoft.com/office/drawing/2014/main" xmlns="" id="{7D16C196-D24B-4BE0-AE74-D44907B2A1B1}"/>
+                <a16:creationId xmlns="" xmlns:a16="http://schemas.microsoft.com/office/drawing/2014/main" id="{7D16C196-D24B-4BE0-AE74-D44907B2A1B1}"/>
               </a:ext>
             </a:extLst>
           </p:cNvPr>
@@ -11212,7 +11212,7 @@
           <p:cNvPr id="6148" name="灯片编号占位符 3">
             <a:extLst>
               <a:ext uri="{FF2B5EF4-FFF2-40B4-BE49-F238E27FC236}">
-                <a16:creationId xmlns:a16="http://schemas.microsoft.com/office/drawing/2014/main" xmlns="" id="{D230392C-ED50-49C3-93A6-10868BF6DADE}"/>
+                <a16:creationId xmlns="" xmlns:a16="http://schemas.microsoft.com/office/drawing/2014/main" id="{D230392C-ED50-49C3-93A6-10868BF6DADE}"/>
               </a:ext>
             </a:extLst>
           </p:cNvPr>
@@ -11462,7 +11462,7 @@
           <p:cNvPr id="6146" name="幻灯片图像占位符 1">
             <a:extLst>
               <a:ext uri="{FF2B5EF4-FFF2-40B4-BE49-F238E27FC236}">
-                <a16:creationId xmlns:a16="http://schemas.microsoft.com/office/drawing/2014/main" xmlns="" id="{4908B133-C54F-400F-8F70-355C57C0BE11}"/>
+                <a16:creationId xmlns="" xmlns:a16="http://schemas.microsoft.com/office/drawing/2014/main" id="{4908B133-C54F-400F-8F70-355C57C0BE11}"/>
               </a:ext>
             </a:extLst>
           </p:cNvPr>
@@ -11499,7 +11499,7 @@
           <p:cNvPr id="6147" name="备注占位符 2">
             <a:extLst>
               <a:ext uri="{FF2B5EF4-FFF2-40B4-BE49-F238E27FC236}">
-                <a16:creationId xmlns:a16="http://schemas.microsoft.com/office/drawing/2014/main" xmlns="" id="{7D16C196-D24B-4BE0-AE74-D44907B2A1B1}"/>
+                <a16:creationId xmlns="" xmlns:a16="http://schemas.microsoft.com/office/drawing/2014/main" id="{7D16C196-D24B-4BE0-AE74-D44907B2A1B1}"/>
               </a:ext>
             </a:extLst>
           </p:cNvPr>
@@ -11554,7 +11554,7 @@
           <p:cNvPr id="6148" name="灯片编号占位符 3">
             <a:extLst>
               <a:ext uri="{FF2B5EF4-FFF2-40B4-BE49-F238E27FC236}">
-                <a16:creationId xmlns:a16="http://schemas.microsoft.com/office/drawing/2014/main" xmlns="" id="{D230392C-ED50-49C3-93A6-10868BF6DADE}"/>
+                <a16:creationId xmlns="" xmlns:a16="http://schemas.microsoft.com/office/drawing/2014/main" id="{D230392C-ED50-49C3-93A6-10868BF6DADE}"/>
               </a:ext>
             </a:extLst>
           </p:cNvPr>
@@ -11804,7 +11804,7 @@
           <p:cNvPr id="2" name="标题 1">
             <a:extLst>
               <a:ext uri="{FF2B5EF4-FFF2-40B4-BE49-F238E27FC236}">
-                <a16:creationId xmlns:a16="http://schemas.microsoft.com/office/drawing/2014/main" xmlns="" id="{558AFC1F-0EC5-49BF-9268-F0FEE4B60F85}"/>
+                <a16:creationId xmlns="" xmlns:a16="http://schemas.microsoft.com/office/drawing/2014/main" id="{558AFC1F-0EC5-49BF-9268-F0FEE4B60F85}"/>
               </a:ext>
             </a:extLst>
           </p:cNvPr>
@@ -11841,7 +11841,7 @@
           <p:cNvPr id="3" name="副标题 2">
             <a:extLst>
               <a:ext uri="{FF2B5EF4-FFF2-40B4-BE49-F238E27FC236}">
-                <a16:creationId xmlns:a16="http://schemas.microsoft.com/office/drawing/2014/main" xmlns="" id="{411F25FC-AA7A-420B-9A3A-84ECEF4013AF}"/>
+                <a16:creationId xmlns="" xmlns:a16="http://schemas.microsoft.com/office/drawing/2014/main" id="{411F25FC-AA7A-420B-9A3A-84ECEF4013AF}"/>
               </a:ext>
             </a:extLst>
           </p:cNvPr>
@@ -11911,7 +11911,7 @@
           <p:cNvPr id="4" name="Rectangle 4">
             <a:extLst>
               <a:ext uri="{FF2B5EF4-FFF2-40B4-BE49-F238E27FC236}">
-                <a16:creationId xmlns:a16="http://schemas.microsoft.com/office/drawing/2014/main" xmlns="" id="{892DDA44-EBAA-4B0D-B1AD-17FC12E24344}"/>
+                <a16:creationId xmlns="" xmlns:a16="http://schemas.microsoft.com/office/drawing/2014/main" id="{892DDA44-EBAA-4B0D-B1AD-17FC12E24344}"/>
               </a:ext>
             </a:extLst>
           </p:cNvPr>
@@ -11945,7 +11945,7 @@
           <p:cNvPr id="5" name="Rectangle 5">
             <a:extLst>
               <a:ext uri="{FF2B5EF4-FFF2-40B4-BE49-F238E27FC236}">
-                <a16:creationId xmlns:a16="http://schemas.microsoft.com/office/drawing/2014/main" xmlns="" id="{59A68DBD-F8D1-4CAE-ACF1-A66E61D864F9}"/>
+                <a16:creationId xmlns="" xmlns:a16="http://schemas.microsoft.com/office/drawing/2014/main" id="{59A68DBD-F8D1-4CAE-ACF1-A66E61D864F9}"/>
               </a:ext>
             </a:extLst>
           </p:cNvPr>
@@ -11979,7 +11979,7 @@
           <p:cNvPr id="6" name="Rectangle 6">
             <a:extLst>
               <a:ext uri="{FF2B5EF4-FFF2-40B4-BE49-F238E27FC236}">
-                <a16:creationId xmlns:a16="http://schemas.microsoft.com/office/drawing/2014/main" xmlns="" id="{A406CACD-345F-48D9-9536-018A859493C9}"/>
+                <a16:creationId xmlns="" xmlns:a16="http://schemas.microsoft.com/office/drawing/2014/main" id="{A406CACD-345F-48D9-9536-018A859493C9}"/>
               </a:ext>
             </a:extLst>
           </p:cNvPr>
@@ -12050,7 +12050,7 @@
           <p:cNvPr id="2" name="标题 1">
             <a:extLst>
               <a:ext uri="{FF2B5EF4-FFF2-40B4-BE49-F238E27FC236}">
-                <a16:creationId xmlns:a16="http://schemas.microsoft.com/office/drawing/2014/main" xmlns="" id="{413EF4AD-90B9-4E2D-B48C-D5D41ADC00B1}"/>
+                <a16:creationId xmlns="" xmlns:a16="http://schemas.microsoft.com/office/drawing/2014/main" id="{413EF4AD-90B9-4E2D-B48C-D5D41ADC00B1}"/>
               </a:ext>
             </a:extLst>
           </p:cNvPr>
@@ -12078,7 +12078,7 @@
           <p:cNvPr id="3" name="竖排文字占位符 2">
             <a:extLst>
               <a:ext uri="{FF2B5EF4-FFF2-40B4-BE49-F238E27FC236}">
-                <a16:creationId xmlns:a16="http://schemas.microsoft.com/office/drawing/2014/main" xmlns="" id="{2935463B-296C-4D20-B55D-237CE160497F}"/>
+                <a16:creationId xmlns="" xmlns:a16="http://schemas.microsoft.com/office/drawing/2014/main" id="{2935463B-296C-4D20-B55D-237CE160497F}"/>
               </a:ext>
             </a:extLst>
           </p:cNvPr>
@@ -12135,7 +12135,7 @@
           <p:cNvPr id="4" name="Rectangle 4">
             <a:extLst>
               <a:ext uri="{FF2B5EF4-FFF2-40B4-BE49-F238E27FC236}">
-                <a16:creationId xmlns:a16="http://schemas.microsoft.com/office/drawing/2014/main" xmlns="" id="{1572E583-F505-4444-906F-8206A9EE7F1E}"/>
+                <a16:creationId xmlns="" xmlns:a16="http://schemas.microsoft.com/office/drawing/2014/main" id="{1572E583-F505-4444-906F-8206A9EE7F1E}"/>
               </a:ext>
             </a:extLst>
           </p:cNvPr>
@@ -12169,7 +12169,7 @@
           <p:cNvPr id="5" name="Rectangle 5">
             <a:extLst>
               <a:ext uri="{FF2B5EF4-FFF2-40B4-BE49-F238E27FC236}">
-                <a16:creationId xmlns:a16="http://schemas.microsoft.com/office/drawing/2014/main" xmlns="" id="{59D895F1-9DF8-48A9-9C6A-3A7AC93DF390}"/>
+                <a16:creationId xmlns="" xmlns:a16="http://schemas.microsoft.com/office/drawing/2014/main" id="{59D895F1-9DF8-48A9-9C6A-3A7AC93DF390}"/>
               </a:ext>
             </a:extLst>
           </p:cNvPr>
@@ -12203,7 +12203,7 @@
           <p:cNvPr id="6" name="Rectangle 6">
             <a:extLst>
               <a:ext uri="{FF2B5EF4-FFF2-40B4-BE49-F238E27FC236}">
-                <a16:creationId xmlns:a16="http://schemas.microsoft.com/office/drawing/2014/main" xmlns="" id="{291603C0-AEEF-495C-84B8-A97B75DBDA95}"/>
+                <a16:creationId xmlns="" xmlns:a16="http://schemas.microsoft.com/office/drawing/2014/main" id="{291603C0-AEEF-495C-84B8-A97B75DBDA95}"/>
               </a:ext>
             </a:extLst>
           </p:cNvPr>
@@ -12274,7 +12274,7 @@
           <p:cNvPr id="2" name="竖排标题 1">
             <a:extLst>
               <a:ext uri="{FF2B5EF4-FFF2-40B4-BE49-F238E27FC236}">
-                <a16:creationId xmlns:a16="http://schemas.microsoft.com/office/drawing/2014/main" xmlns="" id="{5C3D78EF-5EF5-478D-8576-1606D3C29178}"/>
+                <a16:creationId xmlns="" xmlns:a16="http://schemas.microsoft.com/office/drawing/2014/main" id="{5C3D78EF-5EF5-478D-8576-1606D3C29178}"/>
               </a:ext>
             </a:extLst>
           </p:cNvPr>
@@ -12307,7 +12307,7 @@
           <p:cNvPr id="3" name="竖排文字占位符 2">
             <a:extLst>
               <a:ext uri="{FF2B5EF4-FFF2-40B4-BE49-F238E27FC236}">
-                <a16:creationId xmlns:a16="http://schemas.microsoft.com/office/drawing/2014/main" xmlns="" id="{4DCD9F3D-20DB-4182-AD70-C533BC393EB5}"/>
+                <a16:creationId xmlns="" xmlns:a16="http://schemas.microsoft.com/office/drawing/2014/main" id="{4DCD9F3D-20DB-4182-AD70-C533BC393EB5}"/>
               </a:ext>
             </a:extLst>
           </p:cNvPr>
@@ -12369,7 +12369,7 @@
           <p:cNvPr id="4" name="Rectangle 4">
             <a:extLst>
               <a:ext uri="{FF2B5EF4-FFF2-40B4-BE49-F238E27FC236}">
-                <a16:creationId xmlns:a16="http://schemas.microsoft.com/office/drawing/2014/main" xmlns="" id="{80FCF88E-129A-43F9-90EC-1AB558A2726C}"/>
+                <a16:creationId xmlns="" xmlns:a16="http://schemas.microsoft.com/office/drawing/2014/main" id="{80FCF88E-129A-43F9-90EC-1AB558A2726C}"/>
               </a:ext>
             </a:extLst>
           </p:cNvPr>
@@ -12403,7 +12403,7 @@
           <p:cNvPr id="5" name="Rectangle 5">
             <a:extLst>
               <a:ext uri="{FF2B5EF4-FFF2-40B4-BE49-F238E27FC236}">
-                <a16:creationId xmlns:a16="http://schemas.microsoft.com/office/drawing/2014/main" xmlns="" id="{3124BE14-18C5-46A6-8BD5-794314EF816D}"/>
+                <a16:creationId xmlns="" xmlns:a16="http://schemas.microsoft.com/office/drawing/2014/main" id="{3124BE14-18C5-46A6-8BD5-794314EF816D}"/>
               </a:ext>
             </a:extLst>
           </p:cNvPr>
@@ -12437,7 +12437,7 @@
           <p:cNvPr id="6" name="Rectangle 6">
             <a:extLst>
               <a:ext uri="{FF2B5EF4-FFF2-40B4-BE49-F238E27FC236}">
-                <a16:creationId xmlns:a16="http://schemas.microsoft.com/office/drawing/2014/main" xmlns="" id="{597D6CFD-B5D7-46E4-8617-4E9947427CAF}"/>
+                <a16:creationId xmlns="" xmlns:a16="http://schemas.microsoft.com/office/drawing/2014/main" id="{597D6CFD-B5D7-46E4-8617-4E9947427CAF}"/>
               </a:ext>
             </a:extLst>
           </p:cNvPr>
@@ -12508,7 +12508,7 @@
           <p:cNvPr id="2" name="标题 1">
             <a:extLst>
               <a:ext uri="{FF2B5EF4-FFF2-40B4-BE49-F238E27FC236}">
-                <a16:creationId xmlns:a16="http://schemas.microsoft.com/office/drawing/2014/main" xmlns="" id="{79C7DECC-98E6-4FD9-AAA2-12B4A61F95C6}"/>
+                <a16:creationId xmlns="" xmlns:a16="http://schemas.microsoft.com/office/drawing/2014/main" id="{79C7DECC-98E6-4FD9-AAA2-12B4A61F95C6}"/>
               </a:ext>
             </a:extLst>
           </p:cNvPr>
@@ -12536,7 +12536,7 @@
           <p:cNvPr id="3" name="内容占位符 2">
             <a:extLst>
               <a:ext uri="{FF2B5EF4-FFF2-40B4-BE49-F238E27FC236}">
-                <a16:creationId xmlns:a16="http://schemas.microsoft.com/office/drawing/2014/main" xmlns="" id="{2DFFF49D-5346-4472-B7B4-2B4B12070C2F}"/>
+                <a16:creationId xmlns="" xmlns:a16="http://schemas.microsoft.com/office/drawing/2014/main" id="{2DFFF49D-5346-4472-B7B4-2B4B12070C2F}"/>
               </a:ext>
             </a:extLst>
           </p:cNvPr>
@@ -12593,7 +12593,7 @@
           <p:cNvPr id="4" name="Rectangle 4">
             <a:extLst>
               <a:ext uri="{FF2B5EF4-FFF2-40B4-BE49-F238E27FC236}">
-                <a16:creationId xmlns:a16="http://schemas.microsoft.com/office/drawing/2014/main" xmlns="" id="{3AE54C17-8281-4CEE-80BD-30C4F778807C}"/>
+                <a16:creationId xmlns="" xmlns:a16="http://schemas.microsoft.com/office/drawing/2014/main" id="{3AE54C17-8281-4CEE-80BD-30C4F778807C}"/>
               </a:ext>
             </a:extLst>
           </p:cNvPr>
@@ -12627,7 +12627,7 @@
           <p:cNvPr id="5" name="Rectangle 5">
             <a:extLst>
               <a:ext uri="{FF2B5EF4-FFF2-40B4-BE49-F238E27FC236}">
-                <a16:creationId xmlns:a16="http://schemas.microsoft.com/office/drawing/2014/main" xmlns="" id="{AA5AD5C1-CA4D-49A1-9F23-7E5608819125}"/>
+                <a16:creationId xmlns="" xmlns:a16="http://schemas.microsoft.com/office/drawing/2014/main" id="{AA5AD5C1-CA4D-49A1-9F23-7E5608819125}"/>
               </a:ext>
             </a:extLst>
           </p:cNvPr>
@@ -12661,7 +12661,7 @@
           <p:cNvPr id="6" name="Rectangle 6">
             <a:extLst>
               <a:ext uri="{FF2B5EF4-FFF2-40B4-BE49-F238E27FC236}">
-                <a16:creationId xmlns:a16="http://schemas.microsoft.com/office/drawing/2014/main" xmlns="" id="{89EA5E6E-1878-4876-87FC-34CF0D7DC10A}"/>
+                <a16:creationId xmlns="" xmlns:a16="http://schemas.microsoft.com/office/drawing/2014/main" id="{89EA5E6E-1878-4876-87FC-34CF0D7DC10A}"/>
               </a:ext>
             </a:extLst>
           </p:cNvPr>
@@ -12747,7 +12747,7 @@
           <p:cNvPr id="2" name="标题 1">
             <a:extLst>
               <a:ext uri="{FF2B5EF4-FFF2-40B4-BE49-F238E27FC236}">
-                <a16:creationId xmlns:a16="http://schemas.microsoft.com/office/drawing/2014/main" xmlns="" id="{D1C66AC4-7745-487C-B77E-D7209402F8D3}"/>
+                <a16:creationId xmlns="" xmlns:a16="http://schemas.microsoft.com/office/drawing/2014/main" id="{D1C66AC4-7745-487C-B77E-D7209402F8D3}"/>
               </a:ext>
             </a:extLst>
           </p:cNvPr>
@@ -12784,7 +12784,7 @@
           <p:cNvPr id="3" name="文本占位符 2">
             <a:extLst>
               <a:ext uri="{FF2B5EF4-FFF2-40B4-BE49-F238E27FC236}">
-                <a16:creationId xmlns:a16="http://schemas.microsoft.com/office/drawing/2014/main" xmlns="" id="{F0642504-C3D3-4FEB-932D-43E152422788}"/>
+                <a16:creationId xmlns="" xmlns:a16="http://schemas.microsoft.com/office/drawing/2014/main" id="{F0642504-C3D3-4FEB-932D-43E152422788}"/>
               </a:ext>
             </a:extLst>
           </p:cNvPr>
@@ -12855,7 +12855,7 @@
           <p:cNvPr id="4" name="Rectangle 4">
             <a:extLst>
               <a:ext uri="{FF2B5EF4-FFF2-40B4-BE49-F238E27FC236}">
-                <a16:creationId xmlns:a16="http://schemas.microsoft.com/office/drawing/2014/main" xmlns="" id="{1FDDD93F-F324-4F9A-B9D4-6849A4C3DA30}"/>
+                <a16:creationId xmlns="" xmlns:a16="http://schemas.microsoft.com/office/drawing/2014/main" id="{1FDDD93F-F324-4F9A-B9D4-6849A4C3DA30}"/>
               </a:ext>
             </a:extLst>
           </p:cNvPr>
@@ -12889,7 +12889,7 @@
           <p:cNvPr id="5" name="Rectangle 5">
             <a:extLst>
               <a:ext uri="{FF2B5EF4-FFF2-40B4-BE49-F238E27FC236}">
-                <a16:creationId xmlns:a16="http://schemas.microsoft.com/office/drawing/2014/main" xmlns="" id="{58D17B65-E136-4CDA-8948-06EE82F4BCF9}"/>
+                <a16:creationId xmlns="" xmlns:a16="http://schemas.microsoft.com/office/drawing/2014/main" id="{58D17B65-E136-4CDA-8948-06EE82F4BCF9}"/>
               </a:ext>
             </a:extLst>
           </p:cNvPr>
@@ -12923,7 +12923,7 @@
           <p:cNvPr id="6" name="Rectangle 6">
             <a:extLst>
               <a:ext uri="{FF2B5EF4-FFF2-40B4-BE49-F238E27FC236}">
-                <a16:creationId xmlns:a16="http://schemas.microsoft.com/office/drawing/2014/main" xmlns="" id="{D7125560-B1D6-4FEA-8C81-81F49D4763C4}"/>
+                <a16:creationId xmlns="" xmlns:a16="http://schemas.microsoft.com/office/drawing/2014/main" id="{D7125560-B1D6-4FEA-8C81-81F49D4763C4}"/>
               </a:ext>
             </a:extLst>
           </p:cNvPr>
@@ -12994,7 +12994,7 @@
           <p:cNvPr id="2" name="标题 1">
             <a:extLst>
               <a:ext uri="{FF2B5EF4-FFF2-40B4-BE49-F238E27FC236}">
-                <a16:creationId xmlns:a16="http://schemas.microsoft.com/office/drawing/2014/main" xmlns="" id="{235DD831-5C92-41D8-B2A4-F735B961D24C}"/>
+                <a16:creationId xmlns="" xmlns:a16="http://schemas.microsoft.com/office/drawing/2014/main" id="{235DD831-5C92-41D8-B2A4-F735B961D24C}"/>
               </a:ext>
             </a:extLst>
           </p:cNvPr>
@@ -13022,7 +13022,7 @@
           <p:cNvPr id="3" name="内容占位符 2">
             <a:extLst>
               <a:ext uri="{FF2B5EF4-FFF2-40B4-BE49-F238E27FC236}">
-                <a16:creationId xmlns:a16="http://schemas.microsoft.com/office/drawing/2014/main" xmlns="" id="{40589EF3-2B1D-4F74-90F9-1600D88D274F}"/>
+                <a16:creationId xmlns="" xmlns:a16="http://schemas.microsoft.com/office/drawing/2014/main" id="{40589EF3-2B1D-4F74-90F9-1600D88D274F}"/>
               </a:ext>
             </a:extLst>
           </p:cNvPr>
@@ -13084,7 +13084,7 @@
           <p:cNvPr id="4" name="内容占位符 3">
             <a:extLst>
               <a:ext uri="{FF2B5EF4-FFF2-40B4-BE49-F238E27FC236}">
-                <a16:creationId xmlns:a16="http://schemas.microsoft.com/office/drawing/2014/main" xmlns="" id="{31894757-41E5-4DC3-B486-BF0D8D2E3B3C}"/>
+                <a16:creationId xmlns="" xmlns:a16="http://schemas.microsoft.com/office/drawing/2014/main" id="{31894757-41E5-4DC3-B486-BF0D8D2E3B3C}"/>
               </a:ext>
             </a:extLst>
           </p:cNvPr>
@@ -13146,7 +13146,7 @@
           <p:cNvPr id="5" name="Rectangle 4">
             <a:extLst>
               <a:ext uri="{FF2B5EF4-FFF2-40B4-BE49-F238E27FC236}">
-                <a16:creationId xmlns:a16="http://schemas.microsoft.com/office/drawing/2014/main" xmlns="" id="{80B46424-4DF5-42C6-BA6D-7A5F0843E639}"/>
+                <a16:creationId xmlns="" xmlns:a16="http://schemas.microsoft.com/office/drawing/2014/main" id="{80B46424-4DF5-42C6-BA6D-7A5F0843E639}"/>
               </a:ext>
             </a:extLst>
           </p:cNvPr>
@@ -13180,7 +13180,7 @@
           <p:cNvPr id="6" name="Rectangle 5">
             <a:extLst>
               <a:ext uri="{FF2B5EF4-FFF2-40B4-BE49-F238E27FC236}">
-                <a16:creationId xmlns:a16="http://schemas.microsoft.com/office/drawing/2014/main" xmlns="" id="{54C6D9C2-78B1-4830-B70B-68D245CB3988}"/>
+                <a16:creationId xmlns="" xmlns:a16="http://schemas.microsoft.com/office/drawing/2014/main" id="{54C6D9C2-78B1-4830-B70B-68D245CB3988}"/>
               </a:ext>
             </a:extLst>
           </p:cNvPr>
@@ -13214,7 +13214,7 @@
           <p:cNvPr id="7" name="Rectangle 6">
             <a:extLst>
               <a:ext uri="{FF2B5EF4-FFF2-40B4-BE49-F238E27FC236}">
-                <a16:creationId xmlns:a16="http://schemas.microsoft.com/office/drawing/2014/main" xmlns="" id="{7C8F0C60-8AC6-4F0E-B049-CFBBD780349C}"/>
+                <a16:creationId xmlns="" xmlns:a16="http://schemas.microsoft.com/office/drawing/2014/main" id="{7C8F0C60-8AC6-4F0E-B049-CFBBD780349C}"/>
               </a:ext>
             </a:extLst>
           </p:cNvPr>
@@ -13285,7 +13285,7 @@
           <p:cNvPr id="2" name="标题 1">
             <a:extLst>
               <a:ext uri="{FF2B5EF4-FFF2-40B4-BE49-F238E27FC236}">
-                <a16:creationId xmlns:a16="http://schemas.microsoft.com/office/drawing/2014/main" xmlns="" id="{5EAC2349-C79E-4DAD-A7EC-F121B92EABC6}"/>
+                <a16:creationId xmlns="" xmlns:a16="http://schemas.microsoft.com/office/drawing/2014/main" id="{5EAC2349-C79E-4DAD-A7EC-F121B92EABC6}"/>
               </a:ext>
             </a:extLst>
           </p:cNvPr>
@@ -13318,7 +13318,7 @@
           <p:cNvPr id="3" name="文本占位符 2">
             <a:extLst>
               <a:ext uri="{FF2B5EF4-FFF2-40B4-BE49-F238E27FC236}">
-                <a16:creationId xmlns:a16="http://schemas.microsoft.com/office/drawing/2014/main" xmlns="" id="{6577C8D4-D6FA-4BC8-982E-A569EF349637}"/>
+                <a16:creationId xmlns="" xmlns:a16="http://schemas.microsoft.com/office/drawing/2014/main" id="{6577C8D4-D6FA-4BC8-982E-A569EF349637}"/>
               </a:ext>
             </a:extLst>
           </p:cNvPr>
@@ -13389,7 +13389,7 @@
           <p:cNvPr id="4" name="内容占位符 3">
             <a:extLst>
               <a:ext uri="{FF2B5EF4-FFF2-40B4-BE49-F238E27FC236}">
-                <a16:creationId xmlns:a16="http://schemas.microsoft.com/office/drawing/2014/main" xmlns="" id="{2C1BD52F-78B6-4701-9C21-05A4842E2948}"/>
+                <a16:creationId xmlns="" xmlns:a16="http://schemas.microsoft.com/office/drawing/2014/main" id="{2C1BD52F-78B6-4701-9C21-05A4842E2948}"/>
               </a:ext>
             </a:extLst>
           </p:cNvPr>
@@ -13451,7 +13451,7 @@
           <p:cNvPr id="5" name="文本占位符 4">
             <a:extLst>
               <a:ext uri="{FF2B5EF4-FFF2-40B4-BE49-F238E27FC236}">
-                <a16:creationId xmlns:a16="http://schemas.microsoft.com/office/drawing/2014/main" xmlns="" id="{41B5E117-E18D-486E-BBF0-E55E36688CE9}"/>
+                <a16:creationId xmlns="" xmlns:a16="http://schemas.microsoft.com/office/drawing/2014/main" id="{41B5E117-E18D-486E-BBF0-E55E36688CE9}"/>
               </a:ext>
             </a:extLst>
           </p:cNvPr>
@@ -13522,7 +13522,7 @@
           <p:cNvPr id="6" name="内容占位符 5">
             <a:extLst>
               <a:ext uri="{FF2B5EF4-FFF2-40B4-BE49-F238E27FC236}">
-                <a16:creationId xmlns:a16="http://schemas.microsoft.com/office/drawing/2014/main" xmlns="" id="{1A6184B9-916F-4A62-BB58-A9E1721165AE}"/>
+                <a16:creationId xmlns="" xmlns:a16="http://schemas.microsoft.com/office/drawing/2014/main" id="{1A6184B9-916F-4A62-BB58-A9E1721165AE}"/>
               </a:ext>
             </a:extLst>
           </p:cNvPr>
@@ -13584,7 +13584,7 @@
           <p:cNvPr id="7" name="Rectangle 4">
             <a:extLst>
               <a:ext uri="{FF2B5EF4-FFF2-40B4-BE49-F238E27FC236}">
-                <a16:creationId xmlns:a16="http://schemas.microsoft.com/office/drawing/2014/main" xmlns="" id="{9BDEFA24-1BB9-4A63-BE04-B2CD6F8BC7CD}"/>
+                <a16:creationId xmlns="" xmlns:a16="http://schemas.microsoft.com/office/drawing/2014/main" id="{9BDEFA24-1BB9-4A63-BE04-B2CD6F8BC7CD}"/>
               </a:ext>
             </a:extLst>
           </p:cNvPr>
@@ -13618,7 +13618,7 @@
           <p:cNvPr id="8" name="Rectangle 5">
             <a:extLst>
               <a:ext uri="{FF2B5EF4-FFF2-40B4-BE49-F238E27FC236}">
-                <a16:creationId xmlns:a16="http://schemas.microsoft.com/office/drawing/2014/main" xmlns="" id="{291227B2-68B3-4699-A416-5C0E6B364CA1}"/>
+                <a16:creationId xmlns="" xmlns:a16="http://schemas.microsoft.com/office/drawing/2014/main" id="{291227B2-68B3-4699-A416-5C0E6B364CA1}"/>
               </a:ext>
             </a:extLst>
           </p:cNvPr>
@@ -13652,7 +13652,7 @@
           <p:cNvPr id="9" name="Rectangle 6">
             <a:extLst>
               <a:ext uri="{FF2B5EF4-FFF2-40B4-BE49-F238E27FC236}">
-                <a16:creationId xmlns:a16="http://schemas.microsoft.com/office/drawing/2014/main" xmlns="" id="{DEC7A77C-9158-4F27-8F28-4C65512DA59A}"/>
+                <a16:creationId xmlns="" xmlns:a16="http://schemas.microsoft.com/office/drawing/2014/main" id="{DEC7A77C-9158-4F27-8F28-4C65512DA59A}"/>
               </a:ext>
             </a:extLst>
           </p:cNvPr>
@@ -13723,7 +13723,7 @@
           <p:cNvPr id="2" name="标题 1">
             <a:extLst>
               <a:ext uri="{FF2B5EF4-FFF2-40B4-BE49-F238E27FC236}">
-                <a16:creationId xmlns:a16="http://schemas.microsoft.com/office/drawing/2014/main" xmlns="" id="{2BC76C51-0028-4F2D-A216-4D11F5334867}"/>
+                <a16:creationId xmlns="" xmlns:a16="http://schemas.microsoft.com/office/drawing/2014/main" id="{2BC76C51-0028-4F2D-A216-4D11F5334867}"/>
               </a:ext>
             </a:extLst>
           </p:cNvPr>
@@ -13751,7 +13751,7 @@
           <p:cNvPr id="3" name="Rectangle 4">
             <a:extLst>
               <a:ext uri="{FF2B5EF4-FFF2-40B4-BE49-F238E27FC236}">
-                <a16:creationId xmlns:a16="http://schemas.microsoft.com/office/drawing/2014/main" xmlns="" id="{91CC3BF1-A404-4E2C-8AA3-99428C6F6DD8}"/>
+                <a16:creationId xmlns="" xmlns:a16="http://schemas.microsoft.com/office/drawing/2014/main" id="{91CC3BF1-A404-4E2C-8AA3-99428C6F6DD8}"/>
               </a:ext>
             </a:extLst>
           </p:cNvPr>
@@ -13785,7 +13785,7 @@
           <p:cNvPr id="4" name="Rectangle 5">
             <a:extLst>
               <a:ext uri="{FF2B5EF4-FFF2-40B4-BE49-F238E27FC236}">
-                <a16:creationId xmlns:a16="http://schemas.microsoft.com/office/drawing/2014/main" xmlns="" id="{B7D80654-FEB6-4772-9441-0475550AB2E7}"/>
+                <a16:creationId xmlns="" xmlns:a16="http://schemas.microsoft.com/office/drawing/2014/main" id="{B7D80654-FEB6-4772-9441-0475550AB2E7}"/>
               </a:ext>
             </a:extLst>
           </p:cNvPr>
@@ -13819,7 +13819,7 @@
           <p:cNvPr id="5" name="Rectangle 6">
             <a:extLst>
               <a:ext uri="{FF2B5EF4-FFF2-40B4-BE49-F238E27FC236}">
-                <a16:creationId xmlns:a16="http://schemas.microsoft.com/office/drawing/2014/main" xmlns="" id="{968FB6E6-FDEC-4041-BA77-FFA3A3FA254C}"/>
+                <a16:creationId xmlns="" xmlns:a16="http://schemas.microsoft.com/office/drawing/2014/main" id="{968FB6E6-FDEC-4041-BA77-FFA3A3FA254C}"/>
               </a:ext>
             </a:extLst>
           </p:cNvPr>
@@ -13890,7 +13890,7 @@
           <p:cNvPr id="2" name="Rectangle 4">
             <a:extLst>
               <a:ext uri="{FF2B5EF4-FFF2-40B4-BE49-F238E27FC236}">
-                <a16:creationId xmlns:a16="http://schemas.microsoft.com/office/drawing/2014/main" xmlns="" id="{6DC56CB5-95F7-41B4-8677-E12EBE1FBD59}"/>
+                <a16:creationId xmlns="" xmlns:a16="http://schemas.microsoft.com/office/drawing/2014/main" id="{6DC56CB5-95F7-41B4-8677-E12EBE1FBD59}"/>
               </a:ext>
             </a:extLst>
           </p:cNvPr>
@@ -13924,7 +13924,7 @@
           <p:cNvPr id="3" name="Rectangle 5">
             <a:extLst>
               <a:ext uri="{FF2B5EF4-FFF2-40B4-BE49-F238E27FC236}">
-                <a16:creationId xmlns:a16="http://schemas.microsoft.com/office/drawing/2014/main" xmlns="" id="{B7F0A7C5-5870-4D46-AA35-704A0D3C8668}"/>
+                <a16:creationId xmlns="" xmlns:a16="http://schemas.microsoft.com/office/drawing/2014/main" id="{B7F0A7C5-5870-4D46-AA35-704A0D3C8668}"/>
               </a:ext>
             </a:extLst>
           </p:cNvPr>
@@ -13958,7 +13958,7 @@
           <p:cNvPr id="4" name="Rectangle 6">
             <a:extLst>
               <a:ext uri="{FF2B5EF4-FFF2-40B4-BE49-F238E27FC236}">
-                <a16:creationId xmlns:a16="http://schemas.microsoft.com/office/drawing/2014/main" xmlns="" id="{11F62A78-2485-4514-AD6F-798D74A4E024}"/>
+                <a16:creationId xmlns="" xmlns:a16="http://schemas.microsoft.com/office/drawing/2014/main" id="{11F62A78-2485-4514-AD6F-798D74A4E024}"/>
               </a:ext>
             </a:extLst>
           </p:cNvPr>
@@ -14029,7 +14029,7 @@
           <p:cNvPr id="2" name="标题 1">
             <a:extLst>
               <a:ext uri="{FF2B5EF4-FFF2-40B4-BE49-F238E27FC236}">
-                <a16:creationId xmlns:a16="http://schemas.microsoft.com/office/drawing/2014/main" xmlns="" id="{0BD92CCA-0140-4241-AF84-A0DFC0FC9C4C}"/>
+                <a16:creationId xmlns="" xmlns:a16="http://schemas.microsoft.com/office/drawing/2014/main" id="{0BD92CCA-0140-4241-AF84-A0DFC0FC9C4C}"/>
               </a:ext>
             </a:extLst>
           </p:cNvPr>
@@ -14066,7 +14066,7 @@
           <p:cNvPr id="3" name="内容占位符 2">
             <a:extLst>
               <a:ext uri="{FF2B5EF4-FFF2-40B4-BE49-F238E27FC236}">
-                <a16:creationId xmlns:a16="http://schemas.microsoft.com/office/drawing/2014/main" xmlns="" id="{B149F413-03E0-42C8-96F2-A26C380EC64D}"/>
+                <a16:creationId xmlns="" xmlns:a16="http://schemas.microsoft.com/office/drawing/2014/main" id="{B149F413-03E0-42C8-96F2-A26C380EC64D}"/>
               </a:ext>
             </a:extLst>
           </p:cNvPr>
@@ -14156,7 +14156,7 @@
           <p:cNvPr id="4" name="文本占位符 3">
             <a:extLst>
               <a:ext uri="{FF2B5EF4-FFF2-40B4-BE49-F238E27FC236}">
-                <a16:creationId xmlns:a16="http://schemas.microsoft.com/office/drawing/2014/main" xmlns="" id="{80CED1CF-0137-4B94-B04B-8FDCB7C8B161}"/>
+                <a16:creationId xmlns="" xmlns:a16="http://schemas.microsoft.com/office/drawing/2014/main" id="{80CED1CF-0137-4B94-B04B-8FDCB7C8B161}"/>
               </a:ext>
             </a:extLst>
           </p:cNvPr>
@@ -14227,7 +14227,7 @@
           <p:cNvPr id="5" name="Rectangle 4">
             <a:extLst>
               <a:ext uri="{FF2B5EF4-FFF2-40B4-BE49-F238E27FC236}">
-                <a16:creationId xmlns:a16="http://schemas.microsoft.com/office/drawing/2014/main" xmlns="" id="{83A028F8-90C5-4894-9D68-1F454A6818EB}"/>
+                <a16:creationId xmlns="" xmlns:a16="http://schemas.microsoft.com/office/drawing/2014/main" id="{83A028F8-90C5-4894-9D68-1F454A6818EB}"/>
               </a:ext>
             </a:extLst>
           </p:cNvPr>
@@ -14261,7 +14261,7 @@
           <p:cNvPr id="6" name="Rectangle 5">
             <a:extLst>
               <a:ext uri="{FF2B5EF4-FFF2-40B4-BE49-F238E27FC236}">
-                <a16:creationId xmlns:a16="http://schemas.microsoft.com/office/drawing/2014/main" xmlns="" id="{4B6B0556-8025-49EB-A9D8-E82F10331C3C}"/>
+                <a16:creationId xmlns="" xmlns:a16="http://schemas.microsoft.com/office/drawing/2014/main" id="{4B6B0556-8025-49EB-A9D8-E82F10331C3C}"/>
               </a:ext>
             </a:extLst>
           </p:cNvPr>
@@ -14295,7 +14295,7 @@
           <p:cNvPr id="7" name="Rectangle 6">
             <a:extLst>
               <a:ext uri="{FF2B5EF4-FFF2-40B4-BE49-F238E27FC236}">
-                <a16:creationId xmlns:a16="http://schemas.microsoft.com/office/drawing/2014/main" xmlns="" id="{327CC8F1-4BD0-4FEC-AECB-DEAE8BCBA203}"/>
+                <a16:creationId xmlns="" xmlns:a16="http://schemas.microsoft.com/office/drawing/2014/main" id="{327CC8F1-4BD0-4FEC-AECB-DEAE8BCBA203}"/>
               </a:ext>
             </a:extLst>
           </p:cNvPr>
@@ -14366,7 +14366,7 @@
           <p:cNvPr id="2" name="标题 1">
             <a:extLst>
               <a:ext uri="{FF2B5EF4-FFF2-40B4-BE49-F238E27FC236}">
-                <a16:creationId xmlns:a16="http://schemas.microsoft.com/office/drawing/2014/main" xmlns="" id="{71EFFC16-3EB0-4FBB-96E7-A6D46DBE0860}"/>
+                <a16:creationId xmlns="" xmlns:a16="http://schemas.microsoft.com/office/drawing/2014/main" id="{71EFFC16-3EB0-4FBB-96E7-A6D46DBE0860}"/>
               </a:ext>
             </a:extLst>
           </p:cNvPr>
@@ -14403,7 +14403,7 @@
           <p:cNvPr id="3" name="图片占位符 2">
             <a:extLst>
               <a:ext uri="{FF2B5EF4-FFF2-40B4-BE49-F238E27FC236}">
-                <a16:creationId xmlns:a16="http://schemas.microsoft.com/office/drawing/2014/main" xmlns="" id="{5B422F93-2D7C-4C8D-98F2-E969A8987B29}"/>
+                <a16:creationId xmlns="" xmlns:a16="http://schemas.microsoft.com/office/drawing/2014/main" id="{5B422F93-2D7C-4C8D-98F2-E969A8987B29}"/>
               </a:ext>
             </a:extLst>
           </p:cNvPr>
@@ -14471,7 +14471,7 @@
           <p:cNvPr id="4" name="文本占位符 3">
             <a:extLst>
               <a:ext uri="{FF2B5EF4-FFF2-40B4-BE49-F238E27FC236}">
-                <a16:creationId xmlns:a16="http://schemas.microsoft.com/office/drawing/2014/main" xmlns="" id="{C6BF88C8-E1D1-4529-AA38-9722474E4E30}"/>
+                <a16:creationId xmlns="" xmlns:a16="http://schemas.microsoft.com/office/drawing/2014/main" id="{C6BF88C8-E1D1-4529-AA38-9722474E4E30}"/>
               </a:ext>
             </a:extLst>
           </p:cNvPr>
@@ -14542,7 +14542,7 @@
           <p:cNvPr id="5" name="Rectangle 4">
             <a:extLst>
               <a:ext uri="{FF2B5EF4-FFF2-40B4-BE49-F238E27FC236}">
-                <a16:creationId xmlns:a16="http://schemas.microsoft.com/office/drawing/2014/main" xmlns="" id="{8A92ADD1-D1E1-4FA7-89F9-EAC168EC5F5E}"/>
+                <a16:creationId xmlns="" xmlns:a16="http://schemas.microsoft.com/office/drawing/2014/main" id="{8A92ADD1-D1E1-4FA7-89F9-EAC168EC5F5E}"/>
               </a:ext>
             </a:extLst>
           </p:cNvPr>
@@ -14576,7 +14576,7 @@
           <p:cNvPr id="6" name="Rectangle 5">
             <a:extLst>
               <a:ext uri="{FF2B5EF4-FFF2-40B4-BE49-F238E27FC236}">
-                <a16:creationId xmlns:a16="http://schemas.microsoft.com/office/drawing/2014/main" xmlns="" id="{8AC2AA6A-2DDF-4129-A813-17A48D5D6578}"/>
+                <a16:creationId xmlns="" xmlns:a16="http://schemas.microsoft.com/office/drawing/2014/main" id="{8AC2AA6A-2DDF-4129-A813-17A48D5D6578}"/>
               </a:ext>
             </a:extLst>
           </p:cNvPr>
@@ -14610,7 +14610,7 @@
           <p:cNvPr id="7" name="Rectangle 6">
             <a:extLst>
               <a:ext uri="{FF2B5EF4-FFF2-40B4-BE49-F238E27FC236}">
-                <a16:creationId xmlns:a16="http://schemas.microsoft.com/office/drawing/2014/main" xmlns="" id="{AFAB14F8-8064-48F6-8B6D-749183531730}"/>
+                <a16:creationId xmlns="" xmlns:a16="http://schemas.microsoft.com/office/drawing/2014/main" id="{AFAB14F8-8064-48F6-8B6D-749183531730}"/>
               </a:ext>
             </a:extLst>
           </p:cNvPr>
@@ -14693,7 +14693,7 @@
           <p:cNvPr id="1026" name="Rectangle 2">
             <a:extLst>
               <a:ext uri="{FF2B5EF4-FFF2-40B4-BE49-F238E27FC236}">
-                <a16:creationId xmlns:a16="http://schemas.microsoft.com/office/drawing/2014/main" xmlns="" id="{80EF2504-E3EA-4812-BCE9-548B5A526130}"/>
+                <a16:creationId xmlns="" xmlns:a16="http://schemas.microsoft.com/office/drawing/2014/main" id="{80EF2504-E3EA-4812-BCE9-548B5A526130}"/>
               </a:ext>
             </a:extLst>
           </p:cNvPr>
@@ -14767,7 +14767,7 @@
           <p:cNvPr id="1027" name="Rectangle 3">
             <a:extLst>
               <a:ext uri="{FF2B5EF4-FFF2-40B4-BE49-F238E27FC236}">
-                <a16:creationId xmlns:a16="http://schemas.microsoft.com/office/drawing/2014/main" xmlns="" id="{7E888592-4D67-4FDC-8ACC-8DD192CAF425}"/>
+                <a16:creationId xmlns="" xmlns:a16="http://schemas.microsoft.com/office/drawing/2014/main" id="{7E888592-4D67-4FDC-8ACC-8DD192CAF425}"/>
               </a:ext>
             </a:extLst>
           </p:cNvPr>
@@ -14869,7 +14869,7 @@
           <p:cNvPr id="1028" name="Rectangle 4">
             <a:extLst>
               <a:ext uri="{FF2B5EF4-FFF2-40B4-BE49-F238E27FC236}">
-                <a16:creationId xmlns:a16="http://schemas.microsoft.com/office/drawing/2014/main" xmlns="" id="{40A3712E-94B2-46ED-881D-E1249EF279C0}"/>
+                <a16:creationId xmlns="" xmlns:a16="http://schemas.microsoft.com/office/drawing/2014/main" id="{40A3712E-94B2-46ED-881D-E1249EF279C0}"/>
               </a:ext>
             </a:extLst>
           </p:cNvPr>
@@ -14946,7 +14946,7 @@
           <p:cNvPr id="1029" name="Rectangle 5">
             <a:extLst>
               <a:ext uri="{FF2B5EF4-FFF2-40B4-BE49-F238E27FC236}">
-                <a16:creationId xmlns:a16="http://schemas.microsoft.com/office/drawing/2014/main" xmlns="" id="{26116D60-C064-41BB-B932-09348EA6EB7D}"/>
+                <a16:creationId xmlns="" xmlns:a16="http://schemas.microsoft.com/office/drawing/2014/main" id="{26116D60-C064-41BB-B932-09348EA6EB7D}"/>
               </a:ext>
             </a:extLst>
           </p:cNvPr>
@@ -15023,7 +15023,7 @@
           <p:cNvPr id="1030" name="Rectangle 6">
             <a:extLst>
               <a:ext uri="{FF2B5EF4-FFF2-40B4-BE49-F238E27FC236}">
-                <a16:creationId xmlns:a16="http://schemas.microsoft.com/office/drawing/2014/main" xmlns="" id="{4E6E49BE-DB26-4C77-94F7-5228E224DF48}"/>
+                <a16:creationId xmlns="" xmlns:a16="http://schemas.microsoft.com/office/drawing/2014/main" id="{4E6E49BE-DB26-4C77-94F7-5228E224DF48}"/>
               </a:ext>
             </a:extLst>
           </p:cNvPr>
@@ -15610,7 +15610,7 @@
           <p:cNvPr id="5122" name="标题 1">
             <a:extLst>
               <a:ext uri="{FF2B5EF4-FFF2-40B4-BE49-F238E27FC236}">
-                <a16:creationId xmlns:a16="http://schemas.microsoft.com/office/drawing/2014/main" xmlns="" id="{A237414D-C4E1-407F-9B0D-585D2D878A74}"/>
+                <a16:creationId xmlns="" xmlns:a16="http://schemas.microsoft.com/office/drawing/2014/main" id="{A237414D-C4E1-407F-9B0D-585D2D878A74}"/>
               </a:ext>
             </a:extLst>
           </p:cNvPr>
@@ -15684,7 +15684,7 @@
           <p:cNvPr id="3" name="内容占位符 2">
             <a:extLst>
               <a:ext uri="{FF2B5EF4-FFF2-40B4-BE49-F238E27FC236}">
-                <a16:creationId xmlns:a16="http://schemas.microsoft.com/office/drawing/2014/main" xmlns="" id="{3DFD56C3-3B63-4F4C-A455-80D220434928}"/>
+                <a16:creationId xmlns="" xmlns:a16="http://schemas.microsoft.com/office/drawing/2014/main" id="{3DFD56C3-3B63-4F4C-A455-80D220434928}"/>
               </a:ext>
             </a:extLst>
           </p:cNvPr>
@@ -15860,7 +15860,7 @@
           <p:cNvPr id="4" name="内容占位符 2">
             <a:extLst>
               <a:ext uri="{FF2B5EF4-FFF2-40B4-BE49-F238E27FC236}">
-                <a16:creationId xmlns:a16="http://schemas.microsoft.com/office/drawing/2014/main" xmlns="" id="{3DFD56C3-3B63-4F4C-A455-80D220434928}"/>
+                <a16:creationId xmlns="" xmlns:a16="http://schemas.microsoft.com/office/drawing/2014/main" id="{3DFD56C3-3B63-4F4C-A455-80D220434928}"/>
               </a:ext>
             </a:extLst>
           </p:cNvPr>
@@ -16229,7 +16229,7 @@
           <p:cNvPr id="5122" name="标题 1">
             <a:extLst>
               <a:ext uri="{FF2B5EF4-FFF2-40B4-BE49-F238E27FC236}">
-                <a16:creationId xmlns:a16="http://schemas.microsoft.com/office/drawing/2014/main" xmlns="" id="{A237414D-C4E1-407F-9B0D-585D2D878A74}"/>
+                <a16:creationId xmlns="" xmlns:a16="http://schemas.microsoft.com/office/drawing/2014/main" id="{A237414D-C4E1-407F-9B0D-585D2D878A74}"/>
               </a:ext>
             </a:extLst>
           </p:cNvPr>
@@ -16269,7 +16269,7 @@
           <p:cNvPr id="3" name="内容占位符 2">
             <a:extLst>
               <a:ext uri="{FF2B5EF4-FFF2-40B4-BE49-F238E27FC236}">
-                <a16:creationId xmlns:a16="http://schemas.microsoft.com/office/drawing/2014/main" xmlns="" id="{3DFD56C3-3B63-4F4C-A455-80D220434928}"/>
+                <a16:creationId xmlns="" xmlns:a16="http://schemas.microsoft.com/office/drawing/2014/main" id="{3DFD56C3-3B63-4F4C-A455-80D220434928}"/>
               </a:ext>
             </a:extLst>
           </p:cNvPr>
@@ -16691,7 +16691,7 @@
           <p:cNvPr id="5122" name="标题 1">
             <a:extLst>
               <a:ext uri="{FF2B5EF4-FFF2-40B4-BE49-F238E27FC236}">
-                <a16:creationId xmlns:a16="http://schemas.microsoft.com/office/drawing/2014/main" xmlns="" id="{A237414D-C4E1-407F-9B0D-585D2D878A74}"/>
+                <a16:creationId xmlns="" xmlns:a16="http://schemas.microsoft.com/office/drawing/2014/main" id="{A237414D-C4E1-407F-9B0D-585D2D878A74}"/>
               </a:ext>
             </a:extLst>
           </p:cNvPr>
@@ -16731,7 +16731,7 @@
           <p:cNvPr id="3" name="内容占位符 2">
             <a:extLst>
               <a:ext uri="{FF2B5EF4-FFF2-40B4-BE49-F238E27FC236}">
-                <a16:creationId xmlns:a16="http://schemas.microsoft.com/office/drawing/2014/main" xmlns="" id="{3DFD56C3-3B63-4F4C-A455-80D220434928}"/>
+                <a16:creationId xmlns="" xmlns:a16="http://schemas.microsoft.com/office/drawing/2014/main" id="{3DFD56C3-3B63-4F4C-A455-80D220434928}"/>
               </a:ext>
             </a:extLst>
           </p:cNvPr>
@@ -17199,7 +17199,7 @@
           <p:cNvPr id="5122" name="标题 1">
             <a:extLst>
               <a:ext uri="{FF2B5EF4-FFF2-40B4-BE49-F238E27FC236}">
-                <a16:creationId xmlns:a16="http://schemas.microsoft.com/office/drawing/2014/main" xmlns="" id="{A237414D-C4E1-407F-9B0D-585D2D878A74}"/>
+                <a16:creationId xmlns="" xmlns:a16="http://schemas.microsoft.com/office/drawing/2014/main" id="{A237414D-C4E1-407F-9B0D-585D2D878A74}"/>
               </a:ext>
             </a:extLst>
           </p:cNvPr>
@@ -17239,7 +17239,7 @@
           <p:cNvPr id="3" name="内容占位符 2">
             <a:extLst>
               <a:ext uri="{FF2B5EF4-FFF2-40B4-BE49-F238E27FC236}">
-                <a16:creationId xmlns:a16="http://schemas.microsoft.com/office/drawing/2014/main" xmlns="" id="{3DFD56C3-3B63-4F4C-A455-80D220434928}"/>
+                <a16:creationId xmlns="" xmlns:a16="http://schemas.microsoft.com/office/drawing/2014/main" id="{3DFD56C3-3B63-4F4C-A455-80D220434928}"/>
               </a:ext>
             </a:extLst>
           </p:cNvPr>
@@ -17615,7 +17615,7 @@
           <p:cNvPr id="5122" name="标题 1">
             <a:extLst>
               <a:ext uri="{FF2B5EF4-FFF2-40B4-BE49-F238E27FC236}">
-                <a16:creationId xmlns:a16="http://schemas.microsoft.com/office/drawing/2014/main" xmlns="" id="{A237414D-C4E1-407F-9B0D-585D2D878A74}"/>
+                <a16:creationId xmlns="" xmlns:a16="http://schemas.microsoft.com/office/drawing/2014/main" id="{A237414D-C4E1-407F-9B0D-585D2D878A74}"/>
               </a:ext>
             </a:extLst>
           </p:cNvPr>
@@ -17894,7 +17894,7 @@
           <p:cNvPr id="5122" name="标题 1">
             <a:extLst>
               <a:ext uri="{FF2B5EF4-FFF2-40B4-BE49-F238E27FC236}">
-                <a16:creationId xmlns:a16="http://schemas.microsoft.com/office/drawing/2014/main" xmlns="" id="{A237414D-C4E1-407F-9B0D-585D2D878A74}"/>
+                <a16:creationId xmlns="" xmlns:a16="http://schemas.microsoft.com/office/drawing/2014/main" id="{A237414D-C4E1-407F-9B0D-585D2D878A74}"/>
               </a:ext>
             </a:extLst>
           </p:cNvPr>
@@ -18121,7 +18121,7 @@
           <p:cNvPr id="5122" name="标题 1">
             <a:extLst>
               <a:ext uri="{FF2B5EF4-FFF2-40B4-BE49-F238E27FC236}">
-                <a16:creationId xmlns:a16="http://schemas.microsoft.com/office/drawing/2014/main" xmlns="" id="{A237414D-C4E1-407F-9B0D-585D2D878A74}"/>
+                <a16:creationId xmlns="" xmlns:a16="http://schemas.microsoft.com/office/drawing/2014/main" id="{A237414D-C4E1-407F-9B0D-585D2D878A74}"/>
               </a:ext>
             </a:extLst>
           </p:cNvPr>
@@ -18341,11 +18341,11 @@
               <a:t> </a:t>
             </a:r>
             <a:r>
-              <a:rPr lang="en-US" altLang="zh-CN" dirty="0">
-                <a:latin typeface="Times New Roman" panose="02020603050405020304" pitchFamily="18" charset="0"/>
-                <a:cs typeface="Times New Roman" panose="02020603050405020304" pitchFamily="18" charset="0"/>
-              </a:rPr>
-              <a:t>create </a:t>
+              <a:rPr lang="en-US" altLang="zh-CN" dirty="0" smtClean="0">
+                <a:latin typeface="Times New Roman" panose="02020603050405020304" pitchFamily="18" charset="0"/>
+                <a:cs typeface="Times New Roman" panose="02020603050405020304" pitchFamily="18" charset="0"/>
+              </a:rPr>
+              <a:t>creates </a:t>
             </a:r>
             <a:r>
               <a:rPr lang="en-US" altLang="zh-CN" dirty="0">
@@ -18454,7 +18454,7 @@
           <p:cNvPr id="5122" name="标题 1">
             <a:extLst>
               <a:ext uri="{FF2B5EF4-FFF2-40B4-BE49-F238E27FC236}">
-                <a16:creationId xmlns:a16="http://schemas.microsoft.com/office/drawing/2014/main" xmlns="" id="{A237414D-C4E1-407F-9B0D-585D2D878A74}"/>
+                <a16:creationId xmlns="" xmlns:a16="http://schemas.microsoft.com/office/drawing/2014/main" id="{A237414D-C4E1-407F-9B0D-585D2D878A74}"/>
               </a:ext>
             </a:extLst>
           </p:cNvPr>
@@ -18941,33 +18941,15 @@
                                   </p:childTnLst>
                                 </p:cTn>
                               </p:par>
-                            </p:childTnLst>
-                          </p:cTn>
-                        </p:par>
-                      </p:childTnLst>
-                    </p:cTn>
-                  </p:par>
-                  <p:par>
-                    <p:cTn id="15" fill="hold">
-                      <p:stCondLst>
-                        <p:cond delay="indefinite"/>
-                      </p:stCondLst>
-                      <p:childTnLst>
-                        <p:par>
-                          <p:cTn id="16" fill="hold">
-                            <p:stCondLst>
-                              <p:cond delay="0"/>
-                            </p:stCondLst>
-                            <p:childTnLst>
                               <p:par>
-                                <p:cTn id="17" presetID="1" presetClass="entr" presetSubtype="0" fill="hold" grpId="0" nodeType="clickEffect">
+                                <p:cTn id="15" presetID="1" presetClass="entr" presetSubtype="0" fill="hold" grpId="0" nodeType="withEffect">
                                   <p:stCondLst>
                                     <p:cond delay="0"/>
                                   </p:stCondLst>
                                   <p:childTnLst>
                                     <p:set>
                                       <p:cBhvr>
-                                        <p:cTn id="18" dur="1" fill="hold">
+                                        <p:cTn id="16" dur="1" fill="hold">
                                           <p:stCondLst>
                                             <p:cond delay="0"/>
                                           </p:stCondLst>
@@ -19042,7 +19024,7 @@
           <p:cNvPr id="5122" name="标题 1">
             <a:extLst>
               <a:ext uri="{FF2B5EF4-FFF2-40B4-BE49-F238E27FC236}">
-                <a16:creationId xmlns:a16="http://schemas.microsoft.com/office/drawing/2014/main" xmlns="" id="{A237414D-C4E1-407F-9B0D-585D2D878A74}"/>
+                <a16:creationId xmlns="" xmlns:a16="http://schemas.microsoft.com/office/drawing/2014/main" id="{A237414D-C4E1-407F-9B0D-585D2D878A74}"/>
               </a:ext>
             </a:extLst>
           </p:cNvPr>
@@ -19082,7 +19064,7 @@
           <p:cNvPr id="3" name="内容占位符 2">
             <a:extLst>
               <a:ext uri="{FF2B5EF4-FFF2-40B4-BE49-F238E27FC236}">
-                <a16:creationId xmlns:a16="http://schemas.microsoft.com/office/drawing/2014/main" xmlns="" id="{3DFD56C3-3B63-4F4C-A455-80D220434928}"/>
+                <a16:creationId xmlns="" xmlns:a16="http://schemas.microsoft.com/office/drawing/2014/main" id="{3DFD56C3-3B63-4F4C-A455-80D220434928}"/>
               </a:ext>
             </a:extLst>
           </p:cNvPr>
@@ -19151,14 +19133,7 @@
                 <a:latin typeface="Times New Roman" panose="02020603050405020304" pitchFamily="18" charset="0"/>
                 <a:cs typeface="Times New Roman" panose="02020603050405020304" pitchFamily="18" charset="0"/>
               </a:rPr>
-              <a:t>Application Case </a:t>
-            </a:r>
-            <a:r>
-              <a:rPr lang="en-US" altLang="zh-CN" b="1" dirty="0" smtClean="0">
-                <a:latin typeface="Times New Roman" panose="02020603050405020304" pitchFamily="18" charset="0"/>
-                <a:cs typeface="Times New Roman" panose="02020603050405020304" pitchFamily="18" charset="0"/>
-              </a:rPr>
-              <a:t>Study</a:t>
+              <a:t>Application Case Study</a:t>
             </a:r>
             <a:endParaRPr lang="en-US" altLang="zh-CN" b="1" dirty="0">
               <a:latin typeface="Times New Roman" panose="02020603050405020304" pitchFamily="18" charset="0"/>
@@ -19451,7 +19426,7 @@
           <p:cNvPr id="5122" name="标题 1">
             <a:extLst>
               <a:ext uri="{FF2B5EF4-FFF2-40B4-BE49-F238E27FC236}">
-                <a16:creationId xmlns:a16="http://schemas.microsoft.com/office/drawing/2014/main" xmlns="" id="{A237414D-C4E1-407F-9B0D-585D2D878A74}"/>
+                <a16:creationId xmlns="" xmlns:a16="http://schemas.microsoft.com/office/drawing/2014/main" id="{A237414D-C4E1-407F-9B0D-585D2D878A74}"/>
               </a:ext>
             </a:extLst>
           </p:cNvPr>
@@ -19477,21 +19452,7 @@
                 <a:latin typeface="Times New Roman" panose="02020603050405020304" pitchFamily="18" charset="0"/>
                 <a:cs typeface="Times New Roman" panose="02020603050405020304" pitchFamily="18" charset="0"/>
               </a:rPr>
-              <a:t>Application </a:t>
-            </a:r>
-            <a:r>
-              <a:rPr lang="en-US" altLang="zh-CN" dirty="0" smtClean="0">
-                <a:latin typeface="Times New Roman" panose="02020603050405020304" pitchFamily="18" charset="0"/>
-                <a:cs typeface="Times New Roman" panose="02020603050405020304" pitchFamily="18" charset="0"/>
-              </a:rPr>
-              <a:t>Case </a:t>
-            </a:r>
-            <a:r>
-              <a:rPr lang="en-US" altLang="zh-CN" dirty="0" smtClean="0">
-                <a:latin typeface="Times New Roman" panose="02020603050405020304" pitchFamily="18" charset="0"/>
-                <a:cs typeface="Times New Roman" panose="02020603050405020304" pitchFamily="18" charset="0"/>
-              </a:rPr>
-              <a:t>Study</a:t>
+              <a:t>Application Case Study</a:t>
             </a:r>
             <a:endParaRPr lang="en-US" altLang="zh-CN" dirty="0">
               <a:latin typeface="Times New Roman" panose="02020603050405020304" pitchFamily="18" charset="0"/>
@@ -19691,7 +19652,7 @@
           <p:cNvPr id="5122" name="标题 1">
             <a:extLst>
               <a:ext uri="{FF2B5EF4-FFF2-40B4-BE49-F238E27FC236}">
-                <a16:creationId xmlns:a16="http://schemas.microsoft.com/office/drawing/2014/main" xmlns="" id="{A237414D-C4E1-407F-9B0D-585D2D878A74}"/>
+                <a16:creationId xmlns="" xmlns:a16="http://schemas.microsoft.com/office/drawing/2014/main" id="{A237414D-C4E1-407F-9B0D-585D2D878A74}"/>
               </a:ext>
             </a:extLst>
           </p:cNvPr>
@@ -19717,21 +19678,7 @@
                 <a:latin typeface="Times New Roman" panose="02020603050405020304" pitchFamily="18" charset="0"/>
                 <a:cs typeface="Times New Roman" panose="02020603050405020304" pitchFamily="18" charset="0"/>
               </a:rPr>
-              <a:t>Application </a:t>
-            </a:r>
-            <a:r>
-              <a:rPr lang="en-US" altLang="zh-CN" dirty="0" smtClean="0">
-                <a:latin typeface="Times New Roman" panose="02020603050405020304" pitchFamily="18" charset="0"/>
-                <a:cs typeface="Times New Roman" panose="02020603050405020304" pitchFamily="18" charset="0"/>
-              </a:rPr>
-              <a:t>Case </a:t>
-            </a:r>
-            <a:r>
-              <a:rPr lang="en-US" altLang="zh-CN" dirty="0" smtClean="0">
-                <a:latin typeface="Times New Roman" panose="02020603050405020304" pitchFamily="18" charset="0"/>
-                <a:cs typeface="Times New Roman" panose="02020603050405020304" pitchFamily="18" charset="0"/>
-              </a:rPr>
-              <a:t>Study</a:t>
+              <a:t>Application Case Study</a:t>
             </a:r>
             <a:endParaRPr lang="en-US" altLang="zh-CN" dirty="0">
               <a:latin typeface="Times New Roman" panose="02020603050405020304" pitchFamily="18" charset="0"/>
@@ -20168,7 +20115,7 @@
           <p:cNvPr id="5122" name="标题 1">
             <a:extLst>
               <a:ext uri="{FF2B5EF4-FFF2-40B4-BE49-F238E27FC236}">
-                <a16:creationId xmlns:a16="http://schemas.microsoft.com/office/drawing/2014/main" xmlns="" id="{A237414D-C4E1-407F-9B0D-585D2D878A74}"/>
+                <a16:creationId xmlns="" xmlns:a16="http://schemas.microsoft.com/office/drawing/2014/main" id="{A237414D-C4E1-407F-9B0D-585D2D878A74}"/>
               </a:ext>
             </a:extLst>
           </p:cNvPr>
@@ -20847,7 +20794,7 @@
           <p:cNvPr id="5122" name="标题 1">
             <a:extLst>
               <a:ext uri="{FF2B5EF4-FFF2-40B4-BE49-F238E27FC236}">
-                <a16:creationId xmlns:a16="http://schemas.microsoft.com/office/drawing/2014/main" xmlns="" id="{A237414D-C4E1-407F-9B0D-585D2D878A74}"/>
+                <a16:creationId xmlns="" xmlns:a16="http://schemas.microsoft.com/office/drawing/2014/main" id="{A237414D-C4E1-407F-9B0D-585D2D878A74}"/>
               </a:ext>
             </a:extLst>
           </p:cNvPr>
@@ -20873,21 +20820,7 @@
                 <a:latin typeface="Times New Roman" panose="02020603050405020304" pitchFamily="18" charset="0"/>
                 <a:cs typeface="Times New Roman" panose="02020603050405020304" pitchFamily="18" charset="0"/>
               </a:rPr>
-              <a:t>Application </a:t>
-            </a:r>
-            <a:r>
-              <a:rPr lang="en-US" altLang="zh-CN" dirty="0" smtClean="0">
-                <a:latin typeface="Times New Roman" panose="02020603050405020304" pitchFamily="18" charset="0"/>
-                <a:cs typeface="Times New Roman" panose="02020603050405020304" pitchFamily="18" charset="0"/>
-              </a:rPr>
-              <a:t>Case </a:t>
-            </a:r>
-            <a:r>
-              <a:rPr lang="en-US" altLang="zh-CN" dirty="0" smtClean="0">
-                <a:latin typeface="Times New Roman" panose="02020603050405020304" pitchFamily="18" charset="0"/>
-                <a:cs typeface="Times New Roman" panose="02020603050405020304" pitchFamily="18" charset="0"/>
-              </a:rPr>
-              <a:t>Study</a:t>
+              <a:t>Application Case Study</a:t>
             </a:r>
             <a:endParaRPr lang="en-US" altLang="zh-CN" dirty="0">
               <a:latin typeface="Times New Roman" panose="02020603050405020304" pitchFamily="18" charset="0"/>
@@ -21399,7 +21332,7 @@
           <p:cNvPr id="5122" name="标题 1">
             <a:extLst>
               <a:ext uri="{FF2B5EF4-FFF2-40B4-BE49-F238E27FC236}">
-                <a16:creationId xmlns:a16="http://schemas.microsoft.com/office/drawing/2014/main" xmlns="" id="{A237414D-C4E1-407F-9B0D-585D2D878A74}"/>
+                <a16:creationId xmlns="" xmlns:a16="http://schemas.microsoft.com/office/drawing/2014/main" id="{A237414D-C4E1-407F-9B0D-585D2D878A74}"/>
               </a:ext>
             </a:extLst>
           </p:cNvPr>
@@ -21425,14 +21358,7 @@
                 <a:latin typeface="Times New Roman" panose="02020603050405020304" pitchFamily="18" charset="0"/>
                 <a:cs typeface="Times New Roman" panose="02020603050405020304" pitchFamily="18" charset="0"/>
               </a:rPr>
-              <a:t>Application Case </a:t>
-            </a:r>
-            <a:r>
-              <a:rPr lang="en-US" altLang="zh-CN" dirty="0" smtClean="0">
-                <a:latin typeface="Times New Roman" panose="02020603050405020304" pitchFamily="18" charset="0"/>
-                <a:cs typeface="Times New Roman" panose="02020603050405020304" pitchFamily="18" charset="0"/>
-              </a:rPr>
-              <a:t>Study</a:t>
+              <a:t>Application Case Study</a:t>
             </a:r>
             <a:endParaRPr lang="en-US" altLang="zh-CN" dirty="0">
               <a:latin typeface="Times New Roman" panose="02020603050405020304" pitchFamily="18" charset="0"/>
@@ -21660,7 +21586,7 @@
           <p:cNvPr id="5122" name="标题 1">
             <a:extLst>
               <a:ext uri="{FF2B5EF4-FFF2-40B4-BE49-F238E27FC236}">
-                <a16:creationId xmlns:a16="http://schemas.microsoft.com/office/drawing/2014/main" xmlns="" id="{A237414D-C4E1-407F-9B0D-585D2D878A74}"/>
+                <a16:creationId xmlns="" xmlns:a16="http://schemas.microsoft.com/office/drawing/2014/main" id="{A237414D-C4E1-407F-9B0D-585D2D878A74}"/>
               </a:ext>
             </a:extLst>
           </p:cNvPr>
@@ -21686,14 +21612,7 @@
                 <a:latin typeface="Times New Roman" panose="02020603050405020304" pitchFamily="18" charset="0"/>
                 <a:cs typeface="Times New Roman" panose="02020603050405020304" pitchFamily="18" charset="0"/>
               </a:rPr>
-              <a:t>Application Case </a:t>
-            </a:r>
-            <a:r>
-              <a:rPr lang="en-US" altLang="zh-CN" dirty="0" smtClean="0">
-                <a:latin typeface="Times New Roman" panose="02020603050405020304" pitchFamily="18" charset="0"/>
-                <a:cs typeface="Times New Roman" panose="02020603050405020304" pitchFamily="18" charset="0"/>
-              </a:rPr>
-              <a:t>Study</a:t>
+              <a:t>Application Case Study</a:t>
             </a:r>
             <a:endParaRPr lang="en-US" altLang="zh-CN" dirty="0">
               <a:latin typeface="Times New Roman" panose="02020603050405020304" pitchFamily="18" charset="0"/>
@@ -21797,7 +21716,7 @@
           <p:cNvPr id="5122" name="标题 1">
             <a:extLst>
               <a:ext uri="{FF2B5EF4-FFF2-40B4-BE49-F238E27FC236}">
-                <a16:creationId xmlns:a16="http://schemas.microsoft.com/office/drawing/2014/main" xmlns="" id="{A237414D-C4E1-407F-9B0D-585D2D878A74}"/>
+                <a16:creationId xmlns="" xmlns:a16="http://schemas.microsoft.com/office/drawing/2014/main" id="{A237414D-C4E1-407F-9B0D-585D2D878A74}"/>
               </a:ext>
             </a:extLst>
           </p:cNvPr>
@@ -21837,7 +21756,7 @@
           <p:cNvPr id="3" name="内容占位符 2">
             <a:extLst>
               <a:ext uri="{FF2B5EF4-FFF2-40B4-BE49-F238E27FC236}">
-                <a16:creationId xmlns:a16="http://schemas.microsoft.com/office/drawing/2014/main" xmlns="" id="{3DFD56C3-3B63-4F4C-A455-80D220434928}"/>
+                <a16:creationId xmlns="" xmlns:a16="http://schemas.microsoft.com/office/drawing/2014/main" id="{3DFD56C3-3B63-4F4C-A455-80D220434928}"/>
               </a:ext>
             </a:extLst>
           </p:cNvPr>
@@ -21906,14 +21825,7 @@
                 <a:latin typeface="Times New Roman" panose="02020603050405020304" pitchFamily="18" charset="0"/>
                 <a:cs typeface="Times New Roman" panose="02020603050405020304" pitchFamily="18" charset="0"/>
               </a:rPr>
-              <a:t>Application Case </a:t>
-            </a:r>
-            <a:r>
-              <a:rPr lang="en-US" altLang="zh-CN" b="1" dirty="0" smtClean="0">
-                <a:latin typeface="Times New Roman" panose="02020603050405020304" pitchFamily="18" charset="0"/>
-                <a:cs typeface="Times New Roman" panose="02020603050405020304" pitchFamily="18" charset="0"/>
-              </a:rPr>
-              <a:t>Study</a:t>
+              <a:t>Application Case Study</a:t>
             </a:r>
             <a:endParaRPr lang="en-US" altLang="zh-CN" b="1" dirty="0">
               <a:latin typeface="Times New Roman" panose="02020603050405020304" pitchFamily="18" charset="0"/>
@@ -22206,7 +22118,7 @@
           <p:cNvPr id="5122" name="标题 1">
             <a:extLst>
               <a:ext uri="{FF2B5EF4-FFF2-40B4-BE49-F238E27FC236}">
-                <a16:creationId xmlns:a16="http://schemas.microsoft.com/office/drawing/2014/main" xmlns="" id="{A237414D-C4E1-407F-9B0D-585D2D878A74}"/>
+                <a16:creationId xmlns="" xmlns:a16="http://schemas.microsoft.com/office/drawing/2014/main" id="{A237414D-C4E1-407F-9B0D-585D2D878A74}"/>
               </a:ext>
             </a:extLst>
           </p:cNvPr>
@@ -22520,7 +22432,7 @@
           <p:cNvPr id="5122" name="标题 1">
             <a:extLst>
               <a:ext uri="{FF2B5EF4-FFF2-40B4-BE49-F238E27FC236}">
-                <a16:creationId xmlns:a16="http://schemas.microsoft.com/office/drawing/2014/main" xmlns="" id="{A237414D-C4E1-407F-9B0D-585D2D878A74}"/>
+                <a16:creationId xmlns="" xmlns:a16="http://schemas.microsoft.com/office/drawing/2014/main" id="{A237414D-C4E1-407F-9B0D-585D2D878A74}"/>
               </a:ext>
             </a:extLst>
           </p:cNvPr>
@@ -22652,7 +22564,7 @@
           <p:cNvPr id="5122" name="标题 1">
             <a:extLst>
               <a:ext uri="{FF2B5EF4-FFF2-40B4-BE49-F238E27FC236}">
-                <a16:creationId xmlns:a16="http://schemas.microsoft.com/office/drawing/2014/main" xmlns="" id="{A237414D-C4E1-407F-9B0D-585D2D878A74}"/>
+                <a16:creationId xmlns="" xmlns:a16="http://schemas.microsoft.com/office/drawing/2014/main" id="{A237414D-C4E1-407F-9B0D-585D2D878A74}"/>
               </a:ext>
             </a:extLst>
           </p:cNvPr>
@@ -22692,7 +22604,7 @@
           <p:cNvPr id="3" name="内容占位符 2">
             <a:extLst>
               <a:ext uri="{FF2B5EF4-FFF2-40B4-BE49-F238E27FC236}">
-                <a16:creationId xmlns:a16="http://schemas.microsoft.com/office/drawing/2014/main" xmlns="" id="{3DFD56C3-3B63-4F4C-A455-80D220434928}"/>
+                <a16:creationId xmlns="" xmlns:a16="http://schemas.microsoft.com/office/drawing/2014/main" id="{3DFD56C3-3B63-4F4C-A455-80D220434928}"/>
               </a:ext>
             </a:extLst>
           </p:cNvPr>
@@ -22863,7 +22775,7 @@
           <p:cNvPr id="5122" name="标题 1">
             <a:extLst>
               <a:ext uri="{FF2B5EF4-FFF2-40B4-BE49-F238E27FC236}">
-                <a16:creationId xmlns:a16="http://schemas.microsoft.com/office/drawing/2014/main" xmlns="" id="{A237414D-C4E1-407F-9B0D-585D2D878A74}"/>
+                <a16:creationId xmlns="" xmlns:a16="http://schemas.microsoft.com/office/drawing/2014/main" id="{A237414D-C4E1-407F-9B0D-585D2D878A74}"/>
               </a:ext>
             </a:extLst>
           </p:cNvPr>
@@ -22903,7 +22815,7 @@
           <p:cNvPr id="3" name="内容占位符 2">
             <a:extLst>
               <a:ext uri="{FF2B5EF4-FFF2-40B4-BE49-F238E27FC236}">
-                <a16:creationId xmlns:a16="http://schemas.microsoft.com/office/drawing/2014/main" xmlns="" id="{3DFD56C3-3B63-4F4C-A455-80D220434928}"/>
+                <a16:creationId xmlns="" xmlns:a16="http://schemas.microsoft.com/office/drawing/2014/main" id="{3DFD56C3-3B63-4F4C-A455-80D220434928}"/>
               </a:ext>
             </a:extLst>
           </p:cNvPr>
@@ -23099,7 +23011,7 @@
           <p:cNvPr id="5122" name="标题 1">
             <a:extLst>
               <a:ext uri="{FF2B5EF4-FFF2-40B4-BE49-F238E27FC236}">
-                <a16:creationId xmlns:a16="http://schemas.microsoft.com/office/drawing/2014/main" xmlns="" id="{A237414D-C4E1-407F-9B0D-585D2D878A74}"/>
+                <a16:creationId xmlns="" xmlns:a16="http://schemas.microsoft.com/office/drawing/2014/main" id="{A237414D-C4E1-407F-9B0D-585D2D878A74}"/>
               </a:ext>
             </a:extLst>
           </p:cNvPr>
@@ -23231,7 +23143,7 @@
           <p:cNvPr id="5122" name="标题 1">
             <a:extLst>
               <a:ext uri="{FF2B5EF4-FFF2-40B4-BE49-F238E27FC236}">
-                <a16:creationId xmlns:a16="http://schemas.microsoft.com/office/drawing/2014/main" xmlns="" id="{A237414D-C4E1-407F-9B0D-585D2D878A74}"/>
+                <a16:creationId xmlns="" xmlns:a16="http://schemas.microsoft.com/office/drawing/2014/main" id="{A237414D-C4E1-407F-9B0D-585D2D878A74}"/>
               </a:ext>
             </a:extLst>
           </p:cNvPr>
@@ -23321,6 +23233,224 @@
           </a:prstGeom>
         </p:spPr>
       </p:pic>
+      <p:grpSp>
+        <p:nvGrpSpPr>
+          <p:cNvPr id="7" name="组合 6"/>
+          <p:cNvGrpSpPr/>
+          <p:nvPr/>
+        </p:nvGrpSpPr>
+        <p:grpSpPr>
+          <a:xfrm>
+            <a:off x="8752417" y="2250831"/>
+            <a:ext cx="2536906" cy="949569"/>
+            <a:chOff x="8752417" y="2250831"/>
+            <a:chExt cx="2536906" cy="949569"/>
+          </a:xfrm>
+        </p:grpSpPr>
+        <p:sp>
+          <p:nvSpPr>
+            <p:cNvPr id="2" name="圆角矩形 1"/>
+            <p:cNvSpPr/>
+            <p:nvPr/>
+          </p:nvSpPr>
+          <p:spPr>
+            <a:xfrm>
+              <a:off x="9346223" y="2250831"/>
+              <a:ext cx="1943100" cy="949569"/>
+            </a:xfrm>
+            <a:prstGeom prst="roundRect">
+              <a:avLst/>
+            </a:prstGeom>
+            <a:noFill/>
+            <a:ln w="38100">
+              <a:solidFill>
+                <a:srgbClr val="FF0000"/>
+              </a:solidFill>
+            </a:ln>
+          </p:spPr>
+          <p:style>
+            <a:lnRef idx="2">
+              <a:schemeClr val="accent1">
+                <a:shade val="50000"/>
+              </a:schemeClr>
+            </a:lnRef>
+            <a:fillRef idx="1">
+              <a:schemeClr val="accent1"/>
+            </a:fillRef>
+            <a:effectRef idx="0">
+              <a:schemeClr val="accent1"/>
+            </a:effectRef>
+            <a:fontRef idx="minor">
+              <a:schemeClr val="lt1"/>
+            </a:fontRef>
+          </p:style>
+          <p:txBody>
+            <a:bodyPr rtlCol="0" anchor="ctr"/>
+            <a:lstStyle/>
+            <a:p>
+              <a:pPr algn="ctr"/>
+              <a:r>
+                <a:rPr lang="en-US" altLang="zh-CN" dirty="0" smtClean="0">
+                  <a:solidFill>
+                    <a:srgbClr val="FF0000"/>
+                  </a:solidFill>
+                </a:rPr>
+                <a:t>The larger data size, the little relative latency. </a:t>
+              </a:r>
+              <a:endParaRPr lang="zh-CN" altLang="en-US" dirty="0">
+                <a:solidFill>
+                  <a:srgbClr val="FF0000"/>
+                </a:solidFill>
+              </a:endParaRPr>
+            </a:p>
+          </p:txBody>
+        </p:sp>
+        <p:cxnSp>
+          <p:nvCxnSpPr>
+            <p:cNvPr id="4" name="直接箭头连接符 3"/>
+            <p:cNvCxnSpPr/>
+            <p:nvPr/>
+          </p:nvCxnSpPr>
+          <p:spPr>
+            <a:xfrm flipV="1">
+              <a:off x="8752417" y="2769577"/>
+              <a:ext cx="461921" cy="140677"/>
+            </a:xfrm>
+            <a:prstGeom prst="straightConnector1">
+              <a:avLst/>
+            </a:prstGeom>
+            <a:ln w="38100">
+              <a:solidFill>
+                <a:srgbClr val="FF0000"/>
+              </a:solidFill>
+              <a:tailEnd type="triangle"/>
+            </a:ln>
+          </p:spPr>
+          <p:style>
+            <a:lnRef idx="1">
+              <a:schemeClr val="accent1"/>
+            </a:lnRef>
+            <a:fillRef idx="0">
+              <a:schemeClr val="accent1"/>
+            </a:fillRef>
+            <a:effectRef idx="0">
+              <a:schemeClr val="accent1"/>
+            </a:effectRef>
+            <a:fontRef idx="minor">
+              <a:schemeClr val="tx1"/>
+            </a:fontRef>
+          </p:style>
+        </p:cxnSp>
+      </p:grpSp>
+      <p:grpSp>
+        <p:nvGrpSpPr>
+          <p:cNvPr id="9" name="组合 8"/>
+          <p:cNvGrpSpPr/>
+          <p:nvPr/>
+        </p:nvGrpSpPr>
+        <p:grpSpPr>
+          <a:xfrm>
+            <a:off x="8752417" y="4468202"/>
+            <a:ext cx="2703960" cy="949569"/>
+            <a:chOff x="8752417" y="2250831"/>
+            <a:chExt cx="2703960" cy="949569"/>
+          </a:xfrm>
+        </p:grpSpPr>
+        <p:sp>
+          <p:nvSpPr>
+            <p:cNvPr id="10" name="圆角矩形 9"/>
+            <p:cNvSpPr/>
+            <p:nvPr/>
+          </p:nvSpPr>
+          <p:spPr>
+            <a:xfrm>
+              <a:off x="9346223" y="2250831"/>
+              <a:ext cx="2110154" cy="949569"/>
+            </a:xfrm>
+            <a:prstGeom prst="roundRect">
+              <a:avLst/>
+            </a:prstGeom>
+            <a:noFill/>
+            <a:ln w="38100">
+              <a:solidFill>
+                <a:srgbClr val="FF0000"/>
+              </a:solidFill>
+            </a:ln>
+          </p:spPr>
+          <p:style>
+            <a:lnRef idx="2">
+              <a:schemeClr val="accent1">
+                <a:shade val="50000"/>
+              </a:schemeClr>
+            </a:lnRef>
+            <a:fillRef idx="1">
+              <a:schemeClr val="accent1"/>
+            </a:fillRef>
+            <a:effectRef idx="0">
+              <a:schemeClr val="accent1"/>
+            </a:effectRef>
+            <a:fontRef idx="minor">
+              <a:schemeClr val="lt1"/>
+            </a:fontRef>
+          </p:style>
+          <p:txBody>
+            <a:bodyPr rtlCol="0" anchor="ctr"/>
+            <a:lstStyle/>
+            <a:p>
+              <a:pPr algn="ctr"/>
+              <a:r>
+                <a:rPr lang="en-US" altLang="zh-CN" dirty="0" smtClean="0">
+                  <a:solidFill>
+                    <a:srgbClr val="FF0000"/>
+                  </a:solidFill>
+                </a:rPr>
+                <a:t>The bandwidth is most largest among the four methods </a:t>
+              </a:r>
+              <a:endParaRPr lang="zh-CN" altLang="en-US" dirty="0">
+                <a:solidFill>
+                  <a:srgbClr val="FF0000"/>
+                </a:solidFill>
+              </a:endParaRPr>
+            </a:p>
+          </p:txBody>
+        </p:sp>
+        <p:cxnSp>
+          <p:nvCxnSpPr>
+            <p:cNvPr id="11" name="直接箭头连接符 10"/>
+            <p:cNvCxnSpPr/>
+            <p:nvPr/>
+          </p:nvCxnSpPr>
+          <p:spPr>
+            <a:xfrm flipV="1">
+              <a:off x="8752417" y="2769577"/>
+              <a:ext cx="461921" cy="140677"/>
+            </a:xfrm>
+            <a:prstGeom prst="straightConnector1">
+              <a:avLst/>
+            </a:prstGeom>
+            <a:ln w="38100">
+              <a:solidFill>
+                <a:srgbClr val="FF0000"/>
+              </a:solidFill>
+              <a:tailEnd type="triangle"/>
+            </a:ln>
+          </p:spPr>
+          <p:style>
+            <a:lnRef idx="1">
+              <a:schemeClr val="accent1"/>
+            </a:lnRef>
+            <a:fillRef idx="0">
+              <a:schemeClr val="accent1"/>
+            </a:fillRef>
+            <a:effectRef idx="0">
+              <a:schemeClr val="accent1"/>
+            </a:effectRef>
+            <a:fontRef idx="minor">
+              <a:schemeClr val="tx1"/>
+            </a:fontRef>
+          </p:style>
+        </p:cxnSp>
+      </p:grpSp>
     </p:spTree>
     <p:extLst>
       <p:ext uri="{BB962C8B-B14F-4D97-AF65-F5344CB8AC3E}">
@@ -23334,7 +23464,120 @@
   <p:timing>
     <p:tnLst>
       <p:par>
-        <p:cTn id="1" dur="indefinite" restart="never" nodeType="tmRoot"/>
+        <p:cTn id="1" dur="indefinite" restart="never" nodeType="tmRoot">
+          <p:childTnLst>
+            <p:seq concurrent="1" nextAc="seek">
+              <p:cTn id="2" dur="indefinite" nodeType="mainSeq">
+                <p:childTnLst>
+                  <p:par>
+                    <p:cTn id="3" fill="hold">
+                      <p:stCondLst>
+                        <p:cond delay="indefinite"/>
+                      </p:stCondLst>
+                      <p:childTnLst>
+                        <p:par>
+                          <p:cTn id="4" fill="hold">
+                            <p:stCondLst>
+                              <p:cond delay="0"/>
+                            </p:stCondLst>
+                            <p:childTnLst>
+                              <p:par>
+                                <p:cTn id="5" presetID="1" presetClass="entr" presetSubtype="0" fill="hold" nodeType="clickEffect">
+                                  <p:stCondLst>
+                                    <p:cond delay="0"/>
+                                  </p:stCondLst>
+                                  <p:childTnLst>
+                                    <p:set>
+                                      <p:cBhvr>
+                                        <p:cTn id="6" dur="1" fill="hold">
+                                          <p:stCondLst>
+                                            <p:cond delay="0"/>
+                                          </p:stCondLst>
+                                        </p:cTn>
+                                        <p:tgtEl>
+                                          <p:spTgt spid="7"/>
+                                        </p:tgtEl>
+                                        <p:attrNameLst>
+                                          <p:attrName>style.visibility</p:attrName>
+                                        </p:attrNameLst>
+                                      </p:cBhvr>
+                                      <p:to>
+                                        <p:strVal val="visible"/>
+                                      </p:to>
+                                    </p:set>
+                                  </p:childTnLst>
+                                </p:cTn>
+                              </p:par>
+                            </p:childTnLst>
+                          </p:cTn>
+                        </p:par>
+                      </p:childTnLst>
+                    </p:cTn>
+                  </p:par>
+                  <p:par>
+                    <p:cTn id="7" fill="hold">
+                      <p:stCondLst>
+                        <p:cond delay="indefinite"/>
+                      </p:stCondLst>
+                      <p:childTnLst>
+                        <p:par>
+                          <p:cTn id="8" fill="hold">
+                            <p:stCondLst>
+                              <p:cond delay="0"/>
+                            </p:stCondLst>
+                            <p:childTnLst>
+                              <p:par>
+                                <p:cTn id="9" presetID="1" presetClass="entr" presetSubtype="0" fill="hold" nodeType="clickEffect">
+                                  <p:stCondLst>
+                                    <p:cond delay="0"/>
+                                  </p:stCondLst>
+                                  <p:childTnLst>
+                                    <p:set>
+                                      <p:cBhvr>
+                                        <p:cTn id="10" dur="1" fill="hold">
+                                          <p:stCondLst>
+                                            <p:cond delay="0"/>
+                                          </p:stCondLst>
+                                        </p:cTn>
+                                        <p:tgtEl>
+                                          <p:spTgt spid="9"/>
+                                        </p:tgtEl>
+                                        <p:attrNameLst>
+                                          <p:attrName>style.visibility</p:attrName>
+                                        </p:attrNameLst>
+                                      </p:cBhvr>
+                                      <p:to>
+                                        <p:strVal val="visible"/>
+                                      </p:to>
+                                    </p:set>
+                                  </p:childTnLst>
+                                </p:cTn>
+                              </p:par>
+                            </p:childTnLst>
+                          </p:cTn>
+                        </p:par>
+                      </p:childTnLst>
+                    </p:cTn>
+                  </p:par>
+                </p:childTnLst>
+              </p:cTn>
+              <p:prevCondLst>
+                <p:cond evt="onPrev" delay="0">
+                  <p:tgtEl>
+                    <p:sldTgt/>
+                  </p:tgtEl>
+                </p:cond>
+              </p:prevCondLst>
+              <p:nextCondLst>
+                <p:cond evt="onNext" delay="0">
+                  <p:tgtEl>
+                    <p:sldTgt/>
+                  </p:tgtEl>
+                </p:cond>
+              </p:nextCondLst>
+            </p:seq>
+          </p:childTnLst>
+        </p:cTn>
       </p:par>
     </p:tnLst>
   </p:timing>
@@ -23363,7 +23606,7 @@
           <p:cNvPr id="5122" name="标题 1">
             <a:extLst>
               <a:ext uri="{FF2B5EF4-FFF2-40B4-BE49-F238E27FC236}">
-                <a16:creationId xmlns:a16="http://schemas.microsoft.com/office/drawing/2014/main" xmlns="" id="{A237414D-C4E1-407F-9B0D-585D2D878A74}"/>
+                <a16:creationId xmlns="" xmlns:a16="http://schemas.microsoft.com/office/drawing/2014/main" id="{A237414D-C4E1-407F-9B0D-585D2D878A74}"/>
               </a:ext>
             </a:extLst>
           </p:cNvPr>
@@ -23403,7 +23646,7 @@
           <p:cNvPr id="3" name="内容占位符 2">
             <a:extLst>
               <a:ext uri="{FF2B5EF4-FFF2-40B4-BE49-F238E27FC236}">
-                <a16:creationId xmlns:a16="http://schemas.microsoft.com/office/drawing/2014/main" xmlns="" id="{3DFD56C3-3B63-4F4C-A455-80D220434928}"/>
+                <a16:creationId xmlns="" xmlns:a16="http://schemas.microsoft.com/office/drawing/2014/main" id="{3DFD56C3-3B63-4F4C-A455-80D220434928}"/>
               </a:ext>
             </a:extLst>
           </p:cNvPr>
@@ -23472,14 +23715,7 @@
                 <a:latin typeface="Times New Roman" panose="02020603050405020304" pitchFamily="18" charset="0"/>
                 <a:cs typeface="Times New Roman" panose="02020603050405020304" pitchFamily="18" charset="0"/>
               </a:rPr>
-              <a:t>Application Case </a:t>
-            </a:r>
-            <a:r>
-              <a:rPr lang="en-US" altLang="zh-CN" b="1" dirty="0" smtClean="0">
-                <a:latin typeface="Times New Roman" panose="02020603050405020304" pitchFamily="18" charset="0"/>
-                <a:cs typeface="Times New Roman" panose="02020603050405020304" pitchFamily="18" charset="0"/>
-              </a:rPr>
-              <a:t>Study</a:t>
+              <a:t>Application Case Study</a:t>
             </a:r>
             <a:endParaRPr lang="en-US" altLang="zh-CN" b="1" dirty="0">
               <a:latin typeface="Times New Roman" panose="02020603050405020304" pitchFamily="18" charset="0"/>
@@ -23769,7 +24005,7 @@
           <p:cNvPr id="5122" name="标题 1">
             <a:extLst>
               <a:ext uri="{FF2B5EF4-FFF2-40B4-BE49-F238E27FC236}">
-                <a16:creationId xmlns:a16="http://schemas.microsoft.com/office/drawing/2014/main" xmlns="" id="{A237414D-C4E1-407F-9B0D-585D2D878A74}"/>
+                <a16:creationId xmlns="" xmlns:a16="http://schemas.microsoft.com/office/drawing/2014/main" id="{A237414D-C4E1-407F-9B0D-585D2D878A74}"/>
               </a:ext>
             </a:extLst>
           </p:cNvPr>
@@ -23901,7 +24137,7 @@
           <p:cNvPr id="5122" name="标题 1">
             <a:extLst>
               <a:ext uri="{FF2B5EF4-FFF2-40B4-BE49-F238E27FC236}">
-                <a16:creationId xmlns:a16="http://schemas.microsoft.com/office/drawing/2014/main" xmlns="" id="{A237414D-C4E1-407F-9B0D-585D2D878A74}"/>
+                <a16:creationId xmlns="" xmlns:a16="http://schemas.microsoft.com/office/drawing/2014/main" id="{A237414D-C4E1-407F-9B0D-585D2D878A74}"/>
               </a:ext>
             </a:extLst>
           </p:cNvPr>
@@ -23941,7 +24177,7 @@
           <p:cNvPr id="3" name="内容占位符 2">
             <a:extLst>
               <a:ext uri="{FF2B5EF4-FFF2-40B4-BE49-F238E27FC236}">
-                <a16:creationId xmlns:a16="http://schemas.microsoft.com/office/drawing/2014/main" xmlns="" id="{3DFD56C3-3B63-4F4C-A455-80D220434928}"/>
+                <a16:creationId xmlns="" xmlns:a16="http://schemas.microsoft.com/office/drawing/2014/main" id="{3DFD56C3-3B63-4F4C-A455-80D220434928}"/>
               </a:ext>
             </a:extLst>
           </p:cNvPr>
@@ -23997,14 +24233,7 @@
                 <a:latin typeface="Times New Roman" panose="02020603050405020304" pitchFamily="18" charset="0"/>
                 <a:cs typeface="Times New Roman" panose="02020603050405020304" pitchFamily="18" charset="0"/>
               </a:rPr>
-              <a:t>MPI-ACC Design &amp; </a:t>
-            </a:r>
-            <a:r>
-              <a:rPr lang="en-US" altLang="zh-CN" b="1" dirty="0" smtClean="0">
-                <a:latin typeface="Times New Roman" panose="02020603050405020304" pitchFamily="18" charset="0"/>
-                <a:cs typeface="Times New Roman" panose="02020603050405020304" pitchFamily="18" charset="0"/>
-              </a:rPr>
-              <a:t>Optimizations</a:t>
+              <a:t>MPI-ACC Design &amp; Optimizations</a:t>
             </a:r>
           </a:p>
           <a:p>
@@ -24310,7 +24539,7 @@
           <p:cNvPr id="5122" name="标题 1">
             <a:extLst>
               <a:ext uri="{FF2B5EF4-FFF2-40B4-BE49-F238E27FC236}">
-                <a16:creationId xmlns:a16="http://schemas.microsoft.com/office/drawing/2014/main" xmlns="" id="{A237414D-C4E1-407F-9B0D-585D2D878A74}"/>
+                <a16:creationId xmlns="" xmlns:a16="http://schemas.microsoft.com/office/drawing/2014/main" id="{A237414D-C4E1-407F-9B0D-585D2D878A74}"/>
               </a:ext>
             </a:extLst>
           </p:cNvPr>
@@ -24350,7 +24579,7 @@
           <p:cNvPr id="3" name="内容占位符 2">
             <a:extLst>
               <a:ext uri="{FF2B5EF4-FFF2-40B4-BE49-F238E27FC236}">
-                <a16:creationId xmlns:a16="http://schemas.microsoft.com/office/drawing/2014/main" xmlns="" id="{3DFD56C3-3B63-4F4C-A455-80D220434928}"/>
+                <a16:creationId xmlns="" xmlns:a16="http://schemas.microsoft.com/office/drawing/2014/main" id="{3DFD56C3-3B63-4F4C-A455-80D220434928}"/>
               </a:ext>
             </a:extLst>
           </p:cNvPr>
@@ -24679,7 +24908,7 @@
           <p:cNvPr id="5122" name="标题 1">
             <a:extLst>
               <a:ext uri="{FF2B5EF4-FFF2-40B4-BE49-F238E27FC236}">
-                <a16:creationId xmlns:a16="http://schemas.microsoft.com/office/drawing/2014/main" xmlns="" id="{A237414D-C4E1-407F-9B0D-585D2D878A74}"/>
+                <a16:creationId xmlns="" xmlns:a16="http://schemas.microsoft.com/office/drawing/2014/main" id="{A237414D-C4E1-407F-9B0D-585D2D878A74}"/>
               </a:ext>
             </a:extLst>
           </p:cNvPr>
@@ -24719,7 +24948,7 @@
           <p:cNvPr id="3" name="内容占位符 2">
             <a:extLst>
               <a:ext uri="{FF2B5EF4-FFF2-40B4-BE49-F238E27FC236}">
-                <a16:creationId xmlns:a16="http://schemas.microsoft.com/office/drawing/2014/main" xmlns="" id="{3DFD56C3-3B63-4F4C-A455-80D220434928}"/>
+                <a16:creationId xmlns="" xmlns:a16="http://schemas.microsoft.com/office/drawing/2014/main" id="{3DFD56C3-3B63-4F4C-A455-80D220434928}"/>
               </a:ext>
             </a:extLst>
           </p:cNvPr>
@@ -24922,7 +25151,7 @@
           <p:cNvPr id="5122" name="标题 1">
             <a:extLst>
               <a:ext uri="{FF2B5EF4-FFF2-40B4-BE49-F238E27FC236}">
-                <a16:creationId xmlns:a16="http://schemas.microsoft.com/office/drawing/2014/main" xmlns="" id="{A237414D-C4E1-407F-9B0D-585D2D878A74}"/>
+                <a16:creationId xmlns="" xmlns:a16="http://schemas.microsoft.com/office/drawing/2014/main" id="{A237414D-C4E1-407F-9B0D-585D2D878A74}"/>
               </a:ext>
             </a:extLst>
           </p:cNvPr>
@@ -24962,7 +25191,7 @@
           <p:cNvPr id="3" name="内容占位符 2">
             <a:extLst>
               <a:ext uri="{FF2B5EF4-FFF2-40B4-BE49-F238E27FC236}">
-                <a16:creationId xmlns:a16="http://schemas.microsoft.com/office/drawing/2014/main" xmlns="" id="{3DFD56C3-3B63-4F4C-A455-80D220434928}"/>
+                <a16:creationId xmlns="" xmlns:a16="http://schemas.microsoft.com/office/drawing/2014/main" id="{3DFD56C3-3B63-4F4C-A455-80D220434928}"/>
               </a:ext>
             </a:extLst>
           </p:cNvPr>
@@ -25262,7 +25491,7 @@
           <p:cNvPr id="5122" name="标题 1">
             <a:extLst>
               <a:ext uri="{FF2B5EF4-FFF2-40B4-BE49-F238E27FC236}">
-                <a16:creationId xmlns:a16="http://schemas.microsoft.com/office/drawing/2014/main" xmlns="" id="{A237414D-C4E1-407F-9B0D-585D2D878A74}"/>
+                <a16:creationId xmlns="" xmlns:a16="http://schemas.microsoft.com/office/drawing/2014/main" id="{A237414D-C4E1-407F-9B0D-585D2D878A74}"/>
               </a:ext>
             </a:extLst>
           </p:cNvPr>
@@ -25302,7 +25531,7 @@
           <p:cNvPr id="3" name="内容占位符 2">
             <a:extLst>
               <a:ext uri="{FF2B5EF4-FFF2-40B4-BE49-F238E27FC236}">
-                <a16:creationId xmlns:a16="http://schemas.microsoft.com/office/drawing/2014/main" xmlns="" id="{3DFD56C3-3B63-4F4C-A455-80D220434928}"/>
+                <a16:creationId xmlns="" xmlns:a16="http://schemas.microsoft.com/office/drawing/2014/main" id="{3DFD56C3-3B63-4F4C-A455-80D220434928}"/>
               </a:ext>
             </a:extLst>
           </p:cNvPr>
@@ -25378,14 +25607,7 @@
                 <a:latin typeface="Times New Roman" panose="02020603050405020304" pitchFamily="18" charset="0"/>
                 <a:cs typeface="Times New Roman" panose="02020603050405020304" pitchFamily="18" charset="0"/>
               </a:rPr>
-              <a:t>Application Case </a:t>
-            </a:r>
-            <a:r>
-              <a:rPr lang="en-US" altLang="zh-CN" b="1" dirty="0" smtClean="0">
-                <a:latin typeface="Times New Roman" panose="02020603050405020304" pitchFamily="18" charset="0"/>
-                <a:cs typeface="Times New Roman" panose="02020603050405020304" pitchFamily="18" charset="0"/>
-              </a:rPr>
-              <a:t>Study</a:t>
+              <a:t>Application Case Study</a:t>
             </a:r>
             <a:endParaRPr lang="en-US" altLang="zh-CN" b="1" dirty="0">
               <a:latin typeface="Times New Roman" panose="02020603050405020304" pitchFamily="18" charset="0"/>
@@ -25678,7 +25900,7 @@
           <p:cNvPr id="5122" name="标题 1">
             <a:extLst>
               <a:ext uri="{FF2B5EF4-FFF2-40B4-BE49-F238E27FC236}">
-                <a16:creationId xmlns:a16="http://schemas.microsoft.com/office/drawing/2014/main" xmlns="" id="{A237414D-C4E1-407F-9B0D-585D2D878A74}"/>
+                <a16:creationId xmlns="" xmlns:a16="http://schemas.microsoft.com/office/drawing/2014/main" id="{A237414D-C4E1-407F-9B0D-585D2D878A74}"/>
               </a:ext>
             </a:extLst>
           </p:cNvPr>
@@ -25718,7 +25940,7 @@
           <p:cNvPr id="3" name="内容占位符 2">
             <a:extLst>
               <a:ext uri="{FF2B5EF4-FFF2-40B4-BE49-F238E27FC236}">
-                <a16:creationId xmlns:a16="http://schemas.microsoft.com/office/drawing/2014/main" xmlns="" id="{3DFD56C3-3B63-4F4C-A455-80D220434928}"/>
+                <a16:creationId xmlns="" xmlns:a16="http://schemas.microsoft.com/office/drawing/2014/main" id="{3DFD56C3-3B63-4F4C-A455-80D220434928}"/>
               </a:ext>
             </a:extLst>
           </p:cNvPr>
@@ -25977,7 +26199,7 @@
           <p:cNvPr id="5122" name="标题 1">
             <a:extLst>
               <a:ext uri="{FF2B5EF4-FFF2-40B4-BE49-F238E27FC236}">
-                <a16:creationId xmlns:a16="http://schemas.microsoft.com/office/drawing/2014/main" xmlns="" id="{A237414D-C4E1-407F-9B0D-585D2D878A74}"/>
+                <a16:creationId xmlns="" xmlns:a16="http://schemas.microsoft.com/office/drawing/2014/main" id="{A237414D-C4E1-407F-9B0D-585D2D878A74}"/>
               </a:ext>
             </a:extLst>
           </p:cNvPr>
@@ -26017,7 +26239,7 @@
           <p:cNvPr id="3" name="内容占位符 2">
             <a:extLst>
               <a:ext uri="{FF2B5EF4-FFF2-40B4-BE49-F238E27FC236}">
-                <a16:creationId xmlns:a16="http://schemas.microsoft.com/office/drawing/2014/main" xmlns="" id="{3DFD56C3-3B63-4F4C-A455-80D220434928}"/>
+                <a16:creationId xmlns="" xmlns:a16="http://schemas.microsoft.com/office/drawing/2014/main" id="{3DFD56C3-3B63-4F4C-A455-80D220434928}"/>
               </a:ext>
             </a:extLst>
           </p:cNvPr>
@@ -26225,14 +26447,21 @@
                 <a:latin typeface="Times New Roman" panose="02020603050405020304" pitchFamily="18" charset="0"/>
                 <a:cs typeface="Times New Roman" panose="02020603050405020304" pitchFamily="18" charset="0"/>
               </a:rPr>
-              <a:t>theory</a:t>
+              <a:t>theories</a:t>
             </a:r>
             <a:r>
               <a:rPr lang="en-US" altLang="zh-CN" dirty="0" smtClean="0">
                 <a:latin typeface="Times New Roman" panose="02020603050405020304" pitchFamily="18" charset="0"/>
                 <a:cs typeface="Times New Roman" panose="02020603050405020304" pitchFamily="18" charset="0"/>
               </a:rPr>
-              <a:t> and </a:t>
+              <a:t> </a:t>
+            </a:r>
+            <a:r>
+              <a:rPr lang="en-US" altLang="zh-CN" dirty="0" smtClean="0">
+                <a:latin typeface="Times New Roman" panose="02020603050405020304" pitchFamily="18" charset="0"/>
+                <a:cs typeface="Times New Roman" panose="02020603050405020304" pitchFamily="18" charset="0"/>
+              </a:rPr>
+              <a:t>and </a:t>
             </a:r>
             <a:r>
               <a:rPr lang="en-US" altLang="zh-CN" b="1" dirty="0" smtClean="0">
@@ -26335,7 +26564,7 @@
           <p:cNvPr id="5122" name="标题 1">
             <a:extLst>
               <a:ext uri="{FF2B5EF4-FFF2-40B4-BE49-F238E27FC236}">
-                <a16:creationId xmlns:a16="http://schemas.microsoft.com/office/drawing/2014/main" xmlns="" id="{A237414D-C4E1-407F-9B0D-585D2D878A74}"/>
+                <a16:creationId xmlns="" xmlns:a16="http://schemas.microsoft.com/office/drawing/2014/main" id="{A237414D-C4E1-407F-9B0D-585D2D878A74}"/>
               </a:ext>
             </a:extLst>
           </p:cNvPr>

--- a/Technical-Documents/Parallel-Computing/parallel-computing-course/MPI-ACC Accelerator-Aware MPI for Scientific Applications.pptx
+++ b/Technical-Documents/Parallel-Computing/parallel-computing-course/MPI-ACC Accelerator-Aware MPI for Scientific Applications.pptx
@@ -229,7 +229,7 @@
           <a:p>
             <a:fld id="{73A93084-53C3-4D41-9C09-AF8810E82D9D}" type="datetimeFigureOut">
               <a:rPr lang="zh-CN" altLang="en-US" smtClean="0"/>
-              <a:t>2019/3/31</a:t>
+              <a:t>2019/4/3</a:t>
             </a:fld>
             <a:endParaRPr lang="zh-CN" altLang="en-US"/>
           </a:p>
@@ -518,7 +518,7 @@
           <p:cNvPr id="6146" name="幻灯片图像占位符 1">
             <a:extLst>
               <a:ext uri="{FF2B5EF4-FFF2-40B4-BE49-F238E27FC236}">
-                <a16:creationId xmlns="" xmlns:a16="http://schemas.microsoft.com/office/drawing/2014/main" id="{4908B133-C54F-400F-8F70-355C57C0BE11}"/>
+                <a16:creationId xmlns:a16="http://schemas.microsoft.com/office/drawing/2014/main" xmlns="" id="{4908B133-C54F-400F-8F70-355C57C0BE11}"/>
               </a:ext>
             </a:extLst>
           </p:cNvPr>
@@ -555,7 +555,7 @@
           <p:cNvPr id="6147" name="备注占位符 2">
             <a:extLst>
               <a:ext uri="{FF2B5EF4-FFF2-40B4-BE49-F238E27FC236}">
-                <a16:creationId xmlns="" xmlns:a16="http://schemas.microsoft.com/office/drawing/2014/main" id="{7D16C196-D24B-4BE0-AE74-D44907B2A1B1}"/>
+                <a16:creationId xmlns:a16="http://schemas.microsoft.com/office/drawing/2014/main" xmlns="" id="{7D16C196-D24B-4BE0-AE74-D44907B2A1B1}"/>
               </a:ext>
             </a:extLst>
           </p:cNvPr>
@@ -610,7 +610,7 @@
           <p:cNvPr id="6148" name="灯片编号占位符 3">
             <a:extLst>
               <a:ext uri="{FF2B5EF4-FFF2-40B4-BE49-F238E27FC236}">
-                <a16:creationId xmlns="" xmlns:a16="http://schemas.microsoft.com/office/drawing/2014/main" id="{D230392C-ED50-49C3-93A6-10868BF6DADE}"/>
+                <a16:creationId xmlns:a16="http://schemas.microsoft.com/office/drawing/2014/main" xmlns="" id="{D230392C-ED50-49C3-93A6-10868BF6DADE}"/>
               </a:ext>
             </a:extLst>
           </p:cNvPr>
@@ -860,7 +860,7 @@
           <p:cNvPr id="6146" name="幻灯片图像占位符 1">
             <a:extLst>
               <a:ext uri="{FF2B5EF4-FFF2-40B4-BE49-F238E27FC236}">
-                <a16:creationId xmlns="" xmlns:a16="http://schemas.microsoft.com/office/drawing/2014/main" id="{4908B133-C54F-400F-8F70-355C57C0BE11}"/>
+                <a16:creationId xmlns:a16="http://schemas.microsoft.com/office/drawing/2014/main" xmlns="" id="{4908B133-C54F-400F-8F70-355C57C0BE11}"/>
               </a:ext>
             </a:extLst>
           </p:cNvPr>
@@ -897,7 +897,7 @@
           <p:cNvPr id="6147" name="备注占位符 2">
             <a:extLst>
               <a:ext uri="{FF2B5EF4-FFF2-40B4-BE49-F238E27FC236}">
-                <a16:creationId xmlns="" xmlns:a16="http://schemas.microsoft.com/office/drawing/2014/main" id="{7D16C196-D24B-4BE0-AE74-D44907B2A1B1}"/>
+                <a16:creationId xmlns:a16="http://schemas.microsoft.com/office/drawing/2014/main" xmlns="" id="{7D16C196-D24B-4BE0-AE74-D44907B2A1B1}"/>
               </a:ext>
             </a:extLst>
           </p:cNvPr>
@@ -952,7 +952,7 @@
           <p:cNvPr id="6148" name="灯片编号占位符 3">
             <a:extLst>
               <a:ext uri="{FF2B5EF4-FFF2-40B4-BE49-F238E27FC236}">
-                <a16:creationId xmlns="" xmlns:a16="http://schemas.microsoft.com/office/drawing/2014/main" id="{D230392C-ED50-49C3-93A6-10868BF6DADE}"/>
+                <a16:creationId xmlns:a16="http://schemas.microsoft.com/office/drawing/2014/main" xmlns="" id="{D230392C-ED50-49C3-93A6-10868BF6DADE}"/>
               </a:ext>
             </a:extLst>
           </p:cNvPr>
@@ -1202,7 +1202,7 @@
           <p:cNvPr id="6146" name="幻灯片图像占位符 1">
             <a:extLst>
               <a:ext uri="{FF2B5EF4-FFF2-40B4-BE49-F238E27FC236}">
-                <a16:creationId xmlns="" xmlns:a16="http://schemas.microsoft.com/office/drawing/2014/main" id="{4908B133-C54F-400F-8F70-355C57C0BE11}"/>
+                <a16:creationId xmlns:a16="http://schemas.microsoft.com/office/drawing/2014/main" xmlns="" id="{4908B133-C54F-400F-8F70-355C57C0BE11}"/>
               </a:ext>
             </a:extLst>
           </p:cNvPr>
@@ -1239,7 +1239,7 @@
           <p:cNvPr id="6147" name="备注占位符 2">
             <a:extLst>
               <a:ext uri="{FF2B5EF4-FFF2-40B4-BE49-F238E27FC236}">
-                <a16:creationId xmlns="" xmlns:a16="http://schemas.microsoft.com/office/drawing/2014/main" id="{7D16C196-D24B-4BE0-AE74-D44907B2A1B1}"/>
+                <a16:creationId xmlns:a16="http://schemas.microsoft.com/office/drawing/2014/main" xmlns="" id="{7D16C196-D24B-4BE0-AE74-D44907B2A1B1}"/>
               </a:ext>
             </a:extLst>
           </p:cNvPr>
@@ -1294,7 +1294,7 @@
           <p:cNvPr id="6148" name="灯片编号占位符 3">
             <a:extLst>
               <a:ext uri="{FF2B5EF4-FFF2-40B4-BE49-F238E27FC236}">
-                <a16:creationId xmlns="" xmlns:a16="http://schemas.microsoft.com/office/drawing/2014/main" id="{D230392C-ED50-49C3-93A6-10868BF6DADE}"/>
+                <a16:creationId xmlns:a16="http://schemas.microsoft.com/office/drawing/2014/main" xmlns="" id="{D230392C-ED50-49C3-93A6-10868BF6DADE}"/>
               </a:ext>
             </a:extLst>
           </p:cNvPr>
@@ -1544,7 +1544,7 @@
           <p:cNvPr id="6146" name="幻灯片图像占位符 1">
             <a:extLst>
               <a:ext uri="{FF2B5EF4-FFF2-40B4-BE49-F238E27FC236}">
-                <a16:creationId xmlns="" xmlns:a16="http://schemas.microsoft.com/office/drawing/2014/main" id="{4908B133-C54F-400F-8F70-355C57C0BE11}"/>
+                <a16:creationId xmlns:a16="http://schemas.microsoft.com/office/drawing/2014/main" xmlns="" id="{4908B133-C54F-400F-8F70-355C57C0BE11}"/>
               </a:ext>
             </a:extLst>
           </p:cNvPr>
@@ -1581,7 +1581,7 @@
           <p:cNvPr id="6147" name="备注占位符 2">
             <a:extLst>
               <a:ext uri="{FF2B5EF4-FFF2-40B4-BE49-F238E27FC236}">
-                <a16:creationId xmlns="" xmlns:a16="http://schemas.microsoft.com/office/drawing/2014/main" id="{7D16C196-D24B-4BE0-AE74-D44907B2A1B1}"/>
+                <a16:creationId xmlns:a16="http://schemas.microsoft.com/office/drawing/2014/main" xmlns="" id="{7D16C196-D24B-4BE0-AE74-D44907B2A1B1}"/>
               </a:ext>
             </a:extLst>
           </p:cNvPr>
@@ -1636,7 +1636,7 @@
           <p:cNvPr id="6148" name="灯片编号占位符 3">
             <a:extLst>
               <a:ext uri="{FF2B5EF4-FFF2-40B4-BE49-F238E27FC236}">
-                <a16:creationId xmlns="" xmlns:a16="http://schemas.microsoft.com/office/drawing/2014/main" id="{D230392C-ED50-49C3-93A6-10868BF6DADE}"/>
+                <a16:creationId xmlns:a16="http://schemas.microsoft.com/office/drawing/2014/main" xmlns="" id="{D230392C-ED50-49C3-93A6-10868BF6DADE}"/>
               </a:ext>
             </a:extLst>
           </p:cNvPr>
@@ -1886,7 +1886,7 @@
           <p:cNvPr id="6146" name="幻灯片图像占位符 1">
             <a:extLst>
               <a:ext uri="{FF2B5EF4-FFF2-40B4-BE49-F238E27FC236}">
-                <a16:creationId xmlns="" xmlns:a16="http://schemas.microsoft.com/office/drawing/2014/main" id="{4908B133-C54F-400F-8F70-355C57C0BE11}"/>
+                <a16:creationId xmlns:a16="http://schemas.microsoft.com/office/drawing/2014/main" xmlns="" id="{4908B133-C54F-400F-8F70-355C57C0BE11}"/>
               </a:ext>
             </a:extLst>
           </p:cNvPr>
@@ -1923,7 +1923,7 @@
           <p:cNvPr id="6147" name="备注占位符 2">
             <a:extLst>
               <a:ext uri="{FF2B5EF4-FFF2-40B4-BE49-F238E27FC236}">
-                <a16:creationId xmlns="" xmlns:a16="http://schemas.microsoft.com/office/drawing/2014/main" id="{7D16C196-D24B-4BE0-AE74-D44907B2A1B1}"/>
+                <a16:creationId xmlns:a16="http://schemas.microsoft.com/office/drawing/2014/main" xmlns="" id="{7D16C196-D24B-4BE0-AE74-D44907B2A1B1}"/>
               </a:ext>
             </a:extLst>
           </p:cNvPr>
@@ -1978,7 +1978,7 @@
           <p:cNvPr id="6148" name="灯片编号占位符 3">
             <a:extLst>
               <a:ext uri="{FF2B5EF4-FFF2-40B4-BE49-F238E27FC236}">
-                <a16:creationId xmlns="" xmlns:a16="http://schemas.microsoft.com/office/drawing/2014/main" id="{D230392C-ED50-49C3-93A6-10868BF6DADE}"/>
+                <a16:creationId xmlns:a16="http://schemas.microsoft.com/office/drawing/2014/main" xmlns="" id="{D230392C-ED50-49C3-93A6-10868BF6DADE}"/>
               </a:ext>
             </a:extLst>
           </p:cNvPr>
@@ -2228,7 +2228,7 @@
           <p:cNvPr id="6146" name="幻灯片图像占位符 1">
             <a:extLst>
               <a:ext uri="{FF2B5EF4-FFF2-40B4-BE49-F238E27FC236}">
-                <a16:creationId xmlns="" xmlns:a16="http://schemas.microsoft.com/office/drawing/2014/main" id="{4908B133-C54F-400F-8F70-355C57C0BE11}"/>
+                <a16:creationId xmlns:a16="http://schemas.microsoft.com/office/drawing/2014/main" xmlns="" id="{4908B133-C54F-400F-8F70-355C57C0BE11}"/>
               </a:ext>
             </a:extLst>
           </p:cNvPr>
@@ -2265,7 +2265,7 @@
           <p:cNvPr id="6147" name="备注占位符 2">
             <a:extLst>
               <a:ext uri="{FF2B5EF4-FFF2-40B4-BE49-F238E27FC236}">
-                <a16:creationId xmlns="" xmlns:a16="http://schemas.microsoft.com/office/drawing/2014/main" id="{7D16C196-D24B-4BE0-AE74-D44907B2A1B1}"/>
+                <a16:creationId xmlns:a16="http://schemas.microsoft.com/office/drawing/2014/main" xmlns="" id="{7D16C196-D24B-4BE0-AE74-D44907B2A1B1}"/>
               </a:ext>
             </a:extLst>
           </p:cNvPr>
@@ -2320,7 +2320,7 @@
           <p:cNvPr id="6148" name="灯片编号占位符 3">
             <a:extLst>
               <a:ext uri="{FF2B5EF4-FFF2-40B4-BE49-F238E27FC236}">
-                <a16:creationId xmlns="" xmlns:a16="http://schemas.microsoft.com/office/drawing/2014/main" id="{D230392C-ED50-49C3-93A6-10868BF6DADE}"/>
+                <a16:creationId xmlns:a16="http://schemas.microsoft.com/office/drawing/2014/main" xmlns="" id="{D230392C-ED50-49C3-93A6-10868BF6DADE}"/>
               </a:ext>
             </a:extLst>
           </p:cNvPr>
@@ -2570,7 +2570,7 @@
           <p:cNvPr id="6146" name="幻灯片图像占位符 1">
             <a:extLst>
               <a:ext uri="{FF2B5EF4-FFF2-40B4-BE49-F238E27FC236}">
-                <a16:creationId xmlns="" xmlns:a16="http://schemas.microsoft.com/office/drawing/2014/main" id="{4908B133-C54F-400F-8F70-355C57C0BE11}"/>
+                <a16:creationId xmlns:a16="http://schemas.microsoft.com/office/drawing/2014/main" xmlns="" id="{4908B133-C54F-400F-8F70-355C57C0BE11}"/>
               </a:ext>
             </a:extLst>
           </p:cNvPr>
@@ -2607,7 +2607,7 @@
           <p:cNvPr id="6147" name="备注占位符 2">
             <a:extLst>
               <a:ext uri="{FF2B5EF4-FFF2-40B4-BE49-F238E27FC236}">
-                <a16:creationId xmlns="" xmlns:a16="http://schemas.microsoft.com/office/drawing/2014/main" id="{7D16C196-D24B-4BE0-AE74-D44907B2A1B1}"/>
+                <a16:creationId xmlns:a16="http://schemas.microsoft.com/office/drawing/2014/main" xmlns="" id="{7D16C196-D24B-4BE0-AE74-D44907B2A1B1}"/>
               </a:ext>
             </a:extLst>
           </p:cNvPr>
@@ -2662,7 +2662,7 @@
           <p:cNvPr id="6148" name="灯片编号占位符 3">
             <a:extLst>
               <a:ext uri="{FF2B5EF4-FFF2-40B4-BE49-F238E27FC236}">
-                <a16:creationId xmlns="" xmlns:a16="http://schemas.microsoft.com/office/drawing/2014/main" id="{D230392C-ED50-49C3-93A6-10868BF6DADE}"/>
+                <a16:creationId xmlns:a16="http://schemas.microsoft.com/office/drawing/2014/main" xmlns="" id="{D230392C-ED50-49C3-93A6-10868BF6DADE}"/>
               </a:ext>
             </a:extLst>
           </p:cNvPr>
@@ -2912,7 +2912,7 @@
           <p:cNvPr id="6146" name="幻灯片图像占位符 1">
             <a:extLst>
               <a:ext uri="{FF2B5EF4-FFF2-40B4-BE49-F238E27FC236}">
-                <a16:creationId xmlns="" xmlns:a16="http://schemas.microsoft.com/office/drawing/2014/main" id="{4908B133-C54F-400F-8F70-355C57C0BE11}"/>
+                <a16:creationId xmlns:a16="http://schemas.microsoft.com/office/drawing/2014/main" xmlns="" id="{4908B133-C54F-400F-8F70-355C57C0BE11}"/>
               </a:ext>
             </a:extLst>
           </p:cNvPr>
@@ -2949,7 +2949,7 @@
           <p:cNvPr id="6147" name="备注占位符 2">
             <a:extLst>
               <a:ext uri="{FF2B5EF4-FFF2-40B4-BE49-F238E27FC236}">
-                <a16:creationId xmlns="" xmlns:a16="http://schemas.microsoft.com/office/drawing/2014/main" id="{7D16C196-D24B-4BE0-AE74-D44907B2A1B1}"/>
+                <a16:creationId xmlns:a16="http://schemas.microsoft.com/office/drawing/2014/main" xmlns="" id="{7D16C196-D24B-4BE0-AE74-D44907B2A1B1}"/>
               </a:ext>
             </a:extLst>
           </p:cNvPr>
@@ -3004,7 +3004,7 @@
           <p:cNvPr id="6148" name="灯片编号占位符 3">
             <a:extLst>
               <a:ext uri="{FF2B5EF4-FFF2-40B4-BE49-F238E27FC236}">
-                <a16:creationId xmlns="" xmlns:a16="http://schemas.microsoft.com/office/drawing/2014/main" id="{D230392C-ED50-49C3-93A6-10868BF6DADE}"/>
+                <a16:creationId xmlns:a16="http://schemas.microsoft.com/office/drawing/2014/main" xmlns="" id="{D230392C-ED50-49C3-93A6-10868BF6DADE}"/>
               </a:ext>
             </a:extLst>
           </p:cNvPr>
@@ -3254,7 +3254,7 @@
           <p:cNvPr id="6146" name="幻灯片图像占位符 1">
             <a:extLst>
               <a:ext uri="{FF2B5EF4-FFF2-40B4-BE49-F238E27FC236}">
-                <a16:creationId xmlns="" xmlns:a16="http://schemas.microsoft.com/office/drawing/2014/main" id="{4908B133-C54F-400F-8F70-355C57C0BE11}"/>
+                <a16:creationId xmlns:a16="http://schemas.microsoft.com/office/drawing/2014/main" xmlns="" id="{4908B133-C54F-400F-8F70-355C57C0BE11}"/>
               </a:ext>
             </a:extLst>
           </p:cNvPr>
@@ -3291,7 +3291,7 @@
           <p:cNvPr id="6147" name="备注占位符 2">
             <a:extLst>
               <a:ext uri="{FF2B5EF4-FFF2-40B4-BE49-F238E27FC236}">
-                <a16:creationId xmlns="" xmlns:a16="http://schemas.microsoft.com/office/drawing/2014/main" id="{7D16C196-D24B-4BE0-AE74-D44907B2A1B1}"/>
+                <a16:creationId xmlns:a16="http://schemas.microsoft.com/office/drawing/2014/main" xmlns="" id="{7D16C196-D24B-4BE0-AE74-D44907B2A1B1}"/>
               </a:ext>
             </a:extLst>
           </p:cNvPr>
@@ -3346,7 +3346,7 @@
           <p:cNvPr id="6148" name="灯片编号占位符 3">
             <a:extLst>
               <a:ext uri="{FF2B5EF4-FFF2-40B4-BE49-F238E27FC236}">
-                <a16:creationId xmlns="" xmlns:a16="http://schemas.microsoft.com/office/drawing/2014/main" id="{D230392C-ED50-49C3-93A6-10868BF6DADE}"/>
+                <a16:creationId xmlns:a16="http://schemas.microsoft.com/office/drawing/2014/main" xmlns="" id="{D230392C-ED50-49C3-93A6-10868BF6DADE}"/>
               </a:ext>
             </a:extLst>
           </p:cNvPr>
@@ -3596,7 +3596,7 @@
           <p:cNvPr id="6146" name="幻灯片图像占位符 1">
             <a:extLst>
               <a:ext uri="{FF2B5EF4-FFF2-40B4-BE49-F238E27FC236}">
-                <a16:creationId xmlns="" xmlns:a16="http://schemas.microsoft.com/office/drawing/2014/main" id="{4908B133-C54F-400F-8F70-355C57C0BE11}"/>
+                <a16:creationId xmlns:a16="http://schemas.microsoft.com/office/drawing/2014/main" xmlns="" id="{4908B133-C54F-400F-8F70-355C57C0BE11}"/>
               </a:ext>
             </a:extLst>
           </p:cNvPr>
@@ -3633,7 +3633,7 @@
           <p:cNvPr id="6147" name="备注占位符 2">
             <a:extLst>
               <a:ext uri="{FF2B5EF4-FFF2-40B4-BE49-F238E27FC236}">
-                <a16:creationId xmlns="" xmlns:a16="http://schemas.microsoft.com/office/drawing/2014/main" id="{7D16C196-D24B-4BE0-AE74-D44907B2A1B1}"/>
+                <a16:creationId xmlns:a16="http://schemas.microsoft.com/office/drawing/2014/main" xmlns="" id="{7D16C196-D24B-4BE0-AE74-D44907B2A1B1}"/>
               </a:ext>
             </a:extLst>
           </p:cNvPr>
@@ -3688,7 +3688,7 @@
           <p:cNvPr id="6148" name="灯片编号占位符 3">
             <a:extLst>
               <a:ext uri="{FF2B5EF4-FFF2-40B4-BE49-F238E27FC236}">
-                <a16:creationId xmlns="" xmlns:a16="http://schemas.microsoft.com/office/drawing/2014/main" id="{D230392C-ED50-49C3-93A6-10868BF6DADE}"/>
+                <a16:creationId xmlns:a16="http://schemas.microsoft.com/office/drawing/2014/main" xmlns="" id="{D230392C-ED50-49C3-93A6-10868BF6DADE}"/>
               </a:ext>
             </a:extLst>
           </p:cNvPr>
@@ -3938,7 +3938,7 @@
           <p:cNvPr id="6146" name="幻灯片图像占位符 1">
             <a:extLst>
               <a:ext uri="{FF2B5EF4-FFF2-40B4-BE49-F238E27FC236}">
-                <a16:creationId xmlns="" xmlns:a16="http://schemas.microsoft.com/office/drawing/2014/main" id="{4908B133-C54F-400F-8F70-355C57C0BE11}"/>
+                <a16:creationId xmlns:a16="http://schemas.microsoft.com/office/drawing/2014/main" xmlns="" id="{4908B133-C54F-400F-8F70-355C57C0BE11}"/>
               </a:ext>
             </a:extLst>
           </p:cNvPr>
@@ -3975,7 +3975,7 @@
           <p:cNvPr id="6147" name="备注占位符 2">
             <a:extLst>
               <a:ext uri="{FF2B5EF4-FFF2-40B4-BE49-F238E27FC236}">
-                <a16:creationId xmlns="" xmlns:a16="http://schemas.microsoft.com/office/drawing/2014/main" id="{7D16C196-D24B-4BE0-AE74-D44907B2A1B1}"/>
+                <a16:creationId xmlns:a16="http://schemas.microsoft.com/office/drawing/2014/main" xmlns="" id="{7D16C196-D24B-4BE0-AE74-D44907B2A1B1}"/>
               </a:ext>
             </a:extLst>
           </p:cNvPr>
@@ -4030,7 +4030,7 @@
           <p:cNvPr id="6148" name="灯片编号占位符 3">
             <a:extLst>
               <a:ext uri="{FF2B5EF4-FFF2-40B4-BE49-F238E27FC236}">
-                <a16:creationId xmlns="" xmlns:a16="http://schemas.microsoft.com/office/drawing/2014/main" id="{D230392C-ED50-49C3-93A6-10868BF6DADE}"/>
+                <a16:creationId xmlns:a16="http://schemas.microsoft.com/office/drawing/2014/main" xmlns="" id="{D230392C-ED50-49C3-93A6-10868BF6DADE}"/>
               </a:ext>
             </a:extLst>
           </p:cNvPr>
@@ -4280,7 +4280,7 @@
           <p:cNvPr id="6146" name="幻灯片图像占位符 1">
             <a:extLst>
               <a:ext uri="{FF2B5EF4-FFF2-40B4-BE49-F238E27FC236}">
-                <a16:creationId xmlns="" xmlns:a16="http://schemas.microsoft.com/office/drawing/2014/main" id="{4908B133-C54F-400F-8F70-355C57C0BE11}"/>
+                <a16:creationId xmlns:a16="http://schemas.microsoft.com/office/drawing/2014/main" xmlns="" id="{4908B133-C54F-400F-8F70-355C57C0BE11}"/>
               </a:ext>
             </a:extLst>
           </p:cNvPr>
@@ -4317,7 +4317,7 @@
           <p:cNvPr id="6147" name="备注占位符 2">
             <a:extLst>
               <a:ext uri="{FF2B5EF4-FFF2-40B4-BE49-F238E27FC236}">
-                <a16:creationId xmlns="" xmlns:a16="http://schemas.microsoft.com/office/drawing/2014/main" id="{7D16C196-D24B-4BE0-AE74-D44907B2A1B1}"/>
+                <a16:creationId xmlns:a16="http://schemas.microsoft.com/office/drawing/2014/main" xmlns="" id="{7D16C196-D24B-4BE0-AE74-D44907B2A1B1}"/>
               </a:ext>
             </a:extLst>
           </p:cNvPr>
@@ -4372,7 +4372,7 @@
           <p:cNvPr id="6148" name="灯片编号占位符 3">
             <a:extLst>
               <a:ext uri="{FF2B5EF4-FFF2-40B4-BE49-F238E27FC236}">
-                <a16:creationId xmlns="" xmlns:a16="http://schemas.microsoft.com/office/drawing/2014/main" id="{D230392C-ED50-49C3-93A6-10868BF6DADE}"/>
+                <a16:creationId xmlns:a16="http://schemas.microsoft.com/office/drawing/2014/main" xmlns="" id="{D230392C-ED50-49C3-93A6-10868BF6DADE}"/>
               </a:ext>
             </a:extLst>
           </p:cNvPr>
@@ -4622,7 +4622,7 @@
           <p:cNvPr id="6146" name="幻灯片图像占位符 1">
             <a:extLst>
               <a:ext uri="{FF2B5EF4-FFF2-40B4-BE49-F238E27FC236}">
-                <a16:creationId xmlns="" xmlns:a16="http://schemas.microsoft.com/office/drawing/2014/main" id="{4908B133-C54F-400F-8F70-355C57C0BE11}"/>
+                <a16:creationId xmlns:a16="http://schemas.microsoft.com/office/drawing/2014/main" xmlns="" id="{4908B133-C54F-400F-8F70-355C57C0BE11}"/>
               </a:ext>
             </a:extLst>
           </p:cNvPr>
@@ -4659,7 +4659,7 @@
           <p:cNvPr id="6147" name="备注占位符 2">
             <a:extLst>
               <a:ext uri="{FF2B5EF4-FFF2-40B4-BE49-F238E27FC236}">
-                <a16:creationId xmlns="" xmlns:a16="http://schemas.microsoft.com/office/drawing/2014/main" id="{7D16C196-D24B-4BE0-AE74-D44907B2A1B1}"/>
+                <a16:creationId xmlns:a16="http://schemas.microsoft.com/office/drawing/2014/main" xmlns="" id="{7D16C196-D24B-4BE0-AE74-D44907B2A1B1}"/>
               </a:ext>
             </a:extLst>
           </p:cNvPr>
@@ -4714,7 +4714,7 @@
           <p:cNvPr id="6148" name="灯片编号占位符 3">
             <a:extLst>
               <a:ext uri="{FF2B5EF4-FFF2-40B4-BE49-F238E27FC236}">
-                <a16:creationId xmlns="" xmlns:a16="http://schemas.microsoft.com/office/drawing/2014/main" id="{D230392C-ED50-49C3-93A6-10868BF6DADE}"/>
+                <a16:creationId xmlns:a16="http://schemas.microsoft.com/office/drawing/2014/main" xmlns="" id="{D230392C-ED50-49C3-93A6-10868BF6DADE}"/>
               </a:ext>
             </a:extLst>
           </p:cNvPr>
@@ -4964,7 +4964,7 @@
           <p:cNvPr id="6146" name="幻灯片图像占位符 1">
             <a:extLst>
               <a:ext uri="{FF2B5EF4-FFF2-40B4-BE49-F238E27FC236}">
-                <a16:creationId xmlns="" xmlns:a16="http://schemas.microsoft.com/office/drawing/2014/main" id="{4908B133-C54F-400F-8F70-355C57C0BE11}"/>
+                <a16:creationId xmlns:a16="http://schemas.microsoft.com/office/drawing/2014/main" xmlns="" id="{4908B133-C54F-400F-8F70-355C57C0BE11}"/>
               </a:ext>
             </a:extLst>
           </p:cNvPr>
@@ -5001,7 +5001,7 @@
           <p:cNvPr id="6147" name="备注占位符 2">
             <a:extLst>
               <a:ext uri="{FF2B5EF4-FFF2-40B4-BE49-F238E27FC236}">
-                <a16:creationId xmlns="" xmlns:a16="http://schemas.microsoft.com/office/drawing/2014/main" id="{7D16C196-D24B-4BE0-AE74-D44907B2A1B1}"/>
+                <a16:creationId xmlns:a16="http://schemas.microsoft.com/office/drawing/2014/main" xmlns="" id="{7D16C196-D24B-4BE0-AE74-D44907B2A1B1}"/>
               </a:ext>
             </a:extLst>
           </p:cNvPr>
@@ -5056,7 +5056,7 @@
           <p:cNvPr id="6148" name="灯片编号占位符 3">
             <a:extLst>
               <a:ext uri="{FF2B5EF4-FFF2-40B4-BE49-F238E27FC236}">
-                <a16:creationId xmlns="" xmlns:a16="http://schemas.microsoft.com/office/drawing/2014/main" id="{D230392C-ED50-49C3-93A6-10868BF6DADE}"/>
+                <a16:creationId xmlns:a16="http://schemas.microsoft.com/office/drawing/2014/main" xmlns="" id="{D230392C-ED50-49C3-93A6-10868BF6DADE}"/>
               </a:ext>
             </a:extLst>
           </p:cNvPr>
@@ -5306,7 +5306,7 @@
           <p:cNvPr id="6146" name="幻灯片图像占位符 1">
             <a:extLst>
               <a:ext uri="{FF2B5EF4-FFF2-40B4-BE49-F238E27FC236}">
-                <a16:creationId xmlns="" xmlns:a16="http://schemas.microsoft.com/office/drawing/2014/main" id="{4908B133-C54F-400F-8F70-355C57C0BE11}"/>
+                <a16:creationId xmlns:a16="http://schemas.microsoft.com/office/drawing/2014/main" xmlns="" id="{4908B133-C54F-400F-8F70-355C57C0BE11}"/>
               </a:ext>
             </a:extLst>
           </p:cNvPr>
@@ -5343,7 +5343,7 @@
           <p:cNvPr id="6147" name="备注占位符 2">
             <a:extLst>
               <a:ext uri="{FF2B5EF4-FFF2-40B4-BE49-F238E27FC236}">
-                <a16:creationId xmlns="" xmlns:a16="http://schemas.microsoft.com/office/drawing/2014/main" id="{7D16C196-D24B-4BE0-AE74-D44907B2A1B1}"/>
+                <a16:creationId xmlns:a16="http://schemas.microsoft.com/office/drawing/2014/main" xmlns="" id="{7D16C196-D24B-4BE0-AE74-D44907B2A1B1}"/>
               </a:ext>
             </a:extLst>
           </p:cNvPr>
@@ -5398,7 +5398,7 @@
           <p:cNvPr id="6148" name="灯片编号占位符 3">
             <a:extLst>
               <a:ext uri="{FF2B5EF4-FFF2-40B4-BE49-F238E27FC236}">
-                <a16:creationId xmlns="" xmlns:a16="http://schemas.microsoft.com/office/drawing/2014/main" id="{D230392C-ED50-49C3-93A6-10868BF6DADE}"/>
+                <a16:creationId xmlns:a16="http://schemas.microsoft.com/office/drawing/2014/main" xmlns="" id="{D230392C-ED50-49C3-93A6-10868BF6DADE}"/>
               </a:ext>
             </a:extLst>
           </p:cNvPr>
@@ -5648,7 +5648,7 @@
           <p:cNvPr id="6146" name="幻灯片图像占位符 1">
             <a:extLst>
               <a:ext uri="{FF2B5EF4-FFF2-40B4-BE49-F238E27FC236}">
-                <a16:creationId xmlns="" xmlns:a16="http://schemas.microsoft.com/office/drawing/2014/main" id="{4908B133-C54F-400F-8F70-355C57C0BE11}"/>
+                <a16:creationId xmlns:a16="http://schemas.microsoft.com/office/drawing/2014/main" xmlns="" id="{4908B133-C54F-400F-8F70-355C57C0BE11}"/>
               </a:ext>
             </a:extLst>
           </p:cNvPr>
@@ -5685,7 +5685,7 @@
           <p:cNvPr id="6147" name="备注占位符 2">
             <a:extLst>
               <a:ext uri="{FF2B5EF4-FFF2-40B4-BE49-F238E27FC236}">
-                <a16:creationId xmlns="" xmlns:a16="http://schemas.microsoft.com/office/drawing/2014/main" id="{7D16C196-D24B-4BE0-AE74-D44907B2A1B1}"/>
+                <a16:creationId xmlns:a16="http://schemas.microsoft.com/office/drawing/2014/main" xmlns="" id="{7D16C196-D24B-4BE0-AE74-D44907B2A1B1}"/>
               </a:ext>
             </a:extLst>
           </p:cNvPr>
@@ -5740,7 +5740,7 @@
           <p:cNvPr id="6148" name="灯片编号占位符 3">
             <a:extLst>
               <a:ext uri="{FF2B5EF4-FFF2-40B4-BE49-F238E27FC236}">
-                <a16:creationId xmlns="" xmlns:a16="http://schemas.microsoft.com/office/drawing/2014/main" id="{D230392C-ED50-49C3-93A6-10868BF6DADE}"/>
+                <a16:creationId xmlns:a16="http://schemas.microsoft.com/office/drawing/2014/main" xmlns="" id="{D230392C-ED50-49C3-93A6-10868BF6DADE}"/>
               </a:ext>
             </a:extLst>
           </p:cNvPr>
@@ -5990,7 +5990,7 @@
           <p:cNvPr id="6146" name="幻灯片图像占位符 1">
             <a:extLst>
               <a:ext uri="{FF2B5EF4-FFF2-40B4-BE49-F238E27FC236}">
-                <a16:creationId xmlns="" xmlns:a16="http://schemas.microsoft.com/office/drawing/2014/main" id="{4908B133-C54F-400F-8F70-355C57C0BE11}"/>
+                <a16:creationId xmlns:a16="http://schemas.microsoft.com/office/drawing/2014/main" xmlns="" id="{4908B133-C54F-400F-8F70-355C57C0BE11}"/>
               </a:ext>
             </a:extLst>
           </p:cNvPr>
@@ -6027,7 +6027,7 @@
           <p:cNvPr id="6147" name="备注占位符 2">
             <a:extLst>
               <a:ext uri="{FF2B5EF4-FFF2-40B4-BE49-F238E27FC236}">
-                <a16:creationId xmlns="" xmlns:a16="http://schemas.microsoft.com/office/drawing/2014/main" id="{7D16C196-D24B-4BE0-AE74-D44907B2A1B1}"/>
+                <a16:creationId xmlns:a16="http://schemas.microsoft.com/office/drawing/2014/main" xmlns="" id="{7D16C196-D24B-4BE0-AE74-D44907B2A1B1}"/>
               </a:ext>
             </a:extLst>
           </p:cNvPr>
@@ -6082,7 +6082,7 @@
           <p:cNvPr id="6148" name="灯片编号占位符 3">
             <a:extLst>
               <a:ext uri="{FF2B5EF4-FFF2-40B4-BE49-F238E27FC236}">
-                <a16:creationId xmlns="" xmlns:a16="http://schemas.microsoft.com/office/drawing/2014/main" id="{D230392C-ED50-49C3-93A6-10868BF6DADE}"/>
+                <a16:creationId xmlns:a16="http://schemas.microsoft.com/office/drawing/2014/main" xmlns="" id="{D230392C-ED50-49C3-93A6-10868BF6DADE}"/>
               </a:ext>
             </a:extLst>
           </p:cNvPr>
@@ -6332,7 +6332,7 @@
           <p:cNvPr id="6146" name="幻灯片图像占位符 1">
             <a:extLst>
               <a:ext uri="{FF2B5EF4-FFF2-40B4-BE49-F238E27FC236}">
-                <a16:creationId xmlns="" xmlns:a16="http://schemas.microsoft.com/office/drawing/2014/main" id="{4908B133-C54F-400F-8F70-355C57C0BE11}"/>
+                <a16:creationId xmlns:a16="http://schemas.microsoft.com/office/drawing/2014/main" xmlns="" id="{4908B133-C54F-400F-8F70-355C57C0BE11}"/>
               </a:ext>
             </a:extLst>
           </p:cNvPr>
@@ -6369,7 +6369,7 @@
           <p:cNvPr id="6147" name="备注占位符 2">
             <a:extLst>
               <a:ext uri="{FF2B5EF4-FFF2-40B4-BE49-F238E27FC236}">
-                <a16:creationId xmlns="" xmlns:a16="http://schemas.microsoft.com/office/drawing/2014/main" id="{7D16C196-D24B-4BE0-AE74-D44907B2A1B1}"/>
+                <a16:creationId xmlns:a16="http://schemas.microsoft.com/office/drawing/2014/main" xmlns="" id="{7D16C196-D24B-4BE0-AE74-D44907B2A1B1}"/>
               </a:ext>
             </a:extLst>
           </p:cNvPr>
@@ -6424,7 +6424,7 @@
           <p:cNvPr id="6148" name="灯片编号占位符 3">
             <a:extLst>
               <a:ext uri="{FF2B5EF4-FFF2-40B4-BE49-F238E27FC236}">
-                <a16:creationId xmlns="" xmlns:a16="http://schemas.microsoft.com/office/drawing/2014/main" id="{D230392C-ED50-49C3-93A6-10868BF6DADE}"/>
+                <a16:creationId xmlns:a16="http://schemas.microsoft.com/office/drawing/2014/main" xmlns="" id="{D230392C-ED50-49C3-93A6-10868BF6DADE}"/>
               </a:ext>
             </a:extLst>
           </p:cNvPr>
@@ -6674,7 +6674,7 @@
           <p:cNvPr id="6146" name="幻灯片图像占位符 1">
             <a:extLst>
               <a:ext uri="{FF2B5EF4-FFF2-40B4-BE49-F238E27FC236}">
-                <a16:creationId xmlns="" xmlns:a16="http://schemas.microsoft.com/office/drawing/2014/main" id="{4908B133-C54F-400F-8F70-355C57C0BE11}"/>
+                <a16:creationId xmlns:a16="http://schemas.microsoft.com/office/drawing/2014/main" xmlns="" id="{4908B133-C54F-400F-8F70-355C57C0BE11}"/>
               </a:ext>
             </a:extLst>
           </p:cNvPr>
@@ -6711,7 +6711,7 @@
           <p:cNvPr id="6147" name="备注占位符 2">
             <a:extLst>
               <a:ext uri="{FF2B5EF4-FFF2-40B4-BE49-F238E27FC236}">
-                <a16:creationId xmlns="" xmlns:a16="http://schemas.microsoft.com/office/drawing/2014/main" id="{7D16C196-D24B-4BE0-AE74-D44907B2A1B1}"/>
+                <a16:creationId xmlns:a16="http://schemas.microsoft.com/office/drawing/2014/main" xmlns="" id="{7D16C196-D24B-4BE0-AE74-D44907B2A1B1}"/>
               </a:ext>
             </a:extLst>
           </p:cNvPr>
@@ -6766,7 +6766,7 @@
           <p:cNvPr id="6148" name="灯片编号占位符 3">
             <a:extLst>
               <a:ext uri="{FF2B5EF4-FFF2-40B4-BE49-F238E27FC236}">
-                <a16:creationId xmlns="" xmlns:a16="http://schemas.microsoft.com/office/drawing/2014/main" id="{D230392C-ED50-49C3-93A6-10868BF6DADE}"/>
+                <a16:creationId xmlns:a16="http://schemas.microsoft.com/office/drawing/2014/main" xmlns="" id="{D230392C-ED50-49C3-93A6-10868BF6DADE}"/>
               </a:ext>
             </a:extLst>
           </p:cNvPr>
@@ -7016,7 +7016,7 @@
           <p:cNvPr id="6146" name="幻灯片图像占位符 1">
             <a:extLst>
               <a:ext uri="{FF2B5EF4-FFF2-40B4-BE49-F238E27FC236}">
-                <a16:creationId xmlns="" xmlns:a16="http://schemas.microsoft.com/office/drawing/2014/main" id="{4908B133-C54F-400F-8F70-355C57C0BE11}"/>
+                <a16:creationId xmlns:a16="http://schemas.microsoft.com/office/drawing/2014/main" xmlns="" id="{4908B133-C54F-400F-8F70-355C57C0BE11}"/>
               </a:ext>
             </a:extLst>
           </p:cNvPr>
@@ -7053,7 +7053,7 @@
           <p:cNvPr id="6147" name="备注占位符 2">
             <a:extLst>
               <a:ext uri="{FF2B5EF4-FFF2-40B4-BE49-F238E27FC236}">
-                <a16:creationId xmlns="" xmlns:a16="http://schemas.microsoft.com/office/drawing/2014/main" id="{7D16C196-D24B-4BE0-AE74-D44907B2A1B1}"/>
+                <a16:creationId xmlns:a16="http://schemas.microsoft.com/office/drawing/2014/main" xmlns="" id="{7D16C196-D24B-4BE0-AE74-D44907B2A1B1}"/>
               </a:ext>
             </a:extLst>
           </p:cNvPr>
@@ -7108,7 +7108,7 @@
           <p:cNvPr id="6148" name="灯片编号占位符 3">
             <a:extLst>
               <a:ext uri="{FF2B5EF4-FFF2-40B4-BE49-F238E27FC236}">
-                <a16:creationId xmlns="" xmlns:a16="http://schemas.microsoft.com/office/drawing/2014/main" id="{D230392C-ED50-49C3-93A6-10868BF6DADE}"/>
+                <a16:creationId xmlns:a16="http://schemas.microsoft.com/office/drawing/2014/main" xmlns="" id="{D230392C-ED50-49C3-93A6-10868BF6DADE}"/>
               </a:ext>
             </a:extLst>
           </p:cNvPr>
@@ -7358,7 +7358,7 @@
           <p:cNvPr id="6146" name="幻灯片图像占位符 1">
             <a:extLst>
               <a:ext uri="{FF2B5EF4-FFF2-40B4-BE49-F238E27FC236}">
-                <a16:creationId xmlns="" xmlns:a16="http://schemas.microsoft.com/office/drawing/2014/main" id="{4908B133-C54F-400F-8F70-355C57C0BE11}"/>
+                <a16:creationId xmlns:a16="http://schemas.microsoft.com/office/drawing/2014/main" xmlns="" id="{4908B133-C54F-400F-8F70-355C57C0BE11}"/>
               </a:ext>
             </a:extLst>
           </p:cNvPr>
@@ -7395,7 +7395,7 @@
           <p:cNvPr id="6147" name="备注占位符 2">
             <a:extLst>
               <a:ext uri="{FF2B5EF4-FFF2-40B4-BE49-F238E27FC236}">
-                <a16:creationId xmlns="" xmlns:a16="http://schemas.microsoft.com/office/drawing/2014/main" id="{7D16C196-D24B-4BE0-AE74-D44907B2A1B1}"/>
+                <a16:creationId xmlns:a16="http://schemas.microsoft.com/office/drawing/2014/main" xmlns="" id="{7D16C196-D24B-4BE0-AE74-D44907B2A1B1}"/>
               </a:ext>
             </a:extLst>
           </p:cNvPr>
@@ -7450,7 +7450,7 @@
           <p:cNvPr id="6148" name="灯片编号占位符 3">
             <a:extLst>
               <a:ext uri="{FF2B5EF4-FFF2-40B4-BE49-F238E27FC236}">
-                <a16:creationId xmlns="" xmlns:a16="http://schemas.microsoft.com/office/drawing/2014/main" id="{D230392C-ED50-49C3-93A6-10868BF6DADE}"/>
+                <a16:creationId xmlns:a16="http://schemas.microsoft.com/office/drawing/2014/main" xmlns="" id="{D230392C-ED50-49C3-93A6-10868BF6DADE}"/>
               </a:ext>
             </a:extLst>
           </p:cNvPr>
@@ -7700,7 +7700,7 @@
           <p:cNvPr id="6146" name="幻灯片图像占位符 1">
             <a:extLst>
               <a:ext uri="{FF2B5EF4-FFF2-40B4-BE49-F238E27FC236}">
-                <a16:creationId xmlns="" xmlns:a16="http://schemas.microsoft.com/office/drawing/2014/main" id="{4908B133-C54F-400F-8F70-355C57C0BE11}"/>
+                <a16:creationId xmlns:a16="http://schemas.microsoft.com/office/drawing/2014/main" xmlns="" id="{4908B133-C54F-400F-8F70-355C57C0BE11}"/>
               </a:ext>
             </a:extLst>
           </p:cNvPr>
@@ -7737,7 +7737,7 @@
           <p:cNvPr id="6147" name="备注占位符 2">
             <a:extLst>
               <a:ext uri="{FF2B5EF4-FFF2-40B4-BE49-F238E27FC236}">
-                <a16:creationId xmlns="" xmlns:a16="http://schemas.microsoft.com/office/drawing/2014/main" id="{7D16C196-D24B-4BE0-AE74-D44907B2A1B1}"/>
+                <a16:creationId xmlns:a16="http://schemas.microsoft.com/office/drawing/2014/main" xmlns="" id="{7D16C196-D24B-4BE0-AE74-D44907B2A1B1}"/>
               </a:ext>
             </a:extLst>
           </p:cNvPr>
@@ -7792,7 +7792,7 @@
           <p:cNvPr id="6148" name="灯片编号占位符 3">
             <a:extLst>
               <a:ext uri="{FF2B5EF4-FFF2-40B4-BE49-F238E27FC236}">
-                <a16:creationId xmlns="" xmlns:a16="http://schemas.microsoft.com/office/drawing/2014/main" id="{D230392C-ED50-49C3-93A6-10868BF6DADE}"/>
+                <a16:creationId xmlns:a16="http://schemas.microsoft.com/office/drawing/2014/main" xmlns="" id="{D230392C-ED50-49C3-93A6-10868BF6DADE}"/>
               </a:ext>
             </a:extLst>
           </p:cNvPr>
@@ -8042,7 +8042,7 @@
           <p:cNvPr id="6146" name="幻灯片图像占位符 1">
             <a:extLst>
               <a:ext uri="{FF2B5EF4-FFF2-40B4-BE49-F238E27FC236}">
-                <a16:creationId xmlns="" xmlns:a16="http://schemas.microsoft.com/office/drawing/2014/main" id="{4908B133-C54F-400F-8F70-355C57C0BE11}"/>
+                <a16:creationId xmlns:a16="http://schemas.microsoft.com/office/drawing/2014/main" xmlns="" id="{4908B133-C54F-400F-8F70-355C57C0BE11}"/>
               </a:ext>
             </a:extLst>
           </p:cNvPr>
@@ -8079,7 +8079,7 @@
           <p:cNvPr id="6147" name="备注占位符 2">
             <a:extLst>
               <a:ext uri="{FF2B5EF4-FFF2-40B4-BE49-F238E27FC236}">
-                <a16:creationId xmlns="" xmlns:a16="http://schemas.microsoft.com/office/drawing/2014/main" id="{7D16C196-D24B-4BE0-AE74-D44907B2A1B1}"/>
+                <a16:creationId xmlns:a16="http://schemas.microsoft.com/office/drawing/2014/main" xmlns="" id="{7D16C196-D24B-4BE0-AE74-D44907B2A1B1}"/>
               </a:ext>
             </a:extLst>
           </p:cNvPr>
@@ -8134,7 +8134,7 @@
           <p:cNvPr id="6148" name="灯片编号占位符 3">
             <a:extLst>
               <a:ext uri="{FF2B5EF4-FFF2-40B4-BE49-F238E27FC236}">
-                <a16:creationId xmlns="" xmlns:a16="http://schemas.microsoft.com/office/drawing/2014/main" id="{D230392C-ED50-49C3-93A6-10868BF6DADE}"/>
+                <a16:creationId xmlns:a16="http://schemas.microsoft.com/office/drawing/2014/main" xmlns="" id="{D230392C-ED50-49C3-93A6-10868BF6DADE}"/>
               </a:ext>
             </a:extLst>
           </p:cNvPr>
@@ -8384,7 +8384,7 @@
           <p:cNvPr id="6146" name="幻灯片图像占位符 1">
             <a:extLst>
               <a:ext uri="{FF2B5EF4-FFF2-40B4-BE49-F238E27FC236}">
-                <a16:creationId xmlns="" xmlns:a16="http://schemas.microsoft.com/office/drawing/2014/main" id="{4908B133-C54F-400F-8F70-355C57C0BE11}"/>
+                <a16:creationId xmlns:a16="http://schemas.microsoft.com/office/drawing/2014/main" xmlns="" id="{4908B133-C54F-400F-8F70-355C57C0BE11}"/>
               </a:ext>
             </a:extLst>
           </p:cNvPr>
@@ -8421,7 +8421,7 @@
           <p:cNvPr id="6147" name="备注占位符 2">
             <a:extLst>
               <a:ext uri="{FF2B5EF4-FFF2-40B4-BE49-F238E27FC236}">
-                <a16:creationId xmlns="" xmlns:a16="http://schemas.microsoft.com/office/drawing/2014/main" id="{7D16C196-D24B-4BE0-AE74-D44907B2A1B1}"/>
+                <a16:creationId xmlns:a16="http://schemas.microsoft.com/office/drawing/2014/main" xmlns="" id="{7D16C196-D24B-4BE0-AE74-D44907B2A1B1}"/>
               </a:ext>
             </a:extLst>
           </p:cNvPr>
@@ -8476,7 +8476,7 @@
           <p:cNvPr id="6148" name="灯片编号占位符 3">
             <a:extLst>
               <a:ext uri="{FF2B5EF4-FFF2-40B4-BE49-F238E27FC236}">
-                <a16:creationId xmlns="" xmlns:a16="http://schemas.microsoft.com/office/drawing/2014/main" id="{D230392C-ED50-49C3-93A6-10868BF6DADE}"/>
+                <a16:creationId xmlns:a16="http://schemas.microsoft.com/office/drawing/2014/main" xmlns="" id="{D230392C-ED50-49C3-93A6-10868BF6DADE}"/>
               </a:ext>
             </a:extLst>
           </p:cNvPr>
@@ -8726,7 +8726,7 @@
           <p:cNvPr id="6146" name="幻灯片图像占位符 1">
             <a:extLst>
               <a:ext uri="{FF2B5EF4-FFF2-40B4-BE49-F238E27FC236}">
-                <a16:creationId xmlns="" xmlns:a16="http://schemas.microsoft.com/office/drawing/2014/main" id="{4908B133-C54F-400F-8F70-355C57C0BE11}"/>
+                <a16:creationId xmlns:a16="http://schemas.microsoft.com/office/drawing/2014/main" xmlns="" id="{4908B133-C54F-400F-8F70-355C57C0BE11}"/>
               </a:ext>
             </a:extLst>
           </p:cNvPr>
@@ -8763,7 +8763,7 @@
           <p:cNvPr id="6147" name="备注占位符 2">
             <a:extLst>
               <a:ext uri="{FF2B5EF4-FFF2-40B4-BE49-F238E27FC236}">
-                <a16:creationId xmlns="" xmlns:a16="http://schemas.microsoft.com/office/drawing/2014/main" id="{7D16C196-D24B-4BE0-AE74-D44907B2A1B1}"/>
+                <a16:creationId xmlns:a16="http://schemas.microsoft.com/office/drawing/2014/main" xmlns="" id="{7D16C196-D24B-4BE0-AE74-D44907B2A1B1}"/>
               </a:ext>
             </a:extLst>
           </p:cNvPr>
@@ -8818,7 +8818,7 @@
           <p:cNvPr id="6148" name="灯片编号占位符 3">
             <a:extLst>
               <a:ext uri="{FF2B5EF4-FFF2-40B4-BE49-F238E27FC236}">
-                <a16:creationId xmlns="" xmlns:a16="http://schemas.microsoft.com/office/drawing/2014/main" id="{D230392C-ED50-49C3-93A6-10868BF6DADE}"/>
+                <a16:creationId xmlns:a16="http://schemas.microsoft.com/office/drawing/2014/main" xmlns="" id="{D230392C-ED50-49C3-93A6-10868BF6DADE}"/>
               </a:ext>
             </a:extLst>
           </p:cNvPr>
@@ -9068,7 +9068,7 @@
           <p:cNvPr id="6146" name="幻灯片图像占位符 1">
             <a:extLst>
               <a:ext uri="{FF2B5EF4-FFF2-40B4-BE49-F238E27FC236}">
-                <a16:creationId xmlns="" xmlns:a16="http://schemas.microsoft.com/office/drawing/2014/main" id="{4908B133-C54F-400F-8F70-355C57C0BE11}"/>
+                <a16:creationId xmlns:a16="http://schemas.microsoft.com/office/drawing/2014/main" xmlns="" id="{4908B133-C54F-400F-8F70-355C57C0BE11}"/>
               </a:ext>
             </a:extLst>
           </p:cNvPr>
@@ -9105,7 +9105,7 @@
           <p:cNvPr id="6147" name="备注占位符 2">
             <a:extLst>
               <a:ext uri="{FF2B5EF4-FFF2-40B4-BE49-F238E27FC236}">
-                <a16:creationId xmlns="" xmlns:a16="http://schemas.microsoft.com/office/drawing/2014/main" id="{7D16C196-D24B-4BE0-AE74-D44907B2A1B1}"/>
+                <a16:creationId xmlns:a16="http://schemas.microsoft.com/office/drawing/2014/main" xmlns="" id="{7D16C196-D24B-4BE0-AE74-D44907B2A1B1}"/>
               </a:ext>
             </a:extLst>
           </p:cNvPr>
@@ -9160,7 +9160,7 @@
           <p:cNvPr id="6148" name="灯片编号占位符 3">
             <a:extLst>
               <a:ext uri="{FF2B5EF4-FFF2-40B4-BE49-F238E27FC236}">
-                <a16:creationId xmlns="" xmlns:a16="http://schemas.microsoft.com/office/drawing/2014/main" id="{D230392C-ED50-49C3-93A6-10868BF6DADE}"/>
+                <a16:creationId xmlns:a16="http://schemas.microsoft.com/office/drawing/2014/main" xmlns="" id="{D230392C-ED50-49C3-93A6-10868BF6DADE}"/>
               </a:ext>
             </a:extLst>
           </p:cNvPr>
@@ -9410,7 +9410,7 @@
           <p:cNvPr id="6146" name="幻灯片图像占位符 1">
             <a:extLst>
               <a:ext uri="{FF2B5EF4-FFF2-40B4-BE49-F238E27FC236}">
-                <a16:creationId xmlns="" xmlns:a16="http://schemas.microsoft.com/office/drawing/2014/main" id="{4908B133-C54F-400F-8F70-355C57C0BE11}"/>
+                <a16:creationId xmlns:a16="http://schemas.microsoft.com/office/drawing/2014/main" xmlns="" id="{4908B133-C54F-400F-8F70-355C57C0BE11}"/>
               </a:ext>
             </a:extLst>
           </p:cNvPr>
@@ -9447,7 +9447,7 @@
           <p:cNvPr id="6147" name="备注占位符 2">
             <a:extLst>
               <a:ext uri="{FF2B5EF4-FFF2-40B4-BE49-F238E27FC236}">
-                <a16:creationId xmlns="" xmlns:a16="http://schemas.microsoft.com/office/drawing/2014/main" id="{7D16C196-D24B-4BE0-AE74-D44907B2A1B1}"/>
+                <a16:creationId xmlns:a16="http://schemas.microsoft.com/office/drawing/2014/main" xmlns="" id="{7D16C196-D24B-4BE0-AE74-D44907B2A1B1}"/>
               </a:ext>
             </a:extLst>
           </p:cNvPr>
@@ -9502,7 +9502,7 @@
           <p:cNvPr id="6148" name="灯片编号占位符 3">
             <a:extLst>
               <a:ext uri="{FF2B5EF4-FFF2-40B4-BE49-F238E27FC236}">
-                <a16:creationId xmlns="" xmlns:a16="http://schemas.microsoft.com/office/drawing/2014/main" id="{D230392C-ED50-49C3-93A6-10868BF6DADE}"/>
+                <a16:creationId xmlns:a16="http://schemas.microsoft.com/office/drawing/2014/main" xmlns="" id="{D230392C-ED50-49C3-93A6-10868BF6DADE}"/>
               </a:ext>
             </a:extLst>
           </p:cNvPr>
@@ -9752,7 +9752,7 @@
           <p:cNvPr id="6146" name="幻灯片图像占位符 1">
             <a:extLst>
               <a:ext uri="{FF2B5EF4-FFF2-40B4-BE49-F238E27FC236}">
-                <a16:creationId xmlns="" xmlns:a16="http://schemas.microsoft.com/office/drawing/2014/main" id="{4908B133-C54F-400F-8F70-355C57C0BE11}"/>
+                <a16:creationId xmlns:a16="http://schemas.microsoft.com/office/drawing/2014/main" xmlns="" id="{4908B133-C54F-400F-8F70-355C57C0BE11}"/>
               </a:ext>
             </a:extLst>
           </p:cNvPr>
@@ -9789,7 +9789,7 @@
           <p:cNvPr id="6147" name="备注占位符 2">
             <a:extLst>
               <a:ext uri="{FF2B5EF4-FFF2-40B4-BE49-F238E27FC236}">
-                <a16:creationId xmlns="" xmlns:a16="http://schemas.microsoft.com/office/drawing/2014/main" id="{7D16C196-D24B-4BE0-AE74-D44907B2A1B1}"/>
+                <a16:creationId xmlns:a16="http://schemas.microsoft.com/office/drawing/2014/main" xmlns="" id="{7D16C196-D24B-4BE0-AE74-D44907B2A1B1}"/>
               </a:ext>
             </a:extLst>
           </p:cNvPr>
@@ -9844,7 +9844,7 @@
           <p:cNvPr id="6148" name="灯片编号占位符 3">
             <a:extLst>
               <a:ext uri="{FF2B5EF4-FFF2-40B4-BE49-F238E27FC236}">
-                <a16:creationId xmlns="" xmlns:a16="http://schemas.microsoft.com/office/drawing/2014/main" id="{D230392C-ED50-49C3-93A6-10868BF6DADE}"/>
+                <a16:creationId xmlns:a16="http://schemas.microsoft.com/office/drawing/2014/main" xmlns="" id="{D230392C-ED50-49C3-93A6-10868BF6DADE}"/>
               </a:ext>
             </a:extLst>
           </p:cNvPr>
@@ -10094,7 +10094,7 @@
           <p:cNvPr id="6146" name="幻灯片图像占位符 1">
             <a:extLst>
               <a:ext uri="{FF2B5EF4-FFF2-40B4-BE49-F238E27FC236}">
-                <a16:creationId xmlns="" xmlns:a16="http://schemas.microsoft.com/office/drawing/2014/main" id="{4908B133-C54F-400F-8F70-355C57C0BE11}"/>
+                <a16:creationId xmlns:a16="http://schemas.microsoft.com/office/drawing/2014/main" xmlns="" id="{4908B133-C54F-400F-8F70-355C57C0BE11}"/>
               </a:ext>
             </a:extLst>
           </p:cNvPr>
@@ -10131,7 +10131,7 @@
           <p:cNvPr id="6147" name="备注占位符 2">
             <a:extLst>
               <a:ext uri="{FF2B5EF4-FFF2-40B4-BE49-F238E27FC236}">
-                <a16:creationId xmlns="" xmlns:a16="http://schemas.microsoft.com/office/drawing/2014/main" id="{7D16C196-D24B-4BE0-AE74-D44907B2A1B1}"/>
+                <a16:creationId xmlns:a16="http://schemas.microsoft.com/office/drawing/2014/main" xmlns="" id="{7D16C196-D24B-4BE0-AE74-D44907B2A1B1}"/>
               </a:ext>
             </a:extLst>
           </p:cNvPr>
@@ -10186,7 +10186,7 @@
           <p:cNvPr id="6148" name="灯片编号占位符 3">
             <a:extLst>
               <a:ext uri="{FF2B5EF4-FFF2-40B4-BE49-F238E27FC236}">
-                <a16:creationId xmlns="" xmlns:a16="http://schemas.microsoft.com/office/drawing/2014/main" id="{D230392C-ED50-49C3-93A6-10868BF6DADE}"/>
+                <a16:creationId xmlns:a16="http://schemas.microsoft.com/office/drawing/2014/main" xmlns="" id="{D230392C-ED50-49C3-93A6-10868BF6DADE}"/>
               </a:ext>
             </a:extLst>
           </p:cNvPr>
@@ -10436,7 +10436,7 @@
           <p:cNvPr id="6146" name="幻灯片图像占位符 1">
             <a:extLst>
               <a:ext uri="{FF2B5EF4-FFF2-40B4-BE49-F238E27FC236}">
-                <a16:creationId xmlns="" xmlns:a16="http://schemas.microsoft.com/office/drawing/2014/main" id="{4908B133-C54F-400F-8F70-355C57C0BE11}"/>
+                <a16:creationId xmlns:a16="http://schemas.microsoft.com/office/drawing/2014/main" xmlns="" id="{4908B133-C54F-400F-8F70-355C57C0BE11}"/>
               </a:ext>
             </a:extLst>
           </p:cNvPr>
@@ -10473,7 +10473,7 @@
           <p:cNvPr id="6147" name="备注占位符 2">
             <a:extLst>
               <a:ext uri="{FF2B5EF4-FFF2-40B4-BE49-F238E27FC236}">
-                <a16:creationId xmlns="" xmlns:a16="http://schemas.microsoft.com/office/drawing/2014/main" id="{7D16C196-D24B-4BE0-AE74-D44907B2A1B1}"/>
+                <a16:creationId xmlns:a16="http://schemas.microsoft.com/office/drawing/2014/main" xmlns="" id="{7D16C196-D24B-4BE0-AE74-D44907B2A1B1}"/>
               </a:ext>
             </a:extLst>
           </p:cNvPr>
@@ -10528,7 +10528,7 @@
           <p:cNvPr id="6148" name="灯片编号占位符 3">
             <a:extLst>
               <a:ext uri="{FF2B5EF4-FFF2-40B4-BE49-F238E27FC236}">
-                <a16:creationId xmlns="" xmlns:a16="http://schemas.microsoft.com/office/drawing/2014/main" id="{D230392C-ED50-49C3-93A6-10868BF6DADE}"/>
+                <a16:creationId xmlns:a16="http://schemas.microsoft.com/office/drawing/2014/main" xmlns="" id="{D230392C-ED50-49C3-93A6-10868BF6DADE}"/>
               </a:ext>
             </a:extLst>
           </p:cNvPr>
@@ -10778,7 +10778,7 @@
           <p:cNvPr id="6146" name="幻灯片图像占位符 1">
             <a:extLst>
               <a:ext uri="{FF2B5EF4-FFF2-40B4-BE49-F238E27FC236}">
-                <a16:creationId xmlns="" xmlns:a16="http://schemas.microsoft.com/office/drawing/2014/main" id="{4908B133-C54F-400F-8F70-355C57C0BE11}"/>
+                <a16:creationId xmlns:a16="http://schemas.microsoft.com/office/drawing/2014/main" xmlns="" id="{4908B133-C54F-400F-8F70-355C57C0BE11}"/>
               </a:ext>
             </a:extLst>
           </p:cNvPr>
@@ -10815,7 +10815,7 @@
           <p:cNvPr id="6147" name="备注占位符 2">
             <a:extLst>
               <a:ext uri="{FF2B5EF4-FFF2-40B4-BE49-F238E27FC236}">
-                <a16:creationId xmlns="" xmlns:a16="http://schemas.microsoft.com/office/drawing/2014/main" id="{7D16C196-D24B-4BE0-AE74-D44907B2A1B1}"/>
+                <a16:creationId xmlns:a16="http://schemas.microsoft.com/office/drawing/2014/main" xmlns="" id="{7D16C196-D24B-4BE0-AE74-D44907B2A1B1}"/>
               </a:ext>
             </a:extLst>
           </p:cNvPr>
@@ -10870,7 +10870,7 @@
           <p:cNvPr id="6148" name="灯片编号占位符 3">
             <a:extLst>
               <a:ext uri="{FF2B5EF4-FFF2-40B4-BE49-F238E27FC236}">
-                <a16:creationId xmlns="" xmlns:a16="http://schemas.microsoft.com/office/drawing/2014/main" id="{D230392C-ED50-49C3-93A6-10868BF6DADE}"/>
+                <a16:creationId xmlns:a16="http://schemas.microsoft.com/office/drawing/2014/main" xmlns="" id="{D230392C-ED50-49C3-93A6-10868BF6DADE}"/>
               </a:ext>
             </a:extLst>
           </p:cNvPr>
@@ -11120,7 +11120,7 @@
           <p:cNvPr id="6146" name="幻灯片图像占位符 1">
             <a:extLst>
               <a:ext uri="{FF2B5EF4-FFF2-40B4-BE49-F238E27FC236}">
-                <a16:creationId xmlns="" xmlns:a16="http://schemas.microsoft.com/office/drawing/2014/main" id="{4908B133-C54F-400F-8F70-355C57C0BE11}"/>
+                <a16:creationId xmlns:a16="http://schemas.microsoft.com/office/drawing/2014/main" xmlns="" id="{4908B133-C54F-400F-8F70-355C57C0BE11}"/>
               </a:ext>
             </a:extLst>
           </p:cNvPr>
@@ -11157,7 +11157,7 @@
           <p:cNvPr id="6147" name="备注占位符 2">
             <a:extLst>
               <a:ext uri="{FF2B5EF4-FFF2-40B4-BE49-F238E27FC236}">
-                <a16:creationId xmlns="" xmlns:a16="http://schemas.microsoft.com/office/drawing/2014/main" id="{7D16C196-D24B-4BE0-AE74-D44907B2A1B1}"/>
+                <a16:creationId xmlns:a16="http://schemas.microsoft.com/office/drawing/2014/main" xmlns="" id="{7D16C196-D24B-4BE0-AE74-D44907B2A1B1}"/>
               </a:ext>
             </a:extLst>
           </p:cNvPr>
@@ -11212,7 +11212,7 @@
           <p:cNvPr id="6148" name="灯片编号占位符 3">
             <a:extLst>
               <a:ext uri="{FF2B5EF4-FFF2-40B4-BE49-F238E27FC236}">
-                <a16:creationId xmlns="" xmlns:a16="http://schemas.microsoft.com/office/drawing/2014/main" id="{D230392C-ED50-49C3-93A6-10868BF6DADE}"/>
+                <a16:creationId xmlns:a16="http://schemas.microsoft.com/office/drawing/2014/main" xmlns="" id="{D230392C-ED50-49C3-93A6-10868BF6DADE}"/>
               </a:ext>
             </a:extLst>
           </p:cNvPr>
@@ -11462,7 +11462,7 @@
           <p:cNvPr id="6146" name="幻灯片图像占位符 1">
             <a:extLst>
               <a:ext uri="{FF2B5EF4-FFF2-40B4-BE49-F238E27FC236}">
-                <a16:creationId xmlns="" xmlns:a16="http://schemas.microsoft.com/office/drawing/2014/main" id="{4908B133-C54F-400F-8F70-355C57C0BE11}"/>
+                <a16:creationId xmlns:a16="http://schemas.microsoft.com/office/drawing/2014/main" xmlns="" id="{4908B133-C54F-400F-8F70-355C57C0BE11}"/>
               </a:ext>
             </a:extLst>
           </p:cNvPr>
@@ -11499,7 +11499,7 @@
           <p:cNvPr id="6147" name="备注占位符 2">
             <a:extLst>
               <a:ext uri="{FF2B5EF4-FFF2-40B4-BE49-F238E27FC236}">
-                <a16:creationId xmlns="" xmlns:a16="http://schemas.microsoft.com/office/drawing/2014/main" id="{7D16C196-D24B-4BE0-AE74-D44907B2A1B1}"/>
+                <a16:creationId xmlns:a16="http://schemas.microsoft.com/office/drawing/2014/main" xmlns="" id="{7D16C196-D24B-4BE0-AE74-D44907B2A1B1}"/>
               </a:ext>
             </a:extLst>
           </p:cNvPr>
@@ -11554,7 +11554,7 @@
           <p:cNvPr id="6148" name="灯片编号占位符 3">
             <a:extLst>
               <a:ext uri="{FF2B5EF4-FFF2-40B4-BE49-F238E27FC236}">
-                <a16:creationId xmlns="" xmlns:a16="http://schemas.microsoft.com/office/drawing/2014/main" id="{D230392C-ED50-49C3-93A6-10868BF6DADE}"/>
+                <a16:creationId xmlns:a16="http://schemas.microsoft.com/office/drawing/2014/main" xmlns="" id="{D230392C-ED50-49C3-93A6-10868BF6DADE}"/>
               </a:ext>
             </a:extLst>
           </p:cNvPr>
@@ -11804,7 +11804,7 @@
           <p:cNvPr id="2" name="标题 1">
             <a:extLst>
               <a:ext uri="{FF2B5EF4-FFF2-40B4-BE49-F238E27FC236}">
-                <a16:creationId xmlns="" xmlns:a16="http://schemas.microsoft.com/office/drawing/2014/main" id="{558AFC1F-0EC5-49BF-9268-F0FEE4B60F85}"/>
+                <a16:creationId xmlns:a16="http://schemas.microsoft.com/office/drawing/2014/main" xmlns="" id="{558AFC1F-0EC5-49BF-9268-F0FEE4B60F85}"/>
               </a:ext>
             </a:extLst>
           </p:cNvPr>
@@ -11841,7 +11841,7 @@
           <p:cNvPr id="3" name="副标题 2">
             <a:extLst>
               <a:ext uri="{FF2B5EF4-FFF2-40B4-BE49-F238E27FC236}">
-                <a16:creationId xmlns="" xmlns:a16="http://schemas.microsoft.com/office/drawing/2014/main" id="{411F25FC-AA7A-420B-9A3A-84ECEF4013AF}"/>
+                <a16:creationId xmlns:a16="http://schemas.microsoft.com/office/drawing/2014/main" xmlns="" id="{411F25FC-AA7A-420B-9A3A-84ECEF4013AF}"/>
               </a:ext>
             </a:extLst>
           </p:cNvPr>
@@ -11911,7 +11911,7 @@
           <p:cNvPr id="4" name="Rectangle 4">
             <a:extLst>
               <a:ext uri="{FF2B5EF4-FFF2-40B4-BE49-F238E27FC236}">
-                <a16:creationId xmlns="" xmlns:a16="http://schemas.microsoft.com/office/drawing/2014/main" id="{892DDA44-EBAA-4B0D-B1AD-17FC12E24344}"/>
+                <a16:creationId xmlns:a16="http://schemas.microsoft.com/office/drawing/2014/main" xmlns="" id="{892DDA44-EBAA-4B0D-B1AD-17FC12E24344}"/>
               </a:ext>
             </a:extLst>
           </p:cNvPr>
@@ -11945,7 +11945,7 @@
           <p:cNvPr id="5" name="Rectangle 5">
             <a:extLst>
               <a:ext uri="{FF2B5EF4-FFF2-40B4-BE49-F238E27FC236}">
-                <a16:creationId xmlns="" xmlns:a16="http://schemas.microsoft.com/office/drawing/2014/main" id="{59A68DBD-F8D1-4CAE-ACF1-A66E61D864F9}"/>
+                <a16:creationId xmlns:a16="http://schemas.microsoft.com/office/drawing/2014/main" xmlns="" id="{59A68DBD-F8D1-4CAE-ACF1-A66E61D864F9}"/>
               </a:ext>
             </a:extLst>
           </p:cNvPr>
@@ -11979,7 +11979,7 @@
           <p:cNvPr id="6" name="Rectangle 6">
             <a:extLst>
               <a:ext uri="{FF2B5EF4-FFF2-40B4-BE49-F238E27FC236}">
-                <a16:creationId xmlns="" xmlns:a16="http://schemas.microsoft.com/office/drawing/2014/main" id="{A406CACD-345F-48D9-9536-018A859493C9}"/>
+                <a16:creationId xmlns:a16="http://schemas.microsoft.com/office/drawing/2014/main" xmlns="" id="{A406CACD-345F-48D9-9536-018A859493C9}"/>
               </a:ext>
             </a:extLst>
           </p:cNvPr>
@@ -12050,7 +12050,7 @@
           <p:cNvPr id="2" name="标题 1">
             <a:extLst>
               <a:ext uri="{FF2B5EF4-FFF2-40B4-BE49-F238E27FC236}">
-                <a16:creationId xmlns="" xmlns:a16="http://schemas.microsoft.com/office/drawing/2014/main" id="{413EF4AD-90B9-4E2D-B48C-D5D41ADC00B1}"/>
+                <a16:creationId xmlns:a16="http://schemas.microsoft.com/office/drawing/2014/main" xmlns="" id="{413EF4AD-90B9-4E2D-B48C-D5D41ADC00B1}"/>
               </a:ext>
             </a:extLst>
           </p:cNvPr>
@@ -12078,7 +12078,7 @@
           <p:cNvPr id="3" name="竖排文字占位符 2">
             <a:extLst>
               <a:ext uri="{FF2B5EF4-FFF2-40B4-BE49-F238E27FC236}">
-                <a16:creationId xmlns="" xmlns:a16="http://schemas.microsoft.com/office/drawing/2014/main" id="{2935463B-296C-4D20-B55D-237CE160497F}"/>
+                <a16:creationId xmlns:a16="http://schemas.microsoft.com/office/drawing/2014/main" xmlns="" id="{2935463B-296C-4D20-B55D-237CE160497F}"/>
               </a:ext>
             </a:extLst>
           </p:cNvPr>
@@ -12135,7 +12135,7 @@
           <p:cNvPr id="4" name="Rectangle 4">
             <a:extLst>
               <a:ext uri="{FF2B5EF4-FFF2-40B4-BE49-F238E27FC236}">
-                <a16:creationId xmlns="" xmlns:a16="http://schemas.microsoft.com/office/drawing/2014/main" id="{1572E583-F505-4444-906F-8206A9EE7F1E}"/>
+                <a16:creationId xmlns:a16="http://schemas.microsoft.com/office/drawing/2014/main" xmlns="" id="{1572E583-F505-4444-906F-8206A9EE7F1E}"/>
               </a:ext>
             </a:extLst>
           </p:cNvPr>
@@ -12169,7 +12169,7 @@
           <p:cNvPr id="5" name="Rectangle 5">
             <a:extLst>
               <a:ext uri="{FF2B5EF4-FFF2-40B4-BE49-F238E27FC236}">
-                <a16:creationId xmlns="" xmlns:a16="http://schemas.microsoft.com/office/drawing/2014/main" id="{59D895F1-9DF8-48A9-9C6A-3A7AC93DF390}"/>
+                <a16:creationId xmlns:a16="http://schemas.microsoft.com/office/drawing/2014/main" xmlns="" id="{59D895F1-9DF8-48A9-9C6A-3A7AC93DF390}"/>
               </a:ext>
             </a:extLst>
           </p:cNvPr>
@@ -12203,7 +12203,7 @@
           <p:cNvPr id="6" name="Rectangle 6">
             <a:extLst>
               <a:ext uri="{FF2B5EF4-FFF2-40B4-BE49-F238E27FC236}">
-                <a16:creationId xmlns="" xmlns:a16="http://schemas.microsoft.com/office/drawing/2014/main" id="{291603C0-AEEF-495C-84B8-A97B75DBDA95}"/>
+                <a16:creationId xmlns:a16="http://schemas.microsoft.com/office/drawing/2014/main" xmlns="" id="{291603C0-AEEF-495C-84B8-A97B75DBDA95}"/>
               </a:ext>
             </a:extLst>
           </p:cNvPr>
@@ -12274,7 +12274,7 @@
           <p:cNvPr id="2" name="竖排标题 1">
             <a:extLst>
               <a:ext uri="{FF2B5EF4-FFF2-40B4-BE49-F238E27FC236}">
-                <a16:creationId xmlns="" xmlns:a16="http://schemas.microsoft.com/office/drawing/2014/main" id="{5C3D78EF-5EF5-478D-8576-1606D3C29178}"/>
+                <a16:creationId xmlns:a16="http://schemas.microsoft.com/office/drawing/2014/main" xmlns="" id="{5C3D78EF-5EF5-478D-8576-1606D3C29178}"/>
               </a:ext>
             </a:extLst>
           </p:cNvPr>
@@ -12307,7 +12307,7 @@
           <p:cNvPr id="3" name="竖排文字占位符 2">
             <a:extLst>
               <a:ext uri="{FF2B5EF4-FFF2-40B4-BE49-F238E27FC236}">
-                <a16:creationId xmlns="" xmlns:a16="http://schemas.microsoft.com/office/drawing/2014/main" id="{4DCD9F3D-20DB-4182-AD70-C533BC393EB5}"/>
+                <a16:creationId xmlns:a16="http://schemas.microsoft.com/office/drawing/2014/main" xmlns="" id="{4DCD9F3D-20DB-4182-AD70-C533BC393EB5}"/>
               </a:ext>
             </a:extLst>
           </p:cNvPr>
@@ -12369,7 +12369,7 @@
           <p:cNvPr id="4" name="Rectangle 4">
             <a:extLst>
               <a:ext uri="{FF2B5EF4-FFF2-40B4-BE49-F238E27FC236}">
-                <a16:creationId xmlns="" xmlns:a16="http://schemas.microsoft.com/office/drawing/2014/main" id="{80FCF88E-129A-43F9-90EC-1AB558A2726C}"/>
+                <a16:creationId xmlns:a16="http://schemas.microsoft.com/office/drawing/2014/main" xmlns="" id="{80FCF88E-129A-43F9-90EC-1AB558A2726C}"/>
               </a:ext>
             </a:extLst>
           </p:cNvPr>
@@ -12403,7 +12403,7 @@
           <p:cNvPr id="5" name="Rectangle 5">
             <a:extLst>
               <a:ext uri="{FF2B5EF4-FFF2-40B4-BE49-F238E27FC236}">
-                <a16:creationId xmlns="" xmlns:a16="http://schemas.microsoft.com/office/drawing/2014/main" id="{3124BE14-18C5-46A6-8BD5-794314EF816D}"/>
+                <a16:creationId xmlns:a16="http://schemas.microsoft.com/office/drawing/2014/main" xmlns="" id="{3124BE14-18C5-46A6-8BD5-794314EF816D}"/>
               </a:ext>
             </a:extLst>
           </p:cNvPr>
@@ -12437,7 +12437,7 @@
           <p:cNvPr id="6" name="Rectangle 6">
             <a:extLst>
               <a:ext uri="{FF2B5EF4-FFF2-40B4-BE49-F238E27FC236}">
-                <a16:creationId xmlns="" xmlns:a16="http://schemas.microsoft.com/office/drawing/2014/main" id="{597D6CFD-B5D7-46E4-8617-4E9947427CAF}"/>
+                <a16:creationId xmlns:a16="http://schemas.microsoft.com/office/drawing/2014/main" xmlns="" id="{597D6CFD-B5D7-46E4-8617-4E9947427CAF}"/>
               </a:ext>
             </a:extLst>
           </p:cNvPr>
@@ -12508,7 +12508,7 @@
           <p:cNvPr id="2" name="标题 1">
             <a:extLst>
               <a:ext uri="{FF2B5EF4-FFF2-40B4-BE49-F238E27FC236}">
-                <a16:creationId xmlns="" xmlns:a16="http://schemas.microsoft.com/office/drawing/2014/main" id="{79C7DECC-98E6-4FD9-AAA2-12B4A61F95C6}"/>
+                <a16:creationId xmlns:a16="http://schemas.microsoft.com/office/drawing/2014/main" xmlns="" id="{79C7DECC-98E6-4FD9-AAA2-12B4A61F95C6}"/>
               </a:ext>
             </a:extLst>
           </p:cNvPr>
@@ -12536,7 +12536,7 @@
           <p:cNvPr id="3" name="内容占位符 2">
             <a:extLst>
               <a:ext uri="{FF2B5EF4-FFF2-40B4-BE49-F238E27FC236}">
-                <a16:creationId xmlns="" xmlns:a16="http://schemas.microsoft.com/office/drawing/2014/main" id="{2DFFF49D-5346-4472-B7B4-2B4B12070C2F}"/>
+                <a16:creationId xmlns:a16="http://schemas.microsoft.com/office/drawing/2014/main" xmlns="" id="{2DFFF49D-5346-4472-B7B4-2B4B12070C2F}"/>
               </a:ext>
             </a:extLst>
           </p:cNvPr>
@@ -12593,7 +12593,7 @@
           <p:cNvPr id="4" name="Rectangle 4">
             <a:extLst>
               <a:ext uri="{FF2B5EF4-FFF2-40B4-BE49-F238E27FC236}">
-                <a16:creationId xmlns="" xmlns:a16="http://schemas.microsoft.com/office/drawing/2014/main" id="{3AE54C17-8281-4CEE-80BD-30C4F778807C}"/>
+                <a16:creationId xmlns:a16="http://schemas.microsoft.com/office/drawing/2014/main" xmlns="" id="{3AE54C17-8281-4CEE-80BD-30C4F778807C}"/>
               </a:ext>
             </a:extLst>
           </p:cNvPr>
@@ -12627,7 +12627,7 @@
           <p:cNvPr id="5" name="Rectangle 5">
             <a:extLst>
               <a:ext uri="{FF2B5EF4-FFF2-40B4-BE49-F238E27FC236}">
-                <a16:creationId xmlns="" xmlns:a16="http://schemas.microsoft.com/office/drawing/2014/main" id="{AA5AD5C1-CA4D-49A1-9F23-7E5608819125}"/>
+                <a16:creationId xmlns:a16="http://schemas.microsoft.com/office/drawing/2014/main" xmlns="" id="{AA5AD5C1-CA4D-49A1-9F23-7E5608819125}"/>
               </a:ext>
             </a:extLst>
           </p:cNvPr>
@@ -12661,7 +12661,7 @@
           <p:cNvPr id="6" name="Rectangle 6">
             <a:extLst>
               <a:ext uri="{FF2B5EF4-FFF2-40B4-BE49-F238E27FC236}">
-                <a16:creationId xmlns="" xmlns:a16="http://schemas.microsoft.com/office/drawing/2014/main" id="{89EA5E6E-1878-4876-87FC-34CF0D7DC10A}"/>
+                <a16:creationId xmlns:a16="http://schemas.microsoft.com/office/drawing/2014/main" xmlns="" id="{89EA5E6E-1878-4876-87FC-34CF0D7DC10A}"/>
               </a:ext>
             </a:extLst>
           </p:cNvPr>
@@ -12747,7 +12747,7 @@
           <p:cNvPr id="2" name="标题 1">
             <a:extLst>
               <a:ext uri="{FF2B5EF4-FFF2-40B4-BE49-F238E27FC236}">
-                <a16:creationId xmlns="" xmlns:a16="http://schemas.microsoft.com/office/drawing/2014/main" id="{D1C66AC4-7745-487C-B77E-D7209402F8D3}"/>
+                <a16:creationId xmlns:a16="http://schemas.microsoft.com/office/drawing/2014/main" xmlns="" id="{D1C66AC4-7745-487C-B77E-D7209402F8D3}"/>
               </a:ext>
             </a:extLst>
           </p:cNvPr>
@@ -12784,7 +12784,7 @@
           <p:cNvPr id="3" name="文本占位符 2">
             <a:extLst>
               <a:ext uri="{FF2B5EF4-FFF2-40B4-BE49-F238E27FC236}">
-                <a16:creationId xmlns="" xmlns:a16="http://schemas.microsoft.com/office/drawing/2014/main" id="{F0642504-C3D3-4FEB-932D-43E152422788}"/>
+                <a16:creationId xmlns:a16="http://schemas.microsoft.com/office/drawing/2014/main" xmlns="" id="{F0642504-C3D3-4FEB-932D-43E152422788}"/>
               </a:ext>
             </a:extLst>
           </p:cNvPr>
@@ -12855,7 +12855,7 @@
           <p:cNvPr id="4" name="Rectangle 4">
             <a:extLst>
               <a:ext uri="{FF2B5EF4-FFF2-40B4-BE49-F238E27FC236}">
-                <a16:creationId xmlns="" xmlns:a16="http://schemas.microsoft.com/office/drawing/2014/main" id="{1FDDD93F-F324-4F9A-B9D4-6849A4C3DA30}"/>
+                <a16:creationId xmlns:a16="http://schemas.microsoft.com/office/drawing/2014/main" xmlns="" id="{1FDDD93F-F324-4F9A-B9D4-6849A4C3DA30}"/>
               </a:ext>
             </a:extLst>
           </p:cNvPr>
@@ -12889,7 +12889,7 @@
           <p:cNvPr id="5" name="Rectangle 5">
             <a:extLst>
               <a:ext uri="{FF2B5EF4-FFF2-40B4-BE49-F238E27FC236}">
-                <a16:creationId xmlns="" xmlns:a16="http://schemas.microsoft.com/office/drawing/2014/main" id="{58D17B65-E136-4CDA-8948-06EE82F4BCF9}"/>
+                <a16:creationId xmlns:a16="http://schemas.microsoft.com/office/drawing/2014/main" xmlns="" id="{58D17B65-E136-4CDA-8948-06EE82F4BCF9}"/>
               </a:ext>
             </a:extLst>
           </p:cNvPr>
@@ -12923,7 +12923,7 @@
           <p:cNvPr id="6" name="Rectangle 6">
             <a:extLst>
               <a:ext uri="{FF2B5EF4-FFF2-40B4-BE49-F238E27FC236}">
-                <a16:creationId xmlns="" xmlns:a16="http://schemas.microsoft.com/office/drawing/2014/main" id="{D7125560-B1D6-4FEA-8C81-81F49D4763C4}"/>
+                <a16:creationId xmlns:a16="http://schemas.microsoft.com/office/drawing/2014/main" xmlns="" id="{D7125560-B1D6-4FEA-8C81-81F49D4763C4}"/>
               </a:ext>
             </a:extLst>
           </p:cNvPr>
@@ -12994,7 +12994,7 @@
           <p:cNvPr id="2" name="标题 1">
             <a:extLst>
               <a:ext uri="{FF2B5EF4-FFF2-40B4-BE49-F238E27FC236}">
-                <a16:creationId xmlns="" xmlns:a16="http://schemas.microsoft.com/office/drawing/2014/main" id="{235DD831-5C92-41D8-B2A4-F735B961D24C}"/>
+                <a16:creationId xmlns:a16="http://schemas.microsoft.com/office/drawing/2014/main" xmlns="" id="{235DD831-5C92-41D8-B2A4-F735B961D24C}"/>
               </a:ext>
             </a:extLst>
           </p:cNvPr>
@@ -13022,7 +13022,7 @@
           <p:cNvPr id="3" name="内容占位符 2">
             <a:extLst>
               <a:ext uri="{FF2B5EF4-FFF2-40B4-BE49-F238E27FC236}">
-                <a16:creationId xmlns="" xmlns:a16="http://schemas.microsoft.com/office/drawing/2014/main" id="{40589EF3-2B1D-4F74-90F9-1600D88D274F}"/>
+                <a16:creationId xmlns:a16="http://schemas.microsoft.com/office/drawing/2014/main" xmlns="" id="{40589EF3-2B1D-4F74-90F9-1600D88D274F}"/>
               </a:ext>
             </a:extLst>
           </p:cNvPr>
@@ -13084,7 +13084,7 @@
           <p:cNvPr id="4" name="内容占位符 3">
             <a:extLst>
               <a:ext uri="{FF2B5EF4-FFF2-40B4-BE49-F238E27FC236}">
-                <a16:creationId xmlns="" xmlns:a16="http://schemas.microsoft.com/office/drawing/2014/main" id="{31894757-41E5-4DC3-B486-BF0D8D2E3B3C}"/>
+                <a16:creationId xmlns:a16="http://schemas.microsoft.com/office/drawing/2014/main" xmlns="" id="{31894757-41E5-4DC3-B486-BF0D8D2E3B3C}"/>
               </a:ext>
             </a:extLst>
           </p:cNvPr>
@@ -13146,7 +13146,7 @@
           <p:cNvPr id="5" name="Rectangle 4">
             <a:extLst>
               <a:ext uri="{FF2B5EF4-FFF2-40B4-BE49-F238E27FC236}">
-                <a16:creationId xmlns="" xmlns:a16="http://schemas.microsoft.com/office/drawing/2014/main" id="{80B46424-4DF5-42C6-BA6D-7A5F0843E639}"/>
+                <a16:creationId xmlns:a16="http://schemas.microsoft.com/office/drawing/2014/main" xmlns="" id="{80B46424-4DF5-42C6-BA6D-7A5F0843E639}"/>
               </a:ext>
             </a:extLst>
           </p:cNvPr>
@@ -13180,7 +13180,7 @@
           <p:cNvPr id="6" name="Rectangle 5">
             <a:extLst>
               <a:ext uri="{FF2B5EF4-FFF2-40B4-BE49-F238E27FC236}">
-                <a16:creationId xmlns="" xmlns:a16="http://schemas.microsoft.com/office/drawing/2014/main" id="{54C6D9C2-78B1-4830-B70B-68D245CB3988}"/>
+                <a16:creationId xmlns:a16="http://schemas.microsoft.com/office/drawing/2014/main" xmlns="" id="{54C6D9C2-78B1-4830-B70B-68D245CB3988}"/>
               </a:ext>
             </a:extLst>
           </p:cNvPr>
@@ -13214,7 +13214,7 @@
           <p:cNvPr id="7" name="Rectangle 6">
             <a:extLst>
               <a:ext uri="{FF2B5EF4-FFF2-40B4-BE49-F238E27FC236}">
-                <a16:creationId xmlns="" xmlns:a16="http://schemas.microsoft.com/office/drawing/2014/main" id="{7C8F0C60-8AC6-4F0E-B049-CFBBD780349C}"/>
+                <a16:creationId xmlns:a16="http://schemas.microsoft.com/office/drawing/2014/main" xmlns="" id="{7C8F0C60-8AC6-4F0E-B049-CFBBD780349C}"/>
               </a:ext>
             </a:extLst>
           </p:cNvPr>
@@ -13285,7 +13285,7 @@
           <p:cNvPr id="2" name="标题 1">
             <a:extLst>
               <a:ext uri="{FF2B5EF4-FFF2-40B4-BE49-F238E27FC236}">
-                <a16:creationId xmlns="" xmlns:a16="http://schemas.microsoft.com/office/drawing/2014/main" id="{5EAC2349-C79E-4DAD-A7EC-F121B92EABC6}"/>
+                <a16:creationId xmlns:a16="http://schemas.microsoft.com/office/drawing/2014/main" xmlns="" id="{5EAC2349-C79E-4DAD-A7EC-F121B92EABC6}"/>
               </a:ext>
             </a:extLst>
           </p:cNvPr>
@@ -13318,7 +13318,7 @@
           <p:cNvPr id="3" name="文本占位符 2">
             <a:extLst>
               <a:ext uri="{FF2B5EF4-FFF2-40B4-BE49-F238E27FC236}">
-                <a16:creationId xmlns="" xmlns:a16="http://schemas.microsoft.com/office/drawing/2014/main" id="{6577C8D4-D6FA-4BC8-982E-A569EF349637}"/>
+                <a16:creationId xmlns:a16="http://schemas.microsoft.com/office/drawing/2014/main" xmlns="" id="{6577C8D4-D6FA-4BC8-982E-A569EF349637}"/>
               </a:ext>
             </a:extLst>
           </p:cNvPr>
@@ -13389,7 +13389,7 @@
           <p:cNvPr id="4" name="内容占位符 3">
             <a:extLst>
               <a:ext uri="{FF2B5EF4-FFF2-40B4-BE49-F238E27FC236}">
-                <a16:creationId xmlns="" xmlns:a16="http://schemas.microsoft.com/office/drawing/2014/main" id="{2C1BD52F-78B6-4701-9C21-05A4842E2948}"/>
+                <a16:creationId xmlns:a16="http://schemas.microsoft.com/office/drawing/2014/main" xmlns="" id="{2C1BD52F-78B6-4701-9C21-05A4842E2948}"/>
               </a:ext>
             </a:extLst>
           </p:cNvPr>
@@ -13451,7 +13451,7 @@
           <p:cNvPr id="5" name="文本占位符 4">
             <a:extLst>
               <a:ext uri="{FF2B5EF4-FFF2-40B4-BE49-F238E27FC236}">
-                <a16:creationId xmlns="" xmlns:a16="http://schemas.microsoft.com/office/drawing/2014/main" id="{41B5E117-E18D-486E-BBF0-E55E36688CE9}"/>
+                <a16:creationId xmlns:a16="http://schemas.microsoft.com/office/drawing/2014/main" xmlns="" id="{41B5E117-E18D-486E-BBF0-E55E36688CE9}"/>
               </a:ext>
             </a:extLst>
           </p:cNvPr>
@@ -13522,7 +13522,7 @@
           <p:cNvPr id="6" name="内容占位符 5">
             <a:extLst>
               <a:ext uri="{FF2B5EF4-FFF2-40B4-BE49-F238E27FC236}">
-                <a16:creationId xmlns="" xmlns:a16="http://schemas.microsoft.com/office/drawing/2014/main" id="{1A6184B9-916F-4A62-BB58-A9E1721165AE}"/>
+                <a16:creationId xmlns:a16="http://schemas.microsoft.com/office/drawing/2014/main" xmlns="" id="{1A6184B9-916F-4A62-BB58-A9E1721165AE}"/>
               </a:ext>
             </a:extLst>
           </p:cNvPr>
@@ -13584,7 +13584,7 @@
           <p:cNvPr id="7" name="Rectangle 4">
             <a:extLst>
               <a:ext uri="{FF2B5EF4-FFF2-40B4-BE49-F238E27FC236}">
-                <a16:creationId xmlns="" xmlns:a16="http://schemas.microsoft.com/office/drawing/2014/main" id="{9BDEFA24-1BB9-4A63-BE04-B2CD6F8BC7CD}"/>
+                <a16:creationId xmlns:a16="http://schemas.microsoft.com/office/drawing/2014/main" xmlns="" id="{9BDEFA24-1BB9-4A63-BE04-B2CD6F8BC7CD}"/>
               </a:ext>
             </a:extLst>
           </p:cNvPr>
@@ -13618,7 +13618,7 @@
           <p:cNvPr id="8" name="Rectangle 5">
             <a:extLst>
               <a:ext uri="{FF2B5EF4-FFF2-40B4-BE49-F238E27FC236}">
-                <a16:creationId xmlns="" xmlns:a16="http://schemas.microsoft.com/office/drawing/2014/main" id="{291227B2-68B3-4699-A416-5C0E6B364CA1}"/>
+                <a16:creationId xmlns:a16="http://schemas.microsoft.com/office/drawing/2014/main" xmlns="" id="{291227B2-68B3-4699-A416-5C0E6B364CA1}"/>
               </a:ext>
             </a:extLst>
           </p:cNvPr>
@@ -13652,7 +13652,7 @@
           <p:cNvPr id="9" name="Rectangle 6">
             <a:extLst>
               <a:ext uri="{FF2B5EF4-FFF2-40B4-BE49-F238E27FC236}">
-                <a16:creationId xmlns="" xmlns:a16="http://schemas.microsoft.com/office/drawing/2014/main" id="{DEC7A77C-9158-4F27-8F28-4C65512DA59A}"/>
+                <a16:creationId xmlns:a16="http://schemas.microsoft.com/office/drawing/2014/main" xmlns="" id="{DEC7A77C-9158-4F27-8F28-4C65512DA59A}"/>
               </a:ext>
             </a:extLst>
           </p:cNvPr>
@@ -13723,7 +13723,7 @@
           <p:cNvPr id="2" name="标题 1">
             <a:extLst>
               <a:ext uri="{FF2B5EF4-FFF2-40B4-BE49-F238E27FC236}">
-                <a16:creationId xmlns="" xmlns:a16="http://schemas.microsoft.com/office/drawing/2014/main" id="{2BC76C51-0028-4F2D-A216-4D11F5334867}"/>
+                <a16:creationId xmlns:a16="http://schemas.microsoft.com/office/drawing/2014/main" xmlns="" id="{2BC76C51-0028-4F2D-A216-4D11F5334867}"/>
               </a:ext>
             </a:extLst>
           </p:cNvPr>
@@ -13751,7 +13751,7 @@
           <p:cNvPr id="3" name="Rectangle 4">
             <a:extLst>
               <a:ext uri="{FF2B5EF4-FFF2-40B4-BE49-F238E27FC236}">
-                <a16:creationId xmlns="" xmlns:a16="http://schemas.microsoft.com/office/drawing/2014/main" id="{91CC3BF1-A404-4E2C-8AA3-99428C6F6DD8}"/>
+                <a16:creationId xmlns:a16="http://schemas.microsoft.com/office/drawing/2014/main" xmlns="" id="{91CC3BF1-A404-4E2C-8AA3-99428C6F6DD8}"/>
               </a:ext>
             </a:extLst>
           </p:cNvPr>
@@ -13785,7 +13785,7 @@
           <p:cNvPr id="4" name="Rectangle 5">
             <a:extLst>
               <a:ext uri="{FF2B5EF4-FFF2-40B4-BE49-F238E27FC236}">
-                <a16:creationId xmlns="" xmlns:a16="http://schemas.microsoft.com/office/drawing/2014/main" id="{B7D80654-FEB6-4772-9441-0475550AB2E7}"/>
+                <a16:creationId xmlns:a16="http://schemas.microsoft.com/office/drawing/2014/main" xmlns="" id="{B7D80654-FEB6-4772-9441-0475550AB2E7}"/>
               </a:ext>
             </a:extLst>
           </p:cNvPr>
@@ -13819,7 +13819,7 @@
           <p:cNvPr id="5" name="Rectangle 6">
             <a:extLst>
               <a:ext uri="{FF2B5EF4-FFF2-40B4-BE49-F238E27FC236}">
-                <a16:creationId xmlns="" xmlns:a16="http://schemas.microsoft.com/office/drawing/2014/main" id="{968FB6E6-FDEC-4041-BA77-FFA3A3FA254C}"/>
+                <a16:creationId xmlns:a16="http://schemas.microsoft.com/office/drawing/2014/main" xmlns="" id="{968FB6E6-FDEC-4041-BA77-FFA3A3FA254C}"/>
               </a:ext>
             </a:extLst>
           </p:cNvPr>
@@ -13890,7 +13890,7 @@
           <p:cNvPr id="2" name="Rectangle 4">
             <a:extLst>
               <a:ext uri="{FF2B5EF4-FFF2-40B4-BE49-F238E27FC236}">
-                <a16:creationId xmlns="" xmlns:a16="http://schemas.microsoft.com/office/drawing/2014/main" id="{6DC56CB5-95F7-41B4-8677-E12EBE1FBD59}"/>
+                <a16:creationId xmlns:a16="http://schemas.microsoft.com/office/drawing/2014/main" xmlns="" id="{6DC56CB5-95F7-41B4-8677-E12EBE1FBD59}"/>
               </a:ext>
             </a:extLst>
           </p:cNvPr>
@@ -13924,7 +13924,7 @@
           <p:cNvPr id="3" name="Rectangle 5">
             <a:extLst>
               <a:ext uri="{FF2B5EF4-FFF2-40B4-BE49-F238E27FC236}">
-                <a16:creationId xmlns="" xmlns:a16="http://schemas.microsoft.com/office/drawing/2014/main" id="{B7F0A7C5-5870-4D46-AA35-704A0D3C8668}"/>
+                <a16:creationId xmlns:a16="http://schemas.microsoft.com/office/drawing/2014/main" xmlns="" id="{B7F0A7C5-5870-4D46-AA35-704A0D3C8668}"/>
               </a:ext>
             </a:extLst>
           </p:cNvPr>
@@ -13958,7 +13958,7 @@
           <p:cNvPr id="4" name="Rectangle 6">
             <a:extLst>
               <a:ext uri="{FF2B5EF4-FFF2-40B4-BE49-F238E27FC236}">
-                <a16:creationId xmlns="" xmlns:a16="http://schemas.microsoft.com/office/drawing/2014/main" id="{11F62A78-2485-4514-AD6F-798D74A4E024}"/>
+                <a16:creationId xmlns:a16="http://schemas.microsoft.com/office/drawing/2014/main" xmlns="" id="{11F62A78-2485-4514-AD6F-798D74A4E024}"/>
               </a:ext>
             </a:extLst>
           </p:cNvPr>
@@ -14029,7 +14029,7 @@
           <p:cNvPr id="2" name="标题 1">
             <a:extLst>
               <a:ext uri="{FF2B5EF4-FFF2-40B4-BE49-F238E27FC236}">
-                <a16:creationId xmlns="" xmlns:a16="http://schemas.microsoft.com/office/drawing/2014/main" id="{0BD92CCA-0140-4241-AF84-A0DFC0FC9C4C}"/>
+                <a16:creationId xmlns:a16="http://schemas.microsoft.com/office/drawing/2014/main" xmlns="" id="{0BD92CCA-0140-4241-AF84-A0DFC0FC9C4C}"/>
               </a:ext>
             </a:extLst>
           </p:cNvPr>
@@ -14066,7 +14066,7 @@
           <p:cNvPr id="3" name="内容占位符 2">
             <a:extLst>
               <a:ext uri="{FF2B5EF4-FFF2-40B4-BE49-F238E27FC236}">
-                <a16:creationId xmlns="" xmlns:a16="http://schemas.microsoft.com/office/drawing/2014/main" id="{B149F413-03E0-42C8-96F2-A26C380EC64D}"/>
+                <a16:creationId xmlns:a16="http://schemas.microsoft.com/office/drawing/2014/main" xmlns="" id="{B149F413-03E0-42C8-96F2-A26C380EC64D}"/>
               </a:ext>
             </a:extLst>
           </p:cNvPr>
@@ -14156,7 +14156,7 @@
           <p:cNvPr id="4" name="文本占位符 3">
             <a:extLst>
               <a:ext uri="{FF2B5EF4-FFF2-40B4-BE49-F238E27FC236}">
-                <a16:creationId xmlns="" xmlns:a16="http://schemas.microsoft.com/office/drawing/2014/main" id="{80CED1CF-0137-4B94-B04B-8FDCB7C8B161}"/>
+                <a16:creationId xmlns:a16="http://schemas.microsoft.com/office/drawing/2014/main" xmlns="" id="{80CED1CF-0137-4B94-B04B-8FDCB7C8B161}"/>
               </a:ext>
             </a:extLst>
           </p:cNvPr>
@@ -14227,7 +14227,7 @@
           <p:cNvPr id="5" name="Rectangle 4">
             <a:extLst>
               <a:ext uri="{FF2B5EF4-FFF2-40B4-BE49-F238E27FC236}">
-                <a16:creationId xmlns="" xmlns:a16="http://schemas.microsoft.com/office/drawing/2014/main" id="{83A028F8-90C5-4894-9D68-1F454A6818EB}"/>
+                <a16:creationId xmlns:a16="http://schemas.microsoft.com/office/drawing/2014/main" xmlns="" id="{83A028F8-90C5-4894-9D68-1F454A6818EB}"/>
               </a:ext>
             </a:extLst>
           </p:cNvPr>
@@ -14261,7 +14261,7 @@
           <p:cNvPr id="6" name="Rectangle 5">
             <a:extLst>
               <a:ext uri="{FF2B5EF4-FFF2-40B4-BE49-F238E27FC236}">
-                <a16:creationId xmlns="" xmlns:a16="http://schemas.microsoft.com/office/drawing/2014/main" id="{4B6B0556-8025-49EB-A9D8-E82F10331C3C}"/>
+                <a16:creationId xmlns:a16="http://schemas.microsoft.com/office/drawing/2014/main" xmlns="" id="{4B6B0556-8025-49EB-A9D8-E82F10331C3C}"/>
               </a:ext>
             </a:extLst>
           </p:cNvPr>
@@ -14295,7 +14295,7 @@
           <p:cNvPr id="7" name="Rectangle 6">
             <a:extLst>
               <a:ext uri="{FF2B5EF4-FFF2-40B4-BE49-F238E27FC236}">
-                <a16:creationId xmlns="" xmlns:a16="http://schemas.microsoft.com/office/drawing/2014/main" id="{327CC8F1-4BD0-4FEC-AECB-DEAE8BCBA203}"/>
+                <a16:creationId xmlns:a16="http://schemas.microsoft.com/office/drawing/2014/main" xmlns="" id="{327CC8F1-4BD0-4FEC-AECB-DEAE8BCBA203}"/>
               </a:ext>
             </a:extLst>
           </p:cNvPr>
@@ -14366,7 +14366,7 @@
           <p:cNvPr id="2" name="标题 1">
             <a:extLst>
               <a:ext uri="{FF2B5EF4-FFF2-40B4-BE49-F238E27FC236}">
-                <a16:creationId xmlns="" xmlns:a16="http://schemas.microsoft.com/office/drawing/2014/main" id="{71EFFC16-3EB0-4FBB-96E7-A6D46DBE0860}"/>
+                <a16:creationId xmlns:a16="http://schemas.microsoft.com/office/drawing/2014/main" xmlns="" id="{71EFFC16-3EB0-4FBB-96E7-A6D46DBE0860}"/>
               </a:ext>
             </a:extLst>
           </p:cNvPr>
@@ -14403,7 +14403,7 @@
           <p:cNvPr id="3" name="图片占位符 2">
             <a:extLst>
               <a:ext uri="{FF2B5EF4-FFF2-40B4-BE49-F238E27FC236}">
-                <a16:creationId xmlns="" xmlns:a16="http://schemas.microsoft.com/office/drawing/2014/main" id="{5B422F93-2D7C-4C8D-98F2-E969A8987B29}"/>
+                <a16:creationId xmlns:a16="http://schemas.microsoft.com/office/drawing/2014/main" xmlns="" id="{5B422F93-2D7C-4C8D-98F2-E969A8987B29}"/>
               </a:ext>
             </a:extLst>
           </p:cNvPr>
@@ -14471,7 +14471,7 @@
           <p:cNvPr id="4" name="文本占位符 3">
             <a:extLst>
               <a:ext uri="{FF2B5EF4-FFF2-40B4-BE49-F238E27FC236}">
-                <a16:creationId xmlns="" xmlns:a16="http://schemas.microsoft.com/office/drawing/2014/main" id="{C6BF88C8-E1D1-4529-AA38-9722474E4E30}"/>
+                <a16:creationId xmlns:a16="http://schemas.microsoft.com/office/drawing/2014/main" xmlns="" id="{C6BF88C8-E1D1-4529-AA38-9722474E4E30}"/>
               </a:ext>
             </a:extLst>
           </p:cNvPr>
@@ -14542,7 +14542,7 @@
           <p:cNvPr id="5" name="Rectangle 4">
             <a:extLst>
               <a:ext uri="{FF2B5EF4-FFF2-40B4-BE49-F238E27FC236}">
-                <a16:creationId xmlns="" xmlns:a16="http://schemas.microsoft.com/office/drawing/2014/main" id="{8A92ADD1-D1E1-4FA7-89F9-EAC168EC5F5E}"/>
+                <a16:creationId xmlns:a16="http://schemas.microsoft.com/office/drawing/2014/main" xmlns="" id="{8A92ADD1-D1E1-4FA7-89F9-EAC168EC5F5E}"/>
               </a:ext>
             </a:extLst>
           </p:cNvPr>
@@ -14576,7 +14576,7 @@
           <p:cNvPr id="6" name="Rectangle 5">
             <a:extLst>
               <a:ext uri="{FF2B5EF4-FFF2-40B4-BE49-F238E27FC236}">
-                <a16:creationId xmlns="" xmlns:a16="http://schemas.microsoft.com/office/drawing/2014/main" id="{8AC2AA6A-2DDF-4129-A813-17A48D5D6578}"/>
+                <a16:creationId xmlns:a16="http://schemas.microsoft.com/office/drawing/2014/main" xmlns="" id="{8AC2AA6A-2DDF-4129-A813-17A48D5D6578}"/>
               </a:ext>
             </a:extLst>
           </p:cNvPr>
@@ -14610,7 +14610,7 @@
           <p:cNvPr id="7" name="Rectangle 6">
             <a:extLst>
               <a:ext uri="{FF2B5EF4-FFF2-40B4-BE49-F238E27FC236}">
-                <a16:creationId xmlns="" xmlns:a16="http://schemas.microsoft.com/office/drawing/2014/main" id="{AFAB14F8-8064-48F6-8B6D-749183531730}"/>
+                <a16:creationId xmlns:a16="http://schemas.microsoft.com/office/drawing/2014/main" xmlns="" id="{AFAB14F8-8064-48F6-8B6D-749183531730}"/>
               </a:ext>
             </a:extLst>
           </p:cNvPr>
@@ -14693,7 +14693,7 @@
           <p:cNvPr id="1026" name="Rectangle 2">
             <a:extLst>
               <a:ext uri="{FF2B5EF4-FFF2-40B4-BE49-F238E27FC236}">
-                <a16:creationId xmlns="" xmlns:a16="http://schemas.microsoft.com/office/drawing/2014/main" id="{80EF2504-E3EA-4812-BCE9-548B5A526130}"/>
+                <a16:creationId xmlns:a16="http://schemas.microsoft.com/office/drawing/2014/main" xmlns="" id="{80EF2504-E3EA-4812-BCE9-548B5A526130}"/>
               </a:ext>
             </a:extLst>
           </p:cNvPr>
@@ -14767,7 +14767,7 @@
           <p:cNvPr id="1027" name="Rectangle 3">
             <a:extLst>
               <a:ext uri="{FF2B5EF4-FFF2-40B4-BE49-F238E27FC236}">
-                <a16:creationId xmlns="" xmlns:a16="http://schemas.microsoft.com/office/drawing/2014/main" id="{7E888592-4D67-4FDC-8ACC-8DD192CAF425}"/>
+                <a16:creationId xmlns:a16="http://schemas.microsoft.com/office/drawing/2014/main" xmlns="" id="{7E888592-4D67-4FDC-8ACC-8DD192CAF425}"/>
               </a:ext>
             </a:extLst>
           </p:cNvPr>
@@ -14869,7 +14869,7 @@
           <p:cNvPr id="1028" name="Rectangle 4">
             <a:extLst>
               <a:ext uri="{FF2B5EF4-FFF2-40B4-BE49-F238E27FC236}">
-                <a16:creationId xmlns="" xmlns:a16="http://schemas.microsoft.com/office/drawing/2014/main" id="{40A3712E-94B2-46ED-881D-E1249EF279C0}"/>
+                <a16:creationId xmlns:a16="http://schemas.microsoft.com/office/drawing/2014/main" xmlns="" id="{40A3712E-94B2-46ED-881D-E1249EF279C0}"/>
               </a:ext>
             </a:extLst>
           </p:cNvPr>
@@ -14946,7 +14946,7 @@
           <p:cNvPr id="1029" name="Rectangle 5">
             <a:extLst>
               <a:ext uri="{FF2B5EF4-FFF2-40B4-BE49-F238E27FC236}">
-                <a16:creationId xmlns="" xmlns:a16="http://schemas.microsoft.com/office/drawing/2014/main" id="{26116D60-C064-41BB-B932-09348EA6EB7D}"/>
+                <a16:creationId xmlns:a16="http://schemas.microsoft.com/office/drawing/2014/main" xmlns="" id="{26116D60-C064-41BB-B932-09348EA6EB7D}"/>
               </a:ext>
             </a:extLst>
           </p:cNvPr>
@@ -15023,7 +15023,7 @@
           <p:cNvPr id="1030" name="Rectangle 6">
             <a:extLst>
               <a:ext uri="{FF2B5EF4-FFF2-40B4-BE49-F238E27FC236}">
-                <a16:creationId xmlns="" xmlns:a16="http://schemas.microsoft.com/office/drawing/2014/main" id="{4E6E49BE-DB26-4C77-94F7-5228E224DF48}"/>
+                <a16:creationId xmlns:a16="http://schemas.microsoft.com/office/drawing/2014/main" xmlns="" id="{4E6E49BE-DB26-4C77-94F7-5228E224DF48}"/>
               </a:ext>
             </a:extLst>
           </p:cNvPr>
@@ -15610,7 +15610,7 @@
           <p:cNvPr id="5122" name="标题 1">
             <a:extLst>
               <a:ext uri="{FF2B5EF4-FFF2-40B4-BE49-F238E27FC236}">
-                <a16:creationId xmlns="" xmlns:a16="http://schemas.microsoft.com/office/drawing/2014/main" id="{A237414D-C4E1-407F-9B0D-585D2D878A74}"/>
+                <a16:creationId xmlns:a16="http://schemas.microsoft.com/office/drawing/2014/main" xmlns="" id="{A237414D-C4E1-407F-9B0D-585D2D878A74}"/>
               </a:ext>
             </a:extLst>
           </p:cNvPr>
@@ -15684,7 +15684,7 @@
           <p:cNvPr id="3" name="内容占位符 2">
             <a:extLst>
               <a:ext uri="{FF2B5EF4-FFF2-40B4-BE49-F238E27FC236}">
-                <a16:creationId xmlns="" xmlns:a16="http://schemas.microsoft.com/office/drawing/2014/main" id="{3DFD56C3-3B63-4F4C-A455-80D220434928}"/>
+                <a16:creationId xmlns:a16="http://schemas.microsoft.com/office/drawing/2014/main" xmlns="" id="{3DFD56C3-3B63-4F4C-A455-80D220434928}"/>
               </a:ext>
             </a:extLst>
           </p:cNvPr>
@@ -15860,7 +15860,7 @@
           <p:cNvPr id="4" name="内容占位符 2">
             <a:extLst>
               <a:ext uri="{FF2B5EF4-FFF2-40B4-BE49-F238E27FC236}">
-                <a16:creationId xmlns="" xmlns:a16="http://schemas.microsoft.com/office/drawing/2014/main" id="{3DFD56C3-3B63-4F4C-A455-80D220434928}"/>
+                <a16:creationId xmlns:a16="http://schemas.microsoft.com/office/drawing/2014/main" xmlns="" id="{3DFD56C3-3B63-4F4C-A455-80D220434928}"/>
               </a:ext>
             </a:extLst>
           </p:cNvPr>
@@ -16229,7 +16229,7 @@
           <p:cNvPr id="5122" name="标题 1">
             <a:extLst>
               <a:ext uri="{FF2B5EF4-FFF2-40B4-BE49-F238E27FC236}">
-                <a16:creationId xmlns="" xmlns:a16="http://schemas.microsoft.com/office/drawing/2014/main" id="{A237414D-C4E1-407F-9B0D-585D2D878A74}"/>
+                <a16:creationId xmlns:a16="http://schemas.microsoft.com/office/drawing/2014/main" xmlns="" id="{A237414D-C4E1-407F-9B0D-585D2D878A74}"/>
               </a:ext>
             </a:extLst>
           </p:cNvPr>
@@ -16269,7 +16269,7 @@
           <p:cNvPr id="3" name="内容占位符 2">
             <a:extLst>
               <a:ext uri="{FF2B5EF4-FFF2-40B4-BE49-F238E27FC236}">
-                <a16:creationId xmlns="" xmlns:a16="http://schemas.microsoft.com/office/drawing/2014/main" id="{3DFD56C3-3B63-4F4C-A455-80D220434928}"/>
+                <a16:creationId xmlns:a16="http://schemas.microsoft.com/office/drawing/2014/main" xmlns="" id="{3DFD56C3-3B63-4F4C-A455-80D220434928}"/>
               </a:ext>
             </a:extLst>
           </p:cNvPr>
@@ -16306,14 +16306,7 @@
                 <a:latin typeface="Times New Roman" panose="02020603050405020304" pitchFamily="18" charset="0"/>
                 <a:cs typeface="Times New Roman" panose="02020603050405020304" pitchFamily="18" charset="0"/>
               </a:rPr>
-              <a:t>The frameworks </a:t>
-            </a:r>
-            <a:r>
-              <a:rPr lang="en-US" altLang="zh-CN" dirty="0">
-                <a:latin typeface="Times New Roman" panose="02020603050405020304" pitchFamily="18" charset="0"/>
-                <a:cs typeface="Times New Roman" panose="02020603050405020304" pitchFamily="18" charset="0"/>
-              </a:rPr>
-              <a:t>provide </a:t>
+              <a:t>MPI-ACC provide </a:t>
             </a:r>
             <a:r>
               <a:rPr lang="en-US" altLang="zh-CN" b="1" dirty="0">
@@ -16523,10 +16516,23 @@
                 <a:latin typeface="Times New Roman" panose="02020603050405020304" pitchFamily="18" charset="0"/>
                 <a:cs typeface="Times New Roman" panose="02020603050405020304" pitchFamily="18" charset="0"/>
               </a:rPr>
-              <a:t>from the application </a:t>
+              <a:t>from the </a:t>
+            </a:r>
+            <a:r>
+              <a:rPr lang="en-US" altLang="zh-CN" dirty="0">
+                <a:solidFill>
+                  <a:srgbClr val="7030A0"/>
+                </a:solidFill>
+                <a:latin typeface="Times New Roman" panose="02020603050405020304" pitchFamily="18" charset="0"/>
+                <a:cs typeface="Times New Roman" panose="02020603050405020304" pitchFamily="18" charset="0"/>
+              </a:rPr>
+              <a:t>application </a:t>
             </a:r>
             <a:r>
               <a:rPr lang="en-US" altLang="zh-CN" dirty="0" smtClean="0">
+                <a:solidFill>
+                  <a:srgbClr val="7030A0"/>
+                </a:solidFill>
                 <a:latin typeface="Times New Roman" panose="02020603050405020304" pitchFamily="18" charset="0"/>
                 <a:cs typeface="Times New Roman" panose="02020603050405020304" pitchFamily="18" charset="0"/>
               </a:rPr>
@@ -16691,7 +16697,7 @@
           <p:cNvPr id="5122" name="标题 1">
             <a:extLst>
               <a:ext uri="{FF2B5EF4-FFF2-40B4-BE49-F238E27FC236}">
-                <a16:creationId xmlns="" xmlns:a16="http://schemas.microsoft.com/office/drawing/2014/main" id="{A237414D-C4E1-407F-9B0D-585D2D878A74}"/>
+                <a16:creationId xmlns:a16="http://schemas.microsoft.com/office/drawing/2014/main" xmlns="" id="{A237414D-C4E1-407F-9B0D-585D2D878A74}"/>
               </a:ext>
             </a:extLst>
           </p:cNvPr>
@@ -16731,7 +16737,7 @@
           <p:cNvPr id="3" name="内容占位符 2">
             <a:extLst>
               <a:ext uri="{FF2B5EF4-FFF2-40B4-BE49-F238E27FC236}">
-                <a16:creationId xmlns="" xmlns:a16="http://schemas.microsoft.com/office/drawing/2014/main" id="{3DFD56C3-3B63-4F4C-A455-80D220434928}"/>
+                <a16:creationId xmlns:a16="http://schemas.microsoft.com/office/drawing/2014/main" xmlns="" id="{3DFD56C3-3B63-4F4C-A455-80D220434928}"/>
               </a:ext>
             </a:extLst>
           </p:cNvPr>
@@ -17199,7 +17205,7 @@
           <p:cNvPr id="5122" name="标题 1">
             <a:extLst>
               <a:ext uri="{FF2B5EF4-FFF2-40B4-BE49-F238E27FC236}">
-                <a16:creationId xmlns="" xmlns:a16="http://schemas.microsoft.com/office/drawing/2014/main" id="{A237414D-C4E1-407F-9B0D-585D2D878A74}"/>
+                <a16:creationId xmlns:a16="http://schemas.microsoft.com/office/drawing/2014/main" xmlns="" id="{A237414D-C4E1-407F-9B0D-585D2D878A74}"/>
               </a:ext>
             </a:extLst>
           </p:cNvPr>
@@ -17239,7 +17245,7 @@
           <p:cNvPr id="3" name="内容占位符 2">
             <a:extLst>
               <a:ext uri="{FF2B5EF4-FFF2-40B4-BE49-F238E27FC236}">
-                <a16:creationId xmlns="" xmlns:a16="http://schemas.microsoft.com/office/drawing/2014/main" id="{3DFD56C3-3B63-4F4C-A455-80D220434928}"/>
+                <a16:creationId xmlns:a16="http://schemas.microsoft.com/office/drawing/2014/main" xmlns="" id="{3DFD56C3-3B63-4F4C-A455-80D220434928}"/>
               </a:ext>
             </a:extLst>
           </p:cNvPr>
@@ -17615,7 +17621,7 @@
           <p:cNvPr id="5122" name="标题 1">
             <a:extLst>
               <a:ext uri="{FF2B5EF4-FFF2-40B4-BE49-F238E27FC236}">
-                <a16:creationId xmlns="" xmlns:a16="http://schemas.microsoft.com/office/drawing/2014/main" id="{A237414D-C4E1-407F-9B0D-585D2D878A74}"/>
+                <a16:creationId xmlns:a16="http://schemas.microsoft.com/office/drawing/2014/main" xmlns="" id="{A237414D-C4E1-407F-9B0D-585D2D878A74}"/>
               </a:ext>
             </a:extLst>
           </p:cNvPr>
@@ -17852,6 +17858,58 @@
           </a:p>
         </p:txBody>
       </p:sp>
+      <p:sp>
+        <p:nvSpPr>
+          <p:cNvPr id="2" name="云形 1"/>
+          <p:cNvSpPr/>
+          <p:nvPr/>
+        </p:nvSpPr>
+        <p:spPr>
+          <a:xfrm>
+            <a:off x="2448862" y="2229381"/>
+            <a:ext cx="7323909" cy="3779520"/>
+          </a:xfrm>
+          <a:prstGeom prst="cloud">
+            <a:avLst/>
+          </a:prstGeom>
+        </p:spPr>
+        <p:style>
+          <a:lnRef idx="2">
+            <a:schemeClr val="accent1">
+              <a:shade val="50000"/>
+            </a:schemeClr>
+          </a:lnRef>
+          <a:fillRef idx="1">
+            <a:schemeClr val="accent1"/>
+          </a:fillRef>
+          <a:effectRef idx="0">
+            <a:schemeClr val="accent1"/>
+          </a:effectRef>
+          <a:fontRef idx="minor">
+            <a:schemeClr val="lt1"/>
+          </a:fontRef>
+        </p:style>
+        <p:txBody>
+          <a:bodyPr rtlCol="0" anchor="ctr"/>
+          <a:lstStyle/>
+          <a:p>
+            <a:pPr algn="ctr"/>
+            <a:r>
+              <a:rPr lang="en-US" altLang="zh-CN" sz="3600" dirty="0" smtClean="0">
+                <a:solidFill>
+                  <a:srgbClr val="FF0000"/>
+                </a:solidFill>
+              </a:rPr>
+              <a:t>How to solve two issues?</a:t>
+            </a:r>
+            <a:endParaRPr lang="zh-CN" altLang="en-US" sz="3600" dirty="0">
+              <a:solidFill>
+                <a:srgbClr val="FF0000"/>
+              </a:solidFill>
+            </a:endParaRPr>
+          </a:p>
+        </p:txBody>
+      </p:sp>
     </p:spTree>
     <p:extLst>
       <p:ext uri="{BB962C8B-B14F-4D97-AF65-F5344CB8AC3E}">
@@ -17865,9 +17923,80 @@
   <p:timing>
     <p:tnLst>
       <p:par>
-        <p:cTn id="1" dur="indefinite" restart="never" nodeType="tmRoot"/>
+        <p:cTn id="1" dur="indefinite" restart="never" nodeType="tmRoot">
+          <p:childTnLst>
+            <p:seq concurrent="1" nextAc="seek">
+              <p:cTn id="2" dur="indefinite" nodeType="mainSeq">
+                <p:childTnLst>
+                  <p:par>
+                    <p:cTn id="3" fill="hold">
+                      <p:stCondLst>
+                        <p:cond delay="indefinite"/>
+                      </p:stCondLst>
+                      <p:childTnLst>
+                        <p:par>
+                          <p:cTn id="4" fill="hold">
+                            <p:stCondLst>
+                              <p:cond delay="0"/>
+                            </p:stCondLst>
+                            <p:childTnLst>
+                              <p:par>
+                                <p:cTn id="5" presetID="1" presetClass="entr" presetSubtype="0" fill="hold" grpId="0" nodeType="clickEffect">
+                                  <p:stCondLst>
+                                    <p:cond delay="0"/>
+                                  </p:stCondLst>
+                                  <p:childTnLst>
+                                    <p:set>
+                                      <p:cBhvr>
+                                        <p:cTn id="6" dur="1" fill="hold">
+                                          <p:stCondLst>
+                                            <p:cond delay="0"/>
+                                          </p:stCondLst>
+                                        </p:cTn>
+                                        <p:tgtEl>
+                                          <p:spTgt spid="2"/>
+                                        </p:tgtEl>
+                                        <p:attrNameLst>
+                                          <p:attrName>style.visibility</p:attrName>
+                                        </p:attrNameLst>
+                                      </p:cBhvr>
+                                      <p:to>
+                                        <p:strVal val="visible"/>
+                                      </p:to>
+                                    </p:set>
+                                  </p:childTnLst>
+                                </p:cTn>
+                              </p:par>
+                            </p:childTnLst>
+                          </p:cTn>
+                        </p:par>
+                      </p:childTnLst>
+                    </p:cTn>
+                  </p:par>
+                </p:childTnLst>
+              </p:cTn>
+              <p:prevCondLst>
+                <p:cond evt="onPrev" delay="0">
+                  <p:tgtEl>
+                    <p:sldTgt/>
+                  </p:tgtEl>
+                </p:cond>
+              </p:prevCondLst>
+              <p:nextCondLst>
+                <p:cond evt="onNext" delay="0">
+                  <p:tgtEl>
+                    <p:sldTgt/>
+                  </p:tgtEl>
+                </p:cond>
+              </p:nextCondLst>
+            </p:seq>
+          </p:childTnLst>
+        </p:cTn>
       </p:par>
     </p:tnLst>
+    <p:bldLst>
+      <p:bldP spid="2" grpId="0" animBg="1"/>
+    </p:bldLst>
   </p:timing>
 </p:sld>
 </file>
@@ -17894,7 +18023,7 @@
           <p:cNvPr id="5122" name="标题 1">
             <a:extLst>
               <a:ext uri="{FF2B5EF4-FFF2-40B4-BE49-F238E27FC236}">
-                <a16:creationId xmlns="" xmlns:a16="http://schemas.microsoft.com/office/drawing/2014/main" id="{A237414D-C4E1-407F-9B0D-585D2D878A74}"/>
+                <a16:creationId xmlns:a16="http://schemas.microsoft.com/office/drawing/2014/main" xmlns="" id="{A237414D-C4E1-407F-9B0D-585D2D878A74}"/>
               </a:ext>
             </a:extLst>
           </p:cNvPr>
@@ -18121,7 +18250,7 @@
           <p:cNvPr id="5122" name="标题 1">
             <a:extLst>
               <a:ext uri="{FF2B5EF4-FFF2-40B4-BE49-F238E27FC236}">
-                <a16:creationId xmlns="" xmlns:a16="http://schemas.microsoft.com/office/drawing/2014/main" id="{A237414D-C4E1-407F-9B0D-585D2D878A74}"/>
+                <a16:creationId xmlns:a16="http://schemas.microsoft.com/office/drawing/2014/main" xmlns="" id="{A237414D-C4E1-407F-9B0D-585D2D878A74}"/>
               </a:ext>
             </a:extLst>
           </p:cNvPr>
@@ -18338,14 +18467,7 @@
                 <a:latin typeface="Times New Roman" panose="02020603050405020304" pitchFamily="18" charset="0"/>
                 <a:cs typeface="Times New Roman" panose="02020603050405020304" pitchFamily="18" charset="0"/>
               </a:rPr>
-              <a:t> </a:t>
-            </a:r>
-            <a:r>
-              <a:rPr lang="en-US" altLang="zh-CN" dirty="0" smtClean="0">
-                <a:latin typeface="Times New Roman" panose="02020603050405020304" pitchFamily="18" charset="0"/>
-                <a:cs typeface="Times New Roman" panose="02020603050405020304" pitchFamily="18" charset="0"/>
-              </a:rPr>
-              <a:t>creates </a:t>
+              <a:t> creates </a:t>
             </a:r>
             <a:r>
               <a:rPr lang="en-US" altLang="zh-CN" dirty="0">
@@ -18454,7 +18576,7 @@
           <p:cNvPr id="5122" name="标题 1">
             <a:extLst>
               <a:ext uri="{FF2B5EF4-FFF2-40B4-BE49-F238E27FC236}">
-                <a16:creationId xmlns="" xmlns:a16="http://schemas.microsoft.com/office/drawing/2014/main" id="{A237414D-C4E1-407F-9B0D-585D2D878A74}"/>
+                <a16:creationId xmlns:a16="http://schemas.microsoft.com/office/drawing/2014/main" xmlns="" id="{A237414D-C4E1-407F-9B0D-585D2D878A74}"/>
               </a:ext>
             </a:extLst>
           </p:cNvPr>
@@ -18667,124 +18789,6 @@
           </a:fontRef>
         </p:style>
       </p:cxnSp>
-      <p:cxnSp>
-        <p:nvCxnSpPr>
-          <p:cNvPr id="12" name="直接箭头连接符 11"/>
-          <p:cNvCxnSpPr/>
-          <p:nvPr/>
-        </p:nvCxnSpPr>
-        <p:spPr>
-          <a:xfrm flipH="1" flipV="1">
-            <a:off x="7645138" y="4119141"/>
-            <a:ext cx="103695" cy="669675"/>
-          </a:xfrm>
-          <a:prstGeom prst="straightConnector1">
-            <a:avLst/>
-          </a:prstGeom>
-          <a:ln w="38100">
-            <a:solidFill>
-              <a:srgbClr val="FF0000"/>
-            </a:solidFill>
-            <a:tailEnd type="triangle"/>
-          </a:ln>
-        </p:spPr>
-        <p:style>
-          <a:lnRef idx="1">
-            <a:schemeClr val="accent1"/>
-          </a:lnRef>
-          <a:fillRef idx="0">
-            <a:schemeClr val="accent1"/>
-          </a:fillRef>
-          <a:effectRef idx="0">
-            <a:schemeClr val="accent1"/>
-          </a:effectRef>
-          <a:fontRef idx="minor">
-            <a:schemeClr val="tx1"/>
-          </a:fontRef>
-        </p:style>
-      </p:cxnSp>
-      <p:cxnSp>
-        <p:nvCxnSpPr>
-          <p:cNvPr id="14" name="直接箭头连接符 13"/>
-          <p:cNvCxnSpPr/>
-          <p:nvPr/>
-        </p:nvCxnSpPr>
-        <p:spPr>
-          <a:xfrm flipV="1">
-            <a:off x="7034851" y="5716912"/>
-            <a:ext cx="603316" cy="414780"/>
-          </a:xfrm>
-          <a:prstGeom prst="straightConnector1">
-            <a:avLst/>
-          </a:prstGeom>
-          <a:ln w="38100">
-            <a:solidFill>
-              <a:srgbClr val="FF0000"/>
-            </a:solidFill>
-            <a:tailEnd type="triangle"/>
-          </a:ln>
-        </p:spPr>
-        <p:style>
-          <a:lnRef idx="1">
-            <a:schemeClr val="accent1"/>
-          </a:lnRef>
-          <a:fillRef idx="0">
-            <a:schemeClr val="accent1"/>
-          </a:fillRef>
-          <a:effectRef idx="0">
-            <a:schemeClr val="accent1"/>
-          </a:effectRef>
-          <a:fontRef idx="minor">
-            <a:schemeClr val="tx1"/>
-          </a:fontRef>
-        </p:style>
-      </p:cxnSp>
-      <p:sp>
-        <p:nvSpPr>
-          <p:cNvPr id="16" name="圆角矩形 15"/>
-          <p:cNvSpPr/>
-          <p:nvPr/>
-        </p:nvSpPr>
-        <p:spPr>
-          <a:xfrm>
-            <a:off x="5250730" y="4911365"/>
-            <a:ext cx="4355183" cy="461913"/>
-          </a:xfrm>
-          <a:prstGeom prst="roundRect">
-            <a:avLst/>
-          </a:prstGeom>
-          <a:noFill/>
-          <a:ln w="38100">
-            <a:solidFill>
-              <a:srgbClr val="FF0000"/>
-            </a:solidFill>
-          </a:ln>
-        </p:spPr>
-        <p:style>
-          <a:lnRef idx="2">
-            <a:schemeClr val="accent1">
-              <a:shade val="50000"/>
-            </a:schemeClr>
-          </a:lnRef>
-          <a:fillRef idx="1">
-            <a:schemeClr val="accent1"/>
-          </a:fillRef>
-          <a:effectRef idx="0">
-            <a:schemeClr val="accent1"/>
-          </a:effectRef>
-          <a:fontRef idx="minor">
-            <a:schemeClr val="lt1"/>
-          </a:fontRef>
-        </p:style>
-        <p:txBody>
-          <a:bodyPr rtlCol="0" anchor="ctr"/>
-          <a:lstStyle/>
-          <a:p>
-            <a:pPr algn="ctr"/>
-            <a:endParaRPr lang="zh-CN" altLang="en-US"/>
-          </a:p>
-        </p:txBody>
-      </p:sp>
     </p:spTree>
     <p:extLst>
       <p:ext uri="{BB962C8B-B14F-4D97-AF65-F5344CB8AC3E}">
@@ -18875,105 +18879,6 @@
                       </p:childTnLst>
                     </p:cTn>
                   </p:par>
-                  <p:par>
-                    <p:cTn id="9" fill="hold">
-                      <p:stCondLst>
-                        <p:cond delay="indefinite"/>
-                      </p:stCondLst>
-                      <p:childTnLst>
-                        <p:par>
-                          <p:cTn id="10" fill="hold">
-                            <p:stCondLst>
-                              <p:cond delay="0"/>
-                            </p:stCondLst>
-                            <p:childTnLst>
-                              <p:par>
-                                <p:cTn id="11" presetID="1" presetClass="entr" presetSubtype="0" fill="hold" nodeType="clickEffect">
-                                  <p:stCondLst>
-                                    <p:cond delay="0"/>
-                                  </p:stCondLst>
-                                  <p:childTnLst>
-                                    <p:set>
-                                      <p:cBhvr>
-                                        <p:cTn id="12" dur="1" fill="hold">
-                                          <p:stCondLst>
-                                            <p:cond delay="0"/>
-                                          </p:stCondLst>
-                                        </p:cTn>
-                                        <p:tgtEl>
-                                          <p:spTgt spid="12"/>
-                                        </p:tgtEl>
-                                        <p:attrNameLst>
-                                          <p:attrName>style.visibility</p:attrName>
-                                        </p:attrNameLst>
-                                      </p:cBhvr>
-                                      <p:to>
-                                        <p:strVal val="visible"/>
-                                      </p:to>
-                                    </p:set>
-                                  </p:childTnLst>
-                                </p:cTn>
-                              </p:par>
-                              <p:par>
-                                <p:cTn id="13" presetID="1" presetClass="entr" presetSubtype="0" fill="hold" nodeType="withEffect">
-                                  <p:stCondLst>
-                                    <p:cond delay="0"/>
-                                  </p:stCondLst>
-                                  <p:childTnLst>
-                                    <p:set>
-                                      <p:cBhvr>
-                                        <p:cTn id="14" dur="1" fill="hold">
-                                          <p:stCondLst>
-                                            <p:cond delay="0"/>
-                                          </p:stCondLst>
-                                        </p:cTn>
-                                        <p:tgtEl>
-                                          <p:spTgt spid="14"/>
-                                        </p:tgtEl>
-                                        <p:attrNameLst>
-                                          <p:attrName>style.visibility</p:attrName>
-                                        </p:attrNameLst>
-                                      </p:cBhvr>
-                                      <p:to>
-                                        <p:strVal val="visible"/>
-                                      </p:to>
-                                    </p:set>
-                                  </p:childTnLst>
-                                </p:cTn>
-                              </p:par>
-                              <p:par>
-                                <p:cTn id="15" presetID="1" presetClass="entr" presetSubtype="0" fill="hold" grpId="0" nodeType="withEffect">
-                                  <p:stCondLst>
-                                    <p:cond delay="0"/>
-                                  </p:stCondLst>
-                                  <p:childTnLst>
-                                    <p:set>
-                                      <p:cBhvr>
-                                        <p:cTn id="16" dur="1" fill="hold">
-                                          <p:stCondLst>
-                                            <p:cond delay="0"/>
-                                          </p:stCondLst>
-                                        </p:cTn>
-                                        <p:tgtEl>
-                                          <p:spTgt spid="16"/>
-                                        </p:tgtEl>
-                                        <p:attrNameLst>
-                                          <p:attrName>style.visibility</p:attrName>
-                                        </p:attrNameLst>
-                                      </p:cBhvr>
-                                      <p:to>
-                                        <p:strVal val="visible"/>
-                                      </p:to>
-                                    </p:set>
-                                  </p:childTnLst>
-                                </p:cTn>
-                              </p:par>
-                            </p:childTnLst>
-                          </p:cTn>
-                        </p:par>
-                      </p:childTnLst>
-                    </p:cTn>
-                  </p:par>
                 </p:childTnLst>
               </p:cTn>
               <p:prevCondLst>
@@ -18995,9 +18900,6 @@
         </p:cTn>
       </p:par>
     </p:tnLst>
-    <p:bldLst>
-      <p:bldP spid="16" grpId="0" animBg="1"/>
-    </p:bldLst>
   </p:timing>
 </p:sld>
 </file>
@@ -19024,7 +18926,7 @@
           <p:cNvPr id="5122" name="标题 1">
             <a:extLst>
               <a:ext uri="{FF2B5EF4-FFF2-40B4-BE49-F238E27FC236}">
-                <a16:creationId xmlns="" xmlns:a16="http://schemas.microsoft.com/office/drawing/2014/main" id="{A237414D-C4E1-407F-9B0D-585D2D878A74}"/>
+                <a16:creationId xmlns:a16="http://schemas.microsoft.com/office/drawing/2014/main" xmlns="" id="{A237414D-C4E1-407F-9B0D-585D2D878A74}"/>
               </a:ext>
             </a:extLst>
           </p:cNvPr>
@@ -19064,7 +18966,7 @@
           <p:cNvPr id="3" name="内容占位符 2">
             <a:extLst>
               <a:ext uri="{FF2B5EF4-FFF2-40B4-BE49-F238E27FC236}">
-                <a16:creationId xmlns="" xmlns:a16="http://schemas.microsoft.com/office/drawing/2014/main" id="{3DFD56C3-3B63-4F4C-A455-80D220434928}"/>
+                <a16:creationId xmlns:a16="http://schemas.microsoft.com/office/drawing/2014/main" xmlns="" id="{3DFD56C3-3B63-4F4C-A455-80D220434928}"/>
               </a:ext>
             </a:extLst>
           </p:cNvPr>
@@ -19426,7 +19328,7 @@
           <p:cNvPr id="5122" name="标题 1">
             <a:extLst>
               <a:ext uri="{FF2B5EF4-FFF2-40B4-BE49-F238E27FC236}">
-                <a16:creationId xmlns="" xmlns:a16="http://schemas.microsoft.com/office/drawing/2014/main" id="{A237414D-C4E1-407F-9B0D-585D2D878A74}"/>
+                <a16:creationId xmlns:a16="http://schemas.microsoft.com/office/drawing/2014/main" xmlns="" id="{A237414D-C4E1-407F-9B0D-585D2D878A74}"/>
               </a:ext>
             </a:extLst>
           </p:cNvPr>
@@ -19652,7 +19554,7 @@
           <p:cNvPr id="5122" name="标题 1">
             <a:extLst>
               <a:ext uri="{FF2B5EF4-FFF2-40B4-BE49-F238E27FC236}">
-                <a16:creationId xmlns="" xmlns:a16="http://schemas.microsoft.com/office/drawing/2014/main" id="{A237414D-C4E1-407F-9B0D-585D2D878A74}"/>
+                <a16:creationId xmlns:a16="http://schemas.microsoft.com/office/drawing/2014/main" xmlns="" id="{A237414D-C4E1-407F-9B0D-585D2D878A74}"/>
               </a:ext>
             </a:extLst>
           </p:cNvPr>
@@ -20115,7 +20017,7 @@
           <p:cNvPr id="5122" name="标题 1">
             <a:extLst>
               <a:ext uri="{FF2B5EF4-FFF2-40B4-BE49-F238E27FC236}">
-                <a16:creationId xmlns="" xmlns:a16="http://schemas.microsoft.com/office/drawing/2014/main" id="{A237414D-C4E1-407F-9B0D-585D2D878A74}"/>
+                <a16:creationId xmlns:a16="http://schemas.microsoft.com/office/drawing/2014/main" xmlns="" id="{A237414D-C4E1-407F-9B0D-585D2D878A74}"/>
               </a:ext>
             </a:extLst>
           </p:cNvPr>
@@ -20794,7 +20696,7 @@
           <p:cNvPr id="5122" name="标题 1">
             <a:extLst>
               <a:ext uri="{FF2B5EF4-FFF2-40B4-BE49-F238E27FC236}">
-                <a16:creationId xmlns="" xmlns:a16="http://schemas.microsoft.com/office/drawing/2014/main" id="{A237414D-C4E1-407F-9B0D-585D2D878A74}"/>
+                <a16:creationId xmlns:a16="http://schemas.microsoft.com/office/drawing/2014/main" xmlns="" id="{A237414D-C4E1-407F-9B0D-585D2D878A74}"/>
               </a:ext>
             </a:extLst>
           </p:cNvPr>
@@ -21332,7 +21234,7 @@
           <p:cNvPr id="5122" name="标题 1">
             <a:extLst>
               <a:ext uri="{FF2B5EF4-FFF2-40B4-BE49-F238E27FC236}">
-                <a16:creationId xmlns="" xmlns:a16="http://schemas.microsoft.com/office/drawing/2014/main" id="{A237414D-C4E1-407F-9B0D-585D2D878A74}"/>
+                <a16:creationId xmlns:a16="http://schemas.microsoft.com/office/drawing/2014/main" xmlns="" id="{A237414D-C4E1-407F-9B0D-585D2D878A74}"/>
               </a:ext>
             </a:extLst>
           </p:cNvPr>
@@ -21452,7 +21354,31 @@
             </a:r>
             <a:r>
               <a:rPr lang="en-US" altLang="zh-CN" dirty="0"/>
-              <a:t> persistent buffer fragments on the GPU and register them with the MPI library by </a:t>
+              <a:t> </a:t>
+            </a:r>
+            <a:r>
+              <a:rPr lang="en-US" altLang="zh-CN" dirty="0">
+                <a:solidFill>
+                  <a:srgbClr val="FF0000"/>
+                </a:solidFill>
+              </a:rPr>
+              <a:t>persistent buffer </a:t>
+            </a:r>
+            <a:r>
+              <a:rPr lang="en-US" altLang="zh-CN" dirty="0"/>
+              <a:t>fragments on the GPU and </a:t>
+            </a:r>
+            <a:r>
+              <a:rPr lang="en-US" altLang="zh-CN" dirty="0">
+                <a:solidFill>
+                  <a:srgbClr val="FF0000"/>
+                </a:solidFill>
+              </a:rPr>
+              <a:t>register</a:t>
+            </a:r>
+            <a:r>
+              <a:rPr lang="en-US" altLang="zh-CN" dirty="0"/>
+              <a:t> them with the MPI library by </a:t>
             </a:r>
             <a:r>
               <a:rPr lang="en-US" altLang="zh-CN" dirty="0" smtClean="0"/>
@@ -21586,7 +21512,7 @@
           <p:cNvPr id="5122" name="标题 1">
             <a:extLst>
               <a:ext uri="{FF2B5EF4-FFF2-40B4-BE49-F238E27FC236}">
-                <a16:creationId xmlns="" xmlns:a16="http://schemas.microsoft.com/office/drawing/2014/main" id="{A237414D-C4E1-407F-9B0D-585D2D878A74}"/>
+                <a16:creationId xmlns:a16="http://schemas.microsoft.com/office/drawing/2014/main" xmlns="" id="{A237414D-C4E1-407F-9B0D-585D2D878A74}"/>
               </a:ext>
             </a:extLst>
           </p:cNvPr>
@@ -21716,7 +21642,7 @@
           <p:cNvPr id="5122" name="标题 1">
             <a:extLst>
               <a:ext uri="{FF2B5EF4-FFF2-40B4-BE49-F238E27FC236}">
-                <a16:creationId xmlns="" xmlns:a16="http://schemas.microsoft.com/office/drawing/2014/main" id="{A237414D-C4E1-407F-9B0D-585D2D878A74}"/>
+                <a16:creationId xmlns:a16="http://schemas.microsoft.com/office/drawing/2014/main" xmlns="" id="{A237414D-C4E1-407F-9B0D-585D2D878A74}"/>
               </a:ext>
             </a:extLst>
           </p:cNvPr>
@@ -21756,7 +21682,7 @@
           <p:cNvPr id="3" name="内容占位符 2">
             <a:extLst>
               <a:ext uri="{FF2B5EF4-FFF2-40B4-BE49-F238E27FC236}">
-                <a16:creationId xmlns="" xmlns:a16="http://schemas.microsoft.com/office/drawing/2014/main" id="{3DFD56C3-3B63-4F4C-A455-80D220434928}"/>
+                <a16:creationId xmlns:a16="http://schemas.microsoft.com/office/drawing/2014/main" xmlns="" id="{3DFD56C3-3B63-4F4C-A455-80D220434928}"/>
               </a:ext>
             </a:extLst>
           </p:cNvPr>
@@ -22118,7 +22044,7 @@
           <p:cNvPr id="5122" name="标题 1">
             <a:extLst>
               <a:ext uri="{FF2B5EF4-FFF2-40B4-BE49-F238E27FC236}">
-                <a16:creationId xmlns="" xmlns:a16="http://schemas.microsoft.com/office/drawing/2014/main" id="{A237414D-C4E1-407F-9B0D-585D2D878A74}"/>
+                <a16:creationId xmlns:a16="http://schemas.microsoft.com/office/drawing/2014/main" xmlns="" id="{A237414D-C4E1-407F-9B0D-585D2D878A74}"/>
               </a:ext>
             </a:extLst>
           </p:cNvPr>
@@ -22432,7 +22358,7 @@
           <p:cNvPr id="5122" name="标题 1">
             <a:extLst>
               <a:ext uri="{FF2B5EF4-FFF2-40B4-BE49-F238E27FC236}">
-                <a16:creationId xmlns="" xmlns:a16="http://schemas.microsoft.com/office/drawing/2014/main" id="{A237414D-C4E1-407F-9B0D-585D2D878A74}"/>
+                <a16:creationId xmlns:a16="http://schemas.microsoft.com/office/drawing/2014/main" xmlns="" id="{A237414D-C4E1-407F-9B0D-585D2D878A74}"/>
               </a:ext>
             </a:extLst>
           </p:cNvPr>
@@ -22564,7 +22490,7 @@
           <p:cNvPr id="5122" name="标题 1">
             <a:extLst>
               <a:ext uri="{FF2B5EF4-FFF2-40B4-BE49-F238E27FC236}">
-                <a16:creationId xmlns="" xmlns:a16="http://schemas.microsoft.com/office/drawing/2014/main" id="{A237414D-C4E1-407F-9B0D-585D2D878A74}"/>
+                <a16:creationId xmlns:a16="http://schemas.microsoft.com/office/drawing/2014/main" xmlns="" id="{A237414D-C4E1-407F-9B0D-585D2D878A74}"/>
               </a:ext>
             </a:extLst>
           </p:cNvPr>
@@ -22604,7 +22530,7 @@
           <p:cNvPr id="3" name="内容占位符 2">
             <a:extLst>
               <a:ext uri="{FF2B5EF4-FFF2-40B4-BE49-F238E27FC236}">
-                <a16:creationId xmlns="" xmlns:a16="http://schemas.microsoft.com/office/drawing/2014/main" id="{3DFD56C3-3B63-4F4C-A455-80D220434928}"/>
+                <a16:creationId xmlns:a16="http://schemas.microsoft.com/office/drawing/2014/main" xmlns="" id="{3DFD56C3-3B63-4F4C-A455-80D220434928}"/>
               </a:ext>
             </a:extLst>
           </p:cNvPr>
@@ -22775,7 +22701,7 @@
           <p:cNvPr id="5122" name="标题 1">
             <a:extLst>
               <a:ext uri="{FF2B5EF4-FFF2-40B4-BE49-F238E27FC236}">
-                <a16:creationId xmlns="" xmlns:a16="http://schemas.microsoft.com/office/drawing/2014/main" id="{A237414D-C4E1-407F-9B0D-585D2D878A74}"/>
+                <a16:creationId xmlns:a16="http://schemas.microsoft.com/office/drawing/2014/main" xmlns="" id="{A237414D-C4E1-407F-9B0D-585D2D878A74}"/>
               </a:ext>
             </a:extLst>
           </p:cNvPr>
@@ -22815,7 +22741,7 @@
           <p:cNvPr id="3" name="内容占位符 2">
             <a:extLst>
               <a:ext uri="{FF2B5EF4-FFF2-40B4-BE49-F238E27FC236}">
-                <a16:creationId xmlns="" xmlns:a16="http://schemas.microsoft.com/office/drawing/2014/main" id="{3DFD56C3-3B63-4F4C-A455-80D220434928}"/>
+                <a16:creationId xmlns:a16="http://schemas.microsoft.com/office/drawing/2014/main" xmlns="" id="{3DFD56C3-3B63-4F4C-A455-80D220434928}"/>
               </a:ext>
             </a:extLst>
           </p:cNvPr>
@@ -23011,7 +22937,7 @@
           <p:cNvPr id="5122" name="标题 1">
             <a:extLst>
               <a:ext uri="{FF2B5EF4-FFF2-40B4-BE49-F238E27FC236}">
-                <a16:creationId xmlns="" xmlns:a16="http://schemas.microsoft.com/office/drawing/2014/main" id="{A237414D-C4E1-407F-9B0D-585D2D878A74}"/>
+                <a16:creationId xmlns:a16="http://schemas.microsoft.com/office/drawing/2014/main" xmlns="" id="{A237414D-C4E1-407F-9B0D-585D2D878A74}"/>
               </a:ext>
             </a:extLst>
           </p:cNvPr>
@@ -23143,7 +23069,7 @@
           <p:cNvPr id="5122" name="标题 1">
             <a:extLst>
               <a:ext uri="{FF2B5EF4-FFF2-40B4-BE49-F238E27FC236}">
-                <a16:creationId xmlns="" xmlns:a16="http://schemas.microsoft.com/office/drawing/2014/main" id="{A237414D-C4E1-407F-9B0D-585D2D878A74}"/>
+                <a16:creationId xmlns:a16="http://schemas.microsoft.com/office/drawing/2014/main" xmlns="" id="{A237414D-C4E1-407F-9B0D-585D2D878A74}"/>
               </a:ext>
             </a:extLst>
           </p:cNvPr>
@@ -23242,9 +23168,9 @@
         <p:grpSpPr>
           <a:xfrm>
             <a:off x="8752417" y="2250831"/>
-            <a:ext cx="2536906" cy="949569"/>
+            <a:ext cx="2703960" cy="949569"/>
             <a:chOff x="8752417" y="2250831"/>
-            <a:chExt cx="2536906" cy="949569"/>
+            <a:chExt cx="2703960" cy="949569"/>
           </a:xfrm>
         </p:grpSpPr>
         <p:sp>
@@ -23256,7 +23182,7 @@
           <p:spPr>
             <a:xfrm>
               <a:off x="9346223" y="2250831"/>
-              <a:ext cx="1943100" cy="949569"/>
+              <a:ext cx="2110154" cy="949569"/>
             </a:xfrm>
             <a:prstGeom prst="roundRect">
               <a:avLst/>
@@ -23295,7 +23221,23 @@
                     <a:srgbClr val="FF0000"/>
                   </a:solidFill>
                 </a:rPr>
-                <a:t>The larger data size, the little relative latency. </a:t>
+                <a:t>The larger data size, the </a:t>
+              </a:r>
+              <a:r>
+                <a:rPr lang="en-US" altLang="zh-CN" dirty="0" smtClean="0">
+                  <a:solidFill>
+                    <a:srgbClr val="FF0000"/>
+                  </a:solidFill>
+                </a:rPr>
+                <a:t>little increase </a:t>
+              </a:r>
+              <a:r>
+                <a:rPr lang="en-US" altLang="zh-CN" dirty="0" smtClean="0">
+                  <a:solidFill>
+                    <a:srgbClr val="FF0000"/>
+                  </a:solidFill>
+                </a:rPr>
+                <a:t>relative latency. </a:t>
               </a:r>
               <a:endParaRPr lang="zh-CN" altLang="en-US" dirty="0">
                 <a:solidFill>
@@ -23606,7 +23548,7 @@
           <p:cNvPr id="5122" name="标题 1">
             <a:extLst>
               <a:ext uri="{FF2B5EF4-FFF2-40B4-BE49-F238E27FC236}">
-                <a16:creationId xmlns="" xmlns:a16="http://schemas.microsoft.com/office/drawing/2014/main" id="{A237414D-C4E1-407F-9B0D-585D2D878A74}"/>
+                <a16:creationId xmlns:a16="http://schemas.microsoft.com/office/drawing/2014/main" xmlns="" id="{A237414D-C4E1-407F-9B0D-585D2D878A74}"/>
               </a:ext>
             </a:extLst>
           </p:cNvPr>
@@ -23646,7 +23588,7 @@
           <p:cNvPr id="3" name="内容占位符 2">
             <a:extLst>
               <a:ext uri="{FF2B5EF4-FFF2-40B4-BE49-F238E27FC236}">
-                <a16:creationId xmlns="" xmlns:a16="http://schemas.microsoft.com/office/drawing/2014/main" id="{3DFD56C3-3B63-4F4C-A455-80D220434928}"/>
+                <a16:creationId xmlns:a16="http://schemas.microsoft.com/office/drawing/2014/main" xmlns="" id="{3DFD56C3-3B63-4F4C-A455-80D220434928}"/>
               </a:ext>
             </a:extLst>
           </p:cNvPr>
@@ -24005,7 +23947,7 @@
           <p:cNvPr id="5122" name="标题 1">
             <a:extLst>
               <a:ext uri="{FF2B5EF4-FFF2-40B4-BE49-F238E27FC236}">
-                <a16:creationId xmlns="" xmlns:a16="http://schemas.microsoft.com/office/drawing/2014/main" id="{A237414D-C4E1-407F-9B0D-585D2D878A74}"/>
+                <a16:creationId xmlns:a16="http://schemas.microsoft.com/office/drawing/2014/main" xmlns="" id="{A237414D-C4E1-407F-9B0D-585D2D878A74}"/>
               </a:ext>
             </a:extLst>
           </p:cNvPr>
@@ -24137,7 +24079,7 @@
           <p:cNvPr id="5122" name="标题 1">
             <a:extLst>
               <a:ext uri="{FF2B5EF4-FFF2-40B4-BE49-F238E27FC236}">
-                <a16:creationId xmlns="" xmlns:a16="http://schemas.microsoft.com/office/drawing/2014/main" id="{A237414D-C4E1-407F-9B0D-585D2D878A74}"/>
+                <a16:creationId xmlns:a16="http://schemas.microsoft.com/office/drawing/2014/main" xmlns="" id="{A237414D-C4E1-407F-9B0D-585D2D878A74}"/>
               </a:ext>
             </a:extLst>
           </p:cNvPr>
@@ -24177,7 +24119,7 @@
           <p:cNvPr id="3" name="内容占位符 2">
             <a:extLst>
               <a:ext uri="{FF2B5EF4-FFF2-40B4-BE49-F238E27FC236}">
-                <a16:creationId xmlns="" xmlns:a16="http://schemas.microsoft.com/office/drawing/2014/main" id="{3DFD56C3-3B63-4F4C-A455-80D220434928}"/>
+                <a16:creationId xmlns:a16="http://schemas.microsoft.com/office/drawing/2014/main" xmlns="" id="{3DFD56C3-3B63-4F4C-A455-80D220434928}"/>
               </a:ext>
             </a:extLst>
           </p:cNvPr>
@@ -24539,7 +24481,7 @@
           <p:cNvPr id="5122" name="标题 1">
             <a:extLst>
               <a:ext uri="{FF2B5EF4-FFF2-40B4-BE49-F238E27FC236}">
-                <a16:creationId xmlns="" xmlns:a16="http://schemas.microsoft.com/office/drawing/2014/main" id="{A237414D-C4E1-407F-9B0D-585D2D878A74}"/>
+                <a16:creationId xmlns:a16="http://schemas.microsoft.com/office/drawing/2014/main" xmlns="" id="{A237414D-C4E1-407F-9B0D-585D2D878A74}"/>
               </a:ext>
             </a:extLst>
           </p:cNvPr>
@@ -24579,7 +24521,7 @@
           <p:cNvPr id="3" name="内容占位符 2">
             <a:extLst>
               <a:ext uri="{FF2B5EF4-FFF2-40B4-BE49-F238E27FC236}">
-                <a16:creationId xmlns="" xmlns:a16="http://schemas.microsoft.com/office/drawing/2014/main" id="{3DFD56C3-3B63-4F4C-A455-80D220434928}"/>
+                <a16:creationId xmlns:a16="http://schemas.microsoft.com/office/drawing/2014/main" xmlns="" id="{3DFD56C3-3B63-4F4C-A455-80D220434928}"/>
               </a:ext>
             </a:extLst>
           </p:cNvPr>
@@ -24908,7 +24850,7 @@
           <p:cNvPr id="5122" name="标题 1">
             <a:extLst>
               <a:ext uri="{FF2B5EF4-FFF2-40B4-BE49-F238E27FC236}">
-                <a16:creationId xmlns="" xmlns:a16="http://schemas.microsoft.com/office/drawing/2014/main" id="{A237414D-C4E1-407F-9B0D-585D2D878A74}"/>
+                <a16:creationId xmlns:a16="http://schemas.microsoft.com/office/drawing/2014/main" xmlns="" id="{A237414D-C4E1-407F-9B0D-585D2D878A74}"/>
               </a:ext>
             </a:extLst>
           </p:cNvPr>
@@ -24948,7 +24890,7 @@
           <p:cNvPr id="3" name="内容占位符 2">
             <a:extLst>
               <a:ext uri="{FF2B5EF4-FFF2-40B4-BE49-F238E27FC236}">
-                <a16:creationId xmlns="" xmlns:a16="http://schemas.microsoft.com/office/drawing/2014/main" id="{3DFD56C3-3B63-4F4C-A455-80D220434928}"/>
+                <a16:creationId xmlns:a16="http://schemas.microsoft.com/office/drawing/2014/main" xmlns="" id="{3DFD56C3-3B63-4F4C-A455-80D220434928}"/>
               </a:ext>
             </a:extLst>
           </p:cNvPr>
@@ -25151,7 +25093,7 @@
           <p:cNvPr id="5122" name="标题 1">
             <a:extLst>
               <a:ext uri="{FF2B5EF4-FFF2-40B4-BE49-F238E27FC236}">
-                <a16:creationId xmlns="" xmlns:a16="http://schemas.microsoft.com/office/drawing/2014/main" id="{A237414D-C4E1-407F-9B0D-585D2D878A74}"/>
+                <a16:creationId xmlns:a16="http://schemas.microsoft.com/office/drawing/2014/main" xmlns="" id="{A237414D-C4E1-407F-9B0D-585D2D878A74}"/>
               </a:ext>
             </a:extLst>
           </p:cNvPr>
@@ -25191,7 +25133,7 @@
           <p:cNvPr id="3" name="内容占位符 2">
             <a:extLst>
               <a:ext uri="{FF2B5EF4-FFF2-40B4-BE49-F238E27FC236}">
-                <a16:creationId xmlns="" xmlns:a16="http://schemas.microsoft.com/office/drawing/2014/main" id="{3DFD56C3-3B63-4F4C-A455-80D220434928}"/>
+                <a16:creationId xmlns:a16="http://schemas.microsoft.com/office/drawing/2014/main" xmlns="" id="{3DFD56C3-3B63-4F4C-A455-80D220434928}"/>
               </a:ext>
             </a:extLst>
           </p:cNvPr>
@@ -25491,7 +25433,7 @@
           <p:cNvPr id="5122" name="标题 1">
             <a:extLst>
               <a:ext uri="{FF2B5EF4-FFF2-40B4-BE49-F238E27FC236}">
-                <a16:creationId xmlns="" xmlns:a16="http://schemas.microsoft.com/office/drawing/2014/main" id="{A237414D-C4E1-407F-9B0D-585D2D878A74}"/>
+                <a16:creationId xmlns:a16="http://schemas.microsoft.com/office/drawing/2014/main" xmlns="" id="{A237414D-C4E1-407F-9B0D-585D2D878A74}"/>
               </a:ext>
             </a:extLst>
           </p:cNvPr>
@@ -25531,7 +25473,7 @@
           <p:cNvPr id="3" name="内容占位符 2">
             <a:extLst>
               <a:ext uri="{FF2B5EF4-FFF2-40B4-BE49-F238E27FC236}">
-                <a16:creationId xmlns="" xmlns:a16="http://schemas.microsoft.com/office/drawing/2014/main" id="{3DFD56C3-3B63-4F4C-A455-80D220434928}"/>
+                <a16:creationId xmlns:a16="http://schemas.microsoft.com/office/drawing/2014/main" xmlns="" id="{3DFD56C3-3B63-4F4C-A455-80D220434928}"/>
               </a:ext>
             </a:extLst>
           </p:cNvPr>
@@ -25900,7 +25842,7 @@
           <p:cNvPr id="5122" name="标题 1">
             <a:extLst>
               <a:ext uri="{FF2B5EF4-FFF2-40B4-BE49-F238E27FC236}">
-                <a16:creationId xmlns="" xmlns:a16="http://schemas.microsoft.com/office/drawing/2014/main" id="{A237414D-C4E1-407F-9B0D-585D2D878A74}"/>
+                <a16:creationId xmlns:a16="http://schemas.microsoft.com/office/drawing/2014/main" xmlns="" id="{A237414D-C4E1-407F-9B0D-585D2D878A74}"/>
               </a:ext>
             </a:extLst>
           </p:cNvPr>
@@ -25940,7 +25882,7 @@
           <p:cNvPr id="3" name="内容占位符 2">
             <a:extLst>
               <a:ext uri="{FF2B5EF4-FFF2-40B4-BE49-F238E27FC236}">
-                <a16:creationId xmlns="" xmlns:a16="http://schemas.microsoft.com/office/drawing/2014/main" id="{3DFD56C3-3B63-4F4C-A455-80D220434928}"/>
+                <a16:creationId xmlns:a16="http://schemas.microsoft.com/office/drawing/2014/main" xmlns="" id="{3DFD56C3-3B63-4F4C-A455-80D220434928}"/>
               </a:ext>
             </a:extLst>
           </p:cNvPr>
@@ -26199,7 +26141,7 @@
           <p:cNvPr id="5122" name="标题 1">
             <a:extLst>
               <a:ext uri="{FF2B5EF4-FFF2-40B4-BE49-F238E27FC236}">
-                <a16:creationId xmlns="" xmlns:a16="http://schemas.microsoft.com/office/drawing/2014/main" id="{A237414D-C4E1-407F-9B0D-585D2D878A74}"/>
+                <a16:creationId xmlns:a16="http://schemas.microsoft.com/office/drawing/2014/main" xmlns="" id="{A237414D-C4E1-407F-9B0D-585D2D878A74}"/>
               </a:ext>
             </a:extLst>
           </p:cNvPr>
@@ -26239,7 +26181,7 @@
           <p:cNvPr id="3" name="内容占位符 2">
             <a:extLst>
               <a:ext uri="{FF2B5EF4-FFF2-40B4-BE49-F238E27FC236}">
-                <a16:creationId xmlns="" xmlns:a16="http://schemas.microsoft.com/office/drawing/2014/main" id="{3DFD56C3-3B63-4F4C-A455-80D220434928}"/>
+                <a16:creationId xmlns:a16="http://schemas.microsoft.com/office/drawing/2014/main" xmlns="" id="{3DFD56C3-3B63-4F4C-A455-80D220434928}"/>
               </a:ext>
             </a:extLst>
           </p:cNvPr>
@@ -26454,14 +26396,7 @@
                 <a:latin typeface="Times New Roman" panose="02020603050405020304" pitchFamily="18" charset="0"/>
                 <a:cs typeface="Times New Roman" panose="02020603050405020304" pitchFamily="18" charset="0"/>
               </a:rPr>
-              <a:t> </a:t>
-            </a:r>
-            <a:r>
-              <a:rPr lang="en-US" altLang="zh-CN" dirty="0" smtClean="0">
-                <a:latin typeface="Times New Roman" panose="02020603050405020304" pitchFamily="18" charset="0"/>
-                <a:cs typeface="Times New Roman" panose="02020603050405020304" pitchFamily="18" charset="0"/>
-              </a:rPr>
-              <a:t>and </a:t>
+              <a:t> and </a:t>
             </a:r>
             <a:r>
               <a:rPr lang="en-US" altLang="zh-CN" b="1" dirty="0" smtClean="0">
@@ -26564,7 +26499,7 @@
           <p:cNvPr id="5122" name="标题 1">
             <a:extLst>
               <a:ext uri="{FF2B5EF4-FFF2-40B4-BE49-F238E27FC236}">
-                <a16:creationId xmlns="" xmlns:a16="http://schemas.microsoft.com/office/drawing/2014/main" id="{A237414D-C4E1-407F-9B0D-585D2D878A74}"/>
+                <a16:creationId xmlns:a16="http://schemas.microsoft.com/office/drawing/2014/main" xmlns="" id="{A237414D-C4E1-407F-9B0D-585D2D878A74}"/>
               </a:ext>
             </a:extLst>
           </p:cNvPr>
